--- a/KHBD_Tin_học/Lớp_5/Tuần_04/Slide_Tin_hoc_Lop_5_Bai03_04.pptx
+++ b/KHBD_Tin_học/Lớp_5/Tuần_04/Slide_Tin_hoc_Lop_5_Bai03_04.pptx
@@ -14,6 +14,7 @@
     <p:sldId id="262" r:id="rId12"/>
     <p:sldId id="263" r:id="rId13"/>
     <p:sldId id="264" r:id="rId14"/>
+    <p:sldId id="265" r:id="rId15"/>
   </p:sldIdLst>
   <p:sldSz cx="12192000" cy="6858000"/>
   <p:notesSz cx="6858000" cy="9144000"/>
@@ -3397,16 +3398,104 @@
       <p:grpSpPr/>
       <p:sp>
         <p:nvSpPr>
-          <p:cNvPr id="3" name="Rectangle 2"/>
+          <p:cNvPr id="2" name="Rectangle 1"/>
           <p:cNvSpPr/>
           <p:nvPr/>
         </p:nvSpPr>
         <p:spPr>
           <a:xfrm>
             <a:off x="0" y="1051560"/>
-            <a:ext cx="12188952" cy="1645920"/>
+            <a:ext cx="12188952" cy="4754879"/>
           </a:xfrm>
           <a:prstGeom prst="rect">
+            <a:avLst/>
+          </a:prstGeom>
+          <a:solidFill>
+            <a:srgbClr val="BE185D"/>
+          </a:solidFill>
+          <a:ln>
+            <a:noFill/>
+          </a:ln>
+        </p:spPr>
+        <p:style>
+          <a:lnRef idx="1">
+            <a:schemeClr val="accent1"/>
+          </a:lnRef>
+          <a:fillRef idx="3">
+            <a:schemeClr val="accent1"/>
+          </a:fillRef>
+          <a:effectRef idx="2">
+            <a:schemeClr val="accent1"/>
+          </a:effectRef>
+          <a:fontRef idx="minor">
+            <a:schemeClr val="lt1"/>
+          </a:fontRef>
+        </p:style>
+        <p:txBody>
+          <a:bodyPr rtlCol="0" anchor="ctr"/>
+          <a:lstStyle/>
+          <a:p>
+            <a:pPr algn="ctr"/>
+          </a:p>
+        </p:txBody>
+      </p:sp>
+      <p:sp>
+        <p:nvSpPr>
+          <p:cNvPr id="3" name="Rounded Rectangle 2"/>
+          <p:cNvSpPr/>
+          <p:nvPr/>
+        </p:nvSpPr>
+        <p:spPr>
+          <a:xfrm>
+            <a:off x="1097280" y="1463040"/>
+            <a:ext cx="9994392" cy="3657599"/>
+          </a:xfrm>
+          <a:prstGeom prst="roundRect">
+            <a:avLst/>
+          </a:prstGeom>
+          <a:solidFill>
+            <a:srgbClr val="FFFFFF"/>
+          </a:solidFill>
+          <a:ln w="19050">
+            <a:solidFill>
+              <a:srgbClr val="EC4899"/>
+            </a:solidFill>
+          </a:ln>
+        </p:spPr>
+        <p:style>
+          <a:lnRef idx="1">
+            <a:schemeClr val="accent1"/>
+          </a:lnRef>
+          <a:fillRef idx="3">
+            <a:schemeClr val="accent1"/>
+          </a:fillRef>
+          <a:effectRef idx="2">
+            <a:schemeClr val="accent1"/>
+          </a:effectRef>
+          <a:fontRef idx="minor">
+            <a:schemeClr val="lt1"/>
+          </a:fontRef>
+        </p:style>
+        <p:txBody>
+          <a:bodyPr rtlCol="0" anchor="ctr"/>
+          <a:lstStyle/>
+          <a:p>
+            <a:pPr algn="ctr"/>
+          </a:p>
+        </p:txBody>
+      </p:sp>
+      <p:sp>
+        <p:nvSpPr>
+          <p:cNvPr id="4" name="Rounded Rectangle 3"/>
+          <p:cNvSpPr/>
+          <p:nvPr/>
+        </p:nvSpPr>
+        <p:spPr>
+          <a:xfrm>
+            <a:off x="1097280" y="1463040"/>
+            <a:ext cx="9994392" cy="182879"/>
+          </a:xfrm>
+          <a:prstGeom prst="roundRect">
             <a:avLst/>
           </a:prstGeom>
           <a:solidFill>
@@ -3440,6 +3529,175 @@
       </p:sp>
       <p:sp>
         <p:nvSpPr>
+          <p:cNvPr id="5" name="TextBox 4"/>
+          <p:cNvSpPr txBox="1"/>
+          <p:nvPr/>
+        </p:nvSpPr>
+        <p:spPr>
+          <a:xfrm>
+            <a:off x="1371600" y="1828800"/>
+            <a:ext cx="9445752" cy="457200"/>
+          </a:xfrm>
+          <a:prstGeom prst="rect">
+            <a:avLst/>
+          </a:prstGeom>
+          <a:noFill/>
+        </p:spPr>
+        <p:txBody>
+          <a:bodyPr wrap="square" lIns="73152" rIns="73152" tIns="54864" bIns="54864">
+            <a:spAutoFit/>
+          </a:bodyPr>
+          <a:lstStyle/>
+          <a:p>
+            <a:pPr algn="ctr">
+              <a:defRPr sz="1500" b="1">
+                <a:solidFill>
+                  <a:srgbClr val="BE185D"/>
+                </a:solidFill>
+                <a:latin typeface="Arial"/>
+              </a:defRPr>
+            </a:pPr>
+            <a:r>
+              <a:t>TRƯỜNG TIỂU HỌC &amp; THCS UNIGO</a:t>
+            </a:r>
+          </a:p>
+        </p:txBody>
+      </p:sp>
+      <p:sp>
+        <p:nvSpPr>
+          <p:cNvPr id="6" name="TextBox 5"/>
+          <p:cNvSpPr txBox="1"/>
+          <p:nvPr/>
+        </p:nvSpPr>
+        <p:spPr>
+          <a:xfrm>
+            <a:off x="1371600" y="2377440"/>
+            <a:ext cx="9445752" cy="1280160"/>
+          </a:xfrm>
+          <a:prstGeom prst="rect">
+            <a:avLst/>
+          </a:prstGeom>
+          <a:noFill/>
+        </p:spPr>
+        <p:txBody>
+          <a:bodyPr wrap="square" lIns="73152" rIns="73152" tIns="54864" bIns="54864">
+            <a:spAutoFit/>
+          </a:bodyPr>
+          <a:lstStyle/>
+          <a:p>
+            <a:pPr algn="ctr">
+              <a:defRPr sz="2800" b="1">
+                <a:solidFill>
+                  <a:srgbClr val="0F172A"/>
+                </a:solidFill>
+                <a:latin typeface="Arial"/>
+              </a:defRPr>
+            </a:pPr>
+            <a:r>
+              <a:t>TÌM KIẾM THÔNG TIN &amp;</a:t>
+            </a:r>
+            <a:br/>
+            <a:r>
+              <a:t>CẤU TRÚC CÂY THƯ MỤC</a:t>
+            </a:r>
+          </a:p>
+        </p:txBody>
+      </p:sp>
+      <p:sp>
+        <p:nvSpPr>
+          <p:cNvPr id="7" name="TextBox 6"/>
+          <p:cNvSpPr txBox="1"/>
+          <p:nvPr/>
+        </p:nvSpPr>
+        <p:spPr>
+          <a:xfrm>
+            <a:off x="1371600" y="3749039"/>
+            <a:ext cx="9445752" cy="548639"/>
+          </a:xfrm>
+          <a:prstGeom prst="rect">
+            <a:avLst/>
+          </a:prstGeom>
+          <a:noFill/>
+        </p:spPr>
+        <p:txBody>
+          <a:bodyPr wrap="square" lIns="73152" rIns="73152" tIns="54864" bIns="54864">
+            <a:spAutoFit/>
+          </a:bodyPr>
+          <a:lstStyle/>
+          <a:p>
+            <a:pPr algn="ctr">
+              <a:defRPr sz="1800" b="0">
+                <a:solidFill>
+                  <a:srgbClr val="BE185D"/>
+                </a:solidFill>
+                <a:latin typeface="Arial"/>
+              </a:defRPr>
+            </a:pPr>
+            <a:r>
+              <a:t>Tin học • Lớp 5 • Tuần 04 (Tiết 3 &amp; Tiết 4)</a:t>
+            </a:r>
+          </a:p>
+        </p:txBody>
+      </p:sp>
+      <p:sp>
+        <p:nvSpPr>
+          <p:cNvPr id="8" name="TextBox 7"/>
+          <p:cNvSpPr txBox="1"/>
+          <p:nvPr/>
+        </p:nvSpPr>
+        <p:spPr>
+          <a:xfrm>
+            <a:off x="1371600" y="4389120"/>
+            <a:ext cx="9445752" cy="365760"/>
+          </a:xfrm>
+          <a:prstGeom prst="rect">
+            <a:avLst/>
+          </a:prstGeom>
+          <a:noFill/>
+        </p:spPr>
+        <p:txBody>
+          <a:bodyPr wrap="square" lIns="73152" rIns="73152" tIns="54864" bIns="54864">
+            <a:spAutoFit/>
+          </a:bodyPr>
+          <a:lstStyle/>
+          <a:p>
+            <a:pPr algn="ctr">
+              <a:defRPr sz="1400" b="0">
+                <a:solidFill>
+                  <a:srgbClr val="64748B"/>
+                </a:solidFill>
+                <a:latin typeface="Arial"/>
+              </a:defRPr>
+            </a:pPr>
+            <a:r>
+              <a:t>GV: Đậu Đình Nguyên • Bộ môn Tin học</a:t>
+            </a:r>
+          </a:p>
+        </p:txBody>
+      </p:sp>
+    </p:spTree>
+  </p:cSld>
+  <p:clrMapOvr>
+    <a:masterClrMapping/>
+  </p:clrMapOvr>
+  <p:transition spd="med">
+    <p:wipe/>
+  </p:transition>
+</p:sld>
+</file>
+
+<file path=ppt/slides/slide10.xml><?xml version="1.0" encoding="utf-8"?>
+<p:sld xmlns:a="http://schemas.openxmlformats.org/drawingml/2006/main" xmlns:p="http://schemas.openxmlformats.org/presentationml/2006/main" xmlns:r="http://schemas.openxmlformats.org/officeDocument/2006/relationships">
+  <p:cSld>
+    <p:spTree>
+      <p:nvGrpSpPr>
+        <p:cNvPr id="1" name=""/>
+        <p:cNvGrpSpPr/>
+        <p:nvPr/>
+      </p:nvGrpSpPr>
+      <p:grpSpPr/>
+      <p:sp>
+        <p:nvSpPr>
           <p:cNvPr id="2" name="Rectangle 1"/>
           <p:cNvSpPr/>
           <p:nvPr/>
@@ -3483,14 +3741,102 @@
       </p:sp>
       <p:sp>
         <p:nvSpPr>
-          <p:cNvPr id="4" name="TextBox 3"/>
+          <p:cNvPr id="3" name="Rounded Rectangle 2"/>
+          <p:cNvSpPr/>
+          <p:nvPr/>
+        </p:nvSpPr>
+        <p:spPr>
+          <a:xfrm>
+            <a:off x="1828800" y="1645920"/>
+            <a:ext cx="8531352" cy="3474720"/>
+          </a:xfrm>
+          <a:prstGeom prst="roundRect">
+            <a:avLst/>
+          </a:prstGeom>
+          <a:solidFill>
+            <a:srgbClr val="FFFFFF"/>
+          </a:solidFill>
+          <a:ln w="19050">
+            <a:solidFill>
+              <a:srgbClr val="EC4899"/>
+            </a:solidFill>
+          </a:ln>
+        </p:spPr>
+        <p:style>
+          <a:lnRef idx="1">
+            <a:schemeClr val="accent1"/>
+          </a:lnRef>
+          <a:fillRef idx="3">
+            <a:schemeClr val="accent1"/>
+          </a:fillRef>
+          <a:effectRef idx="2">
+            <a:schemeClr val="accent1"/>
+          </a:effectRef>
+          <a:fontRef idx="minor">
+            <a:schemeClr val="lt1"/>
+          </a:fontRef>
+        </p:style>
+        <p:txBody>
+          <a:bodyPr rtlCol="0" anchor="ctr"/>
+          <a:lstStyle/>
+          <a:p>
+            <a:pPr algn="ctr"/>
+          </a:p>
+        </p:txBody>
+      </p:sp>
+      <p:sp>
+        <p:nvSpPr>
+          <p:cNvPr id="4" name="Rounded Rectangle 3"/>
+          <p:cNvSpPr/>
+          <p:nvPr/>
+        </p:nvSpPr>
+        <p:spPr>
+          <a:xfrm>
+            <a:off x="1828800" y="1645920"/>
+            <a:ext cx="8531352" cy="182879"/>
+          </a:xfrm>
+          <a:prstGeom prst="roundRect">
+            <a:avLst/>
+          </a:prstGeom>
+          <a:solidFill>
+            <a:srgbClr val="EC4899"/>
+          </a:solidFill>
+          <a:ln>
+            <a:noFill/>
+          </a:ln>
+        </p:spPr>
+        <p:style>
+          <a:lnRef idx="1">
+            <a:schemeClr val="accent1"/>
+          </a:lnRef>
+          <a:fillRef idx="3">
+            <a:schemeClr val="accent1"/>
+          </a:fillRef>
+          <a:effectRef idx="2">
+            <a:schemeClr val="accent1"/>
+          </a:effectRef>
+          <a:fontRef idx="minor">
+            <a:schemeClr val="lt1"/>
+          </a:fontRef>
+        </p:style>
+        <p:txBody>
+          <a:bodyPr rtlCol="0" anchor="ctr"/>
+          <a:lstStyle/>
+          <a:p>
+            <a:pPr algn="ctr"/>
+          </a:p>
+        </p:txBody>
+      </p:sp>
+      <p:sp>
+        <p:nvSpPr>
+          <p:cNvPr id="5" name="TextBox 4"/>
           <p:cNvSpPr txBox="1"/>
           <p:nvPr/>
         </p:nvSpPr>
         <p:spPr>
           <a:xfrm>
-            <a:off x="731520" y="1828800"/>
-            <a:ext cx="6858000" cy="1371600"/>
+            <a:off x="2011680" y="2011680"/>
+            <a:ext cx="8165592" cy="731519"/>
           </a:xfrm>
           <a:prstGeom prst="rect">
             <a:avLst/>
@@ -3498,34 +3844,35 @@
           <a:noFill/>
         </p:spPr>
         <p:txBody>
-          <a:bodyPr wrap="square">
+          <a:bodyPr wrap="square" lIns="73152" rIns="73152" tIns="54864" bIns="54864">
             <a:spAutoFit/>
           </a:bodyPr>
           <a:lstStyle/>
           <a:p>
-            <a:pPr algn="l"/>
-            <a:r>
-              <a:rPr sz="3400" b="1">
+            <a:pPr algn="ctr">
+              <a:defRPr sz="2400" b="1">
                 <a:solidFill>
-                  <a:srgbClr val="FFFFFF"/>
+                  <a:srgbClr val="BE185D"/>
                 </a:solidFill>
                 <a:latin typeface="Arial"/>
-              </a:rPr>
-              <a:t>Tìm kiếm thông tin &amp; Cây thư mục 📁</a:t>
-            </a:r>
-          </a:p>
-        </p:txBody>
-      </p:sp>
-      <p:sp>
-        <p:nvSpPr>
-          <p:cNvPr id="5" name="TextBox 4"/>
+              </a:defRPr>
+            </a:pPr>
+            <a:r>
+              <a:t>BÀI HỌC KẾT THÚC! 🌟</a:t>
+            </a:r>
+          </a:p>
+        </p:txBody>
+      </p:sp>
+      <p:sp>
+        <p:nvSpPr>
+          <p:cNvPr id="6" name="TextBox 5"/>
           <p:cNvSpPr txBox="1"/>
           <p:nvPr/>
         </p:nvSpPr>
         <p:spPr>
           <a:xfrm>
-            <a:off x="731520" y="3474720"/>
-            <a:ext cx="6858000" cy="731520"/>
+            <a:off x="2011680" y="2834640"/>
+            <a:ext cx="8165592" cy="1097279"/>
           </a:xfrm>
           <a:prstGeom prst="rect">
             <a:avLst/>
@@ -3533,55 +3880,68 @@
           <a:noFill/>
         </p:spPr>
         <p:txBody>
-          <a:bodyPr wrap="square">
+          <a:bodyPr wrap="square" lIns="73152" rIns="73152" tIns="54864" bIns="54864">
             <a:spAutoFit/>
           </a:bodyPr>
           <a:lstStyle/>
           <a:p>
-            <a:pPr algn="l"/>
-            <a:r>
-              <a:rPr sz="2000" b="0">
+            <a:pPr algn="ctr">
+              <a:defRPr sz="1700" b="0">
                 <a:solidFill>
-                  <a:srgbClr val="FFFFFF"/>
+                  <a:srgbClr val="0F172A"/>
                 </a:solidFill>
                 <a:latin typeface="Arial"/>
-              </a:rPr>
-              <a:t>Tin học • Lớp 5 • Tiết 3 &amp; 4</a:t>
-            </a:r>
-          </a:p>
-        </p:txBody>
-      </p:sp>
-      <p:pic>
-        <p:nvPicPr>
-          <p:cNvPr id="6" name="Picture 5" descr="learn1_card1.png"/>
-          <p:cNvPicPr>
-            <a:picLocks noChangeAspect="1"/>
-          </p:cNvPicPr>
-          <p:nvPr/>
-        </p:nvPicPr>
-        <p:blipFill>
-          <a:blip r:embed="rId2"/>
-          <a:stretch>
-            <a:fillRect/>
-          </a:stretch>
-        </p:blipFill>
-        <p:spPr>
-          <a:xfrm>
-            <a:off x="8074152" y="1325880"/>
-            <a:ext cx="3474720" cy="3474720"/>
+              </a:defRPr>
+            </a:pPr>
+            <a:r>
+              <a:t>BTVN: Hoàn thành bài tập thực hành trên máy tính và chuẩn bị cho bài tuần tới nhé!</a:t>
+            </a:r>
+          </a:p>
+        </p:txBody>
+      </p:sp>
+      <p:sp>
+        <p:nvSpPr>
+          <p:cNvPr id="7" name="TextBox 6"/>
+          <p:cNvSpPr txBox="1"/>
+          <p:nvPr/>
+        </p:nvSpPr>
+        <p:spPr>
+          <a:xfrm>
+            <a:off x="2011680" y="4114800"/>
+            <a:ext cx="8165592" cy="548639"/>
           </a:xfrm>
           <a:prstGeom prst="rect">
             <a:avLst/>
           </a:prstGeom>
-        </p:spPr>
-      </p:pic>
+          <a:noFill/>
+        </p:spPr>
+        <p:txBody>
+          <a:bodyPr wrap="square" lIns="73152" rIns="73152" tIns="54864" bIns="54864">
+            <a:spAutoFit/>
+          </a:bodyPr>
+          <a:lstStyle/>
+          <a:p>
+            <a:pPr algn="ctr">
+              <a:defRPr sz="1600" b="1">
+                <a:solidFill>
+                  <a:srgbClr val="EC4899"/>
+                </a:solidFill>
+                <a:latin typeface="Arial"/>
+              </a:defRPr>
+            </a:pPr>
+            <a:r>
+              <a:t>Hẹn gặp lại các em ở bài học tuần sau! 🚀</a:t>
+            </a:r>
+          </a:p>
+        </p:txBody>
+      </p:sp>
     </p:spTree>
   </p:cSld>
   <p:clrMapOvr>
     <a:masterClrMapping/>
   </p:clrMapOvr>
   <p:transition spd="med">
-    <p:fade/>
+    <p:cover/>
   </p:transition>
 </p:sld>
 </file>
@@ -3641,16 +4001,16 @@
       </p:sp>
       <p:sp>
         <p:nvSpPr>
-          <p:cNvPr id="3" name="Rectangle 2"/>
+          <p:cNvPr id="3" name="Rounded Rectangle 2"/>
           <p:cNvSpPr/>
           <p:nvPr/>
         </p:nvSpPr>
         <p:spPr>
           <a:xfrm>
-            <a:off x="0" y="1097280"/>
-            <a:ext cx="12188952" cy="411479"/>
-          </a:xfrm>
-          <a:prstGeom prst="rect">
+            <a:off x="1371600" y="1645920"/>
+            <a:ext cx="9445752" cy="3474720"/>
+          </a:xfrm>
+          <a:prstGeom prst="roundRect">
             <a:avLst/>
           </a:prstGeom>
           <a:solidFill>
@@ -3684,129 +4044,16 @@
       </p:sp>
       <p:sp>
         <p:nvSpPr>
-          <p:cNvPr id="4" name="TextBox 3"/>
-          <p:cNvSpPr txBox="1"/>
-          <p:nvPr/>
-        </p:nvSpPr>
-        <p:spPr>
-          <a:xfrm>
-            <a:off x="274320" y="1124712"/>
-            <a:ext cx="11640312" cy="365760"/>
-          </a:xfrm>
-          <a:prstGeom prst="rect">
-            <a:avLst/>
-          </a:prstGeom>
-          <a:noFill/>
-        </p:spPr>
-        <p:txBody>
-          <a:bodyPr wrap="square">
-            <a:spAutoFit/>
-          </a:bodyPr>
-          <a:lstStyle/>
-          <a:p>
-            <a:pPr algn="l"/>
-            <a:r>
-              <a:rPr sz="1300" b="1">
-                <a:solidFill>
-                  <a:srgbClr val="FFFFFF"/>
-                </a:solidFill>
-                <a:latin typeface="Arial"/>
-              </a:rPr>
-              <a:t>  LỚP 5 • BÀI 3. TÌM KIẾM THÔNG TIN &amp; BÀI 4. CÂY THƯ MỤC</a:t>
-            </a:r>
-          </a:p>
-        </p:txBody>
-      </p:sp>
-      <p:sp>
-        <p:nvSpPr>
-          <p:cNvPr id="5" name="TextBox 4"/>
-          <p:cNvSpPr txBox="1"/>
-          <p:nvPr/>
-        </p:nvSpPr>
-        <p:spPr>
-          <a:xfrm>
-            <a:off x="457200" y="1600200"/>
-            <a:ext cx="7315200" cy="594360"/>
-          </a:xfrm>
-          <a:prstGeom prst="rect">
-            <a:avLst/>
-          </a:prstGeom>
-          <a:noFill/>
-        </p:spPr>
-        <p:txBody>
-          <a:bodyPr wrap="square">
-            <a:spAutoFit/>
-          </a:bodyPr>
-          <a:lstStyle/>
-          <a:p>
-            <a:pPr algn="l"/>
-            <a:r>
-              <a:rPr sz="2600" b="1">
-                <a:solidFill>
-                  <a:srgbClr val="831843"/>
-                </a:solidFill>
-                <a:latin typeface="Arial"/>
-              </a:rPr>
-              <a:t>Làm sao quản lý hàng trăm tệp tài liệu?</a:t>
-            </a:r>
-          </a:p>
-        </p:txBody>
-      </p:sp>
-      <p:sp>
-        <p:nvSpPr>
-          <p:cNvPr id="6" name="Rounded Rectangle 5"/>
+          <p:cNvPr id="4" name="Rounded Rectangle 3"/>
           <p:cNvSpPr/>
           <p:nvPr/>
         </p:nvSpPr>
         <p:spPr>
           <a:xfrm>
-            <a:off x="365760" y="2286000"/>
-            <a:ext cx="6858000" cy="3383279"/>
+            <a:off x="1371600" y="1645920"/>
+            <a:ext cx="365760" cy="3474720"/>
           </a:xfrm>
           <a:prstGeom prst="roundRect">
-            <a:avLst/>
-          </a:prstGeom>
-          <a:solidFill>
-            <a:srgbClr val="FFFFFF"/>
-          </a:solidFill>
-          <a:ln>
-            <a:noFill/>
-          </a:ln>
-        </p:spPr>
-        <p:style>
-          <a:lnRef idx="1">
-            <a:schemeClr val="accent1"/>
-          </a:lnRef>
-          <a:fillRef idx="3">
-            <a:schemeClr val="accent1"/>
-          </a:fillRef>
-          <a:effectRef idx="2">
-            <a:schemeClr val="accent1"/>
-          </a:effectRef>
-          <a:fontRef idx="minor">
-            <a:schemeClr val="lt1"/>
-          </a:fontRef>
-        </p:style>
-        <p:txBody>
-          <a:bodyPr rtlCol="0" anchor="ctr"/>
-          <a:lstStyle/>
-          <a:p>
-            <a:pPr algn="ctr"/>
-          </a:p>
-        </p:txBody>
-      </p:sp>
-      <p:sp>
-        <p:nvSpPr>
-          <p:cNvPr id="7" name="Rectangle 6"/>
-          <p:cNvSpPr/>
-          <p:nvPr/>
-        </p:nvSpPr>
-        <p:spPr>
-          <a:xfrm>
-            <a:off x="365760" y="2286000"/>
-            <a:ext cx="109728" cy="3383279"/>
-          </a:xfrm>
-          <a:prstGeom prst="rect">
             <a:avLst/>
           </a:prstGeom>
           <a:solidFill>
@@ -3840,14 +4087,14 @@
       </p:sp>
       <p:sp>
         <p:nvSpPr>
-          <p:cNvPr id="8" name="TextBox 7"/>
+          <p:cNvPr id="5" name="TextBox 4"/>
           <p:cNvSpPr txBox="1"/>
           <p:nvPr/>
         </p:nvSpPr>
         <p:spPr>
           <a:xfrm>
-            <a:off x="731520" y="2468880"/>
-            <a:ext cx="6309360" cy="3017520"/>
+            <a:off x="2103120" y="2011680"/>
+            <a:ext cx="8046720" cy="548640"/>
           </a:xfrm>
           <a:prstGeom prst="rect">
             <a:avLst/>
@@ -3855,91 +4102,104 @@
           <a:noFill/>
         </p:spPr>
         <p:txBody>
-          <a:bodyPr wrap="square">
+          <a:bodyPr wrap="square" lIns="73152" rIns="73152" tIns="54864" bIns="54864">
             <a:spAutoFit/>
           </a:bodyPr>
           <a:lstStyle/>
           <a:p>
             <a:pPr algn="l">
-              <a:spcAft>
-                <a:spcPts val="600"/>
-              </a:spcAft>
-            </a:pPr>
-            <a:r>
-              <a:rPr sz="2000" b="0">
+              <a:defRPr sz="1600" b="1">
                 <a:solidFill>
-                  <a:srgbClr val="831843"/>
+                  <a:srgbClr val="FEF08A"/>
                 </a:solidFill>
                 <a:latin typeface="Arial"/>
-              </a:rPr>
-              <a:t>Nếu tất cả bài tập, tranh vẽ, bài hát để lộn xộn trong máy tính:</a:t>
-            </a:r>
-          </a:p>
+              </a:defRPr>
+            </a:pPr>
+            <a:r>
+              <a:t>KHÁM PHÁ KIẾN THỨC MỚI</a:t>
+            </a:r>
+          </a:p>
+        </p:txBody>
+      </p:sp>
+      <p:sp>
+        <p:nvSpPr>
+          <p:cNvPr id="6" name="TextBox 5"/>
+          <p:cNvSpPr txBox="1"/>
+          <p:nvPr/>
+        </p:nvSpPr>
+        <p:spPr>
+          <a:xfrm>
+            <a:off x="2103120" y="2651760"/>
+            <a:ext cx="8046720" cy="1371600"/>
+          </a:xfrm>
+          <a:prstGeom prst="rect">
+            <a:avLst/>
+          </a:prstGeom>
+          <a:noFill/>
+        </p:spPr>
+        <p:txBody>
+          <a:bodyPr wrap="square" lIns="73152" rIns="73152" tIns="54864" bIns="54864">
+            <a:spAutoFit/>
+          </a:bodyPr>
+          <a:lstStyle/>
           <a:p>
             <a:pPr algn="l">
-              <a:spcAft>
-                <a:spcPts val="600"/>
-              </a:spcAft>
-            </a:pPr>
-            <a:r>
-              <a:rPr sz="2000" b="0">
+              <a:defRPr sz="2600" b="1">
                 <a:solidFill>
-                  <a:srgbClr val="831843"/>
+                  <a:srgbClr val="FFFFFF"/>
                 </a:solidFill>
                 <a:latin typeface="Arial"/>
-              </a:rPr>
-              <a:t>Làm sao em tìm được bài tập cần nộp cho cô?</a:t>
-            </a:r>
-          </a:p>
+              </a:defRPr>
+            </a:pPr>
+            <a:r>
+              <a:t>TIẾT 3: TÌM KIẾM THÔNG TIN TRONG GIẢI QUYẾT VẤN ĐỀ</a:t>
+            </a:r>
+          </a:p>
+        </p:txBody>
+      </p:sp>
+      <p:sp>
+        <p:nvSpPr>
+          <p:cNvPr id="7" name="TextBox 6"/>
+          <p:cNvSpPr txBox="1"/>
+          <p:nvPr/>
+        </p:nvSpPr>
+        <p:spPr>
+          <a:xfrm>
+            <a:off x="2103120" y="4023360"/>
+            <a:ext cx="8046720" cy="731519"/>
+          </a:xfrm>
+          <a:prstGeom prst="rect">
+            <a:avLst/>
+          </a:prstGeom>
+          <a:noFill/>
+        </p:spPr>
+        <p:txBody>
+          <a:bodyPr wrap="square" lIns="73152" rIns="73152" tIns="54864" bIns="54864">
+            <a:spAutoFit/>
+          </a:bodyPr>
+          <a:lstStyle/>
           <a:p>
             <a:pPr algn="l">
-              <a:spcAft>
-                <a:spcPts val="600"/>
-              </a:spcAft>
-            </a:pPr>
-            <a:r>
-              <a:rPr sz="2000" b="0">
+              <a:defRPr sz="1600" b="0">
                 <a:solidFill>
-                  <a:srgbClr val="831843"/>
+                  <a:srgbClr val="F1F5F9"/>
                 </a:solidFill>
                 <a:latin typeface="Arial"/>
-              </a:rPr>
-              <a:t>Cây thư mục chính là giải pháp hoàn hảo!</a:t>
-            </a:r>
-          </a:p>
-        </p:txBody>
-      </p:sp>
-      <p:pic>
-        <p:nvPicPr>
-          <p:cNvPr id="9" name="Picture 8" descr="learn1_card1.png"/>
-          <p:cNvPicPr>
-            <a:picLocks noChangeAspect="1"/>
-          </p:cNvPicPr>
-          <p:nvPr/>
-        </p:nvPicPr>
-        <p:blipFill>
-          <a:blip r:embed="rId2"/>
-          <a:stretch>
-            <a:fillRect/>
-          </a:stretch>
-        </p:blipFill>
-        <p:spPr>
-          <a:xfrm>
-            <a:off x="7589520" y="2286000"/>
-            <a:ext cx="4114799" cy="3383279"/>
-          </a:xfrm>
-          <a:prstGeom prst="rect">
-            <a:avLst/>
-          </a:prstGeom>
-        </p:spPr>
-      </p:pic>
+              </a:defRPr>
+            </a:pPr>
+            <a:r>
+              <a:t>Khám phá kỹ thuật tìm kiếm chính xác và chọn lọc thông tin đáng tin cậy</a:t>
+            </a:r>
+          </a:p>
+        </p:txBody>
+      </p:sp>
     </p:spTree>
   </p:cSld>
   <p:clrMapOvr>
     <a:masterClrMapping/>
   </p:clrMapOvr>
   <p:transition spd="med">
-    <p:push dir="l"/>
+    <p:push/>
   </p:transition>
 </p:sld>
 </file>
@@ -3999,20 +4259,20 @@
       </p:sp>
       <p:sp>
         <p:nvSpPr>
-          <p:cNvPr id="3" name="Rectangle 2"/>
+          <p:cNvPr id="3" name="Rounded Rectangle 2"/>
           <p:cNvSpPr/>
           <p:nvPr/>
         </p:nvSpPr>
         <p:spPr>
           <a:xfrm>
-            <a:off x="0" y="1097280"/>
-            <a:ext cx="12188952" cy="411479"/>
-          </a:xfrm>
-          <a:prstGeom prst="rect">
+            <a:off x="365760" y="1143000"/>
+            <a:ext cx="2926080" cy="347471"/>
+          </a:xfrm>
+          <a:prstGeom prst="roundRect">
             <a:avLst/>
           </a:prstGeom>
           <a:solidFill>
-            <a:srgbClr val="DC2626"/>
+            <a:srgbClr val="BE185D"/>
           </a:solidFill>
           <a:ln>
             <a:noFill/>
@@ -4048,8 +4308,8 @@
         </p:nvSpPr>
         <p:spPr>
           <a:xfrm>
-            <a:off x="274320" y="1124712"/>
-            <a:ext cx="11640312" cy="365760"/>
+            <a:off x="365760" y="1143000"/>
+            <a:ext cx="2926080" cy="347471"/>
           </a:xfrm>
           <a:prstGeom prst="rect">
             <a:avLst/>
@@ -4057,20 +4317,21 @@
           <a:noFill/>
         </p:spPr>
         <p:txBody>
-          <a:bodyPr wrap="square">
+          <a:bodyPr wrap="square" lIns="73152" rIns="73152" tIns="54864" bIns="54864">
             <a:spAutoFit/>
           </a:bodyPr>
           <a:lstStyle/>
           <a:p>
-            <a:pPr algn="l"/>
-            <a:r>
-              <a:rPr sz="1300" b="1">
+            <a:pPr algn="ctr">
+              <a:defRPr sz="1300" b="1">
                 <a:solidFill>
                   <a:srgbClr val="FFFFFF"/>
                 </a:solidFill>
                 <a:latin typeface="Arial"/>
-              </a:rPr>
-              <a:t>  LỚP 5 • KHÁM PHÁ VIDEO BÀI HỌC</a:t>
+              </a:defRPr>
+            </a:pPr>
+            <a:r>
+              <a:t>KHỞI ĐỘNG &amp; TÌNH HUỐNG</a:t>
             </a:r>
           </a:p>
         </p:txBody>
@@ -4083,8 +4344,8 @@
         </p:nvSpPr>
         <p:spPr>
           <a:xfrm>
-            <a:off x="457200" y="1600200"/>
-            <a:ext cx="11274552" cy="594360"/>
+            <a:off x="3474720" y="1115568"/>
+            <a:ext cx="8046720" cy="411479"/>
           </a:xfrm>
           <a:prstGeom prst="rect">
             <a:avLst/>
@@ -4092,20 +4353,21 @@
           <a:noFill/>
         </p:spPr>
         <p:txBody>
-          <a:bodyPr wrap="square">
+          <a:bodyPr wrap="square" lIns="73152" rIns="73152" tIns="54864" bIns="54864">
             <a:spAutoFit/>
           </a:bodyPr>
           <a:lstStyle/>
           <a:p>
-            <a:pPr algn="l"/>
-            <a:r>
-              <a:rPr sz="2600" b="1">
+            <a:pPr algn="l">
+              <a:defRPr sz="2100" b="1">
                 <a:solidFill>
                   <a:srgbClr val="831843"/>
                 </a:solidFill>
                 <a:latin typeface="Arial"/>
-              </a:rPr>
-              <a:t>Tìm kiếm thông tin &amp; Tổ chức thư mục 🎬</a:t>
+              </a:defRPr>
+            </a:pPr>
+            <a:r>
+              <a:t>Tình huống: Chuẩn bị hành lý cho kì nghỉ hè</a:t>
             </a:r>
           </a:p>
         </p:txBody>
@@ -4118,8 +4380,8 @@
         </p:nvSpPr>
         <p:spPr>
           <a:xfrm>
-            <a:off x="365760" y="2286000"/>
-            <a:ext cx="6858000" cy="3383279"/>
+            <a:off x="365760" y="1645920"/>
+            <a:ext cx="3566160" cy="3977639"/>
           </a:xfrm>
           <a:prstGeom prst="roundRect">
             <a:avLst/>
@@ -4127,9 +4389,9 @@
           <a:solidFill>
             <a:srgbClr val="FFFFFF"/>
           </a:solidFill>
-          <a:ln w="12700">
+          <a:ln w="19050">
             <a:solidFill>
-              <a:srgbClr val="EF4444"/>
+              <a:srgbClr val="EC4899"/>
             </a:solidFill>
           </a:ln>
         </p:spPr>
@@ -4157,20 +4419,20 @@
       </p:sp>
       <p:sp>
         <p:nvSpPr>
-          <p:cNvPr id="7" name="Rectangle 6"/>
+          <p:cNvPr id="7" name="Rounded Rectangle 6"/>
           <p:cNvSpPr/>
           <p:nvPr/>
         </p:nvSpPr>
         <p:spPr>
           <a:xfrm>
-            <a:off x="365760" y="2286000"/>
-            <a:ext cx="109728" cy="3383279"/>
-          </a:xfrm>
-          <a:prstGeom prst="rect">
+            <a:off x="365760" y="1645920"/>
+            <a:ext cx="3566160" cy="411479"/>
+          </a:xfrm>
+          <a:prstGeom prst="roundRect">
             <a:avLst/>
           </a:prstGeom>
           <a:solidFill>
-            <a:srgbClr val="EF4444"/>
+            <a:srgbClr val="BE185D"/>
           </a:solidFill>
           <a:ln>
             <a:noFill/>
@@ -4206,8 +4468,8 @@
         </p:nvSpPr>
         <p:spPr>
           <a:xfrm>
-            <a:off x="731520" y="2468880"/>
-            <a:ext cx="6309360" cy="3017520"/>
+            <a:off x="365760" y="1691640"/>
+            <a:ext cx="3566160" cy="365759"/>
           </a:xfrm>
           <a:prstGeom prst="rect">
             <a:avLst/>
@@ -4215,111 +4477,28 @@
           <a:noFill/>
         </p:spPr>
         <p:txBody>
-          <a:bodyPr wrap="square">
+          <a:bodyPr wrap="square" lIns="73152" rIns="73152" tIns="54864" bIns="54864">
             <a:spAutoFit/>
           </a:bodyPr>
           <a:lstStyle/>
           <a:p>
-            <a:pPr algn="l">
-              <a:spcAft>
-                <a:spcPts val="600"/>
-              </a:spcAft>
-            </a:pPr>
-            <a:r>
-              <a:rPr sz="1700" b="0">
+            <a:pPr algn="ctr">
+              <a:defRPr sz="1400" b="1">
                 <a:solidFill>
-                  <a:srgbClr val="831843"/>
+                  <a:srgbClr val="FFFFFF"/>
                 </a:solidFill>
                 <a:latin typeface="Arial"/>
-              </a:rPr>
-              <a:t>Video hướng dẫn kỹ năng tìm kiếm từ khóa nâng cao và tổ chức cây thư mục khoa học!</a:t>
-            </a:r>
-          </a:p>
-          <a:p>
-            <a:pPr algn="l">
-              <a:spcAft>
-                <a:spcPts val="600"/>
-              </a:spcAft>
+              </a:defRPr>
             </a:pPr>
             <a:r>
-              <a:rPr sz="1700" b="0">
-                <a:solidFill>
-                  <a:srgbClr val="831843"/>
-                </a:solidFill>
-                <a:latin typeface="Arial"/>
-              </a:rPr>
-              <a:t/>
-            </a:r>
-          </a:p>
-          <a:p>
-            <a:pPr algn="l">
-              <a:spcAft>
-                <a:spcPts val="600"/>
-              </a:spcAft>
-            </a:pPr>
-            <a:r>
-              <a:rPr sz="1700" b="0">
-                <a:solidFill>
-                  <a:srgbClr val="831843"/>
-                </a:solidFill>
-                <a:latin typeface="Arial"/>
-              </a:rPr>
-              <a:t>🔗 Đường link video tham khảo:</a:t>
-            </a:r>
-          </a:p>
-          <a:p>
-            <a:pPr algn="l">
-              <a:spcAft>
-                <a:spcPts val="600"/>
-              </a:spcAft>
-            </a:pPr>
-            <a:r>
-              <a:rPr sz="1700" b="0">
-                <a:solidFill>
-                  <a:srgbClr val="831843"/>
-                </a:solidFill>
-                <a:latin typeface="Arial"/>
-              </a:rPr>
-              <a:t>https://www.youtube.com/watch?v=kYJ5z5_W2hY</a:t>
-            </a:r>
-          </a:p>
-          <a:p>
-            <a:pPr algn="l">
-              <a:spcAft>
-                <a:spcPts val="600"/>
-              </a:spcAft>
-            </a:pPr>
-            <a:r>
-              <a:rPr sz="1700" b="0">
-                <a:solidFill>
-                  <a:srgbClr val="831843"/>
-                </a:solidFill>
-                <a:latin typeface="Arial"/>
-              </a:rPr>
-              <a:t/>
-            </a:r>
-          </a:p>
-          <a:p>
-            <a:pPr algn="l">
-              <a:spcAft>
-                <a:spcPts val="600"/>
-              </a:spcAft>
-            </a:pPr>
-            <a:r>
-              <a:rPr sz="1700" b="0">
-                <a:solidFill>
-                  <a:srgbClr val="831843"/>
-                </a:solidFill>
-                <a:latin typeface="Arial"/>
-              </a:rPr>
-              <a:t>💡 Thầy/Cô sẽ chiếu video cho các em quan sát nhé!</a:t>
+              <a:t>1. An đi Nha Trang</a:t>
             </a:r>
           </a:p>
         </p:txBody>
       </p:sp>
       <p:pic>
         <p:nvPicPr>
-          <p:cNvPr id="9" name="Picture 8" descr="learn1_card1.png"/>
+          <p:cNvPr id="9" name="Picture 8" descr="sgk_lop5_bai3_khoi_dong.png"/>
           <p:cNvPicPr>
             <a:picLocks noChangeAspect="1"/>
           </p:cNvPicPr>
@@ -4333,21 +4512,425 @@
         </p:blipFill>
         <p:spPr>
           <a:xfrm>
-            <a:off x="7589520" y="2286000"/>
-            <a:ext cx="4114799" cy="3383279"/>
+            <a:off x="502920" y="2148840"/>
+            <a:ext cx="3291840" cy="2103120"/>
           </a:xfrm>
           <a:prstGeom prst="rect">
             <a:avLst/>
           </a:prstGeom>
         </p:spPr>
       </p:pic>
+      <p:sp>
+        <p:nvSpPr>
+          <p:cNvPr id="10" name="TextBox 9"/>
+          <p:cNvSpPr txBox="1"/>
+          <p:nvPr/>
+        </p:nvSpPr>
+        <p:spPr>
+          <a:xfrm>
+            <a:off x="502920" y="4343400"/>
+            <a:ext cx="3291840" cy="1188719"/>
+          </a:xfrm>
+          <a:prstGeom prst="rect">
+            <a:avLst/>
+          </a:prstGeom>
+          <a:noFill/>
+        </p:spPr>
+        <p:txBody>
+          <a:bodyPr wrap="square" lIns="73152" rIns="73152" tIns="54864" bIns="54864">
+            <a:spAutoFit/>
+          </a:bodyPr>
+          <a:lstStyle/>
+          <a:p>
+            <a:pPr algn="ctr">
+              <a:defRPr sz="1300" b="0">
+                <a:solidFill>
+                  <a:srgbClr val="0F172A"/>
+                </a:solidFill>
+                <a:latin typeface="Arial"/>
+              </a:defRPr>
+            </a:pPr>
+            <a:r>
+              <a:t>Nha Trang là thành phố biển, quanh năm nắng ấm. Cần đồ bơi, kem chống nắng...</a:t>
+            </a:r>
+          </a:p>
+        </p:txBody>
+      </p:sp>
+      <p:sp>
+        <p:nvSpPr>
+          <p:cNvPr id="11" name="Rounded Rectangle 10"/>
+          <p:cNvSpPr/>
+          <p:nvPr/>
+        </p:nvSpPr>
+        <p:spPr>
+          <a:xfrm>
+            <a:off x="4206240" y="1645920"/>
+            <a:ext cx="3566160" cy="3977639"/>
+          </a:xfrm>
+          <a:prstGeom prst="roundRect">
+            <a:avLst/>
+          </a:prstGeom>
+          <a:solidFill>
+            <a:srgbClr val="FFFFFF"/>
+          </a:solidFill>
+          <a:ln w="19050">
+            <a:solidFill>
+              <a:srgbClr val="EC4899"/>
+            </a:solidFill>
+          </a:ln>
+        </p:spPr>
+        <p:style>
+          <a:lnRef idx="1">
+            <a:schemeClr val="accent1"/>
+          </a:lnRef>
+          <a:fillRef idx="3">
+            <a:schemeClr val="accent1"/>
+          </a:fillRef>
+          <a:effectRef idx="2">
+            <a:schemeClr val="accent1"/>
+          </a:effectRef>
+          <a:fontRef idx="minor">
+            <a:schemeClr val="lt1"/>
+          </a:fontRef>
+        </p:style>
+        <p:txBody>
+          <a:bodyPr rtlCol="0" anchor="ctr"/>
+          <a:lstStyle/>
+          <a:p>
+            <a:pPr algn="ctr"/>
+          </a:p>
+        </p:txBody>
+      </p:sp>
+      <p:sp>
+        <p:nvSpPr>
+          <p:cNvPr id="12" name="Rounded Rectangle 11"/>
+          <p:cNvSpPr/>
+          <p:nvPr/>
+        </p:nvSpPr>
+        <p:spPr>
+          <a:xfrm>
+            <a:off x="4206240" y="1645920"/>
+            <a:ext cx="3566160" cy="411479"/>
+          </a:xfrm>
+          <a:prstGeom prst="roundRect">
+            <a:avLst/>
+          </a:prstGeom>
+          <a:solidFill>
+            <a:srgbClr val="BE185D"/>
+          </a:solidFill>
+          <a:ln>
+            <a:noFill/>
+          </a:ln>
+        </p:spPr>
+        <p:style>
+          <a:lnRef idx="1">
+            <a:schemeClr val="accent1"/>
+          </a:lnRef>
+          <a:fillRef idx="3">
+            <a:schemeClr val="accent1"/>
+          </a:fillRef>
+          <a:effectRef idx="2">
+            <a:schemeClr val="accent1"/>
+          </a:effectRef>
+          <a:fontRef idx="minor">
+            <a:schemeClr val="lt1"/>
+          </a:fontRef>
+        </p:style>
+        <p:txBody>
+          <a:bodyPr rtlCol="0" anchor="ctr"/>
+          <a:lstStyle/>
+          <a:p>
+            <a:pPr algn="ctr"/>
+          </a:p>
+        </p:txBody>
+      </p:sp>
+      <p:sp>
+        <p:nvSpPr>
+          <p:cNvPr id="13" name="TextBox 12"/>
+          <p:cNvSpPr txBox="1"/>
+          <p:nvPr/>
+        </p:nvSpPr>
+        <p:spPr>
+          <a:xfrm>
+            <a:off x="4206240" y="1691640"/>
+            <a:ext cx="3566160" cy="365759"/>
+          </a:xfrm>
+          <a:prstGeom prst="rect">
+            <a:avLst/>
+          </a:prstGeom>
+          <a:noFill/>
+        </p:spPr>
+        <p:txBody>
+          <a:bodyPr wrap="square" lIns="73152" rIns="73152" tIns="54864" bIns="54864">
+            <a:spAutoFit/>
+          </a:bodyPr>
+          <a:lstStyle/>
+          <a:p>
+            <a:pPr algn="ctr">
+              <a:defRPr sz="1400" b="1">
+                <a:solidFill>
+                  <a:srgbClr val="FFFFFF"/>
+                </a:solidFill>
+                <a:latin typeface="Arial"/>
+              </a:defRPr>
+            </a:pPr>
+            <a:r>
+              <a:t>2. Khoa đi Đà Lạt</a:t>
+            </a:r>
+          </a:p>
+        </p:txBody>
+      </p:sp>
+      <p:pic>
+        <p:nvPicPr>
+          <p:cNvPr id="14" name="Picture 13" descr="sgk_lop5_bai3_khoi_dong.png"/>
+          <p:cNvPicPr>
+            <a:picLocks noChangeAspect="1"/>
+          </p:cNvPicPr>
+          <p:nvPr/>
+        </p:nvPicPr>
+        <p:blipFill>
+          <a:blip r:embed="rId2"/>
+          <a:stretch>
+            <a:fillRect/>
+          </a:stretch>
+        </p:blipFill>
+        <p:spPr>
+          <a:xfrm>
+            <a:off x="4343400" y="2148840"/>
+            <a:ext cx="3291840" cy="2103120"/>
+          </a:xfrm>
+          <a:prstGeom prst="rect">
+            <a:avLst/>
+          </a:prstGeom>
+        </p:spPr>
+      </p:pic>
+      <p:sp>
+        <p:nvSpPr>
+          <p:cNvPr id="15" name="TextBox 14"/>
+          <p:cNvSpPr txBox="1"/>
+          <p:nvPr/>
+        </p:nvSpPr>
+        <p:spPr>
+          <a:xfrm>
+            <a:off x="4343400" y="4343400"/>
+            <a:ext cx="3291840" cy="1188719"/>
+          </a:xfrm>
+          <a:prstGeom prst="rect">
+            <a:avLst/>
+          </a:prstGeom>
+          <a:noFill/>
+        </p:spPr>
+        <p:txBody>
+          <a:bodyPr wrap="square" lIns="73152" rIns="73152" tIns="54864" bIns="54864">
+            <a:spAutoFit/>
+          </a:bodyPr>
+          <a:lstStyle/>
+          <a:p>
+            <a:pPr algn="ctr">
+              <a:defRPr sz="1300" b="0">
+                <a:solidFill>
+                  <a:srgbClr val="0F172A"/>
+                </a:solidFill>
+                <a:latin typeface="Arial"/>
+              </a:defRPr>
+            </a:pPr>
+            <a:r>
+              <a:t>Đà Lạt nằm ở vùng cao nguyên, đêm se lạnh. Cần áo ấm, áo khoác gió...</a:t>
+            </a:r>
+          </a:p>
+        </p:txBody>
+      </p:sp>
+      <p:sp>
+        <p:nvSpPr>
+          <p:cNvPr id="16" name="Rounded Rectangle 15"/>
+          <p:cNvSpPr/>
+          <p:nvPr/>
+        </p:nvSpPr>
+        <p:spPr>
+          <a:xfrm>
+            <a:off x="8046720" y="1645920"/>
+            <a:ext cx="3566160" cy="3977639"/>
+          </a:xfrm>
+          <a:prstGeom prst="roundRect">
+            <a:avLst/>
+          </a:prstGeom>
+          <a:solidFill>
+            <a:srgbClr val="FFFFFF"/>
+          </a:solidFill>
+          <a:ln w="19050">
+            <a:solidFill>
+              <a:srgbClr val="EC4899"/>
+            </a:solidFill>
+          </a:ln>
+        </p:spPr>
+        <p:style>
+          <a:lnRef idx="1">
+            <a:schemeClr val="accent1"/>
+          </a:lnRef>
+          <a:fillRef idx="3">
+            <a:schemeClr val="accent1"/>
+          </a:fillRef>
+          <a:effectRef idx="2">
+            <a:schemeClr val="accent1"/>
+          </a:effectRef>
+          <a:fontRef idx="minor">
+            <a:schemeClr val="lt1"/>
+          </a:fontRef>
+        </p:style>
+        <p:txBody>
+          <a:bodyPr rtlCol="0" anchor="ctr"/>
+          <a:lstStyle/>
+          <a:p>
+            <a:pPr algn="ctr"/>
+          </a:p>
+        </p:txBody>
+      </p:sp>
+      <p:sp>
+        <p:nvSpPr>
+          <p:cNvPr id="17" name="Rounded Rectangle 16"/>
+          <p:cNvSpPr/>
+          <p:nvPr/>
+        </p:nvSpPr>
+        <p:spPr>
+          <a:xfrm>
+            <a:off x="8046720" y="1645920"/>
+            <a:ext cx="3566160" cy="411479"/>
+          </a:xfrm>
+          <a:prstGeom prst="roundRect">
+            <a:avLst/>
+          </a:prstGeom>
+          <a:solidFill>
+            <a:srgbClr val="BE185D"/>
+          </a:solidFill>
+          <a:ln>
+            <a:noFill/>
+          </a:ln>
+        </p:spPr>
+        <p:style>
+          <a:lnRef idx="1">
+            <a:schemeClr val="accent1"/>
+          </a:lnRef>
+          <a:fillRef idx="3">
+            <a:schemeClr val="accent1"/>
+          </a:fillRef>
+          <a:effectRef idx="2">
+            <a:schemeClr val="accent1"/>
+          </a:effectRef>
+          <a:fontRef idx="minor">
+            <a:schemeClr val="lt1"/>
+          </a:fontRef>
+        </p:style>
+        <p:txBody>
+          <a:bodyPr rtlCol="0" anchor="ctr"/>
+          <a:lstStyle/>
+          <a:p>
+            <a:pPr algn="ctr"/>
+          </a:p>
+        </p:txBody>
+      </p:sp>
+      <p:sp>
+        <p:nvSpPr>
+          <p:cNvPr id="18" name="TextBox 17"/>
+          <p:cNvSpPr txBox="1"/>
+          <p:nvPr/>
+        </p:nvSpPr>
+        <p:spPr>
+          <a:xfrm>
+            <a:off x="8046720" y="1691640"/>
+            <a:ext cx="3566160" cy="365759"/>
+          </a:xfrm>
+          <a:prstGeom prst="rect">
+            <a:avLst/>
+          </a:prstGeom>
+          <a:noFill/>
+        </p:spPr>
+        <p:txBody>
+          <a:bodyPr wrap="square" lIns="73152" rIns="73152" tIns="54864" bIns="54864">
+            <a:spAutoFit/>
+          </a:bodyPr>
+          <a:lstStyle/>
+          <a:p>
+            <a:pPr algn="ctr">
+              <a:defRPr sz="1400" b="1">
+                <a:solidFill>
+                  <a:srgbClr val="FFFFFF"/>
+                </a:solidFill>
+                <a:latin typeface="Arial"/>
+              </a:defRPr>
+            </a:pPr>
+            <a:r>
+              <a:t>3. Minh đi Úc</a:t>
+            </a:r>
+          </a:p>
+        </p:txBody>
+      </p:sp>
+      <p:pic>
+        <p:nvPicPr>
+          <p:cNvPr id="19" name="Picture 18" descr="sgk_lop5_bai3_khoi_dong.png"/>
+          <p:cNvPicPr>
+            <a:picLocks noChangeAspect="1"/>
+          </p:cNvPicPr>
+          <p:nvPr/>
+        </p:nvPicPr>
+        <p:blipFill>
+          <a:blip r:embed="rId2"/>
+          <a:stretch>
+            <a:fillRect/>
+          </a:stretch>
+        </p:blipFill>
+        <p:spPr>
+          <a:xfrm>
+            <a:off x="8183880" y="2148840"/>
+            <a:ext cx="3291840" cy="2103120"/>
+          </a:xfrm>
+          <a:prstGeom prst="rect">
+            <a:avLst/>
+          </a:prstGeom>
+        </p:spPr>
+      </p:pic>
+      <p:sp>
+        <p:nvSpPr>
+          <p:cNvPr id="20" name="TextBox 19"/>
+          <p:cNvSpPr txBox="1"/>
+          <p:nvPr/>
+        </p:nvSpPr>
+        <p:spPr>
+          <a:xfrm>
+            <a:off x="8183880" y="4343400"/>
+            <a:ext cx="3291840" cy="1188719"/>
+          </a:xfrm>
+          <a:prstGeom prst="rect">
+            <a:avLst/>
+          </a:prstGeom>
+          <a:noFill/>
+        </p:spPr>
+        <p:txBody>
+          <a:bodyPr wrap="square" lIns="73152" rIns="73152" tIns="54864" bIns="54864">
+            <a:spAutoFit/>
+          </a:bodyPr>
+          <a:lstStyle/>
+          <a:p>
+            <a:pPr algn="ctr">
+              <a:defRPr sz="1300" b="0">
+                <a:solidFill>
+                  <a:srgbClr val="0F172A"/>
+                </a:solidFill>
+                <a:latin typeface="Arial"/>
+              </a:defRPr>
+            </a:pPr>
+            <a:r>
+              <a:t>Nước Úc ở Nam bán cầu. Mùa hè Việt Nam là mùa đông ở Úc! Cần áo phao dày.</a:t>
+            </a:r>
+          </a:p>
+        </p:txBody>
+      </p:sp>
     </p:spTree>
   </p:cSld>
   <p:clrMapOvr>
     <a:masterClrMapping/>
   </p:clrMapOvr>
   <p:transition spd="med">
-    <p:cover/>
+    <p:fade/>
   </p:transition>
 </p:sld>
 </file>
@@ -4407,16 +4990,16 @@
       </p:sp>
       <p:sp>
         <p:nvSpPr>
-          <p:cNvPr id="3" name="Rectangle 2"/>
+          <p:cNvPr id="3" name="Rounded Rectangle 2"/>
           <p:cNvSpPr/>
           <p:nvPr/>
         </p:nvSpPr>
         <p:spPr>
           <a:xfrm>
-            <a:off x="0" y="1097280"/>
-            <a:ext cx="12188952" cy="411479"/>
-          </a:xfrm>
-          <a:prstGeom prst="rect">
+            <a:off x="365760" y="1143000"/>
+            <a:ext cx="2926080" cy="347471"/>
+          </a:xfrm>
+          <a:prstGeom prst="roundRect">
             <a:avLst/>
           </a:prstGeom>
           <a:solidFill>
@@ -4456,8 +5039,8 @@
         </p:nvSpPr>
         <p:spPr>
           <a:xfrm>
-            <a:off x="274320" y="1124712"/>
-            <a:ext cx="11640312" cy="365760"/>
+            <a:off x="365760" y="1143000"/>
+            <a:ext cx="2926080" cy="347471"/>
           </a:xfrm>
           <a:prstGeom prst="rect">
             <a:avLst/>
@@ -4465,20 +5048,21 @@
           <a:noFill/>
         </p:spPr>
         <p:txBody>
-          <a:bodyPr wrap="square">
+          <a:bodyPr wrap="square" lIns="73152" rIns="73152" tIns="54864" bIns="54864">
             <a:spAutoFit/>
           </a:bodyPr>
           <a:lstStyle/>
           <a:p>
-            <a:pPr algn="l"/>
-            <a:r>
-              <a:rPr sz="1300" b="1">
+            <a:pPr algn="ctr">
+              <a:defRPr sz="1300" b="1">
                 <a:solidFill>
                   <a:srgbClr val="FFFFFF"/>
                 </a:solidFill>
                 <a:latin typeface="Arial"/>
-              </a:rPr>
-              <a:t>  LỚP 5 • BÀI 3. TÌM KIẾM THÔNG TIN &amp; BÀI 4. CÂY THƯ MỤC</a:t>
+              </a:defRPr>
+            </a:pPr>
+            <a:r>
+              <a:t>QUY TRÌNH &amp; THAO TÁC</a:t>
             </a:r>
           </a:p>
         </p:txBody>
@@ -4491,8 +5075,8 @@
         </p:nvSpPr>
         <p:spPr>
           <a:xfrm>
-            <a:off x="457200" y="1600200"/>
-            <a:ext cx="11274552" cy="594360"/>
+            <a:off x="3474720" y="1115568"/>
+            <a:ext cx="8046720" cy="411479"/>
           </a:xfrm>
           <a:prstGeom prst="rect">
             <a:avLst/>
@@ -4500,45 +5084,44 @@
           <a:noFill/>
         </p:spPr>
         <p:txBody>
-          <a:bodyPr wrap="square">
+          <a:bodyPr wrap="square" lIns="73152" rIns="73152" tIns="54864" bIns="54864">
             <a:spAutoFit/>
           </a:bodyPr>
           <a:lstStyle/>
           <a:p>
-            <a:pPr algn="l"/>
-            <a:r>
-              <a:rPr sz="2600" b="1">
+            <a:pPr algn="l">
+              <a:defRPr sz="2100" b="1">
                 <a:solidFill>
                   <a:srgbClr val="831843"/>
                 </a:solidFill>
                 <a:latin typeface="Arial"/>
-              </a:rPr>
-              <a:t>Tiết 3: Kỹ thuật tìm kiếm thông tin hiệu quả</a:t>
-            </a:r>
-          </a:p>
-        </p:txBody>
-      </p:sp>
-      <p:sp>
-        <p:nvSpPr>
-          <p:cNvPr id="6" name="Rounded Rectangle 5"/>
+              </a:defRPr>
+            </a:pPr>
+            <a:r>
+              <a:t>Kỹ thuật sử dụng từ khóa tìm kiếm trên Internet</a:t>
+            </a:r>
+          </a:p>
+        </p:txBody>
+      </p:sp>
+      <p:sp>
+        <p:nvSpPr>
+          <p:cNvPr id="6" name="Chevron 5"/>
           <p:cNvSpPr/>
           <p:nvPr/>
         </p:nvSpPr>
         <p:spPr>
           <a:xfrm>
-            <a:off x="457200" y="2286000"/>
-            <a:ext cx="5477256" cy="1613915"/>
-          </a:xfrm>
-          <a:prstGeom prst="roundRect">
+            <a:off x="365760" y="1645920"/>
+            <a:ext cx="4754880" cy="868680"/>
+          </a:xfrm>
+          <a:prstGeom prst="chevron">
             <a:avLst/>
           </a:prstGeom>
           <a:solidFill>
-            <a:srgbClr val="FFFFFF"/>
+            <a:srgbClr val="BE185D"/>
           </a:solidFill>
-          <a:ln w="12700">
-            <a:solidFill>
-              <a:srgbClr val="EC4899"/>
-            </a:solidFill>
+          <a:ln>
+            <a:noFill/>
           </a:ln>
         </p:spPr>
         <p:style>
@@ -4565,16 +5148,52 @@
       </p:sp>
       <p:sp>
         <p:nvSpPr>
-          <p:cNvPr id="7" name="Rectangle 6"/>
+          <p:cNvPr id="7" name="TextBox 6"/>
+          <p:cNvSpPr txBox="1"/>
+          <p:nvPr/>
+        </p:nvSpPr>
+        <p:spPr>
+          <a:xfrm>
+            <a:off x="640080" y="1719072"/>
+            <a:ext cx="4206240" cy="731520"/>
+          </a:xfrm>
+          <a:prstGeom prst="rect">
+            <a:avLst/>
+          </a:prstGeom>
+          <a:noFill/>
+        </p:spPr>
+        <p:txBody>
+          <a:bodyPr wrap="square" lIns="73152" rIns="73152" tIns="54864" bIns="54864">
+            <a:spAutoFit/>
+          </a:bodyPr>
+          <a:lstStyle/>
+          <a:p>
+            <a:pPr algn="l">
+              <a:defRPr sz="1400" b="1">
+                <a:solidFill>
+                  <a:srgbClr val="FFFFFF"/>
+                </a:solidFill>
+                <a:latin typeface="Arial"/>
+              </a:defRPr>
+            </a:pPr>
+            <a:r>
+              <a:t>1. Chọn từ khóa ngắn gọn, chính xác (Keyword)</a:t>
+            </a:r>
+          </a:p>
+        </p:txBody>
+      </p:sp>
+      <p:sp>
+        <p:nvSpPr>
+          <p:cNvPr id="8" name="Chevron 7"/>
           <p:cNvSpPr/>
           <p:nvPr/>
         </p:nvSpPr>
         <p:spPr>
           <a:xfrm>
-            <a:off x="457200" y="2286000"/>
-            <a:ext cx="91440" cy="1613915"/>
-          </a:xfrm>
-          <a:prstGeom prst="rect">
+            <a:off x="365760" y="2624328"/>
+            <a:ext cx="4754880" cy="868680"/>
+          </a:xfrm>
+          <a:prstGeom prst="chevron">
             <a:avLst/>
           </a:prstGeom>
           <a:solidFill>
@@ -4606,9 +5225,248 @@
           </a:p>
         </p:txBody>
       </p:sp>
+      <p:sp>
+        <p:nvSpPr>
+          <p:cNvPr id="9" name="TextBox 8"/>
+          <p:cNvSpPr txBox="1"/>
+          <p:nvPr/>
+        </p:nvSpPr>
+        <p:spPr>
+          <a:xfrm>
+            <a:off x="640080" y="2697480"/>
+            <a:ext cx="4206240" cy="731519"/>
+          </a:xfrm>
+          <a:prstGeom prst="rect">
+            <a:avLst/>
+          </a:prstGeom>
+          <a:noFill/>
+        </p:spPr>
+        <p:txBody>
+          <a:bodyPr wrap="square" lIns="73152" rIns="73152" tIns="54864" bIns="54864">
+            <a:spAutoFit/>
+          </a:bodyPr>
+          <a:lstStyle/>
+          <a:p>
+            <a:pPr algn="l">
+              <a:defRPr sz="1400" b="1">
+                <a:solidFill>
+                  <a:srgbClr val="FFFFFF"/>
+                </a:solidFill>
+                <a:latin typeface="Arial"/>
+              </a:defRPr>
+            </a:pPr>
+            <a:r>
+              <a:t>2. Đặt từ khóa trong dấu ngoặc kép " " để tìm chuẩn xác</a:t>
+            </a:r>
+          </a:p>
+        </p:txBody>
+      </p:sp>
+      <p:sp>
+        <p:nvSpPr>
+          <p:cNvPr id="10" name="Chevron 9"/>
+          <p:cNvSpPr/>
+          <p:nvPr/>
+        </p:nvSpPr>
+        <p:spPr>
+          <a:xfrm>
+            <a:off x="365760" y="3602736"/>
+            <a:ext cx="4754880" cy="868679"/>
+          </a:xfrm>
+          <a:prstGeom prst="chevron">
+            <a:avLst/>
+          </a:prstGeom>
+          <a:solidFill>
+            <a:srgbClr val="0D9488"/>
+          </a:solidFill>
+          <a:ln>
+            <a:noFill/>
+          </a:ln>
+        </p:spPr>
+        <p:style>
+          <a:lnRef idx="1">
+            <a:schemeClr val="accent1"/>
+          </a:lnRef>
+          <a:fillRef idx="3">
+            <a:schemeClr val="accent1"/>
+          </a:fillRef>
+          <a:effectRef idx="2">
+            <a:schemeClr val="accent1"/>
+          </a:effectRef>
+          <a:fontRef idx="minor">
+            <a:schemeClr val="lt1"/>
+          </a:fontRef>
+        </p:style>
+        <p:txBody>
+          <a:bodyPr rtlCol="0" anchor="ctr"/>
+          <a:lstStyle/>
+          <a:p>
+            <a:pPr algn="ctr"/>
+          </a:p>
+        </p:txBody>
+      </p:sp>
+      <p:sp>
+        <p:nvSpPr>
+          <p:cNvPr id="11" name="TextBox 10"/>
+          <p:cNvSpPr txBox="1"/>
+          <p:nvPr/>
+        </p:nvSpPr>
+        <p:spPr>
+          <a:xfrm>
+            <a:off x="640080" y="3675887"/>
+            <a:ext cx="4206240" cy="731519"/>
+          </a:xfrm>
+          <a:prstGeom prst="rect">
+            <a:avLst/>
+          </a:prstGeom>
+          <a:noFill/>
+        </p:spPr>
+        <p:txBody>
+          <a:bodyPr wrap="square" lIns="73152" rIns="73152" tIns="54864" bIns="54864">
+            <a:spAutoFit/>
+          </a:bodyPr>
+          <a:lstStyle/>
+          <a:p>
+            <a:pPr algn="l">
+              <a:defRPr sz="1400" b="1">
+                <a:solidFill>
+                  <a:srgbClr val="FFFFFF"/>
+                </a:solidFill>
+                <a:latin typeface="Arial"/>
+              </a:defRPr>
+            </a:pPr>
+            <a:r>
+              <a:t>3. Chọn lọc từ website tin cậy (.gov.vn, .edu.vn)</a:t>
+            </a:r>
+          </a:p>
+        </p:txBody>
+      </p:sp>
+      <p:sp>
+        <p:nvSpPr>
+          <p:cNvPr id="12" name="Chevron 11"/>
+          <p:cNvSpPr/>
+          <p:nvPr/>
+        </p:nvSpPr>
+        <p:spPr>
+          <a:xfrm>
+            <a:off x="365760" y="4581144"/>
+            <a:ext cx="4754880" cy="868680"/>
+          </a:xfrm>
+          <a:prstGeom prst="chevron">
+            <a:avLst/>
+          </a:prstGeom>
+          <a:solidFill>
+            <a:srgbClr val="D97706"/>
+          </a:solidFill>
+          <a:ln>
+            <a:noFill/>
+          </a:ln>
+        </p:spPr>
+        <p:style>
+          <a:lnRef idx="1">
+            <a:schemeClr val="accent1"/>
+          </a:lnRef>
+          <a:fillRef idx="3">
+            <a:schemeClr val="accent1"/>
+          </a:fillRef>
+          <a:effectRef idx="2">
+            <a:schemeClr val="accent1"/>
+          </a:effectRef>
+          <a:fontRef idx="minor">
+            <a:schemeClr val="lt1"/>
+          </a:fontRef>
+        </p:style>
+        <p:txBody>
+          <a:bodyPr rtlCol="0" anchor="ctr"/>
+          <a:lstStyle/>
+          <a:p>
+            <a:pPr algn="ctr"/>
+          </a:p>
+        </p:txBody>
+      </p:sp>
+      <p:sp>
+        <p:nvSpPr>
+          <p:cNvPr id="13" name="TextBox 12"/>
+          <p:cNvSpPr txBox="1"/>
+          <p:nvPr/>
+        </p:nvSpPr>
+        <p:spPr>
+          <a:xfrm>
+            <a:off x="640080" y="4654296"/>
+            <a:ext cx="4206240" cy="731519"/>
+          </a:xfrm>
+          <a:prstGeom prst="rect">
+            <a:avLst/>
+          </a:prstGeom>
+          <a:noFill/>
+        </p:spPr>
+        <p:txBody>
+          <a:bodyPr wrap="square" lIns="73152" rIns="73152" tIns="54864" bIns="54864">
+            <a:spAutoFit/>
+          </a:bodyPr>
+          <a:lstStyle/>
+          <a:p>
+            <a:pPr algn="l">
+              <a:defRPr sz="1400" b="1">
+                <a:solidFill>
+                  <a:srgbClr val="FFFFFF"/>
+                </a:solidFill>
+                <a:latin typeface="Arial"/>
+              </a:defRPr>
+            </a:pPr>
+            <a:r>
+              <a:t>4. Đánh giá và tổng hợp thông tin trước khi áp dụng</a:t>
+            </a:r>
+          </a:p>
+        </p:txBody>
+      </p:sp>
+      <p:sp>
+        <p:nvSpPr>
+          <p:cNvPr id="14" name="Rounded Rectangle 13"/>
+          <p:cNvSpPr/>
+          <p:nvPr/>
+        </p:nvSpPr>
+        <p:spPr>
+          <a:xfrm>
+            <a:off x="5394960" y="1645920"/>
+            <a:ext cx="6309360" cy="3977639"/>
+          </a:xfrm>
+          <a:prstGeom prst="roundRect">
+            <a:avLst/>
+          </a:prstGeom>
+          <a:solidFill>
+            <a:srgbClr val="FFFFFF"/>
+          </a:solidFill>
+          <a:ln w="19050">
+            <a:solidFill>
+              <a:srgbClr val="CBD5E1"/>
+            </a:solidFill>
+          </a:ln>
+        </p:spPr>
+        <p:style>
+          <a:lnRef idx="1">
+            <a:schemeClr val="accent1"/>
+          </a:lnRef>
+          <a:fillRef idx="3">
+            <a:schemeClr val="accent1"/>
+          </a:fillRef>
+          <a:effectRef idx="2">
+            <a:schemeClr val="accent1"/>
+          </a:effectRef>
+          <a:fontRef idx="minor">
+            <a:schemeClr val="lt1"/>
+          </a:fontRef>
+        </p:style>
+        <p:txBody>
+          <a:bodyPr rtlCol="0" anchor="ctr"/>
+          <a:lstStyle/>
+          <a:p>
+            <a:pPr algn="ctr"/>
+          </a:p>
+        </p:txBody>
+      </p:sp>
       <p:pic>
         <p:nvPicPr>
-          <p:cNvPr id="8" name="Picture 7" descr="learn1_card1.png"/>
+          <p:cNvPr id="15" name="Picture 14" descr="sgk_lop5_bai3_thuc_hanh_search.png"/>
           <p:cNvPicPr>
             <a:picLocks noChangeAspect="1"/>
           </p:cNvPicPr>
@@ -4622,497 +5480,21 @@
         </p:blipFill>
         <p:spPr>
           <a:xfrm>
-            <a:off x="640080" y="2395728"/>
-            <a:ext cx="2194560" cy="1394459"/>
+            <a:off x="5486400" y="1737360"/>
+            <a:ext cx="6126480" cy="3794760"/>
           </a:xfrm>
           <a:prstGeom prst="rect">
             <a:avLst/>
           </a:prstGeom>
         </p:spPr>
       </p:pic>
-      <p:sp>
-        <p:nvSpPr>
-          <p:cNvPr id="9" name="TextBox 8"/>
-          <p:cNvSpPr txBox="1"/>
-          <p:nvPr/>
-        </p:nvSpPr>
-        <p:spPr>
-          <a:xfrm>
-            <a:off x="3017520" y="2423160"/>
-            <a:ext cx="2825496" cy="1339595"/>
-          </a:xfrm>
-          <a:prstGeom prst="rect">
-            <a:avLst/>
-          </a:prstGeom>
-          <a:noFill/>
-        </p:spPr>
-        <p:txBody>
-          <a:bodyPr wrap="square">
-            <a:spAutoFit/>
-          </a:bodyPr>
-          <a:lstStyle/>
-          <a:p>
-            <a:pPr algn="l"/>
-            <a:r>
-              <a:rPr sz="1800" b="1">
-                <a:solidFill>
-                  <a:srgbClr val="0F172A"/>
-                </a:solidFill>
-                <a:latin typeface="Arial"/>
-              </a:rPr>
-              <a:t>Sử dụng từ khóa ngắn gọn, chính xác (Keyword)</a:t>
-            </a:r>
-          </a:p>
-        </p:txBody>
-      </p:sp>
-      <p:sp>
-        <p:nvSpPr>
-          <p:cNvPr id="10" name="Rounded Rectangle 9"/>
-          <p:cNvSpPr/>
-          <p:nvPr/>
-        </p:nvSpPr>
-        <p:spPr>
-          <a:xfrm>
-            <a:off x="6254496" y="2286000"/>
-            <a:ext cx="5477256" cy="1613915"/>
-          </a:xfrm>
-          <a:prstGeom prst="roundRect">
-            <a:avLst/>
-          </a:prstGeom>
-          <a:solidFill>
-            <a:srgbClr val="FFFFFF"/>
-          </a:solidFill>
-          <a:ln w="12700">
-            <a:solidFill>
-              <a:srgbClr val="EC4899"/>
-            </a:solidFill>
-          </a:ln>
-        </p:spPr>
-        <p:style>
-          <a:lnRef idx="1">
-            <a:schemeClr val="accent1"/>
-          </a:lnRef>
-          <a:fillRef idx="3">
-            <a:schemeClr val="accent1"/>
-          </a:fillRef>
-          <a:effectRef idx="2">
-            <a:schemeClr val="accent1"/>
-          </a:effectRef>
-          <a:fontRef idx="minor">
-            <a:schemeClr val="lt1"/>
-          </a:fontRef>
-        </p:style>
-        <p:txBody>
-          <a:bodyPr rtlCol="0" anchor="ctr"/>
-          <a:lstStyle/>
-          <a:p>
-            <a:pPr algn="ctr"/>
-          </a:p>
-        </p:txBody>
-      </p:sp>
-      <p:sp>
-        <p:nvSpPr>
-          <p:cNvPr id="11" name="Rectangle 10"/>
-          <p:cNvSpPr/>
-          <p:nvPr/>
-        </p:nvSpPr>
-        <p:spPr>
-          <a:xfrm>
-            <a:off x="6254496" y="2286000"/>
-            <a:ext cx="91440" cy="1613915"/>
-          </a:xfrm>
-          <a:prstGeom prst="rect">
-            <a:avLst/>
-          </a:prstGeom>
-          <a:solidFill>
-            <a:srgbClr val="EC4899"/>
-          </a:solidFill>
-          <a:ln>
-            <a:noFill/>
-          </a:ln>
-        </p:spPr>
-        <p:style>
-          <a:lnRef idx="1">
-            <a:schemeClr val="accent1"/>
-          </a:lnRef>
-          <a:fillRef idx="3">
-            <a:schemeClr val="accent1"/>
-          </a:fillRef>
-          <a:effectRef idx="2">
-            <a:schemeClr val="accent1"/>
-          </a:effectRef>
-          <a:fontRef idx="minor">
-            <a:schemeClr val="lt1"/>
-          </a:fontRef>
-        </p:style>
-        <p:txBody>
-          <a:bodyPr rtlCol="0" anchor="ctr"/>
-          <a:lstStyle/>
-          <a:p>
-            <a:pPr algn="ctr"/>
-          </a:p>
-        </p:txBody>
-      </p:sp>
-      <p:pic>
-        <p:nvPicPr>
-          <p:cNvPr id="12" name="Picture 11" descr="learn1_card2.png"/>
-          <p:cNvPicPr>
-            <a:picLocks noChangeAspect="1"/>
-          </p:cNvPicPr>
-          <p:nvPr/>
-        </p:nvPicPr>
-        <p:blipFill>
-          <a:blip r:embed="rId3"/>
-          <a:stretch>
-            <a:fillRect/>
-          </a:stretch>
-        </p:blipFill>
-        <p:spPr>
-          <a:xfrm>
-            <a:off x="6437376" y="2395728"/>
-            <a:ext cx="2194560" cy="1394459"/>
-          </a:xfrm>
-          <a:prstGeom prst="rect">
-            <a:avLst/>
-          </a:prstGeom>
-        </p:spPr>
-      </p:pic>
-      <p:sp>
-        <p:nvSpPr>
-          <p:cNvPr id="13" name="TextBox 12"/>
-          <p:cNvSpPr txBox="1"/>
-          <p:nvPr/>
-        </p:nvSpPr>
-        <p:spPr>
-          <a:xfrm>
-            <a:off x="8814815" y="2423160"/>
-            <a:ext cx="2825496" cy="1339595"/>
-          </a:xfrm>
-          <a:prstGeom prst="rect">
-            <a:avLst/>
-          </a:prstGeom>
-          <a:noFill/>
-        </p:spPr>
-        <p:txBody>
-          <a:bodyPr wrap="square">
-            <a:spAutoFit/>
-          </a:bodyPr>
-          <a:lstStyle/>
-          <a:p>
-            <a:pPr algn="l"/>
-            <a:r>
-              <a:rPr sz="1800" b="1">
-                <a:solidFill>
-                  <a:srgbClr val="0F172A"/>
-                </a:solidFill>
-                <a:latin typeface="Arial"/>
-              </a:rPr>
-              <a:t>Đặt từ khóa trong dấu ngoặc kép " " để tìm chính xác</a:t>
-            </a:r>
-          </a:p>
-        </p:txBody>
-      </p:sp>
-      <p:sp>
-        <p:nvSpPr>
-          <p:cNvPr id="14" name="Rounded Rectangle 13"/>
-          <p:cNvSpPr/>
-          <p:nvPr/>
-        </p:nvSpPr>
-        <p:spPr>
-          <a:xfrm>
-            <a:off x="457200" y="4101083"/>
-            <a:ext cx="5477256" cy="1613915"/>
-          </a:xfrm>
-          <a:prstGeom prst="roundRect">
-            <a:avLst/>
-          </a:prstGeom>
-          <a:solidFill>
-            <a:srgbClr val="FFFFFF"/>
-          </a:solidFill>
-          <a:ln w="12700">
-            <a:solidFill>
-              <a:srgbClr val="EC4899"/>
-            </a:solidFill>
-          </a:ln>
-        </p:spPr>
-        <p:style>
-          <a:lnRef idx="1">
-            <a:schemeClr val="accent1"/>
-          </a:lnRef>
-          <a:fillRef idx="3">
-            <a:schemeClr val="accent1"/>
-          </a:fillRef>
-          <a:effectRef idx="2">
-            <a:schemeClr val="accent1"/>
-          </a:effectRef>
-          <a:fontRef idx="minor">
-            <a:schemeClr val="lt1"/>
-          </a:fontRef>
-        </p:style>
-        <p:txBody>
-          <a:bodyPr rtlCol="0" anchor="ctr"/>
-          <a:lstStyle/>
-          <a:p>
-            <a:pPr algn="ctr"/>
-          </a:p>
-        </p:txBody>
-      </p:sp>
-      <p:sp>
-        <p:nvSpPr>
-          <p:cNvPr id="15" name="Rectangle 14"/>
-          <p:cNvSpPr/>
-          <p:nvPr/>
-        </p:nvSpPr>
-        <p:spPr>
-          <a:xfrm>
-            <a:off x="457200" y="4101083"/>
-            <a:ext cx="91440" cy="1613915"/>
-          </a:xfrm>
-          <a:prstGeom prst="rect">
-            <a:avLst/>
-          </a:prstGeom>
-          <a:solidFill>
-            <a:srgbClr val="EC4899"/>
-          </a:solidFill>
-          <a:ln>
-            <a:noFill/>
-          </a:ln>
-        </p:spPr>
-        <p:style>
-          <a:lnRef idx="1">
-            <a:schemeClr val="accent1"/>
-          </a:lnRef>
-          <a:fillRef idx="3">
-            <a:schemeClr val="accent1"/>
-          </a:fillRef>
-          <a:effectRef idx="2">
-            <a:schemeClr val="accent1"/>
-          </a:effectRef>
-          <a:fontRef idx="minor">
-            <a:schemeClr val="lt1"/>
-          </a:fontRef>
-        </p:style>
-        <p:txBody>
-          <a:bodyPr rtlCol="0" anchor="ctr"/>
-          <a:lstStyle/>
-          <a:p>
-            <a:pPr algn="ctr"/>
-          </a:p>
-        </p:txBody>
-      </p:sp>
-      <p:pic>
-        <p:nvPicPr>
-          <p:cNvPr id="16" name="Picture 15" descr="learn1_card3.png"/>
-          <p:cNvPicPr>
-            <a:picLocks noChangeAspect="1"/>
-          </p:cNvPicPr>
-          <p:nvPr/>
-        </p:nvPicPr>
-        <p:blipFill>
-          <a:blip r:embed="rId4"/>
-          <a:stretch>
-            <a:fillRect/>
-          </a:stretch>
-        </p:blipFill>
-        <p:spPr>
-          <a:xfrm>
-            <a:off x="640080" y="4210812"/>
-            <a:ext cx="2194560" cy="1394459"/>
-          </a:xfrm>
-          <a:prstGeom prst="rect">
-            <a:avLst/>
-          </a:prstGeom>
-        </p:spPr>
-      </p:pic>
-      <p:sp>
-        <p:nvSpPr>
-          <p:cNvPr id="17" name="TextBox 16"/>
-          <p:cNvSpPr txBox="1"/>
-          <p:nvPr/>
-        </p:nvSpPr>
-        <p:spPr>
-          <a:xfrm>
-            <a:off x="3017520" y="4238244"/>
-            <a:ext cx="2825496" cy="1339595"/>
-          </a:xfrm>
-          <a:prstGeom prst="rect">
-            <a:avLst/>
-          </a:prstGeom>
-          <a:noFill/>
-        </p:spPr>
-        <p:txBody>
-          <a:bodyPr wrap="square">
-            <a:spAutoFit/>
-          </a:bodyPr>
-          <a:lstStyle/>
-          <a:p>
-            <a:pPr algn="l"/>
-            <a:r>
-              <a:rPr sz="1800" b="1">
-                <a:solidFill>
-                  <a:srgbClr val="0F172A"/>
-                </a:solidFill>
-                <a:latin typeface="Arial"/>
-              </a:rPr>
-              <a:t>Chọn lọc thông tin từ các website uy tín (.gov, .edu)</a:t>
-            </a:r>
-          </a:p>
-        </p:txBody>
-      </p:sp>
-      <p:sp>
-        <p:nvSpPr>
-          <p:cNvPr id="18" name="Rounded Rectangle 17"/>
-          <p:cNvSpPr/>
-          <p:nvPr/>
-        </p:nvSpPr>
-        <p:spPr>
-          <a:xfrm>
-            <a:off x="6254496" y="4101083"/>
-            <a:ext cx="5477256" cy="1613915"/>
-          </a:xfrm>
-          <a:prstGeom prst="roundRect">
-            <a:avLst/>
-          </a:prstGeom>
-          <a:solidFill>
-            <a:srgbClr val="FFFFFF"/>
-          </a:solidFill>
-          <a:ln w="12700">
-            <a:solidFill>
-              <a:srgbClr val="EC4899"/>
-            </a:solidFill>
-          </a:ln>
-        </p:spPr>
-        <p:style>
-          <a:lnRef idx="1">
-            <a:schemeClr val="accent1"/>
-          </a:lnRef>
-          <a:fillRef idx="3">
-            <a:schemeClr val="accent1"/>
-          </a:fillRef>
-          <a:effectRef idx="2">
-            <a:schemeClr val="accent1"/>
-          </a:effectRef>
-          <a:fontRef idx="minor">
-            <a:schemeClr val="lt1"/>
-          </a:fontRef>
-        </p:style>
-        <p:txBody>
-          <a:bodyPr rtlCol="0" anchor="ctr"/>
-          <a:lstStyle/>
-          <a:p>
-            <a:pPr algn="ctr"/>
-          </a:p>
-        </p:txBody>
-      </p:sp>
-      <p:sp>
-        <p:nvSpPr>
-          <p:cNvPr id="19" name="Rectangle 18"/>
-          <p:cNvSpPr/>
-          <p:nvPr/>
-        </p:nvSpPr>
-        <p:spPr>
-          <a:xfrm>
-            <a:off x="6254496" y="4101083"/>
-            <a:ext cx="91440" cy="1613915"/>
-          </a:xfrm>
-          <a:prstGeom prst="rect">
-            <a:avLst/>
-          </a:prstGeom>
-          <a:solidFill>
-            <a:srgbClr val="EC4899"/>
-          </a:solidFill>
-          <a:ln>
-            <a:noFill/>
-          </a:ln>
-        </p:spPr>
-        <p:style>
-          <a:lnRef idx="1">
-            <a:schemeClr val="accent1"/>
-          </a:lnRef>
-          <a:fillRef idx="3">
-            <a:schemeClr val="accent1"/>
-          </a:fillRef>
-          <a:effectRef idx="2">
-            <a:schemeClr val="accent1"/>
-          </a:effectRef>
-          <a:fontRef idx="minor">
-            <a:schemeClr val="lt1"/>
-          </a:fontRef>
-        </p:style>
-        <p:txBody>
-          <a:bodyPr rtlCol="0" anchor="ctr"/>
-          <a:lstStyle/>
-          <a:p>
-            <a:pPr algn="ctr"/>
-          </a:p>
-        </p:txBody>
-      </p:sp>
-      <p:pic>
-        <p:nvPicPr>
-          <p:cNvPr id="20" name="Picture 19" descr="learn1_card4.png"/>
-          <p:cNvPicPr>
-            <a:picLocks noChangeAspect="1"/>
-          </p:cNvPicPr>
-          <p:nvPr/>
-        </p:nvPicPr>
-        <p:blipFill>
-          <a:blip r:embed="rId5"/>
-          <a:stretch>
-            <a:fillRect/>
-          </a:stretch>
-        </p:blipFill>
-        <p:spPr>
-          <a:xfrm>
-            <a:off x="6437376" y="4210812"/>
-            <a:ext cx="2194560" cy="1394459"/>
-          </a:xfrm>
-          <a:prstGeom prst="rect">
-            <a:avLst/>
-          </a:prstGeom>
-        </p:spPr>
-      </p:pic>
-      <p:sp>
-        <p:nvSpPr>
-          <p:cNvPr id="21" name="TextBox 20"/>
-          <p:cNvSpPr txBox="1"/>
-          <p:nvPr/>
-        </p:nvSpPr>
-        <p:spPr>
-          <a:xfrm>
-            <a:off x="8814815" y="4238244"/>
-            <a:ext cx="2825496" cy="1339595"/>
-          </a:xfrm>
-          <a:prstGeom prst="rect">
-            <a:avLst/>
-          </a:prstGeom>
-          <a:noFill/>
-        </p:spPr>
-        <p:txBody>
-          <a:bodyPr wrap="square">
-            <a:spAutoFit/>
-          </a:bodyPr>
-          <a:lstStyle/>
-          <a:p>
-            <a:pPr algn="l"/>
-            <a:r>
-              <a:rPr sz="1800" b="1">
-                <a:solidFill>
-                  <a:srgbClr val="0F172A"/>
-                </a:solidFill>
-                <a:latin typeface="Arial"/>
-              </a:rPr>
-              <a:t>Đánh giá và kiểm chứng độ chính xác của thông tin</a:t>
-            </a:r>
-          </a:p>
-        </p:txBody>
-      </p:sp>
     </p:spTree>
   </p:cSld>
   <p:clrMapOvr>
     <a:masterClrMapping/>
   </p:clrMapOvr>
   <p:transition spd="med">
-    <p:wipe/>
+    <p:fade/>
   </p:transition>
 </p:sld>
 </file>
@@ -5172,16 +5554,16 @@
       </p:sp>
       <p:sp>
         <p:nvSpPr>
-          <p:cNvPr id="3" name="Rectangle 2"/>
+          <p:cNvPr id="3" name="Rounded Rectangle 2"/>
           <p:cNvSpPr/>
           <p:nvPr/>
         </p:nvSpPr>
         <p:spPr>
           <a:xfrm>
-            <a:off x="0" y="1097280"/>
-            <a:ext cx="12188952" cy="411479"/>
-          </a:xfrm>
-          <a:prstGeom prst="rect">
+            <a:off x="1371600" y="1645920"/>
+            <a:ext cx="9445752" cy="3474720"/>
+          </a:xfrm>
+          <a:prstGeom prst="roundRect">
             <a:avLst/>
           </a:prstGeom>
           <a:solidFill>
@@ -5215,131 +5597,16 @@
       </p:sp>
       <p:sp>
         <p:nvSpPr>
-          <p:cNvPr id="4" name="TextBox 3"/>
-          <p:cNvSpPr txBox="1"/>
-          <p:nvPr/>
-        </p:nvSpPr>
-        <p:spPr>
-          <a:xfrm>
-            <a:off x="274320" y="1124712"/>
-            <a:ext cx="11640312" cy="365760"/>
-          </a:xfrm>
-          <a:prstGeom prst="rect">
-            <a:avLst/>
-          </a:prstGeom>
-          <a:noFill/>
-        </p:spPr>
-        <p:txBody>
-          <a:bodyPr wrap="square">
-            <a:spAutoFit/>
-          </a:bodyPr>
-          <a:lstStyle/>
-          <a:p>
-            <a:pPr algn="l"/>
-            <a:r>
-              <a:rPr sz="1300" b="1">
-                <a:solidFill>
-                  <a:srgbClr val="FFFFFF"/>
-                </a:solidFill>
-                <a:latin typeface="Arial"/>
-              </a:rPr>
-              <a:t>  LỚP 5 • BÀI 3. TÌM KIẾM THÔNG TIN &amp; BÀI 4. CÂY THƯ MỤC</a:t>
-            </a:r>
-          </a:p>
-        </p:txBody>
-      </p:sp>
-      <p:sp>
-        <p:nvSpPr>
-          <p:cNvPr id="5" name="TextBox 4"/>
-          <p:cNvSpPr txBox="1"/>
-          <p:nvPr/>
-        </p:nvSpPr>
-        <p:spPr>
-          <a:xfrm>
-            <a:off x="457200" y="1600200"/>
-            <a:ext cx="11274552" cy="594360"/>
-          </a:xfrm>
-          <a:prstGeom prst="rect">
-            <a:avLst/>
-          </a:prstGeom>
-          <a:noFill/>
-        </p:spPr>
-        <p:txBody>
-          <a:bodyPr wrap="square">
-            <a:spAutoFit/>
-          </a:bodyPr>
-          <a:lstStyle/>
-          <a:p>
-            <a:pPr algn="l"/>
-            <a:r>
-              <a:rPr sz="2600" b="1">
-                <a:solidFill>
-                  <a:srgbClr val="831843"/>
-                </a:solidFill>
-                <a:latin typeface="Arial"/>
-              </a:rPr>
-              <a:t>Tiết 4: Cấu trúc Cây thư mục (Folder Tree)</a:t>
-            </a:r>
-          </a:p>
-        </p:txBody>
-      </p:sp>
-      <p:sp>
-        <p:nvSpPr>
-          <p:cNvPr id="6" name="Rounded Rectangle 5"/>
+          <p:cNvPr id="4" name="Rounded Rectangle 3"/>
           <p:cNvSpPr/>
           <p:nvPr/>
         </p:nvSpPr>
         <p:spPr>
           <a:xfrm>
-            <a:off x="457200" y="2286000"/>
-            <a:ext cx="5477256" cy="1613915"/>
+            <a:off x="1371600" y="1645920"/>
+            <a:ext cx="365760" cy="3474720"/>
           </a:xfrm>
           <a:prstGeom prst="roundRect">
-            <a:avLst/>
-          </a:prstGeom>
-          <a:solidFill>
-            <a:srgbClr val="FFFFFF"/>
-          </a:solidFill>
-          <a:ln w="12700">
-            <a:solidFill>
-              <a:srgbClr val="EC4899"/>
-            </a:solidFill>
-          </a:ln>
-        </p:spPr>
-        <p:style>
-          <a:lnRef idx="1">
-            <a:schemeClr val="accent1"/>
-          </a:lnRef>
-          <a:fillRef idx="3">
-            <a:schemeClr val="accent1"/>
-          </a:fillRef>
-          <a:effectRef idx="2">
-            <a:schemeClr val="accent1"/>
-          </a:effectRef>
-          <a:fontRef idx="minor">
-            <a:schemeClr val="lt1"/>
-          </a:fontRef>
-        </p:style>
-        <p:txBody>
-          <a:bodyPr rtlCol="0" anchor="ctr"/>
-          <a:lstStyle/>
-          <a:p>
-            <a:pPr algn="ctr"/>
-          </a:p>
-        </p:txBody>
-      </p:sp>
-      <p:sp>
-        <p:nvSpPr>
-          <p:cNvPr id="7" name="Rectangle 6"/>
-          <p:cNvSpPr/>
-          <p:nvPr/>
-        </p:nvSpPr>
-        <p:spPr>
-          <a:xfrm>
-            <a:off x="457200" y="2286000"/>
-            <a:ext cx="91440" cy="1613915"/>
-          </a:xfrm>
-          <a:prstGeom prst="rect">
             <a:avLst/>
           </a:prstGeom>
           <a:solidFill>
@@ -5371,502 +5638,110 @@
           </a:p>
         </p:txBody>
       </p:sp>
-      <p:pic>
-        <p:nvPicPr>
-          <p:cNvPr id="8" name="Picture 7" descr="learn2_card1.png"/>
-          <p:cNvPicPr>
-            <a:picLocks noChangeAspect="1"/>
-          </p:cNvPicPr>
-          <p:nvPr/>
-        </p:nvPicPr>
-        <p:blipFill>
-          <a:blip r:embed="rId2"/>
-          <a:stretch>
-            <a:fillRect/>
-          </a:stretch>
-        </p:blipFill>
-        <p:spPr>
-          <a:xfrm>
-            <a:off x="640080" y="2395728"/>
-            <a:ext cx="2194560" cy="1394459"/>
+      <p:sp>
+        <p:nvSpPr>
+          <p:cNvPr id="5" name="TextBox 4"/>
+          <p:cNvSpPr txBox="1"/>
+          <p:nvPr/>
+        </p:nvSpPr>
+        <p:spPr>
+          <a:xfrm>
+            <a:off x="2103120" y="2011680"/>
+            <a:ext cx="8046720" cy="548640"/>
           </a:xfrm>
           <a:prstGeom prst="rect">
             <a:avLst/>
           </a:prstGeom>
-        </p:spPr>
-      </p:pic>
-      <p:sp>
-        <p:nvSpPr>
-          <p:cNvPr id="9" name="TextBox 8"/>
-          <p:cNvSpPr txBox="1"/>
-          <p:nvPr/>
-        </p:nvSpPr>
-        <p:spPr>
-          <a:xfrm>
-            <a:off x="3017520" y="2423160"/>
-            <a:ext cx="2825496" cy="1339595"/>
-          </a:xfrm>
-          <a:prstGeom prst="rect">
-            <a:avLst/>
-          </a:prstGeom>
           <a:noFill/>
         </p:spPr>
         <p:txBody>
-          <a:bodyPr wrap="square">
+          <a:bodyPr wrap="square" lIns="73152" rIns="73152" tIns="54864" bIns="54864">
             <a:spAutoFit/>
           </a:bodyPr>
           <a:lstStyle/>
           <a:p>
-            <a:pPr algn="l"/>
-            <a:r>
-              <a:rPr sz="1800" b="1">
+            <a:pPr algn="l">
+              <a:defRPr sz="1600" b="1">
                 <a:solidFill>
-                  <a:srgbClr val="0F172A"/>
+                  <a:srgbClr val="FEF08A"/>
                 </a:solidFill>
                 <a:latin typeface="Arial"/>
-              </a:rPr>
-              <a:t>Thư mục gốc (Root folder): ổ đĩa C:, D:, E:</a:t>
-            </a:r>
-          </a:p>
-        </p:txBody>
-      </p:sp>
-      <p:sp>
-        <p:nvSpPr>
-          <p:cNvPr id="10" name="Rounded Rectangle 9"/>
-          <p:cNvSpPr/>
-          <p:nvPr/>
-        </p:nvSpPr>
-        <p:spPr>
-          <a:xfrm>
-            <a:off x="6254496" y="2286000"/>
-            <a:ext cx="5477256" cy="1613915"/>
-          </a:xfrm>
-          <a:prstGeom prst="roundRect">
-            <a:avLst/>
-          </a:prstGeom>
-          <a:solidFill>
-            <a:srgbClr val="FFFFFF"/>
-          </a:solidFill>
-          <a:ln w="12700">
-            <a:solidFill>
-              <a:srgbClr val="EC4899"/>
-            </a:solidFill>
-          </a:ln>
-        </p:spPr>
-        <p:style>
-          <a:lnRef idx="1">
-            <a:schemeClr val="accent1"/>
-          </a:lnRef>
-          <a:fillRef idx="3">
-            <a:schemeClr val="accent1"/>
-          </a:fillRef>
-          <a:effectRef idx="2">
-            <a:schemeClr val="accent1"/>
-          </a:effectRef>
-          <a:fontRef idx="minor">
-            <a:schemeClr val="lt1"/>
-          </a:fontRef>
-        </p:style>
-        <p:txBody>
-          <a:bodyPr rtlCol="0" anchor="ctr"/>
-          <a:lstStyle/>
-          <a:p>
-            <a:pPr algn="ctr"/>
-          </a:p>
-        </p:txBody>
-      </p:sp>
-      <p:sp>
-        <p:nvSpPr>
-          <p:cNvPr id="11" name="Rectangle 10"/>
-          <p:cNvSpPr/>
-          <p:nvPr/>
-        </p:nvSpPr>
-        <p:spPr>
-          <a:xfrm>
-            <a:off x="6254496" y="2286000"/>
-            <a:ext cx="91440" cy="1613915"/>
+              </a:defRPr>
+            </a:pPr>
+            <a:r>
+              <a:t>KHÁM PHÁ KIẾN THỨC MỚI</a:t>
+            </a:r>
+          </a:p>
+        </p:txBody>
+      </p:sp>
+      <p:sp>
+        <p:nvSpPr>
+          <p:cNvPr id="6" name="TextBox 5"/>
+          <p:cNvSpPr txBox="1"/>
+          <p:nvPr/>
+        </p:nvSpPr>
+        <p:spPr>
+          <a:xfrm>
+            <a:off x="2103120" y="2651760"/>
+            <a:ext cx="8046720" cy="1371600"/>
           </a:xfrm>
           <a:prstGeom prst="rect">
             <a:avLst/>
           </a:prstGeom>
-          <a:solidFill>
-            <a:srgbClr val="EC4899"/>
-          </a:solidFill>
-          <a:ln>
-            <a:noFill/>
-          </a:ln>
-        </p:spPr>
-        <p:style>
-          <a:lnRef idx="1">
-            <a:schemeClr val="accent1"/>
-          </a:lnRef>
-          <a:fillRef idx="3">
-            <a:schemeClr val="accent1"/>
-          </a:fillRef>
-          <a:effectRef idx="2">
-            <a:schemeClr val="accent1"/>
-          </a:effectRef>
-          <a:fontRef idx="minor">
-            <a:schemeClr val="lt1"/>
-          </a:fontRef>
-        </p:style>
-        <p:txBody>
-          <a:bodyPr rtlCol="0" anchor="ctr"/>
-          <a:lstStyle/>
-          <a:p>
-            <a:pPr algn="ctr"/>
-          </a:p>
-        </p:txBody>
-      </p:sp>
-      <p:pic>
-        <p:nvPicPr>
-          <p:cNvPr id="12" name="Picture 11" descr="learn2_card2.png"/>
-          <p:cNvPicPr>
-            <a:picLocks noChangeAspect="1"/>
-          </p:cNvPicPr>
-          <p:nvPr/>
-        </p:nvPicPr>
-        <p:blipFill>
-          <a:blip r:embed="rId3"/>
-          <a:stretch>
-            <a:fillRect/>
-          </a:stretch>
-        </p:blipFill>
-        <p:spPr>
-          <a:xfrm>
-            <a:off x="6437376" y="2395728"/>
-            <a:ext cx="2194560" cy="1394459"/>
-          </a:xfrm>
-          <a:prstGeom prst="rect">
-            <a:avLst/>
-          </a:prstGeom>
-        </p:spPr>
-      </p:pic>
-      <p:sp>
-        <p:nvSpPr>
-          <p:cNvPr id="13" name="TextBox 12"/>
-          <p:cNvSpPr txBox="1"/>
-          <p:nvPr/>
-        </p:nvSpPr>
-        <p:spPr>
-          <a:xfrm>
-            <a:off x="8814815" y="2423160"/>
-            <a:ext cx="2825496" cy="1339595"/>
-          </a:xfrm>
-          <a:prstGeom prst="rect">
-            <a:avLst/>
-          </a:prstGeom>
           <a:noFill/>
         </p:spPr>
         <p:txBody>
-          <a:bodyPr wrap="square">
+          <a:bodyPr wrap="square" lIns="73152" rIns="73152" tIns="54864" bIns="54864">
             <a:spAutoFit/>
           </a:bodyPr>
           <a:lstStyle/>
           <a:p>
-            <a:pPr algn="l"/>
-            <a:r>
-              <a:rPr sz="1800" b="1">
+            <a:pPr algn="l">
+              <a:defRPr sz="2600" b="1">
                 <a:solidFill>
-                  <a:srgbClr val="0F172A"/>
+                  <a:srgbClr val="FFFFFF"/>
                 </a:solidFill>
                 <a:latin typeface="Arial"/>
-              </a:rPr>
-              <a:t>Thư mục mẹ và thư mục con (Subfolder)</a:t>
-            </a:r>
-          </a:p>
-        </p:txBody>
-      </p:sp>
-      <p:sp>
-        <p:nvSpPr>
-          <p:cNvPr id="14" name="Rounded Rectangle 13"/>
-          <p:cNvSpPr/>
-          <p:nvPr/>
-        </p:nvSpPr>
-        <p:spPr>
-          <a:xfrm>
-            <a:off x="457200" y="4101083"/>
-            <a:ext cx="5477256" cy="1613915"/>
-          </a:xfrm>
-          <a:prstGeom prst="roundRect">
-            <a:avLst/>
-          </a:prstGeom>
-          <a:solidFill>
-            <a:srgbClr val="FFFFFF"/>
-          </a:solidFill>
-          <a:ln w="12700">
-            <a:solidFill>
-              <a:srgbClr val="EC4899"/>
-            </a:solidFill>
-          </a:ln>
-        </p:spPr>
-        <p:style>
-          <a:lnRef idx="1">
-            <a:schemeClr val="accent1"/>
-          </a:lnRef>
-          <a:fillRef idx="3">
-            <a:schemeClr val="accent1"/>
-          </a:fillRef>
-          <a:effectRef idx="2">
-            <a:schemeClr val="accent1"/>
-          </a:effectRef>
-          <a:fontRef idx="minor">
-            <a:schemeClr val="lt1"/>
-          </a:fontRef>
-        </p:style>
-        <p:txBody>
-          <a:bodyPr rtlCol="0" anchor="ctr"/>
-          <a:lstStyle/>
-          <a:p>
-            <a:pPr algn="ctr"/>
-          </a:p>
-        </p:txBody>
-      </p:sp>
-      <p:sp>
-        <p:nvSpPr>
-          <p:cNvPr id="15" name="Rectangle 14"/>
-          <p:cNvSpPr/>
-          <p:nvPr/>
-        </p:nvSpPr>
-        <p:spPr>
-          <a:xfrm>
-            <a:off x="457200" y="4101083"/>
-            <a:ext cx="91440" cy="1613915"/>
+              </a:defRPr>
+            </a:pPr>
+            <a:r>
+              <a:t>TIẾT 4: BÀI 4. CÂY THƯ MỤC TRONG MÁY TÍNH</a:t>
+            </a:r>
+          </a:p>
+        </p:txBody>
+      </p:sp>
+      <p:sp>
+        <p:nvSpPr>
+          <p:cNvPr id="7" name="TextBox 6"/>
+          <p:cNvSpPr txBox="1"/>
+          <p:nvPr/>
+        </p:nvSpPr>
+        <p:spPr>
+          <a:xfrm>
+            <a:off x="2103120" y="4023360"/>
+            <a:ext cx="8046720" cy="731519"/>
           </a:xfrm>
           <a:prstGeom prst="rect">
             <a:avLst/>
           </a:prstGeom>
-          <a:solidFill>
-            <a:srgbClr val="EC4899"/>
-          </a:solidFill>
-          <a:ln>
-            <a:noFill/>
-          </a:ln>
-        </p:spPr>
-        <p:style>
-          <a:lnRef idx="1">
-            <a:schemeClr val="accent1"/>
-          </a:lnRef>
-          <a:fillRef idx="3">
-            <a:schemeClr val="accent1"/>
-          </a:fillRef>
-          <a:effectRef idx="2">
-            <a:schemeClr val="accent1"/>
-          </a:effectRef>
-          <a:fontRef idx="minor">
-            <a:schemeClr val="lt1"/>
-          </a:fontRef>
-        </p:style>
-        <p:txBody>
-          <a:bodyPr rtlCol="0" anchor="ctr"/>
-          <a:lstStyle/>
-          <a:p>
-            <a:pPr algn="ctr"/>
-          </a:p>
-        </p:txBody>
-      </p:sp>
-      <p:pic>
-        <p:nvPicPr>
-          <p:cNvPr id="16" name="Picture 15" descr="learn2_card3.png"/>
-          <p:cNvPicPr>
-            <a:picLocks noChangeAspect="1"/>
-          </p:cNvPicPr>
-          <p:nvPr/>
-        </p:nvPicPr>
-        <p:blipFill>
-          <a:blip r:embed="rId4"/>
-          <a:stretch>
-            <a:fillRect/>
-          </a:stretch>
-        </p:blipFill>
-        <p:spPr>
-          <a:xfrm>
-            <a:off x="640080" y="4210812"/>
-            <a:ext cx="2194560" cy="1394459"/>
-          </a:xfrm>
-          <a:prstGeom prst="rect">
-            <a:avLst/>
-          </a:prstGeom>
-        </p:spPr>
-      </p:pic>
-      <p:sp>
-        <p:nvSpPr>
-          <p:cNvPr id="17" name="TextBox 16"/>
-          <p:cNvSpPr txBox="1"/>
-          <p:nvPr/>
-        </p:nvSpPr>
-        <p:spPr>
-          <a:xfrm>
-            <a:off x="3017520" y="4238244"/>
-            <a:ext cx="2825496" cy="1339595"/>
-          </a:xfrm>
-          <a:prstGeom prst="rect">
-            <a:avLst/>
-          </a:prstGeom>
           <a:noFill/>
         </p:spPr>
         <p:txBody>
-          <a:bodyPr wrap="square">
+          <a:bodyPr wrap="square" lIns="73152" rIns="73152" tIns="54864" bIns="54864">
             <a:spAutoFit/>
           </a:bodyPr>
           <a:lstStyle/>
           <a:p>
-            <a:pPr algn="l"/>
-            <a:r>
-              <a:rPr sz="1800" b="1">
+            <a:pPr algn="l">
+              <a:defRPr sz="1600" b="0">
                 <a:solidFill>
-                  <a:srgbClr val="0F172A"/>
+                  <a:srgbClr val="F1F5F9"/>
                 </a:solidFill>
                 <a:latin typeface="Arial"/>
-              </a:rPr>
-              <a:t>Tệp tin (File): văn bản .docx, trình chiếu .pptx, ảnh .png</a:t>
-            </a:r>
-          </a:p>
-        </p:txBody>
-      </p:sp>
-      <p:sp>
-        <p:nvSpPr>
-          <p:cNvPr id="18" name="Rounded Rectangle 17"/>
-          <p:cNvSpPr/>
-          <p:nvPr/>
-        </p:nvSpPr>
-        <p:spPr>
-          <a:xfrm>
-            <a:off x="6254496" y="4101083"/>
-            <a:ext cx="5477256" cy="1613915"/>
-          </a:xfrm>
-          <a:prstGeom prst="roundRect">
-            <a:avLst/>
-          </a:prstGeom>
-          <a:solidFill>
-            <a:srgbClr val="FFFFFF"/>
-          </a:solidFill>
-          <a:ln w="12700">
-            <a:solidFill>
-              <a:srgbClr val="EC4899"/>
-            </a:solidFill>
-          </a:ln>
-        </p:spPr>
-        <p:style>
-          <a:lnRef idx="1">
-            <a:schemeClr val="accent1"/>
-          </a:lnRef>
-          <a:fillRef idx="3">
-            <a:schemeClr val="accent1"/>
-          </a:fillRef>
-          <a:effectRef idx="2">
-            <a:schemeClr val="accent1"/>
-          </a:effectRef>
-          <a:fontRef idx="minor">
-            <a:schemeClr val="lt1"/>
-          </a:fontRef>
-        </p:style>
-        <p:txBody>
-          <a:bodyPr rtlCol="0" anchor="ctr"/>
-          <a:lstStyle/>
-          <a:p>
-            <a:pPr algn="ctr"/>
-          </a:p>
-        </p:txBody>
-      </p:sp>
-      <p:sp>
-        <p:nvSpPr>
-          <p:cNvPr id="19" name="Rectangle 18"/>
-          <p:cNvSpPr/>
-          <p:nvPr/>
-        </p:nvSpPr>
-        <p:spPr>
-          <a:xfrm>
-            <a:off x="6254496" y="4101083"/>
-            <a:ext cx="91440" cy="1613915"/>
-          </a:xfrm>
-          <a:prstGeom prst="rect">
-            <a:avLst/>
-          </a:prstGeom>
-          <a:solidFill>
-            <a:srgbClr val="EC4899"/>
-          </a:solidFill>
-          <a:ln>
-            <a:noFill/>
-          </a:ln>
-        </p:spPr>
-        <p:style>
-          <a:lnRef idx="1">
-            <a:schemeClr val="accent1"/>
-          </a:lnRef>
-          <a:fillRef idx="3">
-            <a:schemeClr val="accent1"/>
-          </a:fillRef>
-          <a:effectRef idx="2">
-            <a:schemeClr val="accent1"/>
-          </a:effectRef>
-          <a:fontRef idx="minor">
-            <a:schemeClr val="lt1"/>
-          </a:fontRef>
-        </p:style>
-        <p:txBody>
-          <a:bodyPr rtlCol="0" anchor="ctr"/>
-          <a:lstStyle/>
-          <a:p>
-            <a:pPr algn="ctr"/>
-          </a:p>
-        </p:txBody>
-      </p:sp>
-      <p:pic>
-        <p:nvPicPr>
-          <p:cNvPr id="20" name="Picture 19" descr="learn2_card4.png"/>
-          <p:cNvPicPr>
-            <a:picLocks noChangeAspect="1"/>
-          </p:cNvPicPr>
-          <p:nvPr/>
-        </p:nvPicPr>
-        <p:blipFill>
-          <a:blip r:embed="rId5"/>
-          <a:stretch>
-            <a:fillRect/>
-          </a:stretch>
-        </p:blipFill>
-        <p:spPr>
-          <a:xfrm>
-            <a:off x="6437376" y="4210812"/>
-            <a:ext cx="2194560" cy="1394459"/>
-          </a:xfrm>
-          <a:prstGeom prst="rect">
-            <a:avLst/>
-          </a:prstGeom>
-        </p:spPr>
-      </p:pic>
-      <p:sp>
-        <p:nvSpPr>
-          <p:cNvPr id="21" name="TextBox 20"/>
-          <p:cNvSpPr txBox="1"/>
-          <p:nvPr/>
-        </p:nvSpPr>
-        <p:spPr>
-          <a:xfrm>
-            <a:off x="8814815" y="4238244"/>
-            <a:ext cx="2825496" cy="1339595"/>
-          </a:xfrm>
-          <a:prstGeom prst="rect">
-            <a:avLst/>
-          </a:prstGeom>
-          <a:noFill/>
-        </p:spPr>
-        <p:txBody>
-          <a:bodyPr wrap="square">
-            <a:spAutoFit/>
-          </a:bodyPr>
-          <a:lstStyle/>
-          <a:p>
-            <a:pPr algn="l"/>
-            <a:r>
-              <a:rPr sz="1800" b="1">
-                <a:solidFill>
-                  <a:srgbClr val="0F172A"/>
-                </a:solidFill>
-                <a:latin typeface="Arial"/>
-              </a:rPr>
-              <a:t>Đường dẫn (Path): chỉ rõ vị trí lưu trữ của tệp tin</a:t>
+              </a:defRPr>
+            </a:pPr>
+            <a:r>
+              <a:t>Tổ chức lưu trữ dữ liệu khoa học theo cấu trúc hình cây phân cấp</a:t>
             </a:r>
           </a:p>
         </p:txBody>
@@ -5877,7 +5752,7 @@
     <a:masterClrMapping/>
   </p:clrMapOvr>
   <p:transition spd="med">
-    <p:wipe/>
+    <p:push/>
   </p:transition>
 </p:sld>
 </file>
@@ -5937,16 +5812,16 @@
       </p:sp>
       <p:sp>
         <p:nvSpPr>
-          <p:cNvPr id="3" name="Rectangle 2"/>
+          <p:cNvPr id="3" name="Rounded Rectangle 2"/>
           <p:cNvSpPr/>
           <p:nvPr/>
         </p:nvSpPr>
         <p:spPr>
           <a:xfrm>
-            <a:off x="0" y="1097280"/>
-            <a:ext cx="12188952" cy="411479"/>
-          </a:xfrm>
-          <a:prstGeom prst="rect">
+            <a:off x="365760" y="1143000"/>
+            <a:ext cx="2926080" cy="347471"/>
+          </a:xfrm>
+          <a:prstGeom prst="roundRect">
             <a:avLst/>
           </a:prstGeom>
           <a:solidFill>
@@ -5986,8 +5861,8 @@
         </p:nvSpPr>
         <p:spPr>
           <a:xfrm>
-            <a:off x="274320" y="1124712"/>
-            <a:ext cx="11640312" cy="365760"/>
+            <a:off x="365760" y="1143000"/>
+            <a:ext cx="2926080" cy="347471"/>
           </a:xfrm>
           <a:prstGeom prst="rect">
             <a:avLst/>
@@ -5995,20 +5870,21 @@
           <a:noFill/>
         </p:spPr>
         <p:txBody>
-          <a:bodyPr wrap="square">
+          <a:bodyPr wrap="square" lIns="73152" rIns="73152" tIns="54864" bIns="54864">
             <a:spAutoFit/>
           </a:bodyPr>
           <a:lstStyle/>
           <a:p>
-            <a:pPr algn="l"/>
-            <a:r>
-              <a:rPr sz="1300" b="1">
+            <a:pPr algn="ctr">
+              <a:defRPr sz="1300" b="1">
                 <a:solidFill>
                   <a:srgbClr val="FFFFFF"/>
                 </a:solidFill>
                 <a:latin typeface="Arial"/>
-              </a:rPr>
-              <a:t>  LỚP 5 • LUYỆN TẬP TƯƠNG TÁC</a:t>
+              </a:defRPr>
+            </a:pPr>
+            <a:r>
+              <a:t>HOẠT ĐỘNG KHÁM PHÁ</a:t>
             </a:r>
           </a:p>
         </p:txBody>
@@ -6021,8 +5897,8 @@
         </p:nvSpPr>
         <p:spPr>
           <a:xfrm>
-            <a:off x="457200" y="1600200"/>
-            <a:ext cx="11274552" cy="594360"/>
+            <a:off x="3474720" y="1115568"/>
+            <a:ext cx="8046720" cy="411479"/>
           </a:xfrm>
           <a:prstGeom prst="rect">
             <a:avLst/>
@@ -6030,73 +5906,35 @@
           <a:noFill/>
         </p:spPr>
         <p:txBody>
-          <a:bodyPr wrap="square">
+          <a:bodyPr wrap="square" lIns="73152" rIns="73152" tIns="54864" bIns="54864">
             <a:spAutoFit/>
           </a:bodyPr>
           <a:lstStyle/>
           <a:p>
-            <a:pPr algn="l"/>
-            <a:r>
-              <a:rPr sz="2600" b="1">
+            <a:pPr algn="l">
+              <a:defRPr sz="2100" b="1">
                 <a:solidFill>
                   <a:srgbClr val="831843"/>
                 </a:solidFill>
                 <a:latin typeface="Arial"/>
-              </a:rPr>
-              <a:t>Thực hành tạo cây thư mục!</a:t>
-            </a:r>
-          </a:p>
-        </p:txBody>
-      </p:sp>
-      <p:sp>
-        <p:nvSpPr>
-          <p:cNvPr id="6" name="TextBox 5"/>
-          <p:cNvSpPr txBox="1"/>
-          <p:nvPr/>
-        </p:nvSpPr>
-        <p:spPr>
-          <a:xfrm>
-            <a:off x="457200" y="2286000"/>
-            <a:ext cx="11274552" cy="640080"/>
-          </a:xfrm>
-          <a:prstGeom prst="rect">
-            <a:avLst/>
-          </a:prstGeom>
-          <a:noFill/>
-        </p:spPr>
-        <p:txBody>
-          <a:bodyPr wrap="square">
-            <a:spAutoFit/>
-          </a:bodyPr>
-          <a:lstStyle/>
-          <a:p>
-            <a:pPr algn="l">
-              <a:spcAft>
-                <a:spcPts val="600"/>
-              </a:spcAft>
+              </a:defRPr>
             </a:pPr>
             <a:r>
-              <a:rPr sz="1800" b="0">
-                <a:solidFill>
-                  <a:srgbClr val="831843"/>
-                </a:solidFill>
-                <a:latin typeface="Arial"/>
-              </a:rPr>
-              <a:t>Tạo cây thư mục trên ổ đĩa D: theo sơ đồ:</a:t>
-            </a:r>
-          </a:p>
-        </p:txBody>
-      </p:sp>
-      <p:sp>
-        <p:nvSpPr>
-          <p:cNvPr id="7" name="Rounded Rectangle 6"/>
+              <a:t>Cấu trúc phân cấp Cây thư mục</a:t>
+            </a:r>
+          </a:p>
+        </p:txBody>
+      </p:sp>
+      <p:sp>
+        <p:nvSpPr>
+          <p:cNvPr id="6" name="Rounded Rectangle 5"/>
           <p:cNvSpPr/>
           <p:nvPr/>
         </p:nvSpPr>
         <p:spPr>
           <a:xfrm>
-            <a:off x="457200" y="3017520"/>
-            <a:ext cx="5522976" cy="1280159"/>
+            <a:off x="365760" y="1645920"/>
+            <a:ext cx="3840480" cy="3977639"/>
           </a:xfrm>
           <a:prstGeom prst="roundRect">
             <a:avLst/>
@@ -6104,7 +5942,7 @@
           <a:solidFill>
             <a:srgbClr val="FFFFFF"/>
           </a:solidFill>
-          <a:ln w="12700">
+          <a:ln w="19050">
             <a:solidFill>
               <a:srgbClr val="EC4899"/>
             </a:solidFill>
@@ -6132,9 +5970,241 @@
           </a:p>
         </p:txBody>
       </p:sp>
+      <p:sp>
+        <p:nvSpPr>
+          <p:cNvPr id="7" name="Rounded Rectangle 6"/>
+          <p:cNvSpPr/>
+          <p:nvPr/>
+        </p:nvSpPr>
+        <p:spPr>
+          <a:xfrm>
+            <a:off x="365760" y="1645920"/>
+            <a:ext cx="164592" cy="3977639"/>
+          </a:xfrm>
+          <a:prstGeom prst="roundRect">
+            <a:avLst/>
+          </a:prstGeom>
+          <a:solidFill>
+            <a:srgbClr val="EC4899"/>
+          </a:solidFill>
+          <a:ln>
+            <a:noFill/>
+          </a:ln>
+        </p:spPr>
+        <p:style>
+          <a:lnRef idx="1">
+            <a:schemeClr val="accent1"/>
+          </a:lnRef>
+          <a:fillRef idx="3">
+            <a:schemeClr val="accent1"/>
+          </a:fillRef>
+          <a:effectRef idx="2">
+            <a:schemeClr val="accent1"/>
+          </a:effectRef>
+          <a:fontRef idx="minor">
+            <a:schemeClr val="lt1"/>
+          </a:fontRef>
+        </p:style>
+        <p:txBody>
+          <a:bodyPr rtlCol="0" anchor="ctr"/>
+          <a:lstStyle/>
+          <a:p>
+            <a:pPr algn="ctr"/>
+          </a:p>
+        </p:txBody>
+      </p:sp>
+      <p:sp>
+        <p:nvSpPr>
+          <p:cNvPr id="8" name="TextBox 7"/>
+          <p:cNvSpPr txBox="1"/>
+          <p:nvPr/>
+        </p:nvSpPr>
+        <p:spPr>
+          <a:xfrm>
+            <a:off x="640080" y="1783080"/>
+            <a:ext cx="3429000" cy="640080"/>
+          </a:xfrm>
+          <a:prstGeom prst="rect">
+            <a:avLst/>
+          </a:prstGeom>
+          <a:noFill/>
+        </p:spPr>
+        <p:txBody>
+          <a:bodyPr wrap="square" lIns="73152" rIns="73152" tIns="54864" bIns="54864">
+            <a:spAutoFit/>
+          </a:bodyPr>
+          <a:lstStyle/>
+          <a:p>
+            <a:pPr algn="l">
+              <a:defRPr sz="1500" b="1">
+                <a:solidFill>
+                  <a:srgbClr val="0F172A"/>
+                </a:solidFill>
+                <a:latin typeface="Arial"/>
+              </a:defRPr>
+            </a:pPr>
+            <a:r>
+              <a:t>• Ổ đĩa gốc (Root): C:, D:, E:</a:t>
+            </a:r>
+          </a:p>
+        </p:txBody>
+      </p:sp>
+      <p:sp>
+        <p:nvSpPr>
+          <p:cNvPr id="9" name="TextBox 8"/>
+          <p:cNvSpPr txBox="1"/>
+          <p:nvPr/>
+        </p:nvSpPr>
+        <p:spPr>
+          <a:xfrm>
+            <a:off x="640080" y="2468880"/>
+            <a:ext cx="3429000" cy="640080"/>
+          </a:xfrm>
+          <a:prstGeom prst="rect">
+            <a:avLst/>
+          </a:prstGeom>
+          <a:noFill/>
+        </p:spPr>
+        <p:txBody>
+          <a:bodyPr wrap="square" lIns="73152" rIns="73152" tIns="54864" bIns="54864">
+            <a:spAutoFit/>
+          </a:bodyPr>
+          <a:lstStyle/>
+          <a:p>
+            <a:pPr algn="l">
+              <a:defRPr sz="1500" b="1">
+                <a:solidFill>
+                  <a:srgbClr val="0F172A"/>
+                </a:solidFill>
+                <a:latin typeface="Arial"/>
+              </a:defRPr>
+            </a:pPr>
+            <a:r>
+              <a:t>• Thư mục mẹ (Parent folder): Chứa thư mục khác</a:t>
+            </a:r>
+          </a:p>
+        </p:txBody>
+      </p:sp>
+      <p:sp>
+        <p:nvSpPr>
+          <p:cNvPr id="10" name="TextBox 9"/>
+          <p:cNvSpPr txBox="1"/>
+          <p:nvPr/>
+        </p:nvSpPr>
+        <p:spPr>
+          <a:xfrm>
+            <a:off x="640080" y="3154680"/>
+            <a:ext cx="3429000" cy="640080"/>
+          </a:xfrm>
+          <a:prstGeom prst="rect">
+            <a:avLst/>
+          </a:prstGeom>
+          <a:noFill/>
+        </p:spPr>
+        <p:txBody>
+          <a:bodyPr wrap="square" lIns="73152" rIns="73152" tIns="54864" bIns="54864">
+            <a:spAutoFit/>
+          </a:bodyPr>
+          <a:lstStyle/>
+          <a:p>
+            <a:pPr algn="l">
+              <a:defRPr sz="1500" b="1">
+                <a:solidFill>
+                  <a:srgbClr val="0F172A"/>
+                </a:solidFill>
+                <a:latin typeface="Arial"/>
+              </a:defRPr>
+            </a:pPr>
+            <a:r>
+              <a:t>• Thư mục con (Subfolder): Nằm bên trong thư mục mẹ</a:t>
+            </a:r>
+          </a:p>
+        </p:txBody>
+      </p:sp>
+      <p:sp>
+        <p:nvSpPr>
+          <p:cNvPr id="11" name="TextBox 10"/>
+          <p:cNvSpPr txBox="1"/>
+          <p:nvPr/>
+        </p:nvSpPr>
+        <p:spPr>
+          <a:xfrm>
+            <a:off x="640080" y="3840480"/>
+            <a:ext cx="3429000" cy="640080"/>
+          </a:xfrm>
+          <a:prstGeom prst="rect">
+            <a:avLst/>
+          </a:prstGeom>
+          <a:noFill/>
+        </p:spPr>
+        <p:txBody>
+          <a:bodyPr wrap="square" lIns="73152" rIns="73152" tIns="54864" bIns="54864">
+            <a:spAutoFit/>
+          </a:bodyPr>
+          <a:lstStyle/>
+          <a:p>
+            <a:pPr algn="l">
+              <a:defRPr sz="1500" b="1">
+                <a:solidFill>
+                  <a:srgbClr val="0F172A"/>
+                </a:solidFill>
+                <a:latin typeface="Arial"/>
+              </a:defRPr>
+            </a:pPr>
+            <a:r>
+              <a:t>• Tệp tin (File): Nơi lưu trữ nội dung cụ thể</a:t>
+            </a:r>
+          </a:p>
+        </p:txBody>
+      </p:sp>
+      <p:sp>
+        <p:nvSpPr>
+          <p:cNvPr id="12" name="Rounded Rectangle 11"/>
+          <p:cNvSpPr/>
+          <p:nvPr/>
+        </p:nvSpPr>
+        <p:spPr>
+          <a:xfrm>
+            <a:off x="4480560" y="1645920"/>
+            <a:ext cx="7223760" cy="3977639"/>
+          </a:xfrm>
+          <a:prstGeom prst="roundRect">
+            <a:avLst/>
+          </a:prstGeom>
+          <a:solidFill>
+            <a:srgbClr val="FFFFFF"/>
+          </a:solidFill>
+          <a:ln w="19050">
+            <a:solidFill>
+              <a:srgbClr val="CBD5E1"/>
+            </a:solidFill>
+          </a:ln>
+        </p:spPr>
+        <p:style>
+          <a:lnRef idx="1">
+            <a:schemeClr val="accent1"/>
+          </a:lnRef>
+          <a:fillRef idx="3">
+            <a:schemeClr val="accent1"/>
+          </a:fillRef>
+          <a:effectRef idx="2">
+            <a:schemeClr val="accent1"/>
+          </a:effectRef>
+          <a:fontRef idx="minor">
+            <a:schemeClr val="lt1"/>
+          </a:fontRef>
+        </p:style>
+        <p:txBody>
+          <a:bodyPr rtlCol="0" anchor="ctr"/>
+          <a:lstStyle/>
+          <a:p>
+            <a:pPr algn="ctr"/>
+          </a:p>
+        </p:txBody>
+      </p:sp>
       <p:pic>
         <p:nvPicPr>
-          <p:cNvPr id="8" name="Picture 7" descr="learn1_card1.png"/>
+          <p:cNvPr id="13" name="Picture 12" descr="sgk_lop5_bai4_so_do_cay_thu_muc.png"/>
           <p:cNvPicPr>
             <a:picLocks noChangeAspect="1"/>
           </p:cNvPicPr>
@@ -6148,758 +6218,21 @@
         </p:blipFill>
         <p:spPr>
           <a:xfrm>
-            <a:off x="640080" y="3154679"/>
-            <a:ext cx="1280160" cy="1005840"/>
+            <a:off x="4572000" y="1737360"/>
+            <a:ext cx="7040880" cy="3794760"/>
           </a:xfrm>
           <a:prstGeom prst="rect">
             <a:avLst/>
           </a:prstGeom>
         </p:spPr>
       </p:pic>
-      <p:sp>
-        <p:nvSpPr>
-          <p:cNvPr id="9" name="TextBox 8"/>
-          <p:cNvSpPr txBox="1"/>
-          <p:nvPr/>
-        </p:nvSpPr>
-        <p:spPr>
-          <a:xfrm>
-            <a:off x="2103120" y="3154679"/>
-            <a:ext cx="3785616" cy="1005839"/>
-          </a:xfrm>
-          <a:prstGeom prst="rect">
-            <a:avLst/>
-          </a:prstGeom>
-          <a:noFill/>
-        </p:spPr>
-        <p:txBody>
-          <a:bodyPr wrap="square">
-            <a:spAutoFit/>
-          </a:bodyPr>
-          <a:lstStyle/>
-          <a:p>
-            <a:pPr algn="l"/>
-            <a:r>
-              <a:rPr sz="1600" b="1">
-                <a:solidFill>
-                  <a:srgbClr val="831843"/>
-                </a:solidFill>
-                <a:latin typeface="Arial"/>
-              </a:rPr>
-              <a:t>Tạo thư mục chính: HOC_TAP</a:t>
-            </a:r>
-          </a:p>
-        </p:txBody>
-      </p:sp>
-      <p:sp>
-        <p:nvSpPr>
-          <p:cNvPr id="10" name="Rounded Rectangle 9"/>
-          <p:cNvSpPr/>
-          <p:nvPr/>
-        </p:nvSpPr>
-        <p:spPr>
-          <a:xfrm>
-            <a:off x="6208776" y="3017520"/>
-            <a:ext cx="5522976" cy="1280159"/>
-          </a:xfrm>
-          <a:prstGeom prst="roundRect">
-            <a:avLst/>
-          </a:prstGeom>
-          <a:solidFill>
-            <a:srgbClr val="FFFFFF"/>
-          </a:solidFill>
-          <a:ln w="12700">
-            <a:solidFill>
-              <a:srgbClr val="EC4899"/>
-            </a:solidFill>
-          </a:ln>
-        </p:spPr>
-        <p:style>
-          <a:lnRef idx="1">
-            <a:schemeClr val="accent1"/>
-          </a:lnRef>
-          <a:fillRef idx="3">
-            <a:schemeClr val="accent1"/>
-          </a:fillRef>
-          <a:effectRef idx="2">
-            <a:schemeClr val="accent1"/>
-          </a:effectRef>
-          <a:fontRef idx="minor">
-            <a:schemeClr val="lt1"/>
-          </a:fontRef>
-        </p:style>
-        <p:txBody>
-          <a:bodyPr rtlCol="0" anchor="ctr"/>
-          <a:lstStyle/>
-          <a:p>
-            <a:pPr algn="ctr"/>
-          </a:p>
-        </p:txBody>
-      </p:sp>
-      <p:pic>
-        <p:nvPicPr>
-          <p:cNvPr id="11" name="Picture 10" descr="learn1_card2.png"/>
-          <p:cNvPicPr>
-            <a:picLocks noChangeAspect="1"/>
-          </p:cNvPicPr>
-          <p:nvPr/>
-        </p:nvPicPr>
-        <p:blipFill>
-          <a:blip r:embed="rId3"/>
-          <a:stretch>
-            <a:fillRect/>
-          </a:stretch>
-        </p:blipFill>
-        <p:spPr>
-          <a:xfrm>
-            <a:off x="6391656" y="3154679"/>
-            <a:ext cx="1280160" cy="1005840"/>
-          </a:xfrm>
-          <a:prstGeom prst="rect">
-            <a:avLst/>
-          </a:prstGeom>
-        </p:spPr>
-      </p:pic>
-      <p:sp>
-        <p:nvSpPr>
-          <p:cNvPr id="12" name="TextBox 11"/>
-          <p:cNvSpPr txBox="1"/>
-          <p:nvPr/>
-        </p:nvSpPr>
-        <p:spPr>
-          <a:xfrm>
-            <a:off x="7854696" y="3154679"/>
-            <a:ext cx="3785616" cy="1005839"/>
-          </a:xfrm>
-          <a:prstGeom prst="rect">
-            <a:avLst/>
-          </a:prstGeom>
-          <a:noFill/>
-        </p:spPr>
-        <p:txBody>
-          <a:bodyPr wrap="square">
-            <a:spAutoFit/>
-          </a:bodyPr>
-          <a:lstStyle/>
-          <a:p>
-            <a:pPr algn="l"/>
-            <a:r>
-              <a:rPr sz="1600" b="1">
-                <a:solidFill>
-                  <a:srgbClr val="831843"/>
-                </a:solidFill>
-                <a:latin typeface="Arial"/>
-              </a:rPr>
-              <a:t>Tạo 3 thư mục con: TOAN, VAN, TIN_HOC</a:t>
-            </a:r>
-          </a:p>
-        </p:txBody>
-      </p:sp>
-      <p:sp>
-        <p:nvSpPr>
-          <p:cNvPr id="13" name="Rounded Rectangle 12"/>
-          <p:cNvSpPr/>
-          <p:nvPr/>
-        </p:nvSpPr>
-        <p:spPr>
-          <a:xfrm>
-            <a:off x="457200" y="4526279"/>
-            <a:ext cx="5522976" cy="1280160"/>
-          </a:xfrm>
-          <a:prstGeom prst="roundRect">
-            <a:avLst/>
-          </a:prstGeom>
-          <a:solidFill>
-            <a:srgbClr val="FFFFFF"/>
-          </a:solidFill>
-          <a:ln w="12700">
-            <a:solidFill>
-              <a:srgbClr val="EC4899"/>
-            </a:solidFill>
-          </a:ln>
-        </p:spPr>
-        <p:style>
-          <a:lnRef idx="1">
-            <a:schemeClr val="accent1"/>
-          </a:lnRef>
-          <a:fillRef idx="3">
-            <a:schemeClr val="accent1"/>
-          </a:fillRef>
-          <a:effectRef idx="2">
-            <a:schemeClr val="accent1"/>
-          </a:effectRef>
-          <a:fontRef idx="minor">
-            <a:schemeClr val="lt1"/>
-          </a:fontRef>
-        </p:style>
-        <p:txBody>
-          <a:bodyPr rtlCol="0" anchor="ctr"/>
-          <a:lstStyle/>
-          <a:p>
-            <a:pPr algn="ctr"/>
-          </a:p>
-        </p:txBody>
-      </p:sp>
-      <p:pic>
-        <p:nvPicPr>
-          <p:cNvPr id="14" name="Picture 13" descr="learn1_card3.png"/>
-          <p:cNvPicPr>
-            <a:picLocks noChangeAspect="1"/>
-          </p:cNvPicPr>
-          <p:nvPr/>
-        </p:nvPicPr>
-        <p:blipFill>
-          <a:blip r:embed="rId4"/>
-          <a:stretch>
-            <a:fillRect/>
-          </a:stretch>
-        </p:blipFill>
-        <p:spPr>
-          <a:xfrm>
-            <a:off x="640080" y="4663440"/>
-            <a:ext cx="1280160" cy="1005839"/>
-          </a:xfrm>
-          <a:prstGeom prst="rect">
-            <a:avLst/>
-          </a:prstGeom>
-        </p:spPr>
-      </p:pic>
-      <p:sp>
-        <p:nvSpPr>
-          <p:cNvPr id="15" name="TextBox 14"/>
-          <p:cNvSpPr txBox="1"/>
-          <p:nvPr/>
-        </p:nvSpPr>
-        <p:spPr>
-          <a:xfrm>
-            <a:off x="2103120" y="4663440"/>
-            <a:ext cx="3785616" cy="1005839"/>
-          </a:xfrm>
-          <a:prstGeom prst="rect">
-            <a:avLst/>
-          </a:prstGeom>
-          <a:noFill/>
-        </p:spPr>
-        <p:txBody>
-          <a:bodyPr wrap="square">
-            <a:spAutoFit/>
-          </a:bodyPr>
-          <a:lstStyle/>
-          <a:p>
-            <a:pPr algn="l"/>
-            <a:r>
-              <a:rPr sz="1600" b="1">
-                <a:solidFill>
-                  <a:srgbClr val="831843"/>
-                </a:solidFill>
-                <a:latin typeface="Arial"/>
-              </a:rPr>
-              <a:t>Lưu bài tập Tin học vào thư mục TIN_HOC</a:t>
-            </a:r>
-          </a:p>
-        </p:txBody>
-      </p:sp>
-      <p:sp>
-        <p:nvSpPr>
-          <p:cNvPr id="16" name="Rounded Rectangle 15"/>
-          <p:cNvSpPr/>
-          <p:nvPr/>
-        </p:nvSpPr>
-        <p:spPr>
-          <a:xfrm>
-            <a:off x="6208776" y="4526279"/>
-            <a:ext cx="5522976" cy="1280160"/>
-          </a:xfrm>
-          <a:prstGeom prst="roundRect">
-            <a:avLst/>
-          </a:prstGeom>
-          <a:solidFill>
-            <a:srgbClr val="FFFFFF"/>
-          </a:solidFill>
-          <a:ln w="12700">
-            <a:solidFill>
-              <a:srgbClr val="EC4899"/>
-            </a:solidFill>
-          </a:ln>
-        </p:spPr>
-        <p:style>
-          <a:lnRef idx="1">
-            <a:schemeClr val="accent1"/>
-          </a:lnRef>
-          <a:fillRef idx="3">
-            <a:schemeClr val="accent1"/>
-          </a:fillRef>
-          <a:effectRef idx="2">
-            <a:schemeClr val="accent1"/>
-          </a:effectRef>
-          <a:fontRef idx="minor">
-            <a:schemeClr val="lt1"/>
-          </a:fontRef>
-        </p:style>
-        <p:txBody>
-          <a:bodyPr rtlCol="0" anchor="ctr"/>
-          <a:lstStyle/>
-          <a:p>
-            <a:pPr algn="ctr"/>
-          </a:p>
-        </p:txBody>
-      </p:sp>
-      <p:pic>
-        <p:nvPicPr>
-          <p:cNvPr id="17" name="Picture 16" descr="learn1_card4.png"/>
-          <p:cNvPicPr>
-            <a:picLocks noChangeAspect="1"/>
-          </p:cNvPicPr>
-          <p:nvPr/>
-        </p:nvPicPr>
-        <p:blipFill>
-          <a:blip r:embed="rId5"/>
-          <a:stretch>
-            <a:fillRect/>
-          </a:stretch>
-        </p:blipFill>
-        <p:spPr>
-          <a:xfrm>
-            <a:off x="6391656" y="4663440"/>
-            <a:ext cx="1280160" cy="1005839"/>
-          </a:xfrm>
-          <a:prstGeom prst="rect">
-            <a:avLst/>
-          </a:prstGeom>
-        </p:spPr>
-      </p:pic>
-      <p:sp>
-        <p:nvSpPr>
-          <p:cNvPr id="18" name="TextBox 17"/>
-          <p:cNvSpPr txBox="1"/>
-          <p:nvPr/>
-        </p:nvSpPr>
-        <p:spPr>
-          <a:xfrm>
-            <a:off x="7854696" y="4663440"/>
-            <a:ext cx="3785616" cy="1005839"/>
-          </a:xfrm>
-          <a:prstGeom prst="rect">
-            <a:avLst/>
-          </a:prstGeom>
-          <a:noFill/>
-        </p:spPr>
-        <p:txBody>
-          <a:bodyPr wrap="square">
-            <a:spAutoFit/>
-          </a:bodyPr>
-          <a:lstStyle/>
-          <a:p>
-            <a:pPr algn="l"/>
-            <a:r>
-              <a:rPr sz="1600" b="1">
-                <a:solidFill>
-                  <a:srgbClr val="831843"/>
-                </a:solidFill>
-                <a:latin typeface="Arial"/>
-              </a:rPr>
-              <a:t>Đổi tên và xóa thư mục khi cần thiết</a:t>
-            </a:r>
-          </a:p>
-        </p:txBody>
-      </p:sp>
     </p:spTree>
   </p:cSld>
   <p:clrMapOvr>
     <a:masterClrMapping/>
   </p:clrMapOvr>
-  <p:timing>
-    <p:tnLst>
-      <p:par>
-        <p:cTn id="1" dur="indefinite" restart="never" nodeType="tmRoot">
-          <p:childTnLst>
-            <p:seq concurrent="1" nextAc="seek">
-              <p:cTn id="2" dur="indefinite" nodeType="mainSeq">
-                <p:childTnLst>
-                  <p:par>
-                    <p:cTn id="3" fill="hold">
-                      <p:stCondLst>
-                        <p:cond delay="0"/>
-                      </p:stCondLst>
-                      <p:childTnLst>
-                        <p:par>
-                          <p:cTn id="4" presetID="1" presetClass="entr" presetSubtype="0" fill="hold">
-                            <p:stCondLst>
-                              <p:cond delay="0"/>
-                            </p:stCondLst>
-                            <p:childTnLst>
-                              <p:set>
-                                <p:cBhvr>
-                                  <p:cTn id="5" dur="1" fill="hold">
-                                    <p:stCondLst>
-                                      <p:cond delay="0"/>
-                                    </p:stCondLst>
-                                  </p:cTn>
-                                  <p:tgtEl>
-                                    <p:spTgt spid="7"/>
-                                  </p:tgtEl>
-                                  <p:attrNameLst>
-                                    <p:attrName>style.visibility</p:attrName>
-                                  </p:attrNameLst>
-                                </p:cBhvr>
-                                <p:to>
-                                  <p:strVal val="visible"/>
-                                </p:to>
-                              </p:set>
-                            </p:childTnLst>
-                          </p:cTn>
-                        </p:par>
-                        <p:par>
-                          <p:cTn id="6" presetID="1" presetClass="entr" presetSubtype="0" fill="hold">
-                            <p:stCondLst>
-                              <p:cond delay="0"/>
-                            </p:stCondLst>
-                            <p:childTnLst>
-                              <p:set>
-                                <p:cBhvr>
-                                  <p:cTn id="7" dur="1" fill="hold">
-                                    <p:stCondLst>
-                                      <p:cond delay="0"/>
-                                    </p:stCondLst>
-                                  </p:cTn>
-                                  <p:tgtEl>
-                                    <p:spTgt spid="8"/>
-                                  </p:tgtEl>
-                                  <p:attrNameLst>
-                                    <p:attrName>style.visibility</p:attrName>
-                                  </p:attrNameLst>
-                                </p:cBhvr>
-                                <p:to>
-                                  <p:strVal val="visible"/>
-                                </p:to>
-                              </p:set>
-                            </p:childTnLst>
-                          </p:cTn>
-                        </p:par>
-                        <p:par>
-                          <p:cTn id="8" presetID="1" presetClass="entr" presetSubtype="0" fill="hold">
-                            <p:stCondLst>
-                              <p:cond delay="0"/>
-                            </p:stCondLst>
-                            <p:childTnLst>
-                              <p:set>
-                                <p:cBhvr>
-                                  <p:cTn id="9" dur="1" fill="hold">
-                                    <p:stCondLst>
-                                      <p:cond delay="0"/>
-                                    </p:stCondLst>
-                                  </p:cTn>
-                                  <p:tgtEl>
-                                    <p:spTgt spid="9"/>
-                                  </p:tgtEl>
-                                  <p:attrNameLst>
-                                    <p:attrName>style.visibility</p:attrName>
-                                  </p:attrNameLst>
-                                </p:cBhvr>
-                                <p:to>
-                                  <p:strVal val="visible"/>
-                                </p:to>
-                              </p:set>
-                            </p:childTnLst>
-                          </p:cTn>
-                        </p:par>
-                      </p:childTnLst>
-                    </p:cTn>
-                  </p:par>
-                  <p:par>
-                    <p:cTn id="10" fill="hold">
-                      <p:stCondLst>
-                        <p:cond delay="0"/>
-                      </p:stCondLst>
-                      <p:childTnLst>
-                        <p:par>
-                          <p:cTn id="11" presetID="1" presetClass="entr" presetSubtype="0" fill="hold">
-                            <p:stCondLst>
-                              <p:cond delay="0"/>
-                            </p:stCondLst>
-                            <p:childTnLst>
-                              <p:set>
-                                <p:cBhvr>
-                                  <p:cTn id="12" dur="1" fill="hold">
-                                    <p:stCondLst>
-                                      <p:cond delay="0"/>
-                                    </p:stCondLst>
-                                  </p:cTn>
-                                  <p:tgtEl>
-                                    <p:spTgt spid="10"/>
-                                  </p:tgtEl>
-                                  <p:attrNameLst>
-                                    <p:attrName>style.visibility</p:attrName>
-                                  </p:attrNameLst>
-                                </p:cBhvr>
-                                <p:to>
-                                  <p:strVal val="visible"/>
-                                </p:to>
-                              </p:set>
-                            </p:childTnLst>
-                          </p:cTn>
-                        </p:par>
-                        <p:par>
-                          <p:cTn id="13" presetID="1" presetClass="entr" presetSubtype="0" fill="hold">
-                            <p:stCondLst>
-                              <p:cond delay="0"/>
-                            </p:stCondLst>
-                            <p:childTnLst>
-                              <p:set>
-                                <p:cBhvr>
-                                  <p:cTn id="14" dur="1" fill="hold">
-                                    <p:stCondLst>
-                                      <p:cond delay="0"/>
-                                    </p:stCondLst>
-                                  </p:cTn>
-                                  <p:tgtEl>
-                                    <p:spTgt spid="11"/>
-                                  </p:tgtEl>
-                                  <p:attrNameLst>
-                                    <p:attrName>style.visibility</p:attrName>
-                                  </p:attrNameLst>
-                                </p:cBhvr>
-                                <p:to>
-                                  <p:strVal val="visible"/>
-                                </p:to>
-                              </p:set>
-                            </p:childTnLst>
-                          </p:cTn>
-                        </p:par>
-                        <p:par>
-                          <p:cTn id="15" presetID="1" presetClass="entr" presetSubtype="0" fill="hold">
-                            <p:stCondLst>
-                              <p:cond delay="0"/>
-                            </p:stCondLst>
-                            <p:childTnLst>
-                              <p:set>
-                                <p:cBhvr>
-                                  <p:cTn id="16" dur="1" fill="hold">
-                                    <p:stCondLst>
-                                      <p:cond delay="0"/>
-                                    </p:stCondLst>
-                                  </p:cTn>
-                                  <p:tgtEl>
-                                    <p:spTgt spid="12"/>
-                                  </p:tgtEl>
-                                  <p:attrNameLst>
-                                    <p:attrName>style.visibility</p:attrName>
-                                  </p:attrNameLst>
-                                </p:cBhvr>
-                                <p:to>
-                                  <p:strVal val="visible"/>
-                                </p:to>
-                              </p:set>
-                            </p:childTnLst>
-                          </p:cTn>
-                        </p:par>
-                      </p:childTnLst>
-                    </p:cTn>
-                  </p:par>
-                  <p:par>
-                    <p:cTn id="17" fill="hold">
-                      <p:stCondLst>
-                        <p:cond delay="0"/>
-                      </p:stCondLst>
-                      <p:childTnLst>
-                        <p:par>
-                          <p:cTn id="18" presetID="1" presetClass="entr" presetSubtype="0" fill="hold">
-                            <p:stCondLst>
-                              <p:cond delay="0"/>
-                            </p:stCondLst>
-                            <p:childTnLst>
-                              <p:set>
-                                <p:cBhvr>
-                                  <p:cTn id="19" dur="1" fill="hold">
-                                    <p:stCondLst>
-                                      <p:cond delay="0"/>
-                                    </p:stCondLst>
-                                  </p:cTn>
-                                  <p:tgtEl>
-                                    <p:spTgt spid="13"/>
-                                  </p:tgtEl>
-                                  <p:attrNameLst>
-                                    <p:attrName>style.visibility</p:attrName>
-                                  </p:attrNameLst>
-                                </p:cBhvr>
-                                <p:to>
-                                  <p:strVal val="visible"/>
-                                </p:to>
-                              </p:set>
-                            </p:childTnLst>
-                          </p:cTn>
-                        </p:par>
-                        <p:par>
-                          <p:cTn id="20" presetID="1" presetClass="entr" presetSubtype="0" fill="hold">
-                            <p:stCondLst>
-                              <p:cond delay="0"/>
-                            </p:stCondLst>
-                            <p:childTnLst>
-                              <p:set>
-                                <p:cBhvr>
-                                  <p:cTn id="21" dur="1" fill="hold">
-                                    <p:stCondLst>
-                                      <p:cond delay="0"/>
-                                    </p:stCondLst>
-                                  </p:cTn>
-                                  <p:tgtEl>
-                                    <p:spTgt spid="14"/>
-                                  </p:tgtEl>
-                                  <p:attrNameLst>
-                                    <p:attrName>style.visibility</p:attrName>
-                                  </p:attrNameLst>
-                                </p:cBhvr>
-                                <p:to>
-                                  <p:strVal val="visible"/>
-                                </p:to>
-                              </p:set>
-                            </p:childTnLst>
-                          </p:cTn>
-                        </p:par>
-                        <p:par>
-                          <p:cTn id="22" presetID="1" presetClass="entr" presetSubtype="0" fill="hold">
-                            <p:stCondLst>
-                              <p:cond delay="0"/>
-                            </p:stCondLst>
-                            <p:childTnLst>
-                              <p:set>
-                                <p:cBhvr>
-                                  <p:cTn id="23" dur="1" fill="hold">
-                                    <p:stCondLst>
-                                      <p:cond delay="0"/>
-                                    </p:stCondLst>
-                                  </p:cTn>
-                                  <p:tgtEl>
-                                    <p:spTgt spid="15"/>
-                                  </p:tgtEl>
-                                  <p:attrNameLst>
-                                    <p:attrName>style.visibility</p:attrName>
-                                  </p:attrNameLst>
-                                </p:cBhvr>
-                                <p:to>
-                                  <p:strVal val="visible"/>
-                                </p:to>
-                              </p:set>
-                            </p:childTnLst>
-                          </p:cTn>
-                        </p:par>
-                      </p:childTnLst>
-                    </p:cTn>
-                  </p:par>
-                  <p:par>
-                    <p:cTn id="24" fill="hold">
-                      <p:stCondLst>
-                        <p:cond delay="0"/>
-                      </p:stCondLst>
-                      <p:childTnLst>
-                        <p:par>
-                          <p:cTn id="25" presetID="1" presetClass="entr" presetSubtype="0" fill="hold">
-                            <p:stCondLst>
-                              <p:cond delay="0"/>
-                            </p:stCondLst>
-                            <p:childTnLst>
-                              <p:set>
-                                <p:cBhvr>
-                                  <p:cTn id="26" dur="1" fill="hold">
-                                    <p:stCondLst>
-                                      <p:cond delay="0"/>
-                                    </p:stCondLst>
-                                  </p:cTn>
-                                  <p:tgtEl>
-                                    <p:spTgt spid="16"/>
-                                  </p:tgtEl>
-                                  <p:attrNameLst>
-                                    <p:attrName>style.visibility</p:attrName>
-                                  </p:attrNameLst>
-                                </p:cBhvr>
-                                <p:to>
-                                  <p:strVal val="visible"/>
-                                </p:to>
-                              </p:set>
-                            </p:childTnLst>
-                          </p:cTn>
-                        </p:par>
-                        <p:par>
-                          <p:cTn id="27" presetID="1" presetClass="entr" presetSubtype="0" fill="hold">
-                            <p:stCondLst>
-                              <p:cond delay="0"/>
-                            </p:stCondLst>
-                            <p:childTnLst>
-                              <p:set>
-                                <p:cBhvr>
-                                  <p:cTn id="28" dur="1" fill="hold">
-                                    <p:stCondLst>
-                                      <p:cond delay="0"/>
-                                    </p:stCondLst>
-                                  </p:cTn>
-                                  <p:tgtEl>
-                                    <p:spTgt spid="17"/>
-                                  </p:tgtEl>
-                                  <p:attrNameLst>
-                                    <p:attrName>style.visibility</p:attrName>
-                                  </p:attrNameLst>
-                                </p:cBhvr>
-                                <p:to>
-                                  <p:strVal val="visible"/>
-                                </p:to>
-                              </p:set>
-                            </p:childTnLst>
-                          </p:cTn>
-                        </p:par>
-                        <p:par>
-                          <p:cTn id="29" presetID="1" presetClass="entr" presetSubtype="0" fill="hold">
-                            <p:stCondLst>
-                              <p:cond delay="0"/>
-                            </p:stCondLst>
-                            <p:childTnLst>
-                              <p:set>
-                                <p:cBhvr>
-                                  <p:cTn id="30" dur="1" fill="hold">
-                                    <p:stCondLst>
-                                      <p:cond delay="0"/>
-                                    </p:stCondLst>
-                                  </p:cTn>
-                                  <p:tgtEl>
-                                    <p:spTgt spid="18"/>
-                                  </p:tgtEl>
-                                  <p:attrNameLst>
-                                    <p:attrName>style.visibility</p:attrName>
-                                  </p:attrNameLst>
-                                </p:cBhvr>
-                                <p:to>
-                                  <p:strVal val="visible"/>
-                                </p:to>
-                              </p:set>
-                            </p:childTnLst>
-                          </p:cTn>
-                        </p:par>
-                      </p:childTnLst>
-                    </p:cTn>
-                  </p:par>
-                </p:childTnLst>
-              </p:cTn>
-              <p:prevCondLst>
-                <p:cond evt="onPrev" delay="0">
-                  <p:tgtEl>
-                    <p:sldTgt/>
-                  </p:tgtEl>
-                </p:cond>
-              </p:prevCondLst>
-              <p:nextCondLst>
-                <p:cond evt="onNext" delay="0">
-                  <p:tgtEl>
-                    <p:sldTgt/>
-                  </p:tgtEl>
-                </p:cond>
-              </p:nextCondLst>
-            </p:seq>
-          </p:childTnLst>
-        </p:cTn>
-      </p:par>
-    </p:tnLst>
-  </p:timing>
   <p:transition spd="med">
-    <p:wipe/>
+    <p:fade/>
   </p:transition>
 </p:sld>
 </file>
@@ -6959,16 +6292,176 @@
       </p:sp>
       <p:sp>
         <p:nvSpPr>
-          <p:cNvPr id="3" name="Rectangle 2"/>
+          <p:cNvPr id="3" name="Rounded Rectangle 2"/>
           <p:cNvSpPr/>
           <p:nvPr/>
         </p:nvSpPr>
         <p:spPr>
           <a:xfrm>
-            <a:off x="0" y="1097280"/>
-            <a:ext cx="12188952" cy="411479"/>
+            <a:off x="365760" y="1143000"/>
+            <a:ext cx="2926080" cy="347471"/>
+          </a:xfrm>
+          <a:prstGeom prst="roundRect">
+            <a:avLst/>
+          </a:prstGeom>
+          <a:solidFill>
+            <a:srgbClr val="BE185D"/>
+          </a:solidFill>
+          <a:ln>
+            <a:noFill/>
+          </a:ln>
+        </p:spPr>
+        <p:style>
+          <a:lnRef idx="1">
+            <a:schemeClr val="accent1"/>
+          </a:lnRef>
+          <a:fillRef idx="3">
+            <a:schemeClr val="accent1"/>
+          </a:fillRef>
+          <a:effectRef idx="2">
+            <a:schemeClr val="accent1"/>
+          </a:effectRef>
+          <a:fontRef idx="minor">
+            <a:schemeClr val="lt1"/>
+          </a:fontRef>
+        </p:style>
+        <p:txBody>
+          <a:bodyPr rtlCol="0" anchor="ctr"/>
+          <a:lstStyle/>
+          <a:p>
+            <a:pPr algn="ctr"/>
+          </a:p>
+        </p:txBody>
+      </p:sp>
+      <p:sp>
+        <p:nvSpPr>
+          <p:cNvPr id="4" name="TextBox 3"/>
+          <p:cNvSpPr txBox="1"/>
+          <p:nvPr/>
+        </p:nvSpPr>
+        <p:spPr>
+          <a:xfrm>
+            <a:off x="365760" y="1143000"/>
+            <a:ext cx="2926080" cy="347471"/>
           </a:xfrm>
           <a:prstGeom prst="rect">
+            <a:avLst/>
+          </a:prstGeom>
+          <a:noFill/>
+        </p:spPr>
+        <p:txBody>
+          <a:bodyPr wrap="square" lIns="73152" rIns="73152" tIns="54864" bIns="54864">
+            <a:spAutoFit/>
+          </a:bodyPr>
+          <a:lstStyle/>
+          <a:p>
+            <a:pPr algn="ctr">
+              <a:defRPr sz="1300" b="1">
+                <a:solidFill>
+                  <a:srgbClr val="FFFFFF"/>
+                </a:solidFill>
+                <a:latin typeface="Arial"/>
+              </a:defRPr>
+            </a:pPr>
+            <a:r>
+              <a:t>HOẠT ĐỘNG KHÁM PHÁ</a:t>
+            </a:r>
+          </a:p>
+        </p:txBody>
+      </p:sp>
+      <p:sp>
+        <p:nvSpPr>
+          <p:cNvPr id="5" name="TextBox 4"/>
+          <p:cNvSpPr txBox="1"/>
+          <p:nvPr/>
+        </p:nvSpPr>
+        <p:spPr>
+          <a:xfrm>
+            <a:off x="3474720" y="1115568"/>
+            <a:ext cx="8046720" cy="411479"/>
+          </a:xfrm>
+          <a:prstGeom prst="rect">
+            <a:avLst/>
+          </a:prstGeom>
+          <a:noFill/>
+        </p:spPr>
+        <p:txBody>
+          <a:bodyPr wrap="square" lIns="73152" rIns="73152" tIns="54864" bIns="54864">
+            <a:spAutoFit/>
+          </a:bodyPr>
+          <a:lstStyle/>
+          <a:p>
+            <a:pPr algn="l">
+              <a:defRPr sz="2100" b="1">
+                <a:solidFill>
+                  <a:srgbClr val="831843"/>
+                </a:solidFill>
+                <a:latin typeface="Arial"/>
+              </a:defRPr>
+            </a:pPr>
+            <a:r>
+              <a:t>Khám phá Cây thư mục trong File Explorer</a:t>
+            </a:r>
+          </a:p>
+        </p:txBody>
+      </p:sp>
+      <p:sp>
+        <p:nvSpPr>
+          <p:cNvPr id="6" name="Rounded Rectangle 5"/>
+          <p:cNvSpPr/>
+          <p:nvPr/>
+        </p:nvSpPr>
+        <p:spPr>
+          <a:xfrm>
+            <a:off x="365760" y="1645920"/>
+            <a:ext cx="3840480" cy="3977639"/>
+          </a:xfrm>
+          <a:prstGeom prst="roundRect">
+            <a:avLst/>
+          </a:prstGeom>
+          <a:solidFill>
+            <a:srgbClr val="FFFFFF"/>
+          </a:solidFill>
+          <a:ln w="19050">
+            <a:solidFill>
+              <a:srgbClr val="EC4899"/>
+            </a:solidFill>
+          </a:ln>
+        </p:spPr>
+        <p:style>
+          <a:lnRef idx="1">
+            <a:schemeClr val="accent1"/>
+          </a:lnRef>
+          <a:fillRef idx="3">
+            <a:schemeClr val="accent1"/>
+          </a:fillRef>
+          <a:effectRef idx="2">
+            <a:schemeClr val="accent1"/>
+          </a:effectRef>
+          <a:fontRef idx="minor">
+            <a:schemeClr val="lt1"/>
+          </a:fontRef>
+        </p:style>
+        <p:txBody>
+          <a:bodyPr rtlCol="0" anchor="ctr"/>
+          <a:lstStyle/>
+          <a:p>
+            <a:pPr algn="ctr"/>
+          </a:p>
+        </p:txBody>
+      </p:sp>
+      <p:sp>
+        <p:nvSpPr>
+          <p:cNvPr id="7" name="Rounded Rectangle 6"/>
+          <p:cNvSpPr/>
+          <p:nvPr/>
+        </p:nvSpPr>
+        <p:spPr>
+          <a:xfrm>
+            <a:off x="365760" y="1645920"/>
+            <a:ext cx="164592" cy="3977639"/>
+          </a:xfrm>
+          <a:prstGeom prst="roundRect">
             <a:avLst/>
           </a:prstGeom>
           <a:solidFill>
@@ -7002,14 +6495,14 @@
       </p:sp>
       <p:sp>
         <p:nvSpPr>
-          <p:cNvPr id="4" name="TextBox 3"/>
+          <p:cNvPr id="8" name="TextBox 7"/>
           <p:cNvSpPr txBox="1"/>
           <p:nvPr/>
         </p:nvSpPr>
         <p:spPr>
           <a:xfrm>
-            <a:off x="274320" y="1124712"/>
-            <a:ext cx="11640312" cy="365760"/>
+            <a:off x="640080" y="1783080"/>
+            <a:ext cx="3429000" cy="640080"/>
           </a:xfrm>
           <a:prstGeom prst="rect">
             <a:avLst/>
@@ -7017,34 +6510,35 @@
           <a:noFill/>
         </p:spPr>
         <p:txBody>
-          <a:bodyPr wrap="square">
+          <a:bodyPr wrap="square" lIns="73152" rIns="73152" tIns="54864" bIns="54864">
             <a:spAutoFit/>
           </a:bodyPr>
           <a:lstStyle/>
           <a:p>
-            <a:pPr algn="l"/>
-            <a:r>
-              <a:rPr sz="1300" b="1">
+            <a:pPr algn="l">
+              <a:defRPr sz="1500" b="1">
                 <a:solidFill>
-                  <a:srgbClr val="FFFFFF"/>
+                  <a:srgbClr val="0F172A"/>
                 </a:solidFill>
                 <a:latin typeface="Arial"/>
-              </a:rPr>
-              <a:t>  LỚP 5 • THỬ THÁCH</a:t>
-            </a:r>
-          </a:p>
-        </p:txBody>
-      </p:sp>
-      <p:sp>
-        <p:nvSpPr>
-          <p:cNvPr id="5" name="TextBox 4"/>
+              </a:defRPr>
+            </a:pPr>
+            <a:r>
+              <a:t>• Ngăn trái: Sơ đồ cây các ổ đĩa và thư mục</a:t>
+            </a:r>
+          </a:p>
+        </p:txBody>
+      </p:sp>
+      <p:sp>
+        <p:nvSpPr>
+          <p:cNvPr id="9" name="TextBox 8"/>
           <p:cNvSpPr txBox="1"/>
           <p:nvPr/>
         </p:nvSpPr>
         <p:spPr>
           <a:xfrm>
-            <a:off x="457200" y="1600200"/>
-            <a:ext cx="11274552" cy="594360"/>
+            <a:off x="640080" y="2468880"/>
+            <a:ext cx="3429000" cy="640080"/>
           </a:xfrm>
           <a:prstGeom prst="rect">
             <a:avLst/>
@@ -7052,34 +6546,107 @@
           <a:noFill/>
         </p:spPr>
         <p:txBody>
-          <a:bodyPr wrap="square">
+          <a:bodyPr wrap="square" lIns="73152" rIns="73152" tIns="54864" bIns="54864">
             <a:spAutoFit/>
           </a:bodyPr>
           <a:lstStyle/>
           <a:p>
-            <a:pPr algn="l"/>
-            <a:r>
-              <a:rPr sz="2600" b="1">
+            <a:pPr algn="l">
+              <a:defRPr sz="1500" b="1">
                 <a:solidFill>
-                  <a:srgbClr val="831843"/>
+                  <a:srgbClr val="0F172A"/>
                 </a:solidFill>
                 <a:latin typeface="Arial"/>
-              </a:rPr>
-              <a:t>Thử thách: Tìm nhanh tệp tin!</a:t>
-            </a:r>
-          </a:p>
-        </p:txBody>
-      </p:sp>
-      <p:sp>
-        <p:nvSpPr>
-          <p:cNvPr id="6" name="Rounded Rectangle 5"/>
+              </a:defRPr>
+            </a:pPr>
+            <a:r>
+              <a:t>• Ngăn phải: Nội dung chi tiết của thư mục đang chọn</a:t>
+            </a:r>
+          </a:p>
+        </p:txBody>
+      </p:sp>
+      <p:sp>
+        <p:nvSpPr>
+          <p:cNvPr id="10" name="TextBox 9"/>
+          <p:cNvSpPr txBox="1"/>
+          <p:nvPr/>
+        </p:nvSpPr>
+        <p:spPr>
+          <a:xfrm>
+            <a:off x="640080" y="3154680"/>
+            <a:ext cx="3429000" cy="640080"/>
+          </a:xfrm>
+          <a:prstGeom prst="rect">
+            <a:avLst/>
+          </a:prstGeom>
+          <a:noFill/>
+        </p:spPr>
+        <p:txBody>
+          <a:bodyPr wrap="square" lIns="73152" rIns="73152" tIns="54864" bIns="54864">
+            <a:spAutoFit/>
+          </a:bodyPr>
+          <a:lstStyle/>
+          <a:p>
+            <a:pPr algn="l">
+              <a:defRPr sz="1500" b="1">
+                <a:solidFill>
+                  <a:srgbClr val="0F172A"/>
+                </a:solidFill>
+                <a:latin typeface="Arial"/>
+              </a:defRPr>
+            </a:pPr>
+            <a:r>
+              <a:t>• Đường dẫn (Path): Địa chỉ chính xác của tệp</a:t>
+            </a:r>
+          </a:p>
+        </p:txBody>
+      </p:sp>
+      <p:sp>
+        <p:nvSpPr>
+          <p:cNvPr id="11" name="TextBox 10"/>
+          <p:cNvSpPr txBox="1"/>
+          <p:nvPr/>
+        </p:nvSpPr>
+        <p:spPr>
+          <a:xfrm>
+            <a:off x="640080" y="3840480"/>
+            <a:ext cx="3429000" cy="640080"/>
+          </a:xfrm>
+          <a:prstGeom prst="rect">
+            <a:avLst/>
+          </a:prstGeom>
+          <a:noFill/>
+        </p:spPr>
+        <p:txBody>
+          <a:bodyPr wrap="square" lIns="73152" rIns="73152" tIns="54864" bIns="54864">
+            <a:spAutoFit/>
+          </a:bodyPr>
+          <a:lstStyle/>
+          <a:p>
+            <a:pPr algn="l">
+              <a:defRPr sz="1500" b="1">
+                <a:solidFill>
+                  <a:srgbClr val="0F172A"/>
+                </a:solidFill>
+                <a:latin typeface="Arial"/>
+              </a:defRPr>
+            </a:pPr>
+            <a:r>
+              <a:t>• Thao tác nhanh: New folder, Rename, Delete</a:t>
+            </a:r>
+          </a:p>
+        </p:txBody>
+      </p:sp>
+      <p:sp>
+        <p:nvSpPr>
+          <p:cNvPr id="12" name="Rounded Rectangle 11"/>
           <p:cNvSpPr/>
           <p:nvPr/>
         </p:nvSpPr>
         <p:spPr>
           <a:xfrm>
-            <a:off x="365760" y="2286000"/>
-            <a:ext cx="6400800" cy="3383279"/>
+            <a:off x="4480560" y="1645920"/>
+            <a:ext cx="7223760" cy="3977639"/>
           </a:xfrm>
           <a:prstGeom prst="roundRect">
             <a:avLst/>
@@ -7087,8 +6654,10 @@
           <a:solidFill>
             <a:srgbClr val="FFFFFF"/>
           </a:solidFill>
-          <a:ln>
-            <a:noFill/>
+          <a:ln w="19050">
+            <a:solidFill>
+              <a:srgbClr val="CBD5E1"/>
+            </a:solidFill>
           </a:ln>
         </p:spPr>
         <p:style>
@@ -7113,155 +6682,9 @@
           </a:p>
         </p:txBody>
       </p:sp>
-      <p:sp>
-        <p:nvSpPr>
-          <p:cNvPr id="7" name="Rectangle 6"/>
-          <p:cNvSpPr/>
-          <p:nvPr/>
-        </p:nvSpPr>
-        <p:spPr>
-          <a:xfrm>
-            <a:off x="365760" y="2286000"/>
-            <a:ext cx="109728" cy="3383279"/>
-          </a:xfrm>
-          <a:prstGeom prst="rect">
-            <a:avLst/>
-          </a:prstGeom>
-          <a:solidFill>
-            <a:srgbClr val="EC4899"/>
-          </a:solidFill>
-          <a:ln>
-            <a:noFill/>
-          </a:ln>
-        </p:spPr>
-        <p:style>
-          <a:lnRef idx="1">
-            <a:schemeClr val="accent1"/>
-          </a:lnRef>
-          <a:fillRef idx="3">
-            <a:schemeClr val="accent1"/>
-          </a:fillRef>
-          <a:effectRef idx="2">
-            <a:schemeClr val="accent1"/>
-          </a:effectRef>
-          <a:fontRef idx="minor">
-            <a:schemeClr val="lt1"/>
-          </a:fontRef>
-        </p:style>
-        <p:txBody>
-          <a:bodyPr rtlCol="0" anchor="ctr"/>
-          <a:lstStyle/>
-          <a:p>
-            <a:pPr algn="ctr"/>
-          </a:p>
-        </p:txBody>
-      </p:sp>
-      <p:sp>
-        <p:nvSpPr>
-          <p:cNvPr id="8" name="TextBox 7"/>
-          <p:cNvSpPr txBox="1"/>
-          <p:nvPr/>
-        </p:nvSpPr>
-        <p:spPr>
-          <a:xfrm>
-            <a:off x="731520" y="2468880"/>
-            <a:ext cx="5852160" cy="3017520"/>
-          </a:xfrm>
-          <a:prstGeom prst="rect">
-            <a:avLst/>
-          </a:prstGeom>
-          <a:noFill/>
-        </p:spPr>
-        <p:txBody>
-          <a:bodyPr wrap="square">
-            <a:spAutoFit/>
-          </a:bodyPr>
-          <a:lstStyle/>
-          <a:p>
-            <a:pPr algn="l">
-              <a:spcAft>
-                <a:spcPts val="600"/>
-              </a:spcAft>
-            </a:pPr>
-            <a:r>
-              <a:rPr sz="1800" b="0">
-                <a:solidFill>
-                  <a:srgbClr val="831843"/>
-                </a:solidFill>
-                <a:latin typeface="Arial"/>
-              </a:rPr>
-              <a:t>Ghép nối đường dẫn với tệp tương ứng:</a:t>
-            </a:r>
-          </a:p>
-          <a:p>
-            <a:pPr algn="l">
-              <a:spcAft>
-                <a:spcPts val="600"/>
-              </a:spcAft>
-            </a:pPr>
-            <a:r>
-              <a:rPr sz="1800" b="0">
-                <a:solidFill>
-                  <a:srgbClr val="831843"/>
-                </a:solidFill>
-                <a:latin typeface="Arial"/>
-              </a:rPr>
-              <a:t>D:\HOC_TAP\TIN_HOC\Bai3.docx ↔ Tệp bài 3 môn Tin</a:t>
-            </a:r>
-          </a:p>
-          <a:p>
-            <a:pPr algn="l">
-              <a:spcAft>
-                <a:spcPts val="600"/>
-              </a:spcAft>
-            </a:pPr>
-            <a:r>
-              <a:rPr sz="1800" b="0">
-                <a:solidFill>
-                  <a:srgbClr val="831843"/>
-                </a:solidFill>
-                <a:latin typeface="Arial"/>
-              </a:rPr>
-              <a:t>D:\ANH_DEP\Gia_dinh.png ↔ Tệp ảnh gia đình</a:t>
-            </a:r>
-          </a:p>
-          <a:p>
-            <a:pPr algn="l">
-              <a:spcAft>
-                <a:spcPts val="600"/>
-              </a:spcAft>
-            </a:pPr>
-            <a:r>
-              <a:rPr sz="1800" b="0">
-                <a:solidFill>
-                  <a:srgbClr val="831843"/>
-                </a:solidFill>
-                <a:latin typeface="Arial"/>
-              </a:rPr>
-              <a:t>D:\AM_NHAC\Bai_hat.mp3 ↔ Tệp bài hát</a:t>
-            </a:r>
-          </a:p>
-          <a:p>
-            <a:pPr algn="l">
-              <a:spcAft>
-                <a:spcPts val="600"/>
-              </a:spcAft>
-            </a:pPr>
-            <a:r>
-              <a:rPr sz="1800" b="0">
-                <a:solidFill>
-                  <a:srgbClr val="831843"/>
-                </a:solidFill>
-                <a:latin typeface="Arial"/>
-              </a:rPr>
-              <a:t>D:\VIDEO\Hoat_hinh.mp4 ↔ Tệp video</a:t>
-            </a:r>
-          </a:p>
-        </p:txBody>
-      </p:sp>
       <p:pic>
         <p:nvPicPr>
-          <p:cNvPr id="9" name="Picture 8" descr="learn1_card1.png"/>
+          <p:cNvPr id="13" name="Picture 12" descr="sgk_lop5_bai4_file_explorer.png"/>
           <p:cNvPicPr>
             <a:picLocks noChangeAspect="1"/>
           </p:cNvPicPr>
@@ -7275,8 +6698,8 @@
         </p:blipFill>
         <p:spPr>
           <a:xfrm>
-            <a:off x="7132320" y="2377440"/>
-            <a:ext cx="4572000" cy="3200399"/>
+            <a:off x="4572000" y="1737360"/>
+            <a:ext cx="7040880" cy="3794760"/>
           </a:xfrm>
           <a:prstGeom prst="rect">
             <a:avLst/>
@@ -7289,7 +6712,7 @@
     <a:masterClrMapping/>
   </p:clrMapOvr>
   <p:transition spd="med">
-    <p:cover/>
+    <p:fade/>
   </p:transition>
 </p:sld>
 </file>
@@ -7355,53 +6778,10 @@
         </p:nvSpPr>
         <p:spPr>
           <a:xfrm>
-            <a:off x="548640" y="1188719"/>
-            <a:ext cx="11091672" cy="4480559"/>
+            <a:off x="365760" y="1188720"/>
+            <a:ext cx="11247120" cy="822960"/>
           </a:xfrm>
           <a:prstGeom prst="roundRect">
-            <a:avLst/>
-          </a:prstGeom>
-          <a:solidFill>
-            <a:srgbClr val="FFFFFF"/>
-          </a:solidFill>
-          <a:ln>
-            <a:noFill/>
-          </a:ln>
-        </p:spPr>
-        <p:style>
-          <a:lnRef idx="1">
-            <a:schemeClr val="accent1"/>
-          </a:lnRef>
-          <a:fillRef idx="3">
-            <a:schemeClr val="accent1"/>
-          </a:fillRef>
-          <a:effectRef idx="2">
-            <a:schemeClr val="accent1"/>
-          </a:effectRef>
-          <a:fontRef idx="minor">
-            <a:schemeClr val="lt1"/>
-          </a:fontRef>
-        </p:style>
-        <p:txBody>
-          <a:bodyPr rtlCol="0" anchor="ctr"/>
-          <a:lstStyle/>
-          <a:p>
-            <a:pPr algn="ctr"/>
-          </a:p>
-        </p:txBody>
-      </p:sp>
-      <p:sp>
-        <p:nvSpPr>
-          <p:cNvPr id="4" name="Rectangle 3"/>
-          <p:cNvSpPr/>
-          <p:nvPr/>
-        </p:nvSpPr>
-        <p:spPr>
-          <a:xfrm>
-            <a:off x="548640" y="1188719"/>
-            <a:ext cx="11091672" cy="91440"/>
-          </a:xfrm>
-          <a:prstGeom prst="rect">
             <a:avLst/>
           </a:prstGeom>
           <a:solidFill>
@@ -7435,14 +6815,14 @@
       </p:sp>
       <p:sp>
         <p:nvSpPr>
-          <p:cNvPr id="5" name="TextBox 4"/>
+          <p:cNvPr id="4" name="TextBox 3"/>
           <p:cNvSpPr txBox="1"/>
           <p:nvPr/>
         </p:nvSpPr>
         <p:spPr>
           <a:xfrm>
-            <a:off x="914400" y="1417319"/>
-            <a:ext cx="10360152" cy="548640"/>
+            <a:off x="640080" y="1234440"/>
+            <a:ext cx="10698480" cy="731520"/>
           </a:xfrm>
           <a:prstGeom prst="rect">
             <a:avLst/>
@@ -7450,44 +6830,45 @@
           <a:noFill/>
         </p:spPr>
         <p:txBody>
-          <a:bodyPr wrap="square">
+          <a:bodyPr wrap="square" lIns="73152" rIns="73152" tIns="54864" bIns="54864">
             <a:spAutoFit/>
           </a:bodyPr>
           <a:lstStyle/>
           <a:p>
-            <a:pPr algn="l"/>
-            <a:r>
-              <a:rPr sz="2400" b="1">
+            <a:pPr algn="l">
+              <a:defRPr sz="1800" b="1">
                 <a:solidFill>
-                  <a:srgbClr val="831843"/>
+                  <a:srgbClr val="FFFFFF"/>
                 </a:solidFill>
                 <a:latin typeface="Arial"/>
-              </a:rPr>
-              <a:t>Tóm tắt bài học 2 tiết</a:t>
-            </a:r>
-          </a:p>
-        </p:txBody>
-      </p:sp>
-      <p:sp>
-        <p:nvSpPr>
-          <p:cNvPr id="6" name="Rounded Rectangle 5"/>
+              </a:defRPr>
+            </a:pPr>
+            <a:r>
+              <a:t>❓ Tổng kết: Kỹ năng trọng tâm của Tuần 04 là gì?</a:t>
+            </a:r>
+          </a:p>
+        </p:txBody>
+      </p:sp>
+      <p:sp>
+        <p:nvSpPr>
+          <p:cNvPr id="5" name="Rounded Rectangle 4"/>
           <p:cNvSpPr/>
           <p:nvPr/>
         </p:nvSpPr>
         <p:spPr>
           <a:xfrm>
-            <a:off x="914400" y="2103120"/>
-            <a:ext cx="3331464" cy="3291839"/>
+            <a:off x="365760" y="2103120"/>
+            <a:ext cx="6400800" cy="2194559"/>
           </a:xfrm>
           <a:prstGeom prst="roundRect">
             <a:avLst/>
           </a:prstGeom>
           <a:solidFill>
-            <a:srgbClr val="FDF2F8"/>
+            <a:srgbClr val="FFFFFF"/>
           </a:solidFill>
-          <a:ln w="12700">
+          <a:ln w="19050">
             <a:solidFill>
-              <a:srgbClr val="CBD5E1"/>
+              <a:srgbClr val="EC4899"/>
             </a:solidFill>
           </a:ln>
         </p:spPr>
@@ -7515,20 +6896,20 @@
       </p:sp>
       <p:sp>
         <p:nvSpPr>
-          <p:cNvPr id="7" name="Oval 6"/>
+          <p:cNvPr id="6" name="Rounded Rectangle 5"/>
           <p:cNvSpPr/>
           <p:nvPr/>
         </p:nvSpPr>
         <p:spPr>
           <a:xfrm>
-            <a:off x="1051560" y="2240279"/>
-            <a:ext cx="411480" cy="411480"/>
-          </a:xfrm>
-          <a:prstGeom prst="ellipse">
+            <a:off x="365760" y="2103120"/>
+            <a:ext cx="164592" cy="2194559"/>
+          </a:xfrm>
+          <a:prstGeom prst="roundRect">
             <a:avLst/>
           </a:prstGeom>
           <a:solidFill>
-            <a:srgbClr val="BE185D"/>
+            <a:srgbClr val="EC4899"/>
           </a:solidFill>
           <a:ln>
             <a:noFill/>
@@ -7558,14 +6939,50 @@
       </p:sp>
       <p:sp>
         <p:nvSpPr>
+          <p:cNvPr id="7" name="TextBox 6"/>
+          <p:cNvSpPr txBox="1"/>
+          <p:nvPr/>
+        </p:nvSpPr>
+        <p:spPr>
+          <a:xfrm>
+            <a:off x="640080" y="2240280"/>
+            <a:ext cx="5943600" cy="822959"/>
+          </a:xfrm>
+          <a:prstGeom prst="rect">
+            <a:avLst/>
+          </a:prstGeom>
+          <a:noFill/>
+        </p:spPr>
+        <p:txBody>
+          <a:bodyPr wrap="square" lIns="73152" rIns="73152" tIns="54864" bIns="54864">
+            <a:spAutoFit/>
+          </a:bodyPr>
+          <a:lstStyle/>
+          <a:p>
+            <a:pPr algn="l">
+              <a:defRPr sz="1500" b="0">
+                <a:solidFill>
+                  <a:srgbClr val="0F172A"/>
+                </a:solidFill>
+                <a:latin typeface="Arial"/>
+              </a:defRPr>
+            </a:pPr>
+            <a:r>
+              <a:t>👉 Tiết 3: Thu thập và tìm kiếm thông tin chính xác bằng từ khóa.</a:t>
+            </a:r>
+          </a:p>
+        </p:txBody>
+      </p:sp>
+      <p:sp>
+        <p:nvSpPr>
           <p:cNvPr id="8" name="TextBox 7"/>
           <p:cNvSpPr txBox="1"/>
           <p:nvPr/>
         </p:nvSpPr>
         <p:spPr>
           <a:xfrm>
-            <a:off x="1051560" y="2240279"/>
-            <a:ext cx="411480" cy="411480"/>
+            <a:off x="640080" y="3200400"/>
+            <a:ext cx="5943600" cy="822960"/>
           </a:xfrm>
           <a:prstGeom prst="rect">
             <a:avLst/>
@@ -7573,77 +6990,43 @@
           <a:noFill/>
         </p:spPr>
         <p:txBody>
-          <a:bodyPr wrap="square">
+          <a:bodyPr wrap="square" lIns="73152" rIns="73152" tIns="54864" bIns="54864">
             <a:spAutoFit/>
           </a:bodyPr>
           <a:lstStyle/>
           <a:p>
-            <a:pPr algn="ctr"/>
-            <a:r>
-              <a:rPr sz="1400" b="1">
+            <a:pPr algn="l">
+              <a:defRPr sz="1500" b="0">
                 <a:solidFill>
-                  <a:srgbClr val="FFFFFF"/>
+                  <a:srgbClr val="0F172A"/>
                 </a:solidFill>
                 <a:latin typeface="Arial"/>
-              </a:rPr>
-              <a:t>1</a:t>
-            </a:r>
-          </a:p>
-        </p:txBody>
-      </p:sp>
-      <p:sp>
-        <p:nvSpPr>
-          <p:cNvPr id="9" name="TextBox 8"/>
-          <p:cNvSpPr txBox="1"/>
-          <p:nvPr/>
-        </p:nvSpPr>
-        <p:spPr>
-          <a:xfrm>
-            <a:off x="1051560" y="2743200"/>
-            <a:ext cx="3057144" cy="2514599"/>
-          </a:xfrm>
-          <a:prstGeom prst="rect">
-            <a:avLst/>
-          </a:prstGeom>
-          <a:noFill/>
-        </p:spPr>
-        <p:txBody>
-          <a:bodyPr wrap="square">
-            <a:spAutoFit/>
-          </a:bodyPr>
-          <a:lstStyle/>
-          <a:p>
-            <a:pPr algn="l"/>
-            <a:r>
-              <a:rPr sz="1700" b="0">
-                <a:solidFill>
-                  <a:srgbClr val="831843"/>
-                </a:solidFill>
-                <a:latin typeface="Arial"/>
-              </a:rPr>
-              <a:t>Kỹ năng tìm kiếm và đánh giá thông tin</a:t>
-            </a:r>
-          </a:p>
-        </p:txBody>
-      </p:sp>
-      <p:sp>
-        <p:nvSpPr>
-          <p:cNvPr id="10" name="Rounded Rectangle 9"/>
+              </a:defRPr>
+            </a:pPr>
+            <a:r>
+              <a:t>👉 Tiết 4: Sắp xếp dữ liệu ngăn nắp theo cấu trúc Cây thư mục.</a:t>
+            </a:r>
+          </a:p>
+        </p:txBody>
+      </p:sp>
+      <p:sp>
+        <p:nvSpPr>
+          <p:cNvPr id="9" name="Rounded Rectangle 8"/>
           <p:cNvSpPr/>
           <p:nvPr/>
         </p:nvSpPr>
         <p:spPr>
           <a:xfrm>
-            <a:off x="4428744" y="2103120"/>
-            <a:ext cx="3331464" cy="3291839"/>
+            <a:off x="6949440" y="2103120"/>
+            <a:ext cx="4663440" cy="2194559"/>
           </a:xfrm>
           <a:prstGeom prst="roundRect">
             <a:avLst/>
           </a:prstGeom>
           <a:solidFill>
-            <a:srgbClr val="FDF2F8"/>
+            <a:srgbClr val="FFFFFF"/>
           </a:solidFill>
-          <a:ln w="12700">
+          <a:ln w="19050">
             <a:solidFill>
               <a:srgbClr val="CBD5E1"/>
             </a:solidFill>
@@ -7671,22 +7054,46 @@
           </a:p>
         </p:txBody>
       </p:sp>
-      <p:sp>
-        <p:nvSpPr>
-          <p:cNvPr id="11" name="Oval 10"/>
+      <p:pic>
+        <p:nvPicPr>
+          <p:cNvPr id="10" name="Picture 9" descr="sgk_lop5_bai4_luyen_tap.png"/>
+          <p:cNvPicPr>
+            <a:picLocks noChangeAspect="1"/>
+          </p:cNvPicPr>
+          <p:nvPr/>
+        </p:nvPicPr>
+        <p:blipFill>
+          <a:blip r:embed="rId2"/>
+          <a:stretch>
+            <a:fillRect/>
+          </a:stretch>
+        </p:blipFill>
+        <p:spPr>
+          <a:xfrm>
+            <a:off x="7040880" y="2148840"/>
+            <a:ext cx="4480560" cy="2103120"/>
+          </a:xfrm>
+          <a:prstGeom prst="rect">
+            <a:avLst/>
+          </a:prstGeom>
+        </p:spPr>
+      </p:pic>
+      <p:sp>
+        <p:nvSpPr>
+          <p:cNvPr id="11" name="Rounded Rectangle 10"/>
           <p:cNvSpPr/>
           <p:nvPr/>
         </p:nvSpPr>
         <p:spPr>
           <a:xfrm>
-            <a:off x="4565904" y="2240279"/>
-            <a:ext cx="411480" cy="411480"/>
-          </a:xfrm>
-          <a:prstGeom prst="ellipse">
+            <a:off x="365760" y="4434840"/>
+            <a:ext cx="11247120" cy="1188719"/>
+          </a:xfrm>
+          <a:prstGeom prst="roundRect">
             <a:avLst/>
           </a:prstGeom>
           <a:solidFill>
-            <a:srgbClr val="BE185D"/>
+            <a:srgbClr val="EA580C"/>
           </a:solidFill>
           <a:ln>
             <a:noFill/>
@@ -7722,8 +7129,8 @@
         </p:nvSpPr>
         <p:spPr>
           <a:xfrm>
-            <a:off x="4565904" y="2240279"/>
-            <a:ext cx="411480" cy="411480"/>
+            <a:off x="640080" y="4480560"/>
+            <a:ext cx="10698480" cy="320039"/>
           </a:xfrm>
           <a:prstGeom prst="rect">
             <a:avLst/>
@@ -7731,213 +7138,57 @@
           <a:noFill/>
         </p:spPr>
         <p:txBody>
-          <a:bodyPr wrap="square">
+          <a:bodyPr wrap="square" lIns="73152" rIns="73152" tIns="54864" bIns="54864">
             <a:spAutoFit/>
           </a:bodyPr>
           <a:lstStyle/>
           <a:p>
-            <a:pPr algn="ctr"/>
-            <a:r>
-              <a:rPr sz="1400" b="1">
+            <a:pPr algn="l">
+              <a:defRPr sz="1400" b="1">
+                <a:solidFill>
+                  <a:srgbClr val="FEF08A"/>
+                </a:solidFill>
+                <a:latin typeface="Arial"/>
+              </a:defRPr>
+            </a:pPr>
+            <a:r>
+              <a:t>📌 GHI NHỚ TRỌNG TÂM (SGK)</a:t>
+            </a:r>
+          </a:p>
+        </p:txBody>
+      </p:sp>
+      <p:sp>
+        <p:nvSpPr>
+          <p:cNvPr id="13" name="TextBox 12"/>
+          <p:cNvSpPr txBox="1"/>
+          <p:nvPr/>
+        </p:nvSpPr>
+        <p:spPr>
+          <a:xfrm>
+            <a:off x="640080" y="4800600"/>
+            <a:ext cx="10698480" cy="777239"/>
+          </a:xfrm>
+          <a:prstGeom prst="rect">
+            <a:avLst/>
+          </a:prstGeom>
+          <a:noFill/>
+        </p:spPr>
+        <p:txBody>
+          <a:bodyPr wrap="square" lIns="73152" rIns="73152" tIns="54864" bIns="54864">
+            <a:spAutoFit/>
+          </a:bodyPr>
+          <a:lstStyle/>
+          <a:p>
+            <a:pPr algn="l">
+              <a:defRPr sz="1600" b="1">
                 <a:solidFill>
                   <a:srgbClr val="FFFFFF"/>
                 </a:solidFill>
                 <a:latin typeface="Arial"/>
-              </a:rPr>
-              <a:t>2</a:t>
-            </a:r>
-          </a:p>
-        </p:txBody>
-      </p:sp>
-      <p:sp>
-        <p:nvSpPr>
-          <p:cNvPr id="13" name="TextBox 12"/>
-          <p:cNvSpPr txBox="1"/>
-          <p:nvPr/>
-        </p:nvSpPr>
-        <p:spPr>
-          <a:xfrm>
-            <a:off x="4565904" y="2743200"/>
-            <a:ext cx="3057144" cy="2514599"/>
-          </a:xfrm>
-          <a:prstGeom prst="rect">
-            <a:avLst/>
-          </a:prstGeom>
-          <a:noFill/>
-        </p:spPr>
-        <p:txBody>
-          <a:bodyPr wrap="square">
-            <a:spAutoFit/>
-          </a:bodyPr>
-          <a:lstStyle/>
-          <a:p>
-            <a:pPr algn="l"/>
-            <a:r>
-              <a:rPr sz="1700" b="0">
-                <a:solidFill>
-                  <a:srgbClr val="831843"/>
-                </a:solidFill>
-                <a:latin typeface="Arial"/>
-              </a:rPr>
-              <a:t>Hiểu cấu trúc phân cấp của cây thư mục</a:t>
-            </a:r>
-          </a:p>
-        </p:txBody>
-      </p:sp>
-      <p:sp>
-        <p:nvSpPr>
-          <p:cNvPr id="14" name="Rounded Rectangle 13"/>
-          <p:cNvSpPr/>
-          <p:nvPr/>
-        </p:nvSpPr>
-        <p:spPr>
-          <a:xfrm>
-            <a:off x="7943088" y="2103120"/>
-            <a:ext cx="3331464" cy="3291839"/>
-          </a:xfrm>
-          <a:prstGeom prst="roundRect">
-            <a:avLst/>
-          </a:prstGeom>
-          <a:solidFill>
-            <a:srgbClr val="FDF2F8"/>
-          </a:solidFill>
-          <a:ln w="12700">
-            <a:solidFill>
-              <a:srgbClr val="CBD5E1"/>
-            </a:solidFill>
-          </a:ln>
-        </p:spPr>
-        <p:style>
-          <a:lnRef idx="1">
-            <a:schemeClr val="accent1"/>
-          </a:lnRef>
-          <a:fillRef idx="3">
-            <a:schemeClr val="accent1"/>
-          </a:fillRef>
-          <a:effectRef idx="2">
-            <a:schemeClr val="accent1"/>
-          </a:effectRef>
-          <a:fontRef idx="minor">
-            <a:schemeClr val="lt1"/>
-          </a:fontRef>
-        </p:style>
-        <p:txBody>
-          <a:bodyPr rtlCol="0" anchor="ctr"/>
-          <a:lstStyle/>
-          <a:p>
-            <a:pPr algn="ctr"/>
-          </a:p>
-        </p:txBody>
-      </p:sp>
-      <p:sp>
-        <p:nvSpPr>
-          <p:cNvPr id="15" name="Oval 14"/>
-          <p:cNvSpPr/>
-          <p:nvPr/>
-        </p:nvSpPr>
-        <p:spPr>
-          <a:xfrm>
-            <a:off x="8080248" y="2240279"/>
-            <a:ext cx="411480" cy="411480"/>
-          </a:xfrm>
-          <a:prstGeom prst="ellipse">
-            <a:avLst/>
-          </a:prstGeom>
-          <a:solidFill>
-            <a:srgbClr val="BE185D"/>
-          </a:solidFill>
-          <a:ln>
-            <a:noFill/>
-          </a:ln>
-        </p:spPr>
-        <p:style>
-          <a:lnRef idx="1">
-            <a:schemeClr val="accent1"/>
-          </a:lnRef>
-          <a:fillRef idx="3">
-            <a:schemeClr val="accent1"/>
-          </a:fillRef>
-          <a:effectRef idx="2">
-            <a:schemeClr val="accent1"/>
-          </a:effectRef>
-          <a:fontRef idx="minor">
-            <a:schemeClr val="lt1"/>
-          </a:fontRef>
-        </p:style>
-        <p:txBody>
-          <a:bodyPr rtlCol="0" anchor="ctr"/>
-          <a:lstStyle/>
-          <a:p>
-            <a:pPr algn="ctr"/>
-          </a:p>
-        </p:txBody>
-      </p:sp>
-      <p:sp>
-        <p:nvSpPr>
-          <p:cNvPr id="16" name="TextBox 15"/>
-          <p:cNvSpPr txBox="1"/>
-          <p:nvPr/>
-        </p:nvSpPr>
-        <p:spPr>
-          <a:xfrm>
-            <a:off x="8080248" y="2240279"/>
-            <a:ext cx="411480" cy="411480"/>
-          </a:xfrm>
-          <a:prstGeom prst="rect">
-            <a:avLst/>
-          </a:prstGeom>
-          <a:noFill/>
-        </p:spPr>
-        <p:txBody>
-          <a:bodyPr wrap="square">
-            <a:spAutoFit/>
-          </a:bodyPr>
-          <a:lstStyle/>
-          <a:p>
-            <a:pPr algn="ctr"/>
-            <a:r>
-              <a:rPr sz="1400" b="1">
-                <a:solidFill>
-                  <a:srgbClr val="FFFFFF"/>
-                </a:solidFill>
-                <a:latin typeface="Arial"/>
-              </a:rPr>
-              <a:t>3</a:t>
-            </a:r>
-          </a:p>
-        </p:txBody>
-      </p:sp>
-      <p:sp>
-        <p:nvSpPr>
-          <p:cNvPr id="17" name="TextBox 16"/>
-          <p:cNvSpPr txBox="1"/>
-          <p:nvPr/>
-        </p:nvSpPr>
-        <p:spPr>
-          <a:xfrm>
-            <a:off x="8080248" y="2743200"/>
-            <a:ext cx="3057144" cy="2514599"/>
-          </a:xfrm>
-          <a:prstGeom prst="rect">
-            <a:avLst/>
-          </a:prstGeom>
-          <a:noFill/>
-        </p:spPr>
-        <p:txBody>
-          <a:bodyPr wrap="square">
-            <a:spAutoFit/>
-          </a:bodyPr>
-          <a:lstStyle/>
-          <a:p>
-            <a:pPr algn="l"/>
-            <a:r>
-              <a:rPr sz="1700" b="0">
-                <a:solidFill>
-                  <a:srgbClr val="831843"/>
-                </a:solidFill>
-                <a:latin typeface="Arial"/>
-              </a:rPr>
-              <a:t>Tổ chức lưu trữ dữ liệu ngăn nắp, khoa học</a:t>
+              </a:defRPr>
+            </a:pPr>
+            <a:r>
+              <a:t>Làm chủ kỹ năng tìm kiếm và tổ chức dữ liệu giúp em trở thành người sử dụng máy tính thông minh và hiệu quả!</a:t>
             </a:r>
           </a:p>
         </p:txBody>
@@ -7948,7 +7199,7 @@
     <a:masterClrMapping/>
   </p:clrMapOvr>
   <p:transition spd="med">
-    <p:push dir="l"/>
+    <p:fade/>
   </p:transition>
 </p:sld>
 </file>
@@ -7978,6 +7229,173 @@
             <a:avLst/>
           </a:prstGeom>
           <a:solidFill>
+            <a:srgbClr val="FDF2F8"/>
+          </a:solidFill>
+          <a:ln>
+            <a:noFill/>
+          </a:ln>
+        </p:spPr>
+        <p:style>
+          <a:lnRef idx="1">
+            <a:schemeClr val="accent1"/>
+          </a:lnRef>
+          <a:fillRef idx="3">
+            <a:schemeClr val="accent1"/>
+          </a:fillRef>
+          <a:effectRef idx="2">
+            <a:schemeClr val="accent1"/>
+          </a:effectRef>
+          <a:fontRef idx="minor">
+            <a:schemeClr val="lt1"/>
+          </a:fontRef>
+        </p:style>
+        <p:txBody>
+          <a:bodyPr rtlCol="0" anchor="ctr"/>
+          <a:lstStyle/>
+          <a:p>
+            <a:pPr algn="ctr"/>
+          </a:p>
+        </p:txBody>
+      </p:sp>
+      <p:sp>
+        <p:nvSpPr>
+          <p:cNvPr id="3" name="Rounded Rectangle 2"/>
+          <p:cNvSpPr/>
+          <p:nvPr/>
+        </p:nvSpPr>
+        <p:spPr>
+          <a:xfrm>
+            <a:off x="365760" y="1143000"/>
+            <a:ext cx="2926080" cy="347471"/>
+          </a:xfrm>
+          <a:prstGeom prst="roundRect">
+            <a:avLst/>
+          </a:prstGeom>
+          <a:solidFill>
+            <a:srgbClr val="EA580C"/>
+          </a:solidFill>
+          <a:ln>
+            <a:noFill/>
+          </a:ln>
+        </p:spPr>
+        <p:style>
+          <a:lnRef idx="1">
+            <a:schemeClr val="accent1"/>
+          </a:lnRef>
+          <a:fillRef idx="3">
+            <a:schemeClr val="accent1"/>
+          </a:fillRef>
+          <a:effectRef idx="2">
+            <a:schemeClr val="accent1"/>
+          </a:effectRef>
+          <a:fontRef idx="minor">
+            <a:schemeClr val="lt1"/>
+          </a:fontRef>
+        </p:style>
+        <p:txBody>
+          <a:bodyPr rtlCol="0" anchor="ctr"/>
+          <a:lstStyle/>
+          <a:p>
+            <a:pPr algn="ctr"/>
+          </a:p>
+        </p:txBody>
+      </p:sp>
+      <p:sp>
+        <p:nvSpPr>
+          <p:cNvPr id="4" name="TextBox 3"/>
+          <p:cNvSpPr txBox="1"/>
+          <p:nvPr/>
+        </p:nvSpPr>
+        <p:spPr>
+          <a:xfrm>
+            <a:off x="365760" y="1143000"/>
+            <a:ext cx="2926080" cy="347471"/>
+          </a:xfrm>
+          <a:prstGeom prst="rect">
+            <a:avLst/>
+          </a:prstGeom>
+          <a:noFill/>
+        </p:spPr>
+        <p:txBody>
+          <a:bodyPr wrap="square" lIns="73152" rIns="73152" tIns="54864" bIns="54864">
+            <a:spAutoFit/>
+          </a:bodyPr>
+          <a:lstStyle/>
+          <a:p>
+            <a:pPr algn="ctr">
+              <a:defRPr sz="1300" b="1">
+                <a:solidFill>
+                  <a:srgbClr val="FFFFFF"/>
+                </a:solidFill>
+                <a:latin typeface="Arial"/>
+              </a:defRPr>
+            </a:pPr>
+            <a:r>
+              <a:t>LUYỆN TẬP NHANH</a:t>
+            </a:r>
+          </a:p>
+        </p:txBody>
+      </p:sp>
+      <p:sp>
+        <p:nvSpPr>
+          <p:cNvPr id="5" name="Rounded Rectangle 4"/>
+          <p:cNvSpPr/>
+          <p:nvPr/>
+        </p:nvSpPr>
+        <p:spPr>
+          <a:xfrm>
+            <a:off x="365760" y="1600200"/>
+            <a:ext cx="11247120" cy="914400"/>
+          </a:xfrm>
+          <a:prstGeom prst="roundRect">
+            <a:avLst/>
+          </a:prstGeom>
+          <a:solidFill>
+            <a:srgbClr val="FFFFFF"/>
+          </a:solidFill>
+          <a:ln w="19050">
+            <a:solidFill>
+              <a:srgbClr val="BE185D"/>
+            </a:solidFill>
+          </a:ln>
+        </p:spPr>
+        <p:style>
+          <a:lnRef idx="1">
+            <a:schemeClr val="accent1"/>
+          </a:lnRef>
+          <a:fillRef idx="3">
+            <a:schemeClr val="accent1"/>
+          </a:fillRef>
+          <a:effectRef idx="2">
+            <a:schemeClr val="accent1"/>
+          </a:effectRef>
+          <a:fontRef idx="minor">
+            <a:schemeClr val="lt1"/>
+          </a:fontRef>
+        </p:style>
+        <p:txBody>
+          <a:bodyPr rtlCol="0" anchor="ctr"/>
+          <a:lstStyle/>
+          <a:p>
+            <a:pPr algn="ctr"/>
+          </a:p>
+        </p:txBody>
+      </p:sp>
+      <p:sp>
+        <p:nvSpPr>
+          <p:cNvPr id="6" name="Rounded Rectangle 5"/>
+          <p:cNvSpPr/>
+          <p:nvPr/>
+        </p:nvSpPr>
+        <p:spPr>
+          <a:xfrm>
+            <a:off x="365760" y="1600200"/>
+            <a:ext cx="182880" cy="914400"/>
+          </a:xfrm>
+          <a:prstGeom prst="roundRect">
+            <a:avLst/>
+          </a:prstGeom>
+          <a:solidFill>
             <a:srgbClr val="BE185D"/>
           </a:solidFill>
           <a:ln>
@@ -8008,14 +7426,14 @@
       </p:sp>
       <p:sp>
         <p:nvSpPr>
-          <p:cNvPr id="3" name="TextBox 2"/>
+          <p:cNvPr id="7" name="TextBox 6"/>
           <p:cNvSpPr txBox="1"/>
           <p:nvPr/>
         </p:nvSpPr>
         <p:spPr>
           <a:xfrm>
-            <a:off x="914400" y="1828800"/>
-            <a:ext cx="10360152" cy="1097280"/>
+            <a:off x="640080" y="1691640"/>
+            <a:ext cx="10698480" cy="731520"/>
           </a:xfrm>
           <a:prstGeom prst="rect">
             <a:avLst/>
@@ -8023,34 +7441,159 @@
           <a:noFill/>
         </p:spPr>
         <p:txBody>
-          <a:bodyPr wrap="square">
+          <a:bodyPr wrap="square" lIns="73152" rIns="73152" tIns="54864" bIns="54864">
             <a:spAutoFit/>
           </a:bodyPr>
           <a:lstStyle/>
           <a:p>
+            <a:pPr algn="l">
+              <a:defRPr sz="1700" b="1">
+                <a:solidFill>
+                  <a:srgbClr val="0F172A"/>
+                </a:solidFill>
+                <a:latin typeface="Arial"/>
+              </a:defRPr>
+            </a:pPr>
+            <a:r>
+              <a:t>❓ Trong đường dẫn D:\HOC_TAP\TIN_HOC\BaiTap.docx, đâu là thư mục con?</a:t>
+            </a:r>
+          </a:p>
+        </p:txBody>
+      </p:sp>
+      <p:sp>
+        <p:nvSpPr>
+          <p:cNvPr id="8" name="Rounded Rectangle 7"/>
+          <p:cNvSpPr/>
+          <p:nvPr/>
+        </p:nvSpPr>
+        <p:spPr>
+          <a:xfrm>
+            <a:off x="365760" y="2651760"/>
+            <a:ext cx="5440680" cy="1325879"/>
+          </a:xfrm>
+          <a:prstGeom prst="roundRect">
+            <a:avLst/>
+          </a:prstGeom>
+          <a:solidFill>
+            <a:srgbClr val="FFFFFF"/>
+          </a:solidFill>
+          <a:ln w="19050">
+            <a:solidFill>
+              <a:srgbClr val="CBD5E1"/>
+            </a:solidFill>
+          </a:ln>
+        </p:spPr>
+        <p:style>
+          <a:lnRef idx="1">
+            <a:schemeClr val="accent1"/>
+          </a:lnRef>
+          <a:fillRef idx="3">
+            <a:schemeClr val="accent1"/>
+          </a:fillRef>
+          <a:effectRef idx="2">
+            <a:schemeClr val="accent1"/>
+          </a:effectRef>
+          <a:fontRef idx="minor">
+            <a:schemeClr val="lt1"/>
+          </a:fontRef>
+        </p:style>
+        <p:txBody>
+          <a:bodyPr rtlCol="0" anchor="ctr"/>
+          <a:lstStyle/>
+          <a:p>
             <a:pPr algn="ctr"/>
-            <a:r>
-              <a:rPr sz="3400" b="1">
+          </a:p>
+        </p:txBody>
+      </p:sp>
+      <p:sp>
+        <p:nvSpPr>
+          <p:cNvPr id="9" name="Oval 8"/>
+          <p:cNvSpPr/>
+          <p:nvPr/>
+        </p:nvSpPr>
+        <p:spPr>
+          <a:xfrm>
+            <a:off x="548640" y="2880360"/>
+            <a:ext cx="822960" cy="822959"/>
+          </a:xfrm>
+          <a:prstGeom prst="ellipse">
+            <a:avLst/>
+          </a:prstGeom>
+          <a:solidFill>
+            <a:srgbClr val="BE185D"/>
+          </a:solidFill>
+          <a:ln>
+            <a:noFill/>
+          </a:ln>
+        </p:spPr>
+        <p:style>
+          <a:lnRef idx="1">
+            <a:schemeClr val="accent1"/>
+          </a:lnRef>
+          <a:fillRef idx="3">
+            <a:schemeClr val="accent1"/>
+          </a:fillRef>
+          <a:effectRef idx="2">
+            <a:schemeClr val="accent1"/>
+          </a:effectRef>
+          <a:fontRef idx="minor">
+            <a:schemeClr val="lt1"/>
+          </a:fontRef>
+        </p:style>
+        <p:txBody>
+          <a:bodyPr rtlCol="0" anchor="ctr"/>
+          <a:lstStyle/>
+          <a:p>
+            <a:pPr algn="ctr"/>
+          </a:p>
+        </p:txBody>
+      </p:sp>
+      <p:sp>
+        <p:nvSpPr>
+          <p:cNvPr id="10" name="TextBox 9"/>
+          <p:cNvSpPr txBox="1"/>
+          <p:nvPr/>
+        </p:nvSpPr>
+        <p:spPr>
+          <a:xfrm>
+            <a:off x="548640" y="3063240"/>
+            <a:ext cx="822960" cy="457200"/>
+          </a:xfrm>
+          <a:prstGeom prst="rect">
+            <a:avLst/>
+          </a:prstGeom>
+          <a:noFill/>
+        </p:spPr>
+        <p:txBody>
+          <a:bodyPr wrap="square" lIns="73152" rIns="73152" tIns="54864" bIns="54864">
+            <a:spAutoFit/>
+          </a:bodyPr>
+          <a:lstStyle/>
+          <a:p>
+            <a:pPr algn="ctr">
+              <a:defRPr sz="1800" b="1">
                 <a:solidFill>
                   <a:srgbClr val="FFFFFF"/>
                 </a:solidFill>
                 <a:latin typeface="Arial"/>
-              </a:rPr>
-              <a:t>Xuất sắc! ⭐</a:t>
-            </a:r>
-          </a:p>
-        </p:txBody>
-      </p:sp>
-      <p:sp>
-        <p:nvSpPr>
-          <p:cNvPr id="4" name="TextBox 3"/>
+              </a:defRPr>
+            </a:pPr>
+            <a:r>
+              <a:t>A.</a:t>
+            </a:r>
+          </a:p>
+        </p:txBody>
+      </p:sp>
+      <p:sp>
+        <p:nvSpPr>
+          <p:cNvPr id="11" name="TextBox 10"/>
           <p:cNvSpPr txBox="1"/>
           <p:nvPr/>
         </p:nvSpPr>
         <p:spPr>
           <a:xfrm>
-            <a:off x="914400" y="3108960"/>
-            <a:ext cx="10360152" cy="1371600"/>
+            <a:off x="1508760" y="2880360"/>
+            <a:ext cx="4160520" cy="960119"/>
           </a:xfrm>
           <a:prstGeom prst="rect">
             <a:avLst/>
@@ -8058,24 +7601,501 @@
           <a:noFill/>
         </p:spPr>
         <p:txBody>
-          <a:bodyPr wrap="square">
+          <a:bodyPr wrap="square" lIns="73152" rIns="73152" tIns="54864" bIns="54864">
             <a:spAutoFit/>
           </a:bodyPr>
           <a:lstStyle/>
           <a:p>
+            <a:pPr algn="l">
+              <a:defRPr sz="1500" b="0">
+                <a:solidFill>
+                  <a:srgbClr val="0F172A"/>
+                </a:solidFill>
+                <a:latin typeface="Arial"/>
+              </a:defRPr>
+            </a:pPr>
+            <a:r>
+              <a:t>Ổ đĩa D:</a:t>
+            </a:r>
+          </a:p>
+        </p:txBody>
+      </p:sp>
+      <p:sp>
+        <p:nvSpPr>
+          <p:cNvPr id="12" name="Rounded Rectangle 11"/>
+          <p:cNvSpPr/>
+          <p:nvPr/>
+        </p:nvSpPr>
+        <p:spPr>
+          <a:xfrm>
+            <a:off x="6172200" y="2651760"/>
+            <a:ext cx="5440680" cy="1325879"/>
+          </a:xfrm>
+          <a:prstGeom prst="roundRect">
+            <a:avLst/>
+          </a:prstGeom>
+          <a:solidFill>
+            <a:srgbClr val="FFFFFF"/>
+          </a:solidFill>
+          <a:ln w="19050">
+            <a:solidFill>
+              <a:srgbClr val="CBD5E1"/>
+            </a:solidFill>
+          </a:ln>
+        </p:spPr>
+        <p:style>
+          <a:lnRef idx="1">
+            <a:schemeClr val="accent1"/>
+          </a:lnRef>
+          <a:fillRef idx="3">
+            <a:schemeClr val="accent1"/>
+          </a:fillRef>
+          <a:effectRef idx="2">
+            <a:schemeClr val="accent1"/>
+          </a:effectRef>
+          <a:fontRef idx="minor">
+            <a:schemeClr val="lt1"/>
+          </a:fontRef>
+        </p:style>
+        <p:txBody>
+          <a:bodyPr rtlCol="0" anchor="ctr"/>
+          <a:lstStyle/>
+          <a:p>
+            <a:pPr algn="ctr"/>
+          </a:p>
+        </p:txBody>
+      </p:sp>
+      <p:sp>
+        <p:nvSpPr>
+          <p:cNvPr id="13" name="Oval 12"/>
+          <p:cNvSpPr/>
+          <p:nvPr/>
+        </p:nvSpPr>
+        <p:spPr>
+          <a:xfrm>
+            <a:off x="6355080" y="2880360"/>
+            <a:ext cx="822960" cy="822959"/>
+          </a:xfrm>
+          <a:prstGeom prst="ellipse">
+            <a:avLst/>
+          </a:prstGeom>
+          <a:solidFill>
+            <a:srgbClr val="0D9488"/>
+          </a:solidFill>
+          <a:ln>
+            <a:noFill/>
+          </a:ln>
+        </p:spPr>
+        <p:style>
+          <a:lnRef idx="1">
+            <a:schemeClr val="accent1"/>
+          </a:lnRef>
+          <a:fillRef idx="3">
+            <a:schemeClr val="accent1"/>
+          </a:fillRef>
+          <a:effectRef idx="2">
+            <a:schemeClr val="accent1"/>
+          </a:effectRef>
+          <a:fontRef idx="minor">
+            <a:schemeClr val="lt1"/>
+          </a:fontRef>
+        </p:style>
+        <p:txBody>
+          <a:bodyPr rtlCol="0" anchor="ctr"/>
+          <a:lstStyle/>
+          <a:p>
+            <a:pPr algn="ctr"/>
+          </a:p>
+        </p:txBody>
+      </p:sp>
+      <p:sp>
+        <p:nvSpPr>
+          <p:cNvPr id="14" name="TextBox 13"/>
+          <p:cNvSpPr txBox="1"/>
+          <p:nvPr/>
+        </p:nvSpPr>
+        <p:spPr>
+          <a:xfrm>
+            <a:off x="6355080" y="3063240"/>
+            <a:ext cx="822960" cy="457200"/>
+          </a:xfrm>
+          <a:prstGeom prst="rect">
+            <a:avLst/>
+          </a:prstGeom>
+          <a:noFill/>
+        </p:spPr>
+        <p:txBody>
+          <a:bodyPr wrap="square" lIns="73152" rIns="73152" tIns="54864" bIns="54864">
+            <a:spAutoFit/>
+          </a:bodyPr>
+          <a:lstStyle/>
+          <a:p>
             <a:pPr algn="ctr">
-              <a:spcAft>
-                <a:spcPts val="600"/>
-              </a:spcAft>
-            </a:pPr>
-            <a:r>
-              <a:rPr sz="2000" b="0">
+              <a:defRPr sz="1800" b="1">
                 <a:solidFill>
                   <a:srgbClr val="FFFFFF"/>
                 </a:solidFill>
                 <a:latin typeface="Arial"/>
-              </a:rPr>
-              <a:t>BTVN: Sắp xếp lại các thư mục học tập trên máy tính của em!</a:t>
+              </a:defRPr>
+            </a:pPr>
+            <a:r>
+              <a:t>B.</a:t>
+            </a:r>
+          </a:p>
+        </p:txBody>
+      </p:sp>
+      <p:sp>
+        <p:nvSpPr>
+          <p:cNvPr id="15" name="TextBox 14"/>
+          <p:cNvSpPr txBox="1"/>
+          <p:nvPr/>
+        </p:nvSpPr>
+        <p:spPr>
+          <a:xfrm>
+            <a:off x="7315200" y="2880360"/>
+            <a:ext cx="4160520" cy="960119"/>
+          </a:xfrm>
+          <a:prstGeom prst="rect">
+            <a:avLst/>
+          </a:prstGeom>
+          <a:noFill/>
+        </p:spPr>
+        <p:txBody>
+          <a:bodyPr wrap="square" lIns="73152" rIns="73152" tIns="54864" bIns="54864">
+            <a:spAutoFit/>
+          </a:bodyPr>
+          <a:lstStyle/>
+          <a:p>
+            <a:pPr algn="l">
+              <a:defRPr sz="1500" b="0">
+                <a:solidFill>
+                  <a:srgbClr val="0F172A"/>
+                </a:solidFill>
+                <a:latin typeface="Arial"/>
+              </a:defRPr>
+            </a:pPr>
+            <a:r>
+              <a:t>Thư mục TIN_HOC</a:t>
+            </a:r>
+          </a:p>
+        </p:txBody>
+      </p:sp>
+      <p:sp>
+        <p:nvSpPr>
+          <p:cNvPr id="16" name="Rounded Rectangle 15"/>
+          <p:cNvSpPr/>
+          <p:nvPr/>
+        </p:nvSpPr>
+        <p:spPr>
+          <a:xfrm>
+            <a:off x="365760" y="4114800"/>
+            <a:ext cx="5440680" cy="1325880"/>
+          </a:xfrm>
+          <a:prstGeom prst="roundRect">
+            <a:avLst/>
+          </a:prstGeom>
+          <a:solidFill>
+            <a:srgbClr val="FFFFFF"/>
+          </a:solidFill>
+          <a:ln w="19050">
+            <a:solidFill>
+              <a:srgbClr val="CBD5E1"/>
+            </a:solidFill>
+          </a:ln>
+        </p:spPr>
+        <p:style>
+          <a:lnRef idx="1">
+            <a:schemeClr val="accent1"/>
+          </a:lnRef>
+          <a:fillRef idx="3">
+            <a:schemeClr val="accent1"/>
+          </a:fillRef>
+          <a:effectRef idx="2">
+            <a:schemeClr val="accent1"/>
+          </a:effectRef>
+          <a:fontRef idx="minor">
+            <a:schemeClr val="lt1"/>
+          </a:fontRef>
+        </p:style>
+        <p:txBody>
+          <a:bodyPr rtlCol="0" anchor="ctr"/>
+          <a:lstStyle/>
+          <a:p>
+            <a:pPr algn="ctr"/>
+          </a:p>
+        </p:txBody>
+      </p:sp>
+      <p:sp>
+        <p:nvSpPr>
+          <p:cNvPr id="17" name="Oval 16"/>
+          <p:cNvSpPr/>
+          <p:nvPr/>
+        </p:nvSpPr>
+        <p:spPr>
+          <a:xfrm>
+            <a:off x="548640" y="4343400"/>
+            <a:ext cx="822960" cy="822960"/>
+          </a:xfrm>
+          <a:prstGeom prst="ellipse">
+            <a:avLst/>
+          </a:prstGeom>
+          <a:solidFill>
+            <a:srgbClr val="D97706"/>
+          </a:solidFill>
+          <a:ln>
+            <a:noFill/>
+          </a:ln>
+        </p:spPr>
+        <p:style>
+          <a:lnRef idx="1">
+            <a:schemeClr val="accent1"/>
+          </a:lnRef>
+          <a:fillRef idx="3">
+            <a:schemeClr val="accent1"/>
+          </a:fillRef>
+          <a:effectRef idx="2">
+            <a:schemeClr val="accent1"/>
+          </a:effectRef>
+          <a:fontRef idx="minor">
+            <a:schemeClr val="lt1"/>
+          </a:fontRef>
+        </p:style>
+        <p:txBody>
+          <a:bodyPr rtlCol="0" anchor="ctr"/>
+          <a:lstStyle/>
+          <a:p>
+            <a:pPr algn="ctr"/>
+          </a:p>
+        </p:txBody>
+      </p:sp>
+      <p:sp>
+        <p:nvSpPr>
+          <p:cNvPr id="18" name="TextBox 17"/>
+          <p:cNvSpPr txBox="1"/>
+          <p:nvPr/>
+        </p:nvSpPr>
+        <p:spPr>
+          <a:xfrm>
+            <a:off x="548640" y="4526280"/>
+            <a:ext cx="822960" cy="457200"/>
+          </a:xfrm>
+          <a:prstGeom prst="rect">
+            <a:avLst/>
+          </a:prstGeom>
+          <a:noFill/>
+        </p:spPr>
+        <p:txBody>
+          <a:bodyPr wrap="square" lIns="73152" rIns="73152" tIns="54864" bIns="54864">
+            <a:spAutoFit/>
+          </a:bodyPr>
+          <a:lstStyle/>
+          <a:p>
+            <a:pPr algn="ctr">
+              <a:defRPr sz="1800" b="1">
+                <a:solidFill>
+                  <a:srgbClr val="FFFFFF"/>
+                </a:solidFill>
+                <a:latin typeface="Arial"/>
+              </a:defRPr>
+            </a:pPr>
+            <a:r>
+              <a:t>C.</a:t>
+            </a:r>
+          </a:p>
+        </p:txBody>
+      </p:sp>
+      <p:sp>
+        <p:nvSpPr>
+          <p:cNvPr id="19" name="TextBox 18"/>
+          <p:cNvSpPr txBox="1"/>
+          <p:nvPr/>
+        </p:nvSpPr>
+        <p:spPr>
+          <a:xfrm>
+            <a:off x="1508760" y="4343400"/>
+            <a:ext cx="4160520" cy="960119"/>
+          </a:xfrm>
+          <a:prstGeom prst="rect">
+            <a:avLst/>
+          </a:prstGeom>
+          <a:noFill/>
+        </p:spPr>
+        <p:txBody>
+          <a:bodyPr wrap="square" lIns="73152" rIns="73152" tIns="54864" bIns="54864">
+            <a:spAutoFit/>
+          </a:bodyPr>
+          <a:lstStyle/>
+          <a:p>
+            <a:pPr algn="l">
+              <a:defRPr sz="1500" b="0">
+                <a:solidFill>
+                  <a:srgbClr val="0F172A"/>
+                </a:solidFill>
+                <a:latin typeface="Arial"/>
+              </a:defRPr>
+            </a:pPr>
+            <a:r>
+              <a:t>Tệp BaiTap.docx</a:t>
+            </a:r>
+          </a:p>
+        </p:txBody>
+      </p:sp>
+      <p:sp>
+        <p:nvSpPr>
+          <p:cNvPr id="20" name="Rounded Rectangle 19"/>
+          <p:cNvSpPr/>
+          <p:nvPr/>
+        </p:nvSpPr>
+        <p:spPr>
+          <a:xfrm>
+            <a:off x="6172200" y="4114800"/>
+            <a:ext cx="5440680" cy="1325880"/>
+          </a:xfrm>
+          <a:prstGeom prst="roundRect">
+            <a:avLst/>
+          </a:prstGeom>
+          <a:solidFill>
+            <a:srgbClr val="FFFFFF"/>
+          </a:solidFill>
+          <a:ln w="19050">
+            <a:solidFill>
+              <a:srgbClr val="CBD5E1"/>
+            </a:solidFill>
+          </a:ln>
+        </p:spPr>
+        <p:style>
+          <a:lnRef idx="1">
+            <a:schemeClr val="accent1"/>
+          </a:lnRef>
+          <a:fillRef idx="3">
+            <a:schemeClr val="accent1"/>
+          </a:fillRef>
+          <a:effectRef idx="2">
+            <a:schemeClr val="accent1"/>
+          </a:effectRef>
+          <a:fontRef idx="minor">
+            <a:schemeClr val="lt1"/>
+          </a:fontRef>
+        </p:style>
+        <p:txBody>
+          <a:bodyPr rtlCol="0" anchor="ctr"/>
+          <a:lstStyle/>
+          <a:p>
+            <a:pPr algn="ctr"/>
+          </a:p>
+        </p:txBody>
+      </p:sp>
+      <p:sp>
+        <p:nvSpPr>
+          <p:cNvPr id="21" name="Oval 20"/>
+          <p:cNvSpPr/>
+          <p:nvPr/>
+        </p:nvSpPr>
+        <p:spPr>
+          <a:xfrm>
+            <a:off x="6355080" y="4343400"/>
+            <a:ext cx="822960" cy="822960"/>
+          </a:xfrm>
+          <a:prstGeom prst="ellipse">
+            <a:avLst/>
+          </a:prstGeom>
+          <a:solidFill>
+            <a:srgbClr val="7C3AED"/>
+          </a:solidFill>
+          <a:ln>
+            <a:noFill/>
+          </a:ln>
+        </p:spPr>
+        <p:style>
+          <a:lnRef idx="1">
+            <a:schemeClr val="accent1"/>
+          </a:lnRef>
+          <a:fillRef idx="3">
+            <a:schemeClr val="accent1"/>
+          </a:fillRef>
+          <a:effectRef idx="2">
+            <a:schemeClr val="accent1"/>
+          </a:effectRef>
+          <a:fontRef idx="minor">
+            <a:schemeClr val="lt1"/>
+          </a:fontRef>
+        </p:style>
+        <p:txBody>
+          <a:bodyPr rtlCol="0" anchor="ctr"/>
+          <a:lstStyle/>
+          <a:p>
+            <a:pPr algn="ctr"/>
+          </a:p>
+        </p:txBody>
+      </p:sp>
+      <p:sp>
+        <p:nvSpPr>
+          <p:cNvPr id="22" name="TextBox 21"/>
+          <p:cNvSpPr txBox="1"/>
+          <p:nvPr/>
+        </p:nvSpPr>
+        <p:spPr>
+          <a:xfrm>
+            <a:off x="6355080" y="4526280"/>
+            <a:ext cx="822960" cy="457200"/>
+          </a:xfrm>
+          <a:prstGeom prst="rect">
+            <a:avLst/>
+          </a:prstGeom>
+          <a:noFill/>
+        </p:spPr>
+        <p:txBody>
+          <a:bodyPr wrap="square" lIns="73152" rIns="73152" tIns="54864" bIns="54864">
+            <a:spAutoFit/>
+          </a:bodyPr>
+          <a:lstStyle/>
+          <a:p>
+            <a:pPr algn="ctr">
+              <a:defRPr sz="1800" b="1">
+                <a:solidFill>
+                  <a:srgbClr val="FFFFFF"/>
+                </a:solidFill>
+                <a:latin typeface="Arial"/>
+              </a:defRPr>
+            </a:pPr>
+            <a:r>
+              <a:t>D.</a:t>
+            </a:r>
+          </a:p>
+        </p:txBody>
+      </p:sp>
+      <p:sp>
+        <p:nvSpPr>
+          <p:cNvPr id="23" name="TextBox 22"/>
+          <p:cNvSpPr txBox="1"/>
+          <p:nvPr/>
+        </p:nvSpPr>
+        <p:spPr>
+          <a:xfrm>
+            <a:off x="7315200" y="4343400"/>
+            <a:ext cx="4160520" cy="960119"/>
+          </a:xfrm>
+          <a:prstGeom prst="rect">
+            <a:avLst/>
+          </a:prstGeom>
+          <a:noFill/>
+        </p:spPr>
+        <p:txBody>
+          <a:bodyPr wrap="square" lIns="73152" rIns="73152" tIns="54864" bIns="54864">
+            <a:spAutoFit/>
+          </a:bodyPr>
+          <a:lstStyle/>
+          <a:p>
+            <a:pPr algn="l">
+              <a:defRPr sz="1500" b="0">
+                <a:solidFill>
+                  <a:srgbClr val="0F172A"/>
+                </a:solidFill>
+                <a:latin typeface="Arial"/>
+              </a:defRPr>
+            </a:pPr>
+            <a:r>
+              <a:t>Thư mục gốc</a:t>
             </a:r>
           </a:p>
         </p:txBody>

--- a/KHBD_Tin_học/Lớp_5/Tuần_04/Slide_Tin_hoc_Lop_5_Bai03_04.pptx
+++ b/KHBD_Tin_học/Lớp_5/Tuần_04/Slide_Tin_hoc_Lop_5_Bai03_04.pptx
@@ -3493,7 +3493,7 @@
         <p:spPr>
           <a:xfrm>
             <a:off x="1097280" y="1463040"/>
-            <a:ext cx="9994392" cy="182879"/>
+            <a:ext cx="9994392" cy="228600"/>
           </a:xfrm>
           <a:prstGeom prst="roundRect">
             <a:avLst/>
@@ -4367,7 +4367,7 @@
               </a:defRPr>
             </a:pPr>
             <a:r>
-              <a:t>Tình huống: Chuẩn bị hành lý cho kì nghỉ hè</a:t>
+              <a:t>Tình huống: Chuẩn bị hành lý đi nghỉ hè</a:t>
             </a:r>
           </a:p>
         </p:txBody>
@@ -4381,7 +4381,7 @@
         <p:spPr>
           <a:xfrm>
             <a:off x="365760" y="1645920"/>
-            <a:ext cx="3566160" cy="3977639"/>
+            <a:ext cx="11247120" cy="2971800"/>
           </a:xfrm>
           <a:prstGeom prst="roundRect">
             <a:avLst/>
@@ -4417,88 +4417,9 @@
           </a:p>
         </p:txBody>
       </p:sp>
-      <p:sp>
-        <p:nvSpPr>
-          <p:cNvPr id="7" name="Rounded Rectangle 6"/>
-          <p:cNvSpPr/>
-          <p:nvPr/>
-        </p:nvSpPr>
-        <p:spPr>
-          <a:xfrm>
-            <a:off x="365760" y="1645920"/>
-            <a:ext cx="3566160" cy="411479"/>
-          </a:xfrm>
-          <a:prstGeom prst="roundRect">
-            <a:avLst/>
-          </a:prstGeom>
-          <a:solidFill>
-            <a:srgbClr val="BE185D"/>
-          </a:solidFill>
-          <a:ln>
-            <a:noFill/>
-          </a:ln>
-        </p:spPr>
-        <p:style>
-          <a:lnRef idx="1">
-            <a:schemeClr val="accent1"/>
-          </a:lnRef>
-          <a:fillRef idx="3">
-            <a:schemeClr val="accent1"/>
-          </a:fillRef>
-          <a:effectRef idx="2">
-            <a:schemeClr val="accent1"/>
-          </a:effectRef>
-          <a:fontRef idx="minor">
-            <a:schemeClr val="lt1"/>
-          </a:fontRef>
-        </p:style>
-        <p:txBody>
-          <a:bodyPr rtlCol="0" anchor="ctr"/>
-          <a:lstStyle/>
-          <a:p>
-            <a:pPr algn="ctr"/>
-          </a:p>
-        </p:txBody>
-      </p:sp>
-      <p:sp>
-        <p:nvSpPr>
-          <p:cNvPr id="8" name="TextBox 7"/>
-          <p:cNvSpPr txBox="1"/>
-          <p:nvPr/>
-        </p:nvSpPr>
-        <p:spPr>
-          <a:xfrm>
-            <a:off x="365760" y="1691640"/>
-            <a:ext cx="3566160" cy="365759"/>
-          </a:xfrm>
-          <a:prstGeom prst="rect">
-            <a:avLst/>
-          </a:prstGeom>
-          <a:noFill/>
-        </p:spPr>
-        <p:txBody>
-          <a:bodyPr wrap="square" lIns="73152" rIns="73152" tIns="54864" bIns="54864">
-            <a:spAutoFit/>
-          </a:bodyPr>
-          <a:lstStyle/>
-          <a:p>
-            <a:pPr algn="ctr">
-              <a:defRPr sz="1400" b="1">
-                <a:solidFill>
-                  <a:srgbClr val="FFFFFF"/>
-                </a:solidFill>
-                <a:latin typeface="Arial"/>
-              </a:defRPr>
-            </a:pPr>
-            <a:r>
-              <a:t>1. An đi Nha Trang</a:t>
-            </a:r>
-          </a:p>
-        </p:txBody>
-      </p:sp>
       <p:pic>
         <p:nvPicPr>
-          <p:cNvPr id="9" name="Picture 8" descr="sgk_lop5_bai3_khoi_dong.png"/>
+          <p:cNvPr id="7" name="Picture 6" descr="ai_lop5_bai3_travel.jpg"/>
           <p:cNvPicPr>
             <a:picLocks noChangeAspect="1"/>
           </p:cNvPicPr>
@@ -4512,14 +4433,102 @@
         </p:blipFill>
         <p:spPr>
           <a:xfrm>
-            <a:off x="502920" y="2148840"/>
-            <a:ext cx="3291840" cy="2103120"/>
+            <a:off x="457200" y="1691640"/>
+            <a:ext cx="11064240" cy="2880360"/>
           </a:xfrm>
           <a:prstGeom prst="rect">
             <a:avLst/>
           </a:prstGeom>
         </p:spPr>
       </p:pic>
+      <p:sp>
+        <p:nvSpPr>
+          <p:cNvPr id="8" name="Rounded Rectangle 7"/>
+          <p:cNvSpPr/>
+          <p:nvPr/>
+        </p:nvSpPr>
+        <p:spPr>
+          <a:xfrm>
+            <a:off x="365760" y="4709160"/>
+            <a:ext cx="11247120" cy="960119"/>
+          </a:xfrm>
+          <a:prstGeom prst="roundRect">
+            <a:avLst/>
+          </a:prstGeom>
+          <a:solidFill>
+            <a:srgbClr val="FFFFFF"/>
+          </a:solidFill>
+          <a:ln w="19050">
+            <a:solidFill>
+              <a:srgbClr val="BE185D"/>
+            </a:solidFill>
+          </a:ln>
+        </p:spPr>
+        <p:style>
+          <a:lnRef idx="1">
+            <a:schemeClr val="accent1"/>
+          </a:lnRef>
+          <a:fillRef idx="3">
+            <a:schemeClr val="accent1"/>
+          </a:fillRef>
+          <a:effectRef idx="2">
+            <a:schemeClr val="accent1"/>
+          </a:effectRef>
+          <a:fontRef idx="minor">
+            <a:schemeClr val="lt1"/>
+          </a:fontRef>
+        </p:style>
+        <p:txBody>
+          <a:bodyPr rtlCol="0" anchor="ctr"/>
+          <a:lstStyle/>
+          <a:p>
+            <a:pPr algn="ctr"/>
+          </a:p>
+        </p:txBody>
+      </p:sp>
+      <p:sp>
+        <p:nvSpPr>
+          <p:cNvPr id="9" name="Rounded Rectangle 8"/>
+          <p:cNvSpPr/>
+          <p:nvPr/>
+        </p:nvSpPr>
+        <p:spPr>
+          <a:xfrm>
+            <a:off x="365760" y="4709160"/>
+            <a:ext cx="182880" cy="960119"/>
+          </a:xfrm>
+          <a:prstGeom prst="roundRect">
+            <a:avLst/>
+          </a:prstGeom>
+          <a:solidFill>
+            <a:srgbClr val="BE185D"/>
+          </a:solidFill>
+          <a:ln>
+            <a:noFill/>
+          </a:ln>
+        </p:spPr>
+        <p:style>
+          <a:lnRef idx="1">
+            <a:schemeClr val="accent1"/>
+          </a:lnRef>
+          <a:fillRef idx="3">
+            <a:schemeClr val="accent1"/>
+          </a:fillRef>
+          <a:effectRef idx="2">
+            <a:schemeClr val="accent1"/>
+          </a:effectRef>
+          <a:fontRef idx="minor">
+            <a:schemeClr val="lt1"/>
+          </a:fontRef>
+        </p:style>
+        <p:txBody>
+          <a:bodyPr rtlCol="0" anchor="ctr"/>
+          <a:lstStyle/>
+          <a:p>
+            <a:pPr algn="ctr"/>
+          </a:p>
+        </p:txBody>
+      </p:sp>
       <p:sp>
         <p:nvSpPr>
           <p:cNvPr id="10" name="TextBox 9"/>
@@ -4528,8 +4537,8 @@
         </p:nvSpPr>
         <p:spPr>
           <a:xfrm>
-            <a:off x="502920" y="4343400"/>
-            <a:ext cx="3291840" cy="1188719"/>
+            <a:off x="685800" y="4800600"/>
+            <a:ext cx="10607040" cy="777239"/>
           </a:xfrm>
           <a:prstGeom prst="rect">
             <a:avLst/>
@@ -4542,8 +4551,8 @@
           </a:bodyPr>
           <a:lstStyle/>
           <a:p>
-            <a:pPr algn="ctr">
-              <a:defRPr sz="1300" b="0">
+            <a:pPr algn="l">
+              <a:defRPr sz="1500" b="1">
                 <a:solidFill>
                   <a:srgbClr val="0F172A"/>
                 </a:solidFill>
@@ -4551,375 +4560,11 @@
               </a:defRPr>
             </a:pPr>
             <a:r>
-              <a:t>Nha Trang là thành phố biển, quanh năm nắng ấm. Cần đồ bơi, kem chống nắng...</a:t>
-            </a:r>
-          </a:p>
-        </p:txBody>
-      </p:sp>
-      <p:sp>
-        <p:nvSpPr>
-          <p:cNvPr id="11" name="Rounded Rectangle 10"/>
-          <p:cNvSpPr/>
-          <p:nvPr/>
-        </p:nvSpPr>
-        <p:spPr>
-          <a:xfrm>
-            <a:off x="4206240" y="1645920"/>
-            <a:ext cx="3566160" cy="3977639"/>
-          </a:xfrm>
-          <a:prstGeom prst="roundRect">
-            <a:avLst/>
-          </a:prstGeom>
-          <a:solidFill>
-            <a:srgbClr val="FFFFFF"/>
-          </a:solidFill>
-          <a:ln w="19050">
-            <a:solidFill>
-              <a:srgbClr val="EC4899"/>
-            </a:solidFill>
-          </a:ln>
-        </p:spPr>
-        <p:style>
-          <a:lnRef idx="1">
-            <a:schemeClr val="accent1"/>
-          </a:lnRef>
-          <a:fillRef idx="3">
-            <a:schemeClr val="accent1"/>
-          </a:fillRef>
-          <a:effectRef idx="2">
-            <a:schemeClr val="accent1"/>
-          </a:effectRef>
-          <a:fontRef idx="minor">
-            <a:schemeClr val="lt1"/>
-          </a:fontRef>
-        </p:style>
-        <p:txBody>
-          <a:bodyPr rtlCol="0" anchor="ctr"/>
-          <a:lstStyle/>
-          <a:p>
-            <a:pPr algn="ctr"/>
-          </a:p>
-        </p:txBody>
-      </p:sp>
-      <p:sp>
-        <p:nvSpPr>
-          <p:cNvPr id="12" name="Rounded Rectangle 11"/>
-          <p:cNvSpPr/>
-          <p:nvPr/>
-        </p:nvSpPr>
-        <p:spPr>
-          <a:xfrm>
-            <a:off x="4206240" y="1645920"/>
-            <a:ext cx="3566160" cy="411479"/>
-          </a:xfrm>
-          <a:prstGeom prst="roundRect">
-            <a:avLst/>
-          </a:prstGeom>
-          <a:solidFill>
-            <a:srgbClr val="BE185D"/>
-          </a:solidFill>
-          <a:ln>
-            <a:noFill/>
-          </a:ln>
-        </p:spPr>
-        <p:style>
-          <a:lnRef idx="1">
-            <a:schemeClr val="accent1"/>
-          </a:lnRef>
-          <a:fillRef idx="3">
-            <a:schemeClr val="accent1"/>
-          </a:fillRef>
-          <a:effectRef idx="2">
-            <a:schemeClr val="accent1"/>
-          </a:effectRef>
-          <a:fontRef idx="minor">
-            <a:schemeClr val="lt1"/>
-          </a:fontRef>
-        </p:style>
-        <p:txBody>
-          <a:bodyPr rtlCol="0" anchor="ctr"/>
-          <a:lstStyle/>
-          <a:p>
-            <a:pPr algn="ctr"/>
-          </a:p>
-        </p:txBody>
-      </p:sp>
-      <p:sp>
-        <p:nvSpPr>
-          <p:cNvPr id="13" name="TextBox 12"/>
-          <p:cNvSpPr txBox="1"/>
-          <p:nvPr/>
-        </p:nvSpPr>
-        <p:spPr>
-          <a:xfrm>
-            <a:off x="4206240" y="1691640"/>
-            <a:ext cx="3566160" cy="365759"/>
-          </a:xfrm>
-          <a:prstGeom prst="rect">
-            <a:avLst/>
-          </a:prstGeom>
-          <a:noFill/>
-        </p:spPr>
-        <p:txBody>
-          <a:bodyPr wrap="square" lIns="73152" rIns="73152" tIns="54864" bIns="54864">
-            <a:spAutoFit/>
-          </a:bodyPr>
-          <a:lstStyle/>
-          <a:p>
-            <a:pPr algn="ctr">
-              <a:defRPr sz="1400" b="1">
-                <a:solidFill>
-                  <a:srgbClr val="FFFFFF"/>
-                </a:solidFill>
-                <a:latin typeface="Arial"/>
-              </a:defRPr>
-            </a:pPr>
-            <a:r>
-              <a:t>2. Khoa đi Đà Lạt</a:t>
-            </a:r>
-          </a:p>
-        </p:txBody>
-      </p:sp>
-      <p:pic>
-        <p:nvPicPr>
-          <p:cNvPr id="14" name="Picture 13" descr="sgk_lop5_bai3_khoi_dong.png"/>
-          <p:cNvPicPr>
-            <a:picLocks noChangeAspect="1"/>
-          </p:cNvPicPr>
-          <p:nvPr/>
-        </p:nvPicPr>
-        <p:blipFill>
-          <a:blip r:embed="rId2"/>
-          <a:stretch>
-            <a:fillRect/>
-          </a:stretch>
-        </p:blipFill>
-        <p:spPr>
-          <a:xfrm>
-            <a:off x="4343400" y="2148840"/>
-            <a:ext cx="3291840" cy="2103120"/>
-          </a:xfrm>
-          <a:prstGeom prst="rect">
-            <a:avLst/>
-          </a:prstGeom>
-        </p:spPr>
-      </p:pic>
-      <p:sp>
-        <p:nvSpPr>
-          <p:cNvPr id="15" name="TextBox 14"/>
-          <p:cNvSpPr txBox="1"/>
-          <p:nvPr/>
-        </p:nvSpPr>
-        <p:spPr>
-          <a:xfrm>
-            <a:off x="4343400" y="4343400"/>
-            <a:ext cx="3291840" cy="1188719"/>
-          </a:xfrm>
-          <a:prstGeom prst="rect">
-            <a:avLst/>
-          </a:prstGeom>
-          <a:noFill/>
-        </p:spPr>
-        <p:txBody>
-          <a:bodyPr wrap="square" lIns="73152" rIns="73152" tIns="54864" bIns="54864">
-            <a:spAutoFit/>
-          </a:bodyPr>
-          <a:lstStyle/>
-          <a:p>
-            <a:pPr algn="ctr">
-              <a:defRPr sz="1300" b="0">
-                <a:solidFill>
-                  <a:srgbClr val="0F172A"/>
-                </a:solidFill>
-                <a:latin typeface="Arial"/>
-              </a:defRPr>
-            </a:pPr>
-            <a:r>
-              <a:t>Đà Lạt nằm ở vùng cao nguyên, đêm se lạnh. Cần áo ấm, áo khoác gió...</a:t>
-            </a:r>
-          </a:p>
-        </p:txBody>
-      </p:sp>
-      <p:sp>
-        <p:nvSpPr>
-          <p:cNvPr id="16" name="Rounded Rectangle 15"/>
-          <p:cNvSpPr/>
-          <p:nvPr/>
-        </p:nvSpPr>
-        <p:spPr>
-          <a:xfrm>
-            <a:off x="8046720" y="1645920"/>
-            <a:ext cx="3566160" cy="3977639"/>
-          </a:xfrm>
-          <a:prstGeom prst="roundRect">
-            <a:avLst/>
-          </a:prstGeom>
-          <a:solidFill>
-            <a:srgbClr val="FFFFFF"/>
-          </a:solidFill>
-          <a:ln w="19050">
-            <a:solidFill>
-              <a:srgbClr val="EC4899"/>
-            </a:solidFill>
-          </a:ln>
-        </p:spPr>
-        <p:style>
-          <a:lnRef idx="1">
-            <a:schemeClr val="accent1"/>
-          </a:lnRef>
-          <a:fillRef idx="3">
-            <a:schemeClr val="accent1"/>
-          </a:fillRef>
-          <a:effectRef idx="2">
-            <a:schemeClr val="accent1"/>
-          </a:effectRef>
-          <a:fontRef idx="minor">
-            <a:schemeClr val="lt1"/>
-          </a:fontRef>
-        </p:style>
-        <p:txBody>
-          <a:bodyPr rtlCol="0" anchor="ctr"/>
-          <a:lstStyle/>
-          <a:p>
-            <a:pPr algn="ctr"/>
-          </a:p>
-        </p:txBody>
-      </p:sp>
-      <p:sp>
-        <p:nvSpPr>
-          <p:cNvPr id="17" name="Rounded Rectangle 16"/>
-          <p:cNvSpPr/>
-          <p:nvPr/>
-        </p:nvSpPr>
-        <p:spPr>
-          <a:xfrm>
-            <a:off x="8046720" y="1645920"/>
-            <a:ext cx="3566160" cy="411479"/>
-          </a:xfrm>
-          <a:prstGeom prst="roundRect">
-            <a:avLst/>
-          </a:prstGeom>
-          <a:solidFill>
-            <a:srgbClr val="BE185D"/>
-          </a:solidFill>
-          <a:ln>
-            <a:noFill/>
-          </a:ln>
-        </p:spPr>
-        <p:style>
-          <a:lnRef idx="1">
-            <a:schemeClr val="accent1"/>
-          </a:lnRef>
-          <a:fillRef idx="3">
-            <a:schemeClr val="accent1"/>
-          </a:fillRef>
-          <a:effectRef idx="2">
-            <a:schemeClr val="accent1"/>
-          </a:effectRef>
-          <a:fontRef idx="minor">
-            <a:schemeClr val="lt1"/>
-          </a:fontRef>
-        </p:style>
-        <p:txBody>
-          <a:bodyPr rtlCol="0" anchor="ctr"/>
-          <a:lstStyle/>
-          <a:p>
-            <a:pPr algn="ctr"/>
-          </a:p>
-        </p:txBody>
-      </p:sp>
-      <p:sp>
-        <p:nvSpPr>
-          <p:cNvPr id="18" name="TextBox 17"/>
-          <p:cNvSpPr txBox="1"/>
-          <p:nvPr/>
-        </p:nvSpPr>
-        <p:spPr>
-          <a:xfrm>
-            <a:off x="8046720" y="1691640"/>
-            <a:ext cx="3566160" cy="365759"/>
-          </a:xfrm>
-          <a:prstGeom prst="rect">
-            <a:avLst/>
-          </a:prstGeom>
-          <a:noFill/>
-        </p:spPr>
-        <p:txBody>
-          <a:bodyPr wrap="square" lIns="73152" rIns="73152" tIns="54864" bIns="54864">
-            <a:spAutoFit/>
-          </a:bodyPr>
-          <a:lstStyle/>
-          <a:p>
-            <a:pPr algn="ctr">
-              <a:defRPr sz="1400" b="1">
-                <a:solidFill>
-                  <a:srgbClr val="FFFFFF"/>
-                </a:solidFill>
-                <a:latin typeface="Arial"/>
-              </a:defRPr>
-            </a:pPr>
-            <a:r>
-              <a:t>3. Minh đi Úc</a:t>
-            </a:r>
-          </a:p>
-        </p:txBody>
-      </p:sp>
-      <p:pic>
-        <p:nvPicPr>
-          <p:cNvPr id="19" name="Picture 18" descr="sgk_lop5_bai3_khoi_dong.png"/>
-          <p:cNvPicPr>
-            <a:picLocks noChangeAspect="1"/>
-          </p:cNvPicPr>
-          <p:nvPr/>
-        </p:nvPicPr>
-        <p:blipFill>
-          <a:blip r:embed="rId2"/>
-          <a:stretch>
-            <a:fillRect/>
-          </a:stretch>
-        </p:blipFill>
-        <p:spPr>
-          <a:xfrm>
-            <a:off x="8183880" y="2148840"/>
-            <a:ext cx="3291840" cy="2103120"/>
-          </a:xfrm>
-          <a:prstGeom prst="rect">
-            <a:avLst/>
-          </a:prstGeom>
-        </p:spPr>
-      </p:pic>
-      <p:sp>
-        <p:nvSpPr>
-          <p:cNvPr id="20" name="TextBox 19"/>
-          <p:cNvSpPr txBox="1"/>
-          <p:nvPr/>
-        </p:nvSpPr>
-        <p:spPr>
-          <a:xfrm>
-            <a:off x="8183880" y="4343400"/>
-            <a:ext cx="3291840" cy="1188719"/>
-          </a:xfrm>
-          <a:prstGeom prst="rect">
-            <a:avLst/>
-          </a:prstGeom>
-          <a:noFill/>
-        </p:spPr>
-        <p:txBody>
-          <a:bodyPr wrap="square" lIns="73152" rIns="73152" tIns="54864" bIns="54864">
-            <a:spAutoFit/>
-          </a:bodyPr>
-          <a:lstStyle/>
-          <a:p>
-            <a:pPr algn="ctr">
-              <a:defRPr sz="1300" b="0">
-                <a:solidFill>
-                  <a:srgbClr val="0F172A"/>
-                </a:solidFill>
-                <a:latin typeface="Arial"/>
-              </a:defRPr>
-            </a:pPr>
-            <a:r>
-              <a:t>Nước Úc ở Nam bán cầu. Mùa hè Việt Nam là mùa đông ở Úc! Cần áo phao dày.</a:t>
+              <a:t>👉 An đi biển Nha Trang (nắng nóng), Khoa đi Đà Lạt (se lạnh), Minh đi Úc (mùa đông tuyết).</a:t>
+            </a:r>
+            <a:br/>
+            <a:r>
+              <a:t>Vì sao mỗi bạn phải chuẩn bị hành lý hoàn toàn khác nhau?</a:t>
             </a:r>
           </a:p>
         </p:txBody>
@@ -5062,7 +4707,7 @@
               </a:defRPr>
             </a:pPr>
             <a:r>
-              <a:t>QUY TRÌNH &amp; THAO TÁC</a:t>
+              <a:t>HOẠT ĐỘNG KHÁM PHÁ</a:t>
             </a:r>
           </a:p>
         </p:txBody>
@@ -5098,30 +4743,32 @@
               </a:defRPr>
             </a:pPr>
             <a:r>
-              <a:t>Kỹ thuật sử dụng từ khóa tìm kiếm trên Internet</a:t>
-            </a:r>
-          </a:p>
-        </p:txBody>
-      </p:sp>
-      <p:sp>
-        <p:nvSpPr>
-          <p:cNvPr id="6" name="Chevron 5"/>
+              <a:t>Kỹ thuật sử dụng Từ khóa tìm kiếm thần kỳ</a:t>
+            </a:r>
+          </a:p>
+        </p:txBody>
+      </p:sp>
+      <p:sp>
+        <p:nvSpPr>
+          <p:cNvPr id="6" name="Rounded Rectangle 5"/>
           <p:cNvSpPr/>
           <p:nvPr/>
         </p:nvSpPr>
         <p:spPr>
           <a:xfrm>
             <a:off x="365760" y="1645920"/>
-            <a:ext cx="4754880" cy="868680"/>
-          </a:xfrm>
-          <a:prstGeom prst="chevron">
+            <a:ext cx="4023360" cy="3977639"/>
+          </a:xfrm>
+          <a:prstGeom prst="roundRect">
             <a:avLst/>
           </a:prstGeom>
           <a:solidFill>
-            <a:srgbClr val="BE185D"/>
+            <a:srgbClr val="FFFFFF"/>
           </a:solidFill>
-          <a:ln>
-            <a:noFill/>
+          <a:ln w="19050">
+            <a:solidFill>
+              <a:srgbClr val="EC4899"/>
+            </a:solidFill>
           </a:ln>
         </p:spPr>
         <p:style>
@@ -5148,52 +4795,16 @@
       </p:sp>
       <p:sp>
         <p:nvSpPr>
-          <p:cNvPr id="7" name="TextBox 6"/>
-          <p:cNvSpPr txBox="1"/>
-          <p:nvPr/>
-        </p:nvSpPr>
-        <p:spPr>
-          <a:xfrm>
-            <a:off x="640080" y="1719072"/>
-            <a:ext cx="4206240" cy="731520"/>
-          </a:xfrm>
-          <a:prstGeom prst="rect">
-            <a:avLst/>
-          </a:prstGeom>
-          <a:noFill/>
-        </p:spPr>
-        <p:txBody>
-          <a:bodyPr wrap="square" lIns="73152" rIns="73152" tIns="54864" bIns="54864">
-            <a:spAutoFit/>
-          </a:bodyPr>
-          <a:lstStyle/>
-          <a:p>
-            <a:pPr algn="l">
-              <a:defRPr sz="1400" b="1">
-                <a:solidFill>
-                  <a:srgbClr val="FFFFFF"/>
-                </a:solidFill>
-                <a:latin typeface="Arial"/>
-              </a:defRPr>
-            </a:pPr>
-            <a:r>
-              <a:t>1. Chọn từ khóa ngắn gọn, chính xác (Keyword)</a:t>
-            </a:r>
-          </a:p>
-        </p:txBody>
-      </p:sp>
-      <p:sp>
-        <p:nvSpPr>
-          <p:cNvPr id="8" name="Chevron 7"/>
+          <p:cNvPr id="7" name="Rounded Rectangle 6"/>
           <p:cNvSpPr/>
           <p:nvPr/>
         </p:nvSpPr>
         <p:spPr>
           <a:xfrm>
-            <a:off x="365760" y="2624328"/>
-            <a:ext cx="4754880" cy="868680"/>
-          </a:xfrm>
-          <a:prstGeom prst="chevron">
+            <a:off x="365760" y="1645920"/>
+            <a:ext cx="164592" cy="3977639"/>
+          </a:xfrm>
+          <a:prstGeom prst="roundRect">
             <a:avLst/>
           </a:prstGeom>
           <a:solidFill>
@@ -5227,14 +4838,14 @@
       </p:sp>
       <p:sp>
         <p:nvSpPr>
-          <p:cNvPr id="9" name="TextBox 8"/>
+          <p:cNvPr id="8" name="TextBox 7"/>
           <p:cNvSpPr txBox="1"/>
           <p:nvPr/>
         </p:nvSpPr>
         <p:spPr>
           <a:xfrm>
-            <a:off x="640080" y="2697480"/>
-            <a:ext cx="4206240" cy="731519"/>
+            <a:off x="640080" y="1783080"/>
+            <a:ext cx="3611880" cy="640080"/>
           </a:xfrm>
           <a:prstGeom prst="rect">
             <a:avLst/>
@@ -5248,72 +4859,29 @@
           <a:lstStyle/>
           <a:p>
             <a:pPr algn="l">
-              <a:defRPr sz="1400" b="1">
+              <a:defRPr sz="1500" b="1">
                 <a:solidFill>
-                  <a:srgbClr val="FFFFFF"/>
+                  <a:srgbClr val="0F172A"/>
                 </a:solidFill>
                 <a:latin typeface="Arial"/>
               </a:defRPr>
             </a:pPr>
             <a:r>
-              <a:t>2. Đặt từ khóa trong dấu ngoặc kép " " để tìm chuẩn xác</a:t>
-            </a:r>
-          </a:p>
-        </p:txBody>
-      </p:sp>
-      <p:sp>
-        <p:nvSpPr>
-          <p:cNvPr id="10" name="Chevron 9"/>
-          <p:cNvSpPr/>
-          <p:nvPr/>
-        </p:nvSpPr>
-        <p:spPr>
-          <a:xfrm>
-            <a:off x="365760" y="3602736"/>
-            <a:ext cx="4754880" cy="868679"/>
-          </a:xfrm>
-          <a:prstGeom prst="chevron">
-            <a:avLst/>
-          </a:prstGeom>
-          <a:solidFill>
-            <a:srgbClr val="0D9488"/>
-          </a:solidFill>
-          <a:ln>
-            <a:noFill/>
-          </a:ln>
-        </p:spPr>
-        <p:style>
-          <a:lnRef idx="1">
-            <a:schemeClr val="accent1"/>
-          </a:lnRef>
-          <a:fillRef idx="3">
-            <a:schemeClr val="accent1"/>
-          </a:fillRef>
-          <a:effectRef idx="2">
-            <a:schemeClr val="accent1"/>
-          </a:effectRef>
-          <a:fontRef idx="minor">
-            <a:schemeClr val="lt1"/>
-          </a:fontRef>
-        </p:style>
-        <p:txBody>
-          <a:bodyPr rtlCol="0" anchor="ctr"/>
-          <a:lstStyle/>
-          <a:p>
-            <a:pPr algn="ctr"/>
-          </a:p>
-        </p:txBody>
-      </p:sp>
-      <p:sp>
-        <p:nvSpPr>
-          <p:cNvPr id="11" name="TextBox 10"/>
+              <a:t>• Chọn từ khóa ngắn gọn, chính xác</a:t>
+            </a:r>
+          </a:p>
+        </p:txBody>
+      </p:sp>
+      <p:sp>
+        <p:nvSpPr>
+          <p:cNvPr id="9" name="TextBox 8"/>
           <p:cNvSpPr txBox="1"/>
           <p:nvPr/>
         </p:nvSpPr>
         <p:spPr>
           <a:xfrm>
-            <a:off x="640080" y="3675887"/>
-            <a:ext cx="4206240" cy="731519"/>
+            <a:off x="640080" y="2468880"/>
+            <a:ext cx="3611880" cy="640080"/>
           </a:xfrm>
           <a:prstGeom prst="rect">
             <a:avLst/>
@@ -5327,72 +4895,29 @@
           <a:lstStyle/>
           <a:p>
             <a:pPr algn="l">
-              <a:defRPr sz="1400" b="1">
+              <a:defRPr sz="1500" b="1">
                 <a:solidFill>
-                  <a:srgbClr val="FFFFFF"/>
+                  <a:srgbClr val="0F172A"/>
                 </a:solidFill>
                 <a:latin typeface="Arial"/>
               </a:defRPr>
             </a:pPr>
             <a:r>
-              <a:t>3. Chọn lọc từ website tin cậy (.gov.vn, .edu.vn)</a:t>
-            </a:r>
-          </a:p>
-        </p:txBody>
-      </p:sp>
-      <p:sp>
-        <p:nvSpPr>
-          <p:cNvPr id="12" name="Chevron 11"/>
-          <p:cNvSpPr/>
-          <p:nvPr/>
-        </p:nvSpPr>
-        <p:spPr>
-          <a:xfrm>
-            <a:off x="365760" y="4581144"/>
-            <a:ext cx="4754880" cy="868680"/>
-          </a:xfrm>
-          <a:prstGeom prst="chevron">
-            <a:avLst/>
-          </a:prstGeom>
-          <a:solidFill>
-            <a:srgbClr val="D97706"/>
-          </a:solidFill>
-          <a:ln>
-            <a:noFill/>
-          </a:ln>
-        </p:spPr>
-        <p:style>
-          <a:lnRef idx="1">
-            <a:schemeClr val="accent1"/>
-          </a:lnRef>
-          <a:fillRef idx="3">
-            <a:schemeClr val="accent1"/>
-          </a:fillRef>
-          <a:effectRef idx="2">
-            <a:schemeClr val="accent1"/>
-          </a:effectRef>
-          <a:fontRef idx="minor">
-            <a:schemeClr val="lt1"/>
-          </a:fontRef>
-        </p:style>
-        <p:txBody>
-          <a:bodyPr rtlCol="0" anchor="ctr"/>
-          <a:lstStyle/>
-          <a:p>
-            <a:pPr algn="ctr"/>
-          </a:p>
-        </p:txBody>
-      </p:sp>
-      <p:sp>
-        <p:nvSpPr>
-          <p:cNvPr id="13" name="TextBox 12"/>
+              <a:t>• Đặt từ khóa trong dấu ngoặc kép " "</a:t>
+            </a:r>
+          </a:p>
+        </p:txBody>
+      </p:sp>
+      <p:sp>
+        <p:nvSpPr>
+          <p:cNvPr id="10" name="TextBox 9"/>
           <p:cNvSpPr txBox="1"/>
           <p:nvPr/>
         </p:nvSpPr>
         <p:spPr>
           <a:xfrm>
-            <a:off x="640080" y="4654296"/>
-            <a:ext cx="4206240" cy="731519"/>
+            <a:off x="640080" y="3154680"/>
+            <a:ext cx="3611880" cy="640080"/>
           </a:xfrm>
           <a:prstGeom prst="rect">
             <a:avLst/>
@@ -5406,29 +4931,65 @@
           <a:lstStyle/>
           <a:p>
             <a:pPr algn="l">
-              <a:defRPr sz="1400" b="1">
+              <a:defRPr sz="1500" b="1">
                 <a:solidFill>
-                  <a:srgbClr val="FFFFFF"/>
+                  <a:srgbClr val="0F172A"/>
                 </a:solidFill>
                 <a:latin typeface="Arial"/>
               </a:defRPr>
             </a:pPr>
             <a:r>
-              <a:t>4. Đánh giá và tổng hợp thông tin trước khi áp dụng</a:t>
-            </a:r>
-          </a:p>
-        </p:txBody>
-      </p:sp>
-      <p:sp>
-        <p:nvSpPr>
-          <p:cNvPr id="14" name="Rounded Rectangle 13"/>
+              <a:t>• Ưu tiên nguồn tin chính thống, đáng tin cậy</a:t>
+            </a:r>
+          </a:p>
+        </p:txBody>
+      </p:sp>
+      <p:sp>
+        <p:nvSpPr>
+          <p:cNvPr id="11" name="TextBox 10"/>
+          <p:cNvSpPr txBox="1"/>
+          <p:nvPr/>
+        </p:nvSpPr>
+        <p:spPr>
+          <a:xfrm>
+            <a:off x="640080" y="3840480"/>
+            <a:ext cx="3611880" cy="640080"/>
+          </a:xfrm>
+          <a:prstGeom prst="rect">
+            <a:avLst/>
+          </a:prstGeom>
+          <a:noFill/>
+        </p:spPr>
+        <p:txBody>
+          <a:bodyPr wrap="square" lIns="73152" rIns="73152" tIns="54864" bIns="54864">
+            <a:spAutoFit/>
+          </a:bodyPr>
+          <a:lstStyle/>
+          <a:p>
+            <a:pPr algn="l">
+              <a:defRPr sz="1500" b="1">
+                <a:solidFill>
+                  <a:srgbClr val="0F172A"/>
+                </a:solidFill>
+                <a:latin typeface="Arial"/>
+              </a:defRPr>
+            </a:pPr>
+            <a:r>
+              <a:t>• Giải quyết vấn đề nhanh chóng và hiệu quả</a:t>
+            </a:r>
+          </a:p>
+        </p:txBody>
+      </p:sp>
+      <p:sp>
+        <p:nvSpPr>
+          <p:cNvPr id="12" name="Rounded Rectangle 11"/>
           <p:cNvSpPr/>
           <p:nvPr/>
         </p:nvSpPr>
         <p:spPr>
           <a:xfrm>
-            <a:off x="5394960" y="1645920"/>
-            <a:ext cx="6309360" cy="3977639"/>
+            <a:off x="4663440" y="1645920"/>
+            <a:ext cx="7040880" cy="3977639"/>
           </a:xfrm>
           <a:prstGeom prst="roundRect">
             <a:avLst/>
@@ -5466,7 +5027,7 @@
       </p:sp>
       <p:pic>
         <p:nvPicPr>
-          <p:cNvPr id="15" name="Picture 14" descr="sgk_lop5_bai3_thuc_hanh_search.png"/>
+          <p:cNvPr id="13" name="Picture 12" descr="ai_lop5_bai3_search.jpg"/>
           <p:cNvPicPr>
             <a:picLocks noChangeAspect="1"/>
           </p:cNvPicPr>
@@ -5480,8 +5041,8 @@
         </p:blipFill>
         <p:spPr>
           <a:xfrm>
-            <a:off x="5486400" y="1737360"/>
-            <a:ext cx="6126480" cy="3794760"/>
+            <a:off x="4754880" y="1737360"/>
+            <a:ext cx="6858000" cy="3794760"/>
           </a:xfrm>
           <a:prstGeom prst="rect">
             <a:avLst/>
@@ -5884,7 +5445,7 @@
               </a:defRPr>
             </a:pPr>
             <a:r>
-              <a:t>HOẠT ĐỘNG KHÁM PHÁ</a:t>
+              <a:t>KHỞI ĐỘNG &amp; TÌNH HUỐNG</a:t>
             </a:r>
           </a:p>
         </p:txBody>
@@ -5920,7 +5481,7 @@
               </a:defRPr>
             </a:pPr>
             <a:r>
-              <a:t>Cấu trúc phân cấp Cây thư mục</a:t>
+              <a:t>Cây tri thức — Sơ đồ Cây thư mục kỳ diệu</a:t>
             </a:r>
           </a:p>
         </p:txBody>
@@ -5934,7 +5495,7 @@
         <p:spPr>
           <a:xfrm>
             <a:off x="365760" y="1645920"/>
-            <a:ext cx="3840480" cy="3977639"/>
+            <a:ext cx="11247120" cy="2971800"/>
           </a:xfrm>
           <a:prstGeom prst="roundRect">
             <a:avLst/>
@@ -5970,25 +5531,51 @@
           </a:p>
         </p:txBody>
       </p:sp>
-      <p:sp>
-        <p:nvSpPr>
-          <p:cNvPr id="7" name="Rounded Rectangle 6"/>
+      <p:pic>
+        <p:nvPicPr>
+          <p:cNvPr id="7" name="Picture 6" descr="ai_lop5_bai4_tree.jpg"/>
+          <p:cNvPicPr>
+            <a:picLocks noChangeAspect="1"/>
+          </p:cNvPicPr>
+          <p:nvPr/>
+        </p:nvPicPr>
+        <p:blipFill>
+          <a:blip r:embed="rId2"/>
+          <a:stretch>
+            <a:fillRect/>
+          </a:stretch>
+        </p:blipFill>
+        <p:spPr>
+          <a:xfrm>
+            <a:off x="457200" y="1691640"/>
+            <a:ext cx="11064240" cy="2880360"/>
+          </a:xfrm>
+          <a:prstGeom prst="rect">
+            <a:avLst/>
+          </a:prstGeom>
+        </p:spPr>
+      </p:pic>
+      <p:sp>
+        <p:nvSpPr>
+          <p:cNvPr id="8" name="Rounded Rectangle 7"/>
           <p:cNvSpPr/>
           <p:nvPr/>
         </p:nvSpPr>
         <p:spPr>
           <a:xfrm>
-            <a:off x="365760" y="1645920"/>
-            <a:ext cx="164592" cy="3977639"/>
+            <a:off x="365760" y="4709160"/>
+            <a:ext cx="11247120" cy="960119"/>
           </a:xfrm>
           <a:prstGeom prst="roundRect">
             <a:avLst/>
           </a:prstGeom>
           <a:solidFill>
-            <a:srgbClr val="EC4899"/>
+            <a:srgbClr val="FFFFFF"/>
           </a:solidFill>
-          <a:ln>
-            <a:noFill/>
+          <a:ln w="19050">
+            <a:solidFill>
+              <a:srgbClr val="BE185D"/>
+            </a:solidFill>
           </a:ln>
         </p:spPr>
         <p:style>
@@ -6015,14 +5602,57 @@
       </p:sp>
       <p:sp>
         <p:nvSpPr>
-          <p:cNvPr id="8" name="TextBox 7"/>
+          <p:cNvPr id="9" name="Rounded Rectangle 8"/>
+          <p:cNvSpPr/>
+          <p:nvPr/>
+        </p:nvSpPr>
+        <p:spPr>
+          <a:xfrm>
+            <a:off x="365760" y="4709160"/>
+            <a:ext cx="182880" cy="960119"/>
+          </a:xfrm>
+          <a:prstGeom prst="roundRect">
+            <a:avLst/>
+          </a:prstGeom>
+          <a:solidFill>
+            <a:srgbClr val="BE185D"/>
+          </a:solidFill>
+          <a:ln>
+            <a:noFill/>
+          </a:ln>
+        </p:spPr>
+        <p:style>
+          <a:lnRef idx="1">
+            <a:schemeClr val="accent1"/>
+          </a:lnRef>
+          <a:fillRef idx="3">
+            <a:schemeClr val="accent1"/>
+          </a:fillRef>
+          <a:effectRef idx="2">
+            <a:schemeClr val="accent1"/>
+          </a:effectRef>
+          <a:fontRef idx="minor">
+            <a:schemeClr val="lt1"/>
+          </a:fontRef>
+        </p:style>
+        <p:txBody>
+          <a:bodyPr rtlCol="0" anchor="ctr"/>
+          <a:lstStyle/>
+          <a:p>
+            <a:pPr algn="ctr"/>
+          </a:p>
+        </p:txBody>
+      </p:sp>
+      <p:sp>
+        <p:nvSpPr>
+          <p:cNvPr id="10" name="TextBox 9"/>
           <p:cNvSpPr txBox="1"/>
           <p:nvPr/>
         </p:nvSpPr>
         <p:spPr>
           <a:xfrm>
-            <a:off x="640080" y="1783080"/>
-            <a:ext cx="3429000" cy="640080"/>
+            <a:off x="685800" y="4800600"/>
+            <a:ext cx="10607040" cy="777239"/>
           </a:xfrm>
           <a:prstGeom prst="rect">
             <a:avLst/>
@@ -6044,188 +5674,11 @@
               </a:defRPr>
             </a:pPr>
             <a:r>
-              <a:t>• Ổ đĩa gốc (Root): C:, D:, E:</a:t>
-            </a:r>
-          </a:p>
-        </p:txBody>
-      </p:sp>
-      <p:sp>
-        <p:nvSpPr>
-          <p:cNvPr id="9" name="TextBox 8"/>
-          <p:cNvSpPr txBox="1"/>
-          <p:nvPr/>
-        </p:nvSpPr>
-        <p:spPr>
-          <a:xfrm>
-            <a:off x="640080" y="2468880"/>
-            <a:ext cx="3429000" cy="640080"/>
-          </a:xfrm>
-          <a:prstGeom prst="rect">
-            <a:avLst/>
-          </a:prstGeom>
-          <a:noFill/>
-        </p:spPr>
-        <p:txBody>
-          <a:bodyPr wrap="square" lIns="73152" rIns="73152" tIns="54864" bIns="54864">
-            <a:spAutoFit/>
-          </a:bodyPr>
-          <a:lstStyle/>
-          <a:p>
-            <a:pPr algn="l">
-              <a:defRPr sz="1500" b="1">
-                <a:solidFill>
-                  <a:srgbClr val="0F172A"/>
-                </a:solidFill>
-                <a:latin typeface="Arial"/>
-              </a:defRPr>
-            </a:pPr>
-            <a:r>
-              <a:t>• Thư mục mẹ (Parent folder): Chứa thư mục khác</a:t>
-            </a:r>
-          </a:p>
-        </p:txBody>
-      </p:sp>
-      <p:sp>
-        <p:nvSpPr>
-          <p:cNvPr id="10" name="TextBox 9"/>
-          <p:cNvSpPr txBox="1"/>
-          <p:nvPr/>
-        </p:nvSpPr>
-        <p:spPr>
-          <a:xfrm>
-            <a:off x="640080" y="3154680"/>
-            <a:ext cx="3429000" cy="640080"/>
-          </a:xfrm>
-          <a:prstGeom prst="rect">
-            <a:avLst/>
-          </a:prstGeom>
-          <a:noFill/>
-        </p:spPr>
-        <p:txBody>
-          <a:bodyPr wrap="square" lIns="73152" rIns="73152" tIns="54864" bIns="54864">
-            <a:spAutoFit/>
-          </a:bodyPr>
-          <a:lstStyle/>
-          <a:p>
-            <a:pPr algn="l">
-              <a:defRPr sz="1500" b="1">
-                <a:solidFill>
-                  <a:srgbClr val="0F172A"/>
-                </a:solidFill>
-                <a:latin typeface="Arial"/>
-              </a:defRPr>
-            </a:pPr>
-            <a:r>
-              <a:t>• Thư mục con (Subfolder): Nằm bên trong thư mục mẹ</a:t>
-            </a:r>
-          </a:p>
-        </p:txBody>
-      </p:sp>
-      <p:sp>
-        <p:nvSpPr>
-          <p:cNvPr id="11" name="TextBox 10"/>
-          <p:cNvSpPr txBox="1"/>
-          <p:nvPr/>
-        </p:nvSpPr>
-        <p:spPr>
-          <a:xfrm>
-            <a:off x="640080" y="3840480"/>
-            <a:ext cx="3429000" cy="640080"/>
-          </a:xfrm>
-          <a:prstGeom prst="rect">
-            <a:avLst/>
-          </a:prstGeom>
-          <a:noFill/>
-        </p:spPr>
-        <p:txBody>
-          <a:bodyPr wrap="square" lIns="73152" rIns="73152" tIns="54864" bIns="54864">
-            <a:spAutoFit/>
-          </a:bodyPr>
-          <a:lstStyle/>
-          <a:p>
-            <a:pPr algn="l">
-              <a:defRPr sz="1500" b="1">
-                <a:solidFill>
-                  <a:srgbClr val="0F172A"/>
-                </a:solidFill>
-                <a:latin typeface="Arial"/>
-              </a:defRPr>
-            </a:pPr>
-            <a:r>
-              <a:t>• Tệp tin (File): Nơi lưu trữ nội dung cụ thể</a:t>
-            </a:r>
-          </a:p>
-        </p:txBody>
-      </p:sp>
-      <p:sp>
-        <p:nvSpPr>
-          <p:cNvPr id="12" name="Rounded Rectangle 11"/>
-          <p:cNvSpPr/>
-          <p:nvPr/>
-        </p:nvSpPr>
-        <p:spPr>
-          <a:xfrm>
-            <a:off x="4480560" y="1645920"/>
-            <a:ext cx="7223760" cy="3977639"/>
-          </a:xfrm>
-          <a:prstGeom prst="roundRect">
-            <a:avLst/>
-          </a:prstGeom>
-          <a:solidFill>
-            <a:srgbClr val="FFFFFF"/>
-          </a:solidFill>
-          <a:ln w="19050">
-            <a:solidFill>
-              <a:srgbClr val="CBD5E1"/>
-            </a:solidFill>
-          </a:ln>
-        </p:spPr>
-        <p:style>
-          <a:lnRef idx="1">
-            <a:schemeClr val="accent1"/>
-          </a:lnRef>
-          <a:fillRef idx="3">
-            <a:schemeClr val="accent1"/>
-          </a:fillRef>
-          <a:effectRef idx="2">
-            <a:schemeClr val="accent1"/>
-          </a:effectRef>
-          <a:fontRef idx="minor">
-            <a:schemeClr val="lt1"/>
-          </a:fontRef>
-        </p:style>
-        <p:txBody>
-          <a:bodyPr rtlCol="0" anchor="ctr"/>
-          <a:lstStyle/>
-          <a:p>
-            <a:pPr algn="ctr"/>
-          </a:p>
-        </p:txBody>
-      </p:sp>
-      <p:pic>
-        <p:nvPicPr>
-          <p:cNvPr id="13" name="Picture 12" descr="sgk_lop5_bai4_so_do_cay_thu_muc.png"/>
-          <p:cNvPicPr>
-            <a:picLocks noChangeAspect="1"/>
-          </p:cNvPicPr>
-          <p:nvPr/>
-        </p:nvPicPr>
-        <p:blipFill>
-          <a:blip r:embed="rId2"/>
-          <a:stretch>
-            <a:fillRect/>
-          </a:stretch>
-        </p:blipFill>
-        <p:spPr>
-          <a:xfrm>
-            <a:off x="4572000" y="1737360"/>
-            <a:ext cx="7040880" cy="3794760"/>
-          </a:xfrm>
-          <a:prstGeom prst="rect">
-            <a:avLst/>
-          </a:prstGeom>
-        </p:spPr>
-      </p:pic>
+              <a:t>👉 Gốc là ổ đĩa (C:, D:), Cành lớn là Thư mục mẹ, Cành nhỏ là Thư mục con, Quả là các Tệp tin!</a:t>
+            </a:r>
+          </a:p>
+        </p:txBody>
+      </p:sp>
     </p:spTree>
   </p:cSld>
   <p:clrMapOvr>
@@ -6364,7 +5817,7 @@
               </a:defRPr>
             </a:pPr>
             <a:r>
-              <a:t>HOẠT ĐỘNG KHÁM PHÁ</a:t>
+              <a:t>KIẾN THỨC CỐT LÕI</a:t>
             </a:r>
           </a:p>
         </p:txBody>
@@ -6400,7 +5853,7 @@
               </a:defRPr>
             </a:pPr>
             <a:r>
-              <a:t>Khám phá Cây thư mục trong File Explorer</a:t>
+              <a:t>Các thành phần trong Cây thư mục</a:t>
             </a:r>
           </a:p>
         </p:txBody>
@@ -6414,7 +5867,7 @@
         <p:spPr>
           <a:xfrm>
             <a:off x="365760" y="1645920"/>
-            <a:ext cx="3840480" cy="3977639"/>
+            <a:ext cx="3566160" cy="3977639"/>
           </a:xfrm>
           <a:prstGeom prst="roundRect">
             <a:avLst/>
@@ -6424,7 +5877,7 @@
           </a:solidFill>
           <a:ln w="19050">
             <a:solidFill>
-              <a:srgbClr val="EC4899"/>
+              <a:srgbClr val="BE185D"/>
             </a:solidFill>
           </a:ln>
         </p:spPr>
@@ -6459,13 +5912,13 @@
         <p:spPr>
           <a:xfrm>
             <a:off x="365760" y="1645920"/>
-            <a:ext cx="164592" cy="3977639"/>
+            <a:ext cx="3566160" cy="457199"/>
           </a:xfrm>
           <a:prstGeom prst="roundRect">
             <a:avLst/>
           </a:prstGeom>
           <a:solidFill>
-            <a:srgbClr val="EC4899"/>
+            <a:srgbClr val="BE185D"/>
           </a:solidFill>
           <a:ln>
             <a:noFill/>
@@ -6501,8 +5954,8 @@
         </p:nvSpPr>
         <p:spPr>
           <a:xfrm>
-            <a:off x="640080" y="1783080"/>
-            <a:ext cx="3429000" cy="640080"/>
+            <a:off x="365760" y="1691640"/>
+            <a:ext cx="3566160" cy="411480"/>
           </a:xfrm>
           <a:prstGeom prst="rect">
             <a:avLst/>
@@ -6515,8 +5968,44 @@
           </a:bodyPr>
           <a:lstStyle/>
           <a:p>
+            <a:pPr algn="ctr">
+              <a:defRPr sz="1500" b="1">
+                <a:solidFill>
+                  <a:srgbClr val="FFFFFF"/>
+                </a:solidFill>
+                <a:latin typeface="Arial"/>
+              </a:defRPr>
+            </a:pPr>
+            <a:r>
+              <a:t>1. Ổ đĩa gốc (Root)</a:t>
+            </a:r>
+          </a:p>
+        </p:txBody>
+      </p:sp>
+      <p:sp>
+        <p:nvSpPr>
+          <p:cNvPr id="9" name="TextBox 8"/>
+          <p:cNvSpPr txBox="1"/>
+          <p:nvPr/>
+        </p:nvSpPr>
+        <p:spPr>
+          <a:xfrm>
+            <a:off x="502920" y="2240280"/>
+            <a:ext cx="3291840" cy="594359"/>
+          </a:xfrm>
+          <a:prstGeom prst="rect">
+            <a:avLst/>
+          </a:prstGeom>
+          <a:noFill/>
+        </p:spPr>
+        <p:txBody>
+          <a:bodyPr wrap="square" lIns="73152" rIns="73152" tIns="54864" bIns="54864">
+            <a:spAutoFit/>
+          </a:bodyPr>
+          <a:lstStyle/>
+          <a:p>
             <a:pPr algn="l">
-              <a:defRPr sz="1500" b="1">
+              <a:defRPr sz="1400" b="0">
                 <a:solidFill>
                   <a:srgbClr val="0F172A"/>
                 </a:solidFill>
@@ -6524,21 +6013,21 @@
               </a:defRPr>
             </a:pPr>
             <a:r>
-              <a:t>• Ngăn trái: Sơ đồ cây các ổ đĩa và thư mục</a:t>
-            </a:r>
-          </a:p>
-        </p:txBody>
-      </p:sp>
-      <p:sp>
-        <p:nvSpPr>
-          <p:cNvPr id="9" name="TextBox 8"/>
+              <a:t>• Ổ đĩa C:, D:, E:</a:t>
+            </a:r>
+          </a:p>
+        </p:txBody>
+      </p:sp>
+      <p:sp>
+        <p:nvSpPr>
+          <p:cNvPr id="10" name="TextBox 9"/>
           <p:cNvSpPr txBox="1"/>
           <p:nvPr/>
         </p:nvSpPr>
         <p:spPr>
           <a:xfrm>
-            <a:off x="640080" y="2468880"/>
-            <a:ext cx="3429000" cy="640080"/>
+            <a:off x="502920" y="2880360"/>
+            <a:ext cx="3291840" cy="594359"/>
           </a:xfrm>
           <a:prstGeom prst="rect">
             <a:avLst/>
@@ -6552,7 +6041,7 @@
           <a:lstStyle/>
           <a:p>
             <a:pPr algn="l">
-              <a:defRPr sz="1500" b="1">
+              <a:defRPr sz="1400" b="0">
                 <a:solidFill>
                   <a:srgbClr val="0F172A"/>
                 </a:solidFill>
@@ -6560,21 +6049,109 @@
               </a:defRPr>
             </a:pPr>
             <a:r>
-              <a:t>• Ngăn phải: Nội dung chi tiết của thư mục đang chọn</a:t>
-            </a:r>
-          </a:p>
-        </p:txBody>
-      </p:sp>
-      <p:sp>
-        <p:nvSpPr>
-          <p:cNvPr id="10" name="TextBox 9"/>
+              <a:t>• Nơi chứa toàn bộ cây dữ liệu</a:t>
+            </a:r>
+          </a:p>
+        </p:txBody>
+      </p:sp>
+      <p:sp>
+        <p:nvSpPr>
+          <p:cNvPr id="11" name="Rounded Rectangle 10"/>
+          <p:cNvSpPr/>
+          <p:nvPr/>
+        </p:nvSpPr>
+        <p:spPr>
+          <a:xfrm>
+            <a:off x="4206240" y="1645920"/>
+            <a:ext cx="3566160" cy="3977639"/>
+          </a:xfrm>
+          <a:prstGeom prst="roundRect">
+            <a:avLst/>
+          </a:prstGeom>
+          <a:solidFill>
+            <a:srgbClr val="FFFFFF"/>
+          </a:solidFill>
+          <a:ln w="19050">
+            <a:solidFill>
+              <a:srgbClr val="0D9488"/>
+            </a:solidFill>
+          </a:ln>
+        </p:spPr>
+        <p:style>
+          <a:lnRef idx="1">
+            <a:schemeClr val="accent1"/>
+          </a:lnRef>
+          <a:fillRef idx="3">
+            <a:schemeClr val="accent1"/>
+          </a:fillRef>
+          <a:effectRef idx="2">
+            <a:schemeClr val="accent1"/>
+          </a:effectRef>
+          <a:fontRef idx="minor">
+            <a:schemeClr val="lt1"/>
+          </a:fontRef>
+        </p:style>
+        <p:txBody>
+          <a:bodyPr rtlCol="0" anchor="ctr"/>
+          <a:lstStyle/>
+          <a:p>
+            <a:pPr algn="ctr"/>
+          </a:p>
+        </p:txBody>
+      </p:sp>
+      <p:sp>
+        <p:nvSpPr>
+          <p:cNvPr id="12" name="Rounded Rectangle 11"/>
+          <p:cNvSpPr/>
+          <p:nvPr/>
+        </p:nvSpPr>
+        <p:spPr>
+          <a:xfrm>
+            <a:off x="4206240" y="1645920"/>
+            <a:ext cx="3566160" cy="457199"/>
+          </a:xfrm>
+          <a:prstGeom prst="roundRect">
+            <a:avLst/>
+          </a:prstGeom>
+          <a:solidFill>
+            <a:srgbClr val="0D9488"/>
+          </a:solidFill>
+          <a:ln>
+            <a:noFill/>
+          </a:ln>
+        </p:spPr>
+        <p:style>
+          <a:lnRef idx="1">
+            <a:schemeClr val="accent1"/>
+          </a:lnRef>
+          <a:fillRef idx="3">
+            <a:schemeClr val="accent1"/>
+          </a:fillRef>
+          <a:effectRef idx="2">
+            <a:schemeClr val="accent1"/>
+          </a:effectRef>
+          <a:fontRef idx="minor">
+            <a:schemeClr val="lt1"/>
+          </a:fontRef>
+        </p:style>
+        <p:txBody>
+          <a:bodyPr rtlCol="0" anchor="ctr"/>
+          <a:lstStyle/>
+          <a:p>
+            <a:pPr algn="ctr"/>
+          </a:p>
+        </p:txBody>
+      </p:sp>
+      <p:sp>
+        <p:nvSpPr>
+          <p:cNvPr id="13" name="TextBox 12"/>
           <p:cNvSpPr txBox="1"/>
           <p:nvPr/>
         </p:nvSpPr>
         <p:spPr>
           <a:xfrm>
-            <a:off x="640080" y="3154680"/>
-            <a:ext cx="3429000" cy="640080"/>
+            <a:off x="4206240" y="1691640"/>
+            <a:ext cx="3566160" cy="411480"/>
           </a:xfrm>
           <a:prstGeom prst="rect">
             <a:avLst/>
@@ -6587,8 +6164,44 @@
           </a:bodyPr>
           <a:lstStyle/>
           <a:p>
+            <a:pPr algn="ctr">
+              <a:defRPr sz="1500" b="1">
+                <a:solidFill>
+                  <a:srgbClr val="FFFFFF"/>
+                </a:solidFill>
+                <a:latin typeface="Arial"/>
+              </a:defRPr>
+            </a:pPr>
+            <a:r>
+              <a:t>2. Thư mục (Folder)</a:t>
+            </a:r>
+          </a:p>
+        </p:txBody>
+      </p:sp>
+      <p:sp>
+        <p:nvSpPr>
+          <p:cNvPr id="14" name="TextBox 13"/>
+          <p:cNvSpPr txBox="1"/>
+          <p:nvPr/>
+        </p:nvSpPr>
+        <p:spPr>
+          <a:xfrm>
+            <a:off x="4343400" y="2240280"/>
+            <a:ext cx="3291840" cy="594359"/>
+          </a:xfrm>
+          <a:prstGeom prst="rect">
+            <a:avLst/>
+          </a:prstGeom>
+          <a:noFill/>
+        </p:spPr>
+        <p:txBody>
+          <a:bodyPr wrap="square" lIns="73152" rIns="73152" tIns="54864" bIns="54864">
+            <a:spAutoFit/>
+          </a:bodyPr>
+          <a:lstStyle/>
+          <a:p>
             <a:pPr algn="l">
-              <a:defRPr sz="1500" b="1">
+              <a:defRPr sz="1400" b="0">
                 <a:solidFill>
                   <a:srgbClr val="0F172A"/>
                 </a:solidFill>
@@ -6596,21 +6209,21 @@
               </a:defRPr>
             </a:pPr>
             <a:r>
-              <a:t>• Đường dẫn (Path): Địa chỉ chính xác của tệp</a:t>
-            </a:r>
-          </a:p>
-        </p:txBody>
-      </p:sp>
-      <p:sp>
-        <p:nvSpPr>
-          <p:cNvPr id="11" name="TextBox 10"/>
+              <a:t>• Thư mục mẹ chứa thư mục con</a:t>
+            </a:r>
+          </a:p>
+        </p:txBody>
+      </p:sp>
+      <p:sp>
+        <p:nvSpPr>
+          <p:cNvPr id="15" name="TextBox 14"/>
           <p:cNvSpPr txBox="1"/>
           <p:nvPr/>
         </p:nvSpPr>
         <p:spPr>
           <a:xfrm>
-            <a:off x="640080" y="3840480"/>
-            <a:ext cx="3429000" cy="640080"/>
+            <a:off x="4343400" y="2880360"/>
+            <a:ext cx="3291840" cy="594359"/>
           </a:xfrm>
           <a:prstGeom prst="rect">
             <a:avLst/>
@@ -6624,7 +6237,7 @@
           <a:lstStyle/>
           <a:p>
             <a:pPr algn="l">
-              <a:defRPr sz="1500" b="1">
+              <a:defRPr sz="1400" b="0">
                 <a:solidFill>
                   <a:srgbClr val="0F172A"/>
                 </a:solidFill>
@@ -6632,21 +6245,21 @@
               </a:defRPr>
             </a:pPr>
             <a:r>
-              <a:t>• Thao tác nhanh: New folder, Rename, Delete</a:t>
-            </a:r>
-          </a:p>
-        </p:txBody>
-      </p:sp>
-      <p:sp>
-        <p:nvSpPr>
-          <p:cNvPr id="12" name="Rounded Rectangle 11"/>
+              <a:t>• Ví dụ: TOAN, VAN, TIN_HOC</a:t>
+            </a:r>
+          </a:p>
+        </p:txBody>
+      </p:sp>
+      <p:sp>
+        <p:nvSpPr>
+          <p:cNvPr id="16" name="Rounded Rectangle 15"/>
           <p:cNvSpPr/>
           <p:nvPr/>
         </p:nvSpPr>
         <p:spPr>
           <a:xfrm>
-            <a:off x="4480560" y="1645920"/>
-            <a:ext cx="7223760" cy="3977639"/>
+            <a:off x="8046720" y="1645920"/>
+            <a:ext cx="3566160" cy="3977639"/>
           </a:xfrm>
           <a:prstGeom prst="roundRect">
             <a:avLst/>
@@ -6656,7 +6269,7 @@
           </a:solidFill>
           <a:ln w="19050">
             <a:solidFill>
-              <a:srgbClr val="CBD5E1"/>
+              <a:srgbClr val="D97706"/>
             </a:solidFill>
           </a:ln>
         </p:spPr>
@@ -6682,30 +6295,157 @@
           </a:p>
         </p:txBody>
       </p:sp>
-      <p:pic>
-        <p:nvPicPr>
-          <p:cNvPr id="13" name="Picture 12" descr="sgk_lop5_bai4_file_explorer.png"/>
-          <p:cNvPicPr>
-            <a:picLocks noChangeAspect="1"/>
-          </p:cNvPicPr>
-          <p:nvPr/>
-        </p:nvPicPr>
-        <p:blipFill>
-          <a:blip r:embed="rId2"/>
-          <a:stretch>
-            <a:fillRect/>
-          </a:stretch>
-        </p:blipFill>
-        <p:spPr>
-          <a:xfrm>
-            <a:off x="4572000" y="1737360"/>
-            <a:ext cx="7040880" cy="3794760"/>
+      <p:sp>
+        <p:nvSpPr>
+          <p:cNvPr id="17" name="Rounded Rectangle 16"/>
+          <p:cNvSpPr/>
+          <p:nvPr/>
+        </p:nvSpPr>
+        <p:spPr>
+          <a:xfrm>
+            <a:off x="8046720" y="1645920"/>
+            <a:ext cx="3566160" cy="457199"/>
+          </a:xfrm>
+          <a:prstGeom prst="roundRect">
+            <a:avLst/>
+          </a:prstGeom>
+          <a:solidFill>
+            <a:srgbClr val="D97706"/>
+          </a:solidFill>
+          <a:ln>
+            <a:noFill/>
+          </a:ln>
+        </p:spPr>
+        <p:style>
+          <a:lnRef idx="1">
+            <a:schemeClr val="accent1"/>
+          </a:lnRef>
+          <a:fillRef idx="3">
+            <a:schemeClr val="accent1"/>
+          </a:fillRef>
+          <a:effectRef idx="2">
+            <a:schemeClr val="accent1"/>
+          </a:effectRef>
+          <a:fontRef idx="minor">
+            <a:schemeClr val="lt1"/>
+          </a:fontRef>
+        </p:style>
+        <p:txBody>
+          <a:bodyPr rtlCol="0" anchor="ctr"/>
+          <a:lstStyle/>
+          <a:p>
+            <a:pPr algn="ctr"/>
+          </a:p>
+        </p:txBody>
+      </p:sp>
+      <p:sp>
+        <p:nvSpPr>
+          <p:cNvPr id="18" name="TextBox 17"/>
+          <p:cNvSpPr txBox="1"/>
+          <p:nvPr/>
+        </p:nvSpPr>
+        <p:spPr>
+          <a:xfrm>
+            <a:off x="8046720" y="1691640"/>
+            <a:ext cx="3566160" cy="411480"/>
           </a:xfrm>
           <a:prstGeom prst="rect">
             <a:avLst/>
           </a:prstGeom>
-        </p:spPr>
-      </p:pic>
+          <a:noFill/>
+        </p:spPr>
+        <p:txBody>
+          <a:bodyPr wrap="square" lIns="73152" rIns="73152" tIns="54864" bIns="54864">
+            <a:spAutoFit/>
+          </a:bodyPr>
+          <a:lstStyle/>
+          <a:p>
+            <a:pPr algn="ctr">
+              <a:defRPr sz="1500" b="1">
+                <a:solidFill>
+                  <a:srgbClr val="FFFFFF"/>
+                </a:solidFill>
+                <a:latin typeface="Arial"/>
+              </a:defRPr>
+            </a:pPr>
+            <a:r>
+              <a:t>3. Tệp tin (File)</a:t>
+            </a:r>
+          </a:p>
+        </p:txBody>
+      </p:sp>
+      <p:sp>
+        <p:nvSpPr>
+          <p:cNvPr id="19" name="TextBox 18"/>
+          <p:cNvSpPr txBox="1"/>
+          <p:nvPr/>
+        </p:nvSpPr>
+        <p:spPr>
+          <a:xfrm>
+            <a:off x="8183880" y="2240280"/>
+            <a:ext cx="3291840" cy="594359"/>
+          </a:xfrm>
+          <a:prstGeom prst="rect">
+            <a:avLst/>
+          </a:prstGeom>
+          <a:noFill/>
+        </p:spPr>
+        <p:txBody>
+          <a:bodyPr wrap="square" lIns="73152" rIns="73152" tIns="54864" bIns="54864">
+            <a:spAutoFit/>
+          </a:bodyPr>
+          <a:lstStyle/>
+          <a:p>
+            <a:pPr algn="l">
+              <a:defRPr sz="1400" b="0">
+                <a:solidFill>
+                  <a:srgbClr val="0F172A"/>
+                </a:solidFill>
+                <a:latin typeface="Arial"/>
+              </a:defRPr>
+            </a:pPr>
+            <a:r>
+              <a:t>• Bài văn .docx, Bài giảng .pptx</a:t>
+            </a:r>
+          </a:p>
+        </p:txBody>
+      </p:sp>
+      <p:sp>
+        <p:nvSpPr>
+          <p:cNvPr id="20" name="TextBox 19"/>
+          <p:cNvSpPr txBox="1"/>
+          <p:nvPr/>
+        </p:nvSpPr>
+        <p:spPr>
+          <a:xfrm>
+            <a:off x="8183880" y="2880360"/>
+            <a:ext cx="3291840" cy="594359"/>
+          </a:xfrm>
+          <a:prstGeom prst="rect">
+            <a:avLst/>
+          </a:prstGeom>
+          <a:noFill/>
+        </p:spPr>
+        <p:txBody>
+          <a:bodyPr wrap="square" lIns="73152" rIns="73152" tIns="54864" bIns="54864">
+            <a:spAutoFit/>
+          </a:bodyPr>
+          <a:lstStyle/>
+          <a:p>
+            <a:pPr algn="l">
+              <a:defRPr sz="1400" b="0">
+                <a:solidFill>
+                  <a:srgbClr val="0F172A"/>
+                </a:solidFill>
+                <a:latin typeface="Arial"/>
+              </a:defRPr>
+            </a:pPr>
+            <a:r>
+              <a:t>• Tranh vẽ .png, Âm thanh .mp3</a:t>
+            </a:r>
+          </a:p>
+        </p:txBody>
+      </p:sp>
     </p:spTree>
   </p:cSld>
   <p:clrMapOvr>
@@ -6844,7 +6584,7 @@
               </a:defRPr>
             </a:pPr>
             <a:r>
-              <a:t>❓ Tổng kết: Kỹ năng trọng tâm của Tuần 04 là gì?</a:t>
+              <a:t>❓ Tổng kết kiến thức trọng tâm Tuần 04 (Lớp 5)</a:t>
             </a:r>
           </a:p>
         </p:txBody>
@@ -6968,7 +6708,7 @@
               </a:defRPr>
             </a:pPr>
             <a:r>
-              <a:t>👉 Tiết 3: Thu thập và tìm kiếm thông tin chính xác bằng từ khóa.</a:t>
+              <a:t>👉 Tiết 3: Thu thập và tìm kiếm thông tin chính xác bằng từ khóa " ".</a:t>
             </a:r>
           </a:p>
         </p:txBody>
@@ -7056,7 +6796,7 @@
       </p:sp>
       <p:pic>
         <p:nvPicPr>
-          <p:cNvPr id="10" name="Picture 9" descr="sgk_lop5_bai4_luyen_tap.png"/>
+          <p:cNvPr id="10" name="Picture 9" descr="ai_lop5_bai4_tree.jpg"/>
           <p:cNvPicPr>
             <a:picLocks noChangeAspect="1"/>
           </p:cNvPicPr>

--- a/KHBD_Tin_học/Lớp_5/Tuần_04/Slide_Tin_hoc_Lop_5_Bai03_04.pptx
+++ b/KHBD_Tin_học/Lớp_5/Tuần_04/Slide_Tin_hoc_Lop_5_Bai03_04.pptx
@@ -4707,7 +4707,7 @@
               </a:defRPr>
             </a:pPr>
             <a:r>
-              <a:t>HOẠT ĐỘNG KHÁM PHÁ</a:t>
+              <a:t>QUY TRÌNH &amp; THAO TÁC</a:t>
             </a:r>
           </a:p>
         </p:txBody>
@@ -4743,32 +4743,30 @@
               </a:defRPr>
             </a:pPr>
             <a:r>
-              <a:t>Kỹ thuật sử dụng Từ khóa tìm kiếm thần kỳ</a:t>
-            </a:r>
-          </a:p>
-        </p:txBody>
-      </p:sp>
-      <p:sp>
-        <p:nvSpPr>
-          <p:cNvPr id="6" name="Rounded Rectangle 5"/>
+              <a:t>Sơ đồ 4 bước tìm kiếm thông tin chính xác</a:t>
+            </a:r>
+          </a:p>
+        </p:txBody>
+      </p:sp>
+      <p:sp>
+        <p:nvSpPr>
+          <p:cNvPr id="6" name="Chevron 5"/>
           <p:cNvSpPr/>
           <p:nvPr/>
         </p:nvSpPr>
         <p:spPr>
           <a:xfrm>
             <a:off x="365760" y="1645920"/>
-            <a:ext cx="4023360" cy="3977639"/>
-          </a:xfrm>
-          <a:prstGeom prst="roundRect">
+            <a:ext cx="4389120" cy="868680"/>
+          </a:xfrm>
+          <a:prstGeom prst="chevron">
             <a:avLst/>
           </a:prstGeom>
           <a:solidFill>
-            <a:srgbClr val="FFFFFF"/>
+            <a:srgbClr val="BE185D"/>
           </a:solidFill>
-          <a:ln w="19050">
-            <a:solidFill>
-              <a:srgbClr val="EC4899"/>
-            </a:solidFill>
+          <a:ln>
+            <a:noFill/>
           </a:ln>
         </p:spPr>
         <p:style>
@@ -4795,16 +4793,52 @@
       </p:sp>
       <p:sp>
         <p:nvSpPr>
-          <p:cNvPr id="7" name="Rounded Rectangle 6"/>
+          <p:cNvPr id="7" name="TextBox 6"/>
+          <p:cNvSpPr txBox="1"/>
+          <p:nvPr/>
+        </p:nvSpPr>
+        <p:spPr>
+          <a:xfrm>
+            <a:off x="594360" y="1719072"/>
+            <a:ext cx="3840480" cy="731520"/>
+          </a:xfrm>
+          <a:prstGeom prst="rect">
+            <a:avLst/>
+          </a:prstGeom>
+          <a:noFill/>
+        </p:spPr>
+        <p:txBody>
+          <a:bodyPr wrap="square" lIns="73152" rIns="73152" tIns="54864" bIns="54864">
+            <a:spAutoFit/>
+          </a:bodyPr>
+          <a:lstStyle/>
+          <a:p>
+            <a:pPr algn="l">
+              <a:defRPr sz="1400" b="1">
+                <a:solidFill>
+                  <a:srgbClr val="FFFFFF"/>
+                </a:solidFill>
+                <a:latin typeface="Arial"/>
+              </a:defRPr>
+            </a:pPr>
+            <a:r>
+              <a:t>Bước 1: Xác định thông tin</a:t>
+            </a:r>
+          </a:p>
+        </p:txBody>
+      </p:sp>
+      <p:sp>
+        <p:nvSpPr>
+          <p:cNvPr id="8" name="Chevron 7"/>
           <p:cNvSpPr/>
           <p:nvPr/>
         </p:nvSpPr>
         <p:spPr>
           <a:xfrm>
-            <a:off x="365760" y="1645920"/>
-            <a:ext cx="164592" cy="3977639"/>
-          </a:xfrm>
-          <a:prstGeom prst="roundRect">
+            <a:off x="365760" y="2624328"/>
+            <a:ext cx="4389120" cy="868680"/>
+          </a:xfrm>
+          <a:prstGeom prst="chevron">
             <a:avLst/>
           </a:prstGeom>
           <a:solidFill>
@@ -4838,14 +4872,14 @@
       </p:sp>
       <p:sp>
         <p:nvSpPr>
-          <p:cNvPr id="8" name="TextBox 7"/>
+          <p:cNvPr id="9" name="TextBox 8"/>
           <p:cNvSpPr txBox="1"/>
           <p:nvPr/>
         </p:nvSpPr>
         <p:spPr>
           <a:xfrm>
-            <a:off x="640080" y="1783080"/>
-            <a:ext cx="3611880" cy="640080"/>
+            <a:off x="594360" y="2697480"/>
+            <a:ext cx="3840480" cy="731519"/>
           </a:xfrm>
           <a:prstGeom prst="rect">
             <a:avLst/>
@@ -4859,29 +4893,72 @@
           <a:lstStyle/>
           <a:p>
             <a:pPr algn="l">
-              <a:defRPr sz="1500" b="1">
+              <a:defRPr sz="1400" b="1">
                 <a:solidFill>
-                  <a:srgbClr val="0F172A"/>
+                  <a:srgbClr val="FFFFFF"/>
                 </a:solidFill>
                 <a:latin typeface="Arial"/>
               </a:defRPr>
             </a:pPr>
             <a:r>
-              <a:t>• Chọn từ khóa ngắn gọn, chính xác</a:t>
-            </a:r>
-          </a:p>
-        </p:txBody>
-      </p:sp>
-      <p:sp>
-        <p:nvSpPr>
-          <p:cNvPr id="9" name="TextBox 8"/>
+              <a:t>Bước 2: Chọn từ khóa " "</a:t>
+            </a:r>
+          </a:p>
+        </p:txBody>
+      </p:sp>
+      <p:sp>
+        <p:nvSpPr>
+          <p:cNvPr id="10" name="Chevron 9"/>
+          <p:cNvSpPr/>
+          <p:nvPr/>
+        </p:nvSpPr>
+        <p:spPr>
+          <a:xfrm>
+            <a:off x="365760" y="3602736"/>
+            <a:ext cx="4389120" cy="868679"/>
+          </a:xfrm>
+          <a:prstGeom prst="chevron">
+            <a:avLst/>
+          </a:prstGeom>
+          <a:solidFill>
+            <a:srgbClr val="0D9488"/>
+          </a:solidFill>
+          <a:ln>
+            <a:noFill/>
+          </a:ln>
+        </p:spPr>
+        <p:style>
+          <a:lnRef idx="1">
+            <a:schemeClr val="accent1"/>
+          </a:lnRef>
+          <a:fillRef idx="3">
+            <a:schemeClr val="accent1"/>
+          </a:fillRef>
+          <a:effectRef idx="2">
+            <a:schemeClr val="accent1"/>
+          </a:effectRef>
+          <a:fontRef idx="minor">
+            <a:schemeClr val="lt1"/>
+          </a:fontRef>
+        </p:style>
+        <p:txBody>
+          <a:bodyPr rtlCol="0" anchor="ctr"/>
+          <a:lstStyle/>
+          <a:p>
+            <a:pPr algn="ctr"/>
+          </a:p>
+        </p:txBody>
+      </p:sp>
+      <p:sp>
+        <p:nvSpPr>
+          <p:cNvPr id="11" name="TextBox 10"/>
           <p:cNvSpPr txBox="1"/>
           <p:nvPr/>
         </p:nvSpPr>
         <p:spPr>
           <a:xfrm>
-            <a:off x="640080" y="2468880"/>
-            <a:ext cx="3611880" cy="640080"/>
+            <a:off x="594360" y="3675887"/>
+            <a:ext cx="3840480" cy="731519"/>
           </a:xfrm>
           <a:prstGeom prst="rect">
             <a:avLst/>
@@ -4895,29 +4972,72 @@
           <a:lstStyle/>
           <a:p>
             <a:pPr algn="l">
-              <a:defRPr sz="1500" b="1">
+              <a:defRPr sz="1400" b="1">
                 <a:solidFill>
-                  <a:srgbClr val="0F172A"/>
+                  <a:srgbClr val="FFFFFF"/>
                 </a:solidFill>
                 <a:latin typeface="Arial"/>
               </a:defRPr>
             </a:pPr>
             <a:r>
-              <a:t>• Đặt từ khóa trong dấu ngoặc kép " "</a:t>
-            </a:r>
-          </a:p>
-        </p:txBody>
-      </p:sp>
-      <p:sp>
-        <p:nvSpPr>
-          <p:cNvPr id="10" name="TextBox 9"/>
+              <a:t>Bước 3: Chọn nguồn uy tín</a:t>
+            </a:r>
+          </a:p>
+        </p:txBody>
+      </p:sp>
+      <p:sp>
+        <p:nvSpPr>
+          <p:cNvPr id="12" name="Chevron 11"/>
+          <p:cNvSpPr/>
+          <p:nvPr/>
+        </p:nvSpPr>
+        <p:spPr>
+          <a:xfrm>
+            <a:off x="365760" y="4581144"/>
+            <a:ext cx="4389120" cy="868680"/>
+          </a:xfrm>
+          <a:prstGeom prst="chevron">
+            <a:avLst/>
+          </a:prstGeom>
+          <a:solidFill>
+            <a:srgbClr val="D97706"/>
+          </a:solidFill>
+          <a:ln>
+            <a:noFill/>
+          </a:ln>
+        </p:spPr>
+        <p:style>
+          <a:lnRef idx="1">
+            <a:schemeClr val="accent1"/>
+          </a:lnRef>
+          <a:fillRef idx="3">
+            <a:schemeClr val="accent1"/>
+          </a:fillRef>
+          <a:effectRef idx="2">
+            <a:schemeClr val="accent1"/>
+          </a:effectRef>
+          <a:fontRef idx="minor">
+            <a:schemeClr val="lt1"/>
+          </a:fontRef>
+        </p:style>
+        <p:txBody>
+          <a:bodyPr rtlCol="0" anchor="ctr"/>
+          <a:lstStyle/>
+          <a:p>
+            <a:pPr algn="ctr"/>
+          </a:p>
+        </p:txBody>
+      </p:sp>
+      <p:sp>
+        <p:nvSpPr>
+          <p:cNvPr id="13" name="TextBox 12"/>
           <p:cNvSpPr txBox="1"/>
           <p:nvPr/>
         </p:nvSpPr>
         <p:spPr>
           <a:xfrm>
-            <a:off x="640080" y="3154680"/>
-            <a:ext cx="3611880" cy="640080"/>
+            <a:off x="594360" y="4654296"/>
+            <a:ext cx="3840480" cy="731519"/>
           </a:xfrm>
           <a:prstGeom prst="rect">
             <a:avLst/>
@@ -4931,65 +5051,29 @@
           <a:lstStyle/>
           <a:p>
             <a:pPr algn="l">
-              <a:defRPr sz="1500" b="1">
+              <a:defRPr sz="1400" b="1">
                 <a:solidFill>
-                  <a:srgbClr val="0F172A"/>
+                  <a:srgbClr val="FFFFFF"/>
                 </a:solidFill>
                 <a:latin typeface="Arial"/>
               </a:defRPr>
             </a:pPr>
             <a:r>
-              <a:t>• Ưu tiên nguồn tin chính thống, đáng tin cậy</a:t>
-            </a:r>
-          </a:p>
-        </p:txBody>
-      </p:sp>
-      <p:sp>
-        <p:nvSpPr>
-          <p:cNvPr id="11" name="TextBox 10"/>
-          <p:cNvSpPr txBox="1"/>
-          <p:nvPr/>
-        </p:nvSpPr>
-        <p:spPr>
-          <a:xfrm>
-            <a:off x="640080" y="3840480"/>
-            <a:ext cx="3611880" cy="640080"/>
-          </a:xfrm>
-          <a:prstGeom prst="rect">
-            <a:avLst/>
-          </a:prstGeom>
-          <a:noFill/>
-        </p:spPr>
-        <p:txBody>
-          <a:bodyPr wrap="square" lIns="73152" rIns="73152" tIns="54864" bIns="54864">
-            <a:spAutoFit/>
-          </a:bodyPr>
-          <a:lstStyle/>
-          <a:p>
-            <a:pPr algn="l">
-              <a:defRPr sz="1500" b="1">
-                <a:solidFill>
-                  <a:srgbClr val="0F172A"/>
-                </a:solidFill>
-                <a:latin typeface="Arial"/>
-              </a:defRPr>
-            </a:pPr>
-            <a:r>
-              <a:t>• Giải quyết vấn đề nhanh chóng và hiệu quả</a:t>
-            </a:r>
-          </a:p>
-        </p:txBody>
-      </p:sp>
-      <p:sp>
-        <p:nvSpPr>
-          <p:cNvPr id="12" name="Rounded Rectangle 11"/>
+              <a:t>Bước 4: Tổng hợp &amp; áp dụng</a:t>
+            </a:r>
+          </a:p>
+        </p:txBody>
+      </p:sp>
+      <p:sp>
+        <p:nvSpPr>
+          <p:cNvPr id="14" name="Rounded Rectangle 13"/>
           <p:cNvSpPr/>
           <p:nvPr/>
         </p:nvSpPr>
         <p:spPr>
           <a:xfrm>
-            <a:off x="4663440" y="1645920"/>
-            <a:ext cx="7040880" cy="3977639"/>
+            <a:off x="5029200" y="1645920"/>
+            <a:ext cx="6675120" cy="3977639"/>
           </a:xfrm>
           <a:prstGeom prst="roundRect">
             <a:avLst/>
@@ -5027,7 +5111,7 @@
       </p:sp>
       <p:pic>
         <p:nvPicPr>
-          <p:cNvPr id="13" name="Picture 12" descr="ai_lop5_bai3_search.jpg"/>
+          <p:cNvPr id="15" name="Picture 14" descr="lop5_bai3_quy_trinh_tim_kiem_4buoc.png"/>
           <p:cNvPicPr>
             <a:picLocks noChangeAspect="1"/>
           </p:cNvPicPr>
@@ -5041,8 +5125,8 @@
         </p:blipFill>
         <p:spPr>
           <a:xfrm>
-            <a:off x="4754880" y="1737360"/>
-            <a:ext cx="6858000" cy="3794760"/>
+            <a:off x="5120640" y="1737360"/>
+            <a:ext cx="6492240" cy="3794760"/>
           </a:xfrm>
           <a:prstGeom prst="rect">
             <a:avLst/>
@@ -5445,7 +5529,7 @@
               </a:defRPr>
             </a:pPr>
             <a:r>
-              <a:t>KHỞI ĐỘNG &amp; TÌNH HUỐNG</a:t>
+              <a:t>QUY TRÌNH &amp; THAO TÁC</a:t>
             </a:r>
           </a:p>
         </p:txBody>
@@ -5481,21 +5565,337 @@
               </a:defRPr>
             </a:pPr>
             <a:r>
-              <a:t>Cây tri thức — Sơ đồ Cây thư mục kỳ diệu</a:t>
-            </a:r>
-          </a:p>
-        </p:txBody>
-      </p:sp>
-      <p:sp>
-        <p:nvSpPr>
-          <p:cNvPr id="6" name="Rounded Rectangle 5"/>
+              <a:t>4 Thao tác quản lý thư mục cơ bản</a:t>
+            </a:r>
+          </a:p>
+        </p:txBody>
+      </p:sp>
+      <p:sp>
+        <p:nvSpPr>
+          <p:cNvPr id="6" name="Chevron 5"/>
           <p:cNvSpPr/>
           <p:nvPr/>
         </p:nvSpPr>
         <p:spPr>
           <a:xfrm>
             <a:off x="365760" y="1645920"/>
-            <a:ext cx="11247120" cy="2971800"/>
+            <a:ext cx="4389120" cy="868680"/>
+          </a:xfrm>
+          <a:prstGeom prst="chevron">
+            <a:avLst/>
+          </a:prstGeom>
+          <a:solidFill>
+            <a:srgbClr val="BE185D"/>
+          </a:solidFill>
+          <a:ln>
+            <a:noFill/>
+          </a:ln>
+        </p:spPr>
+        <p:style>
+          <a:lnRef idx="1">
+            <a:schemeClr val="accent1"/>
+          </a:lnRef>
+          <a:fillRef idx="3">
+            <a:schemeClr val="accent1"/>
+          </a:fillRef>
+          <a:effectRef idx="2">
+            <a:schemeClr val="accent1"/>
+          </a:effectRef>
+          <a:fontRef idx="minor">
+            <a:schemeClr val="lt1"/>
+          </a:fontRef>
+        </p:style>
+        <p:txBody>
+          <a:bodyPr rtlCol="0" anchor="ctr"/>
+          <a:lstStyle/>
+          <a:p>
+            <a:pPr algn="ctr"/>
+          </a:p>
+        </p:txBody>
+      </p:sp>
+      <p:sp>
+        <p:nvSpPr>
+          <p:cNvPr id="7" name="TextBox 6"/>
+          <p:cNvSpPr txBox="1"/>
+          <p:nvPr/>
+        </p:nvSpPr>
+        <p:spPr>
+          <a:xfrm>
+            <a:off x="594360" y="1719072"/>
+            <a:ext cx="3840480" cy="731520"/>
+          </a:xfrm>
+          <a:prstGeom prst="rect">
+            <a:avLst/>
+          </a:prstGeom>
+          <a:noFill/>
+        </p:spPr>
+        <p:txBody>
+          <a:bodyPr wrap="square" lIns="73152" rIns="73152" tIns="54864" bIns="54864">
+            <a:spAutoFit/>
+          </a:bodyPr>
+          <a:lstStyle/>
+          <a:p>
+            <a:pPr algn="l">
+              <a:defRPr sz="1400" b="1">
+                <a:solidFill>
+                  <a:srgbClr val="FFFFFF"/>
+                </a:solidFill>
+                <a:latin typeface="Arial"/>
+              </a:defRPr>
+            </a:pPr>
+            <a:r>
+              <a:t>1. Tạo thư mục mới (New)</a:t>
+            </a:r>
+          </a:p>
+        </p:txBody>
+      </p:sp>
+      <p:sp>
+        <p:nvSpPr>
+          <p:cNvPr id="8" name="Chevron 7"/>
+          <p:cNvSpPr/>
+          <p:nvPr/>
+        </p:nvSpPr>
+        <p:spPr>
+          <a:xfrm>
+            <a:off x="365760" y="2624328"/>
+            <a:ext cx="4389120" cy="868680"/>
+          </a:xfrm>
+          <a:prstGeom prst="chevron">
+            <a:avLst/>
+          </a:prstGeom>
+          <a:solidFill>
+            <a:srgbClr val="EC4899"/>
+          </a:solidFill>
+          <a:ln>
+            <a:noFill/>
+          </a:ln>
+        </p:spPr>
+        <p:style>
+          <a:lnRef idx="1">
+            <a:schemeClr val="accent1"/>
+          </a:lnRef>
+          <a:fillRef idx="3">
+            <a:schemeClr val="accent1"/>
+          </a:fillRef>
+          <a:effectRef idx="2">
+            <a:schemeClr val="accent1"/>
+          </a:effectRef>
+          <a:fontRef idx="minor">
+            <a:schemeClr val="lt1"/>
+          </a:fontRef>
+        </p:style>
+        <p:txBody>
+          <a:bodyPr rtlCol="0" anchor="ctr"/>
+          <a:lstStyle/>
+          <a:p>
+            <a:pPr algn="ctr"/>
+          </a:p>
+        </p:txBody>
+      </p:sp>
+      <p:sp>
+        <p:nvSpPr>
+          <p:cNvPr id="9" name="TextBox 8"/>
+          <p:cNvSpPr txBox="1"/>
+          <p:nvPr/>
+        </p:nvSpPr>
+        <p:spPr>
+          <a:xfrm>
+            <a:off x="594360" y="2697480"/>
+            <a:ext cx="3840480" cy="731519"/>
+          </a:xfrm>
+          <a:prstGeom prst="rect">
+            <a:avLst/>
+          </a:prstGeom>
+          <a:noFill/>
+        </p:spPr>
+        <p:txBody>
+          <a:bodyPr wrap="square" lIns="73152" rIns="73152" tIns="54864" bIns="54864">
+            <a:spAutoFit/>
+          </a:bodyPr>
+          <a:lstStyle/>
+          <a:p>
+            <a:pPr algn="l">
+              <a:defRPr sz="1400" b="1">
+                <a:solidFill>
+                  <a:srgbClr val="FFFFFF"/>
+                </a:solidFill>
+                <a:latin typeface="Arial"/>
+              </a:defRPr>
+            </a:pPr>
+            <a:r>
+              <a:t>2. Đổi tên thư mục (Rename)</a:t>
+            </a:r>
+          </a:p>
+        </p:txBody>
+      </p:sp>
+      <p:sp>
+        <p:nvSpPr>
+          <p:cNvPr id="10" name="Chevron 9"/>
+          <p:cNvSpPr/>
+          <p:nvPr/>
+        </p:nvSpPr>
+        <p:spPr>
+          <a:xfrm>
+            <a:off x="365760" y="3602736"/>
+            <a:ext cx="4389120" cy="868679"/>
+          </a:xfrm>
+          <a:prstGeom prst="chevron">
+            <a:avLst/>
+          </a:prstGeom>
+          <a:solidFill>
+            <a:srgbClr val="0D9488"/>
+          </a:solidFill>
+          <a:ln>
+            <a:noFill/>
+          </a:ln>
+        </p:spPr>
+        <p:style>
+          <a:lnRef idx="1">
+            <a:schemeClr val="accent1"/>
+          </a:lnRef>
+          <a:fillRef idx="3">
+            <a:schemeClr val="accent1"/>
+          </a:fillRef>
+          <a:effectRef idx="2">
+            <a:schemeClr val="accent1"/>
+          </a:effectRef>
+          <a:fontRef idx="minor">
+            <a:schemeClr val="lt1"/>
+          </a:fontRef>
+        </p:style>
+        <p:txBody>
+          <a:bodyPr rtlCol="0" anchor="ctr"/>
+          <a:lstStyle/>
+          <a:p>
+            <a:pPr algn="ctr"/>
+          </a:p>
+        </p:txBody>
+      </p:sp>
+      <p:sp>
+        <p:nvSpPr>
+          <p:cNvPr id="11" name="TextBox 10"/>
+          <p:cNvSpPr txBox="1"/>
+          <p:nvPr/>
+        </p:nvSpPr>
+        <p:spPr>
+          <a:xfrm>
+            <a:off x="594360" y="3675887"/>
+            <a:ext cx="3840480" cy="731519"/>
+          </a:xfrm>
+          <a:prstGeom prst="rect">
+            <a:avLst/>
+          </a:prstGeom>
+          <a:noFill/>
+        </p:spPr>
+        <p:txBody>
+          <a:bodyPr wrap="square" lIns="73152" rIns="73152" tIns="54864" bIns="54864">
+            <a:spAutoFit/>
+          </a:bodyPr>
+          <a:lstStyle/>
+          <a:p>
+            <a:pPr algn="l">
+              <a:defRPr sz="1400" b="1">
+                <a:solidFill>
+                  <a:srgbClr val="FFFFFF"/>
+                </a:solidFill>
+                <a:latin typeface="Arial"/>
+              </a:defRPr>
+            </a:pPr>
+            <a:r>
+              <a:t>3. Sao chép / Cắt &amp; Dán</a:t>
+            </a:r>
+          </a:p>
+        </p:txBody>
+      </p:sp>
+      <p:sp>
+        <p:nvSpPr>
+          <p:cNvPr id="12" name="Chevron 11"/>
+          <p:cNvSpPr/>
+          <p:nvPr/>
+        </p:nvSpPr>
+        <p:spPr>
+          <a:xfrm>
+            <a:off x="365760" y="4581144"/>
+            <a:ext cx="4389120" cy="868680"/>
+          </a:xfrm>
+          <a:prstGeom prst="chevron">
+            <a:avLst/>
+          </a:prstGeom>
+          <a:solidFill>
+            <a:srgbClr val="D97706"/>
+          </a:solidFill>
+          <a:ln>
+            <a:noFill/>
+          </a:ln>
+        </p:spPr>
+        <p:style>
+          <a:lnRef idx="1">
+            <a:schemeClr val="accent1"/>
+          </a:lnRef>
+          <a:fillRef idx="3">
+            <a:schemeClr val="accent1"/>
+          </a:fillRef>
+          <a:effectRef idx="2">
+            <a:schemeClr val="accent1"/>
+          </a:effectRef>
+          <a:fontRef idx="minor">
+            <a:schemeClr val="lt1"/>
+          </a:fontRef>
+        </p:style>
+        <p:txBody>
+          <a:bodyPr rtlCol="0" anchor="ctr"/>
+          <a:lstStyle/>
+          <a:p>
+            <a:pPr algn="ctr"/>
+          </a:p>
+        </p:txBody>
+      </p:sp>
+      <p:sp>
+        <p:nvSpPr>
+          <p:cNvPr id="13" name="TextBox 12"/>
+          <p:cNvSpPr txBox="1"/>
+          <p:nvPr/>
+        </p:nvSpPr>
+        <p:spPr>
+          <a:xfrm>
+            <a:off x="594360" y="4654296"/>
+            <a:ext cx="3840480" cy="731519"/>
+          </a:xfrm>
+          <a:prstGeom prst="rect">
+            <a:avLst/>
+          </a:prstGeom>
+          <a:noFill/>
+        </p:spPr>
+        <p:txBody>
+          <a:bodyPr wrap="square" lIns="73152" rIns="73152" tIns="54864" bIns="54864">
+            <a:spAutoFit/>
+          </a:bodyPr>
+          <a:lstStyle/>
+          <a:p>
+            <a:pPr algn="l">
+              <a:defRPr sz="1400" b="1">
+                <a:solidFill>
+                  <a:srgbClr val="FFFFFF"/>
+                </a:solidFill>
+                <a:latin typeface="Arial"/>
+              </a:defRPr>
+            </a:pPr>
+            <a:r>
+              <a:t>4. Xóa thư mục rác (Delete)</a:t>
+            </a:r>
+          </a:p>
+        </p:txBody>
+      </p:sp>
+      <p:sp>
+        <p:nvSpPr>
+          <p:cNvPr id="14" name="Rounded Rectangle 13"/>
+          <p:cNvSpPr/>
+          <p:nvPr/>
+        </p:nvSpPr>
+        <p:spPr>
+          <a:xfrm>
+            <a:off x="5029200" y="1645920"/>
+            <a:ext cx="6675120" cy="3977639"/>
           </a:xfrm>
           <a:prstGeom prst="roundRect">
             <a:avLst/>
@@ -5505,7 +5905,7 @@
           </a:solidFill>
           <a:ln w="19050">
             <a:solidFill>
-              <a:srgbClr val="EC4899"/>
+              <a:srgbClr val="CBD5E1"/>
             </a:solidFill>
           </a:ln>
         </p:spPr>
@@ -5533,7 +5933,7 @@
       </p:sp>
       <p:pic>
         <p:nvPicPr>
-          <p:cNvPr id="7" name="Picture 6" descr="ai_lop5_bai4_tree.jpg"/>
+          <p:cNvPr id="15" name="Picture 14" descr="lop5_bai4_4_operations_flow.png"/>
           <p:cNvPicPr>
             <a:picLocks noChangeAspect="1"/>
           </p:cNvPicPr>
@@ -5547,138 +5947,14 @@
         </p:blipFill>
         <p:spPr>
           <a:xfrm>
-            <a:off x="457200" y="1691640"/>
-            <a:ext cx="11064240" cy="2880360"/>
+            <a:off x="5120640" y="1737360"/>
+            <a:ext cx="6492240" cy="3794760"/>
           </a:xfrm>
           <a:prstGeom prst="rect">
             <a:avLst/>
           </a:prstGeom>
         </p:spPr>
       </p:pic>
-      <p:sp>
-        <p:nvSpPr>
-          <p:cNvPr id="8" name="Rounded Rectangle 7"/>
-          <p:cNvSpPr/>
-          <p:nvPr/>
-        </p:nvSpPr>
-        <p:spPr>
-          <a:xfrm>
-            <a:off x="365760" y="4709160"/>
-            <a:ext cx="11247120" cy="960119"/>
-          </a:xfrm>
-          <a:prstGeom prst="roundRect">
-            <a:avLst/>
-          </a:prstGeom>
-          <a:solidFill>
-            <a:srgbClr val="FFFFFF"/>
-          </a:solidFill>
-          <a:ln w="19050">
-            <a:solidFill>
-              <a:srgbClr val="BE185D"/>
-            </a:solidFill>
-          </a:ln>
-        </p:spPr>
-        <p:style>
-          <a:lnRef idx="1">
-            <a:schemeClr val="accent1"/>
-          </a:lnRef>
-          <a:fillRef idx="3">
-            <a:schemeClr val="accent1"/>
-          </a:fillRef>
-          <a:effectRef idx="2">
-            <a:schemeClr val="accent1"/>
-          </a:effectRef>
-          <a:fontRef idx="minor">
-            <a:schemeClr val="lt1"/>
-          </a:fontRef>
-        </p:style>
-        <p:txBody>
-          <a:bodyPr rtlCol="0" anchor="ctr"/>
-          <a:lstStyle/>
-          <a:p>
-            <a:pPr algn="ctr"/>
-          </a:p>
-        </p:txBody>
-      </p:sp>
-      <p:sp>
-        <p:nvSpPr>
-          <p:cNvPr id="9" name="Rounded Rectangle 8"/>
-          <p:cNvSpPr/>
-          <p:nvPr/>
-        </p:nvSpPr>
-        <p:spPr>
-          <a:xfrm>
-            <a:off x="365760" y="4709160"/>
-            <a:ext cx="182880" cy="960119"/>
-          </a:xfrm>
-          <a:prstGeom prst="roundRect">
-            <a:avLst/>
-          </a:prstGeom>
-          <a:solidFill>
-            <a:srgbClr val="BE185D"/>
-          </a:solidFill>
-          <a:ln>
-            <a:noFill/>
-          </a:ln>
-        </p:spPr>
-        <p:style>
-          <a:lnRef idx="1">
-            <a:schemeClr val="accent1"/>
-          </a:lnRef>
-          <a:fillRef idx="3">
-            <a:schemeClr val="accent1"/>
-          </a:fillRef>
-          <a:effectRef idx="2">
-            <a:schemeClr val="accent1"/>
-          </a:effectRef>
-          <a:fontRef idx="minor">
-            <a:schemeClr val="lt1"/>
-          </a:fontRef>
-        </p:style>
-        <p:txBody>
-          <a:bodyPr rtlCol="0" anchor="ctr"/>
-          <a:lstStyle/>
-          <a:p>
-            <a:pPr algn="ctr"/>
-          </a:p>
-        </p:txBody>
-      </p:sp>
-      <p:sp>
-        <p:nvSpPr>
-          <p:cNvPr id="10" name="TextBox 9"/>
-          <p:cNvSpPr txBox="1"/>
-          <p:nvPr/>
-        </p:nvSpPr>
-        <p:spPr>
-          <a:xfrm>
-            <a:off x="685800" y="4800600"/>
-            <a:ext cx="10607040" cy="777239"/>
-          </a:xfrm>
-          <a:prstGeom prst="rect">
-            <a:avLst/>
-          </a:prstGeom>
-          <a:noFill/>
-        </p:spPr>
-        <p:txBody>
-          <a:bodyPr wrap="square" lIns="73152" rIns="73152" tIns="54864" bIns="54864">
-            <a:spAutoFit/>
-          </a:bodyPr>
-          <a:lstStyle/>
-          <a:p>
-            <a:pPr algn="l">
-              <a:defRPr sz="1500" b="1">
-                <a:solidFill>
-                  <a:srgbClr val="0F172A"/>
-                </a:solidFill>
-                <a:latin typeface="Arial"/>
-              </a:defRPr>
-            </a:pPr>
-            <a:r>
-              <a:t>👉 Gốc là ổ đĩa (C:, D:), Cành lớn là Thư mục mẹ, Cành nhỏ là Thư mục con, Quả là các Tệp tin!</a:t>
-            </a:r>
-          </a:p>
-        </p:txBody>
-      </p:sp>
     </p:spTree>
   </p:cSld>
   <p:clrMapOvr>
@@ -5817,7 +6093,7 @@
               </a:defRPr>
             </a:pPr>
             <a:r>
-              <a:t>KIẾN THỨC CỐT LÕI</a:t>
+              <a:t>HOẠT ĐỘNG KHÁM PHÁ</a:t>
             </a:r>
           </a:p>
         </p:txBody>
@@ -5853,7 +6129,7 @@
               </a:defRPr>
             </a:pPr>
             <a:r>
-              <a:t>Các thành phần trong Cây thư mục</a:t>
+              <a:t>Thực hành xây dựng Cây thư mục học tập</a:t>
             </a:r>
           </a:p>
         </p:txBody>
@@ -5867,7 +6143,7 @@
         <p:spPr>
           <a:xfrm>
             <a:off x="365760" y="1645920"/>
-            <a:ext cx="3566160" cy="3977639"/>
+            <a:ext cx="4023360" cy="3977639"/>
           </a:xfrm>
           <a:prstGeom prst="roundRect">
             <a:avLst/>
@@ -5877,7 +6153,7 @@
           </a:solidFill>
           <a:ln w="19050">
             <a:solidFill>
-              <a:srgbClr val="BE185D"/>
+              <a:srgbClr val="EC4899"/>
             </a:solidFill>
           </a:ln>
         </p:spPr>
@@ -5912,13 +6188,13 @@
         <p:spPr>
           <a:xfrm>
             <a:off x="365760" y="1645920"/>
-            <a:ext cx="3566160" cy="457199"/>
+            <a:ext cx="164592" cy="3977639"/>
           </a:xfrm>
           <a:prstGeom prst="roundRect">
             <a:avLst/>
           </a:prstGeom>
           <a:solidFill>
-            <a:srgbClr val="BE185D"/>
+            <a:srgbClr val="EC4899"/>
           </a:solidFill>
           <a:ln>
             <a:noFill/>
@@ -5954,8 +6230,8 @@
         </p:nvSpPr>
         <p:spPr>
           <a:xfrm>
-            <a:off x="365760" y="1691640"/>
-            <a:ext cx="3566160" cy="411480"/>
+            <a:off x="640080" y="1783080"/>
+            <a:ext cx="3611880" cy="640080"/>
           </a:xfrm>
           <a:prstGeom prst="rect">
             <a:avLst/>
@@ -5968,44 +6244,8 @@
           </a:bodyPr>
           <a:lstStyle/>
           <a:p>
-            <a:pPr algn="ctr">
+            <a:pPr algn="l">
               <a:defRPr sz="1500" b="1">
-                <a:solidFill>
-                  <a:srgbClr val="FFFFFF"/>
-                </a:solidFill>
-                <a:latin typeface="Arial"/>
-              </a:defRPr>
-            </a:pPr>
-            <a:r>
-              <a:t>1. Ổ đĩa gốc (Root)</a:t>
-            </a:r>
-          </a:p>
-        </p:txBody>
-      </p:sp>
-      <p:sp>
-        <p:nvSpPr>
-          <p:cNvPr id="9" name="TextBox 8"/>
-          <p:cNvSpPr txBox="1"/>
-          <p:nvPr/>
-        </p:nvSpPr>
-        <p:spPr>
-          <a:xfrm>
-            <a:off x="502920" y="2240280"/>
-            <a:ext cx="3291840" cy="594359"/>
-          </a:xfrm>
-          <a:prstGeom prst="rect">
-            <a:avLst/>
-          </a:prstGeom>
-          <a:noFill/>
-        </p:spPr>
-        <p:txBody>
-          <a:bodyPr wrap="square" lIns="73152" rIns="73152" tIns="54864" bIns="54864">
-            <a:spAutoFit/>
-          </a:bodyPr>
-          <a:lstStyle/>
-          <a:p>
-            <a:pPr algn="l">
-              <a:defRPr sz="1400" b="0">
                 <a:solidFill>
                   <a:srgbClr val="0F172A"/>
                 </a:solidFill>
@@ -6013,21 +6253,21 @@
               </a:defRPr>
             </a:pPr>
             <a:r>
-              <a:t>• Ổ đĩa C:, D:, E:</a:t>
-            </a:r>
-          </a:p>
-        </p:txBody>
-      </p:sp>
-      <p:sp>
-        <p:nvSpPr>
-          <p:cNvPr id="10" name="TextBox 9"/>
+              <a:t>• Tạo thư mục mẹ HOC_TAP trên ổ đĩa D:</a:t>
+            </a:r>
+          </a:p>
+        </p:txBody>
+      </p:sp>
+      <p:sp>
+        <p:nvSpPr>
+          <p:cNvPr id="9" name="TextBox 8"/>
           <p:cNvSpPr txBox="1"/>
           <p:nvPr/>
         </p:nvSpPr>
         <p:spPr>
           <a:xfrm>
-            <a:off x="502920" y="2880360"/>
-            <a:ext cx="3291840" cy="594359"/>
+            <a:off x="640080" y="2468880"/>
+            <a:ext cx="3611880" cy="640080"/>
           </a:xfrm>
           <a:prstGeom prst="rect">
             <a:avLst/>
@@ -6041,7 +6281,7 @@
           <a:lstStyle/>
           <a:p>
             <a:pPr algn="l">
-              <a:defRPr sz="1400" b="0">
+              <a:defRPr sz="1500" b="1">
                 <a:solidFill>
                   <a:srgbClr val="0F172A"/>
                 </a:solidFill>
@@ -6049,109 +6289,21 @@
               </a:defRPr>
             </a:pPr>
             <a:r>
-              <a:t>• Nơi chứa toàn bộ cây dữ liệu</a:t>
-            </a:r>
-          </a:p>
-        </p:txBody>
-      </p:sp>
-      <p:sp>
-        <p:nvSpPr>
-          <p:cNvPr id="11" name="Rounded Rectangle 10"/>
-          <p:cNvSpPr/>
-          <p:nvPr/>
-        </p:nvSpPr>
-        <p:spPr>
-          <a:xfrm>
-            <a:off x="4206240" y="1645920"/>
-            <a:ext cx="3566160" cy="3977639"/>
-          </a:xfrm>
-          <a:prstGeom prst="roundRect">
-            <a:avLst/>
-          </a:prstGeom>
-          <a:solidFill>
-            <a:srgbClr val="FFFFFF"/>
-          </a:solidFill>
-          <a:ln w="19050">
-            <a:solidFill>
-              <a:srgbClr val="0D9488"/>
-            </a:solidFill>
-          </a:ln>
-        </p:spPr>
-        <p:style>
-          <a:lnRef idx="1">
-            <a:schemeClr val="accent1"/>
-          </a:lnRef>
-          <a:fillRef idx="3">
-            <a:schemeClr val="accent1"/>
-          </a:fillRef>
-          <a:effectRef idx="2">
-            <a:schemeClr val="accent1"/>
-          </a:effectRef>
-          <a:fontRef idx="minor">
-            <a:schemeClr val="lt1"/>
-          </a:fontRef>
-        </p:style>
-        <p:txBody>
-          <a:bodyPr rtlCol="0" anchor="ctr"/>
-          <a:lstStyle/>
-          <a:p>
-            <a:pPr algn="ctr"/>
-          </a:p>
-        </p:txBody>
-      </p:sp>
-      <p:sp>
-        <p:nvSpPr>
-          <p:cNvPr id="12" name="Rounded Rectangle 11"/>
-          <p:cNvSpPr/>
-          <p:nvPr/>
-        </p:nvSpPr>
-        <p:spPr>
-          <a:xfrm>
-            <a:off x="4206240" y="1645920"/>
-            <a:ext cx="3566160" cy="457199"/>
-          </a:xfrm>
-          <a:prstGeom prst="roundRect">
-            <a:avLst/>
-          </a:prstGeom>
-          <a:solidFill>
-            <a:srgbClr val="0D9488"/>
-          </a:solidFill>
-          <a:ln>
-            <a:noFill/>
-          </a:ln>
-        </p:spPr>
-        <p:style>
-          <a:lnRef idx="1">
-            <a:schemeClr val="accent1"/>
-          </a:lnRef>
-          <a:fillRef idx="3">
-            <a:schemeClr val="accent1"/>
-          </a:fillRef>
-          <a:effectRef idx="2">
-            <a:schemeClr val="accent1"/>
-          </a:effectRef>
-          <a:fontRef idx="minor">
-            <a:schemeClr val="lt1"/>
-          </a:fontRef>
-        </p:style>
-        <p:txBody>
-          <a:bodyPr rtlCol="0" anchor="ctr"/>
-          <a:lstStyle/>
-          <a:p>
-            <a:pPr algn="ctr"/>
-          </a:p>
-        </p:txBody>
-      </p:sp>
-      <p:sp>
-        <p:nvSpPr>
-          <p:cNvPr id="13" name="TextBox 12"/>
+              <a:t>• Tạo 3 thư mục con: TOAN, TIENG_VIET, TIN_HOC</a:t>
+            </a:r>
+          </a:p>
+        </p:txBody>
+      </p:sp>
+      <p:sp>
+        <p:nvSpPr>
+          <p:cNvPr id="10" name="TextBox 9"/>
           <p:cNvSpPr txBox="1"/>
           <p:nvPr/>
         </p:nvSpPr>
         <p:spPr>
           <a:xfrm>
-            <a:off x="4206240" y="1691640"/>
-            <a:ext cx="3566160" cy="411480"/>
+            <a:off x="640080" y="3154680"/>
+            <a:ext cx="3611880" cy="640080"/>
           </a:xfrm>
           <a:prstGeom prst="rect">
             <a:avLst/>
@@ -6164,44 +6316,8 @@
           </a:bodyPr>
           <a:lstStyle/>
           <a:p>
-            <a:pPr algn="ctr">
+            <a:pPr algn="l">
               <a:defRPr sz="1500" b="1">
-                <a:solidFill>
-                  <a:srgbClr val="FFFFFF"/>
-                </a:solidFill>
-                <a:latin typeface="Arial"/>
-              </a:defRPr>
-            </a:pPr>
-            <a:r>
-              <a:t>2. Thư mục (Folder)</a:t>
-            </a:r>
-          </a:p>
-        </p:txBody>
-      </p:sp>
-      <p:sp>
-        <p:nvSpPr>
-          <p:cNvPr id="14" name="TextBox 13"/>
-          <p:cNvSpPr txBox="1"/>
-          <p:nvPr/>
-        </p:nvSpPr>
-        <p:spPr>
-          <a:xfrm>
-            <a:off x="4343400" y="2240280"/>
-            <a:ext cx="3291840" cy="594359"/>
-          </a:xfrm>
-          <a:prstGeom prst="rect">
-            <a:avLst/>
-          </a:prstGeom>
-          <a:noFill/>
-        </p:spPr>
-        <p:txBody>
-          <a:bodyPr wrap="square" lIns="73152" rIns="73152" tIns="54864" bIns="54864">
-            <a:spAutoFit/>
-          </a:bodyPr>
-          <a:lstStyle/>
-          <a:p>
-            <a:pPr algn="l">
-              <a:defRPr sz="1400" b="0">
                 <a:solidFill>
                   <a:srgbClr val="0F172A"/>
                 </a:solidFill>
@@ -6209,21 +6325,21 @@
               </a:defRPr>
             </a:pPr>
             <a:r>
-              <a:t>• Thư mục mẹ chứa thư mục con</a:t>
-            </a:r>
-          </a:p>
-        </p:txBody>
-      </p:sp>
-      <p:sp>
-        <p:nvSpPr>
-          <p:cNvPr id="15" name="TextBox 14"/>
+              <a:t>• Lưu bài tập vào đúng thư mục tương ứng</a:t>
+            </a:r>
+          </a:p>
+        </p:txBody>
+      </p:sp>
+      <p:sp>
+        <p:nvSpPr>
+          <p:cNvPr id="11" name="TextBox 10"/>
           <p:cNvSpPr txBox="1"/>
           <p:nvPr/>
         </p:nvSpPr>
         <p:spPr>
           <a:xfrm>
-            <a:off x="4343400" y="2880360"/>
-            <a:ext cx="3291840" cy="594359"/>
+            <a:off x="640080" y="3840480"/>
+            <a:ext cx="3611880" cy="640080"/>
           </a:xfrm>
           <a:prstGeom prst="rect">
             <a:avLst/>
@@ -6237,7 +6353,7 @@
           <a:lstStyle/>
           <a:p>
             <a:pPr algn="l">
-              <a:defRPr sz="1400" b="0">
+              <a:defRPr sz="1500" b="1">
                 <a:solidFill>
                   <a:srgbClr val="0F172A"/>
                 </a:solidFill>
@@ -6245,21 +6361,21 @@
               </a:defRPr>
             </a:pPr>
             <a:r>
-              <a:t>• Ví dụ: TOAN, VAN, TIN_HOC</a:t>
-            </a:r>
-          </a:p>
-        </p:txBody>
-      </p:sp>
-      <p:sp>
-        <p:nvSpPr>
-          <p:cNvPr id="16" name="Rounded Rectangle 15"/>
+              <a:t>• Cấu trúc chuẩn Tiếng Việt rõ ràng, ngăn nắp!</a:t>
+            </a:r>
+          </a:p>
+        </p:txBody>
+      </p:sp>
+      <p:sp>
+        <p:nvSpPr>
+          <p:cNvPr id="12" name="Rounded Rectangle 11"/>
           <p:cNvSpPr/>
           <p:nvPr/>
         </p:nvSpPr>
         <p:spPr>
           <a:xfrm>
-            <a:off x="8046720" y="1645920"/>
-            <a:ext cx="3566160" cy="3977639"/>
+            <a:off x="4663440" y="1645920"/>
+            <a:ext cx="7040880" cy="3977639"/>
           </a:xfrm>
           <a:prstGeom prst="roundRect">
             <a:avLst/>
@@ -6269,7 +6385,7 @@
           </a:solidFill>
           <a:ln w="19050">
             <a:solidFill>
-              <a:srgbClr val="D97706"/>
+              <a:srgbClr val="CBD5E1"/>
             </a:solidFill>
           </a:ln>
         </p:spPr>
@@ -6295,157 +6411,30 @@
           </a:p>
         </p:txBody>
       </p:sp>
-      <p:sp>
-        <p:nvSpPr>
-          <p:cNvPr id="17" name="Rounded Rectangle 16"/>
-          <p:cNvSpPr/>
-          <p:nvPr/>
-        </p:nvSpPr>
-        <p:spPr>
-          <a:xfrm>
-            <a:off x="8046720" y="1645920"/>
-            <a:ext cx="3566160" cy="457199"/>
-          </a:xfrm>
-          <a:prstGeom prst="roundRect">
-            <a:avLst/>
-          </a:prstGeom>
-          <a:solidFill>
-            <a:srgbClr val="D97706"/>
-          </a:solidFill>
-          <a:ln>
-            <a:noFill/>
-          </a:ln>
-        </p:spPr>
-        <p:style>
-          <a:lnRef idx="1">
-            <a:schemeClr val="accent1"/>
-          </a:lnRef>
-          <a:fillRef idx="3">
-            <a:schemeClr val="accent1"/>
-          </a:fillRef>
-          <a:effectRef idx="2">
-            <a:schemeClr val="accent1"/>
-          </a:effectRef>
-          <a:fontRef idx="minor">
-            <a:schemeClr val="lt1"/>
-          </a:fontRef>
-        </p:style>
-        <p:txBody>
-          <a:bodyPr rtlCol="0" anchor="ctr"/>
-          <a:lstStyle/>
-          <a:p>
-            <a:pPr algn="ctr"/>
-          </a:p>
-        </p:txBody>
-      </p:sp>
-      <p:sp>
-        <p:nvSpPr>
-          <p:cNvPr id="18" name="TextBox 17"/>
-          <p:cNvSpPr txBox="1"/>
-          <p:nvPr/>
-        </p:nvSpPr>
-        <p:spPr>
-          <a:xfrm>
-            <a:off x="8046720" y="1691640"/>
-            <a:ext cx="3566160" cy="411480"/>
+      <p:pic>
+        <p:nvPicPr>
+          <p:cNvPr id="13" name="Picture 12" descr="lop5_bai4_cay_thuc_hanh_hoctap.png"/>
+          <p:cNvPicPr>
+            <a:picLocks noChangeAspect="1"/>
+          </p:cNvPicPr>
+          <p:nvPr/>
+        </p:nvPicPr>
+        <p:blipFill>
+          <a:blip r:embed="rId2"/>
+          <a:stretch>
+            <a:fillRect/>
+          </a:stretch>
+        </p:blipFill>
+        <p:spPr>
+          <a:xfrm>
+            <a:off x="4754880" y="1737360"/>
+            <a:ext cx="6858000" cy="3794760"/>
           </a:xfrm>
           <a:prstGeom prst="rect">
             <a:avLst/>
           </a:prstGeom>
-          <a:noFill/>
-        </p:spPr>
-        <p:txBody>
-          <a:bodyPr wrap="square" lIns="73152" rIns="73152" tIns="54864" bIns="54864">
-            <a:spAutoFit/>
-          </a:bodyPr>
-          <a:lstStyle/>
-          <a:p>
-            <a:pPr algn="ctr">
-              <a:defRPr sz="1500" b="1">
-                <a:solidFill>
-                  <a:srgbClr val="FFFFFF"/>
-                </a:solidFill>
-                <a:latin typeface="Arial"/>
-              </a:defRPr>
-            </a:pPr>
-            <a:r>
-              <a:t>3. Tệp tin (File)</a:t>
-            </a:r>
-          </a:p>
-        </p:txBody>
-      </p:sp>
-      <p:sp>
-        <p:nvSpPr>
-          <p:cNvPr id="19" name="TextBox 18"/>
-          <p:cNvSpPr txBox="1"/>
-          <p:nvPr/>
-        </p:nvSpPr>
-        <p:spPr>
-          <a:xfrm>
-            <a:off x="8183880" y="2240280"/>
-            <a:ext cx="3291840" cy="594359"/>
-          </a:xfrm>
-          <a:prstGeom prst="rect">
-            <a:avLst/>
-          </a:prstGeom>
-          <a:noFill/>
-        </p:spPr>
-        <p:txBody>
-          <a:bodyPr wrap="square" lIns="73152" rIns="73152" tIns="54864" bIns="54864">
-            <a:spAutoFit/>
-          </a:bodyPr>
-          <a:lstStyle/>
-          <a:p>
-            <a:pPr algn="l">
-              <a:defRPr sz="1400" b="0">
-                <a:solidFill>
-                  <a:srgbClr val="0F172A"/>
-                </a:solidFill>
-                <a:latin typeface="Arial"/>
-              </a:defRPr>
-            </a:pPr>
-            <a:r>
-              <a:t>• Bài văn .docx, Bài giảng .pptx</a:t>
-            </a:r>
-          </a:p>
-        </p:txBody>
-      </p:sp>
-      <p:sp>
-        <p:nvSpPr>
-          <p:cNvPr id="20" name="TextBox 19"/>
-          <p:cNvSpPr txBox="1"/>
-          <p:nvPr/>
-        </p:nvSpPr>
-        <p:spPr>
-          <a:xfrm>
-            <a:off x="8183880" y="2880360"/>
-            <a:ext cx="3291840" cy="594359"/>
-          </a:xfrm>
-          <a:prstGeom prst="rect">
-            <a:avLst/>
-          </a:prstGeom>
-          <a:noFill/>
-        </p:spPr>
-        <p:txBody>
-          <a:bodyPr wrap="square" lIns="73152" rIns="73152" tIns="54864" bIns="54864">
-            <a:spAutoFit/>
-          </a:bodyPr>
-          <a:lstStyle/>
-          <a:p>
-            <a:pPr algn="l">
-              <a:defRPr sz="1400" b="0">
-                <a:solidFill>
-                  <a:srgbClr val="0F172A"/>
-                </a:solidFill>
-                <a:latin typeface="Arial"/>
-              </a:defRPr>
-            </a:pPr>
-            <a:r>
-              <a:t>• Tranh vẽ .png, Âm thanh .mp3</a:t>
-            </a:r>
-          </a:p>
-        </p:txBody>
-      </p:sp>
+        </p:spPr>
+      </p:pic>
     </p:spTree>
   </p:cSld>
   <p:clrMapOvr>
@@ -6796,7 +6785,7 @@
       </p:sp>
       <p:pic>
         <p:nvPicPr>
-          <p:cNvPr id="10" name="Picture 9" descr="ai_lop5_bai4_tree.jpg"/>
+          <p:cNvPr id="10" name="Picture 9" descr="lop5_bai4_cay_thuc_hanh_hoctap.png"/>
           <p:cNvPicPr>
             <a:picLocks noChangeAspect="1"/>
           </p:cNvPicPr>

--- a/KHBD_Tin_học/Lớp_5/Tuần_04/Slide_Tin_hoc_Lop_5_Bai03_04.pptx
+++ b/KHBD_Tin_học/Lớp_5/Tuần_04/Slide_Tin_hoc_Lop_5_Bai03_04.pptx
@@ -4743,7 +4743,7 @@
               </a:defRPr>
             </a:pPr>
             <a:r>
-              <a:t>Sơ đồ 4 bước tìm kiếm thông tin chính xác</a:t>
+              <a:t>Quy trình 4 bước tìm kiếm thông tin chính xác</a:t>
             </a:r>
           </a:p>
         </p:txBody>
@@ -5111,7 +5111,7 @@
       </p:sp>
       <p:pic>
         <p:nvPicPr>
-          <p:cNvPr id="15" name="Picture 14" descr="lop5_bai3_quy_trinh_tim_kiem_4buoc.png"/>
+          <p:cNvPr id="15" name="Picture 14" descr="ai_lop5_bai3_search_flow.jpg"/>
           <p:cNvPicPr>
             <a:picLocks noChangeAspect="1"/>
           </p:cNvPicPr>
@@ -5933,7 +5933,7 @@
       </p:sp>
       <p:pic>
         <p:nvPicPr>
-          <p:cNvPr id="15" name="Picture 14" descr="lop5_bai4_4_operations_flow.png"/>
+          <p:cNvPr id="15" name="Picture 14" descr="ai_lop5_bai4_4steps_flow.jpg"/>
           <p:cNvPicPr>
             <a:picLocks noChangeAspect="1"/>
           </p:cNvPicPr>
@@ -6413,7 +6413,7 @@
       </p:sp>
       <p:pic>
         <p:nvPicPr>
-          <p:cNvPr id="13" name="Picture 12" descr="lop5_bai4_cay_thuc_hanh_hoctap.png"/>
+          <p:cNvPr id="13" name="Picture 12" descr="ai_lop5_bai4_hoctap_folders.jpg"/>
           <p:cNvPicPr>
             <a:picLocks noChangeAspect="1"/>
           </p:cNvPicPr>
@@ -6785,7 +6785,7 @@
       </p:sp>
       <p:pic>
         <p:nvPicPr>
-          <p:cNvPr id="10" name="Picture 9" descr="lop5_bai4_cay_thuc_hanh_hoctap.png"/>
+          <p:cNvPr id="10" name="Picture 9" descr="ai_lop5_bai4_hoctap_folders.jpg"/>
           <p:cNvPicPr>
             <a:picLocks noChangeAspect="1"/>
           </p:cNvPicPr>

--- a/KHBD_Tin_học/Lớp_5/Tuần_04/Slide_Tin_hoc_Lop_5_Bai03_04.pptx
+++ b/KHBD_Tin_học/Lớp_5/Tuần_04/Slide_Tin_hoc_Lop_5_Bai03_04.pptx
@@ -5,16 +5,18 @@
     <p:sldMasterId id="2147483648" r:id="rId1"/>
   </p:sldMasterIdLst>
   <p:sldIdLst>
-    <p:sldId id="256" r:id="rId5"/>
-    <p:sldId id="257" r:id="rId4"/>
-    <p:sldId id="258" r:id="rId3"/>
-    <p:sldId id="259" r:id="rId2"/>
-    <p:sldId id="260" r:id="rId10"/>
-    <p:sldId id="261" r:id="rId11"/>
-    <p:sldId id="262" r:id="rId12"/>
-    <p:sldId id="263" r:id="rId13"/>
-    <p:sldId id="264" r:id="rId14"/>
-    <p:sldId id="265" r:id="rId15"/>
+    <p:sldId id="256" r:id="rId2"/>
+    <p:sldId id="257" r:id="rId3"/>
+    <p:sldId id="258" r:id="rId4"/>
+    <p:sldId id="266" r:id="rId5"/>
+    <p:sldId id="259" r:id="rId6"/>
+    <p:sldId id="260" r:id="rId7"/>
+    <p:sldId id="267" r:id="rId8"/>
+    <p:sldId id="261" r:id="rId9"/>
+    <p:sldId id="262" r:id="rId10"/>
+    <p:sldId id="263" r:id="rId11"/>
+    <p:sldId id="264" r:id="rId12"/>
+    <p:sldId id="265" r:id="rId13"/>
   </p:sldIdLst>
   <p:sldSz cx="12192000" cy="6858000"/>
   <p:notesSz cx="6858000" cy="9144000"/>
@@ -113,6 +115,11 @@
       </a:defRPr>
     </a:lvl9pPr>
   </p:defaultTextStyle>
+  <p:extLst>
+    <p:ext uri="{EFAFB233-063F-42B5-8137-9DF3F51BA10A}">
+      <p15:sldGuideLst xmlns:p15="http://schemas.microsoft.com/office/powerpoint/2012/main"/>
+    </p:ext>
+  </p:extLst>
 </p:presentation>
 </file>
 
@@ -263,7 +270,7 @@
           <a:p>
             <a:fld id="{4EA7EFA5-8E37-463D-AE92-97FC5095B482}" type="datetimeFigureOut">
               <a:rPr lang="en-US" smtClean="0"/>
-              <a:t>8/4/2026</a:t>
+              <a:t>8/25/2026</a:t>
             </a:fld>
             <a:endParaRPr lang="en-US"/>
           </a:p>
@@ -461,7 +468,7 @@
           <a:p>
             <a:fld id="{4EA7EFA5-8E37-463D-AE92-97FC5095B482}" type="datetimeFigureOut">
               <a:rPr lang="en-US" smtClean="0"/>
-              <a:t>8/4/2026</a:t>
+              <a:t>8/25/2026</a:t>
             </a:fld>
             <a:endParaRPr lang="en-US"/>
           </a:p>
@@ -669,7 +676,7 @@
           <a:p>
             <a:fld id="{4EA7EFA5-8E37-463D-AE92-97FC5095B482}" type="datetimeFigureOut">
               <a:rPr lang="en-US" smtClean="0"/>
-              <a:t>8/4/2026</a:t>
+              <a:t>8/25/2026</a:t>
             </a:fld>
             <a:endParaRPr lang="en-US"/>
           </a:p>
@@ -867,7 +874,7 @@
           <a:p>
             <a:fld id="{4EA7EFA5-8E37-463D-AE92-97FC5095B482}" type="datetimeFigureOut">
               <a:rPr lang="en-US" smtClean="0"/>
-              <a:t>8/4/2026</a:t>
+              <a:t>8/25/2026</a:t>
             </a:fld>
             <a:endParaRPr lang="en-US"/>
           </a:p>
@@ -1142,7 +1149,7 @@
           <a:p>
             <a:fld id="{4EA7EFA5-8E37-463D-AE92-97FC5095B482}" type="datetimeFigureOut">
               <a:rPr lang="en-US" smtClean="0"/>
-              <a:t>8/4/2026</a:t>
+              <a:t>8/25/2026</a:t>
             </a:fld>
             <a:endParaRPr lang="en-US"/>
           </a:p>
@@ -1407,7 +1414,7 @@
           <a:p>
             <a:fld id="{4EA7EFA5-8E37-463D-AE92-97FC5095B482}" type="datetimeFigureOut">
               <a:rPr lang="en-US" smtClean="0"/>
-              <a:t>8/4/2026</a:t>
+              <a:t>8/25/2026</a:t>
             </a:fld>
             <a:endParaRPr lang="en-US"/>
           </a:p>
@@ -1819,7 +1826,7 @@
           <a:p>
             <a:fld id="{4EA7EFA5-8E37-463D-AE92-97FC5095B482}" type="datetimeFigureOut">
               <a:rPr lang="en-US" smtClean="0"/>
-              <a:t>8/4/2026</a:t>
+              <a:t>8/25/2026</a:t>
             </a:fld>
             <a:endParaRPr lang="en-US"/>
           </a:p>
@@ -1960,7 +1967,7 @@
           <a:p>
             <a:fld id="{4EA7EFA5-8E37-463D-AE92-97FC5095B482}" type="datetimeFigureOut">
               <a:rPr lang="en-US" smtClean="0"/>
-              <a:t>8/4/2026</a:t>
+              <a:t>8/25/2026</a:t>
             </a:fld>
             <a:endParaRPr lang="en-US"/>
           </a:p>
@@ -2073,7 +2080,7 @@
           <a:p>
             <a:fld id="{4EA7EFA5-8E37-463D-AE92-97FC5095B482}" type="datetimeFigureOut">
               <a:rPr lang="en-US" smtClean="0"/>
-              <a:t>8/4/2026</a:t>
+              <a:t>8/25/2026</a:t>
             </a:fld>
             <a:endParaRPr lang="en-US"/>
           </a:p>
@@ -2384,7 +2391,7 @@
           <a:p>
             <a:fld id="{4EA7EFA5-8E37-463D-AE92-97FC5095B482}" type="datetimeFigureOut">
               <a:rPr lang="en-US" smtClean="0"/>
-              <a:t>8/4/2026</a:t>
+              <a:t>8/25/2026</a:t>
             </a:fld>
             <a:endParaRPr lang="en-US"/>
           </a:p>
@@ -2672,7 +2679,7 @@
           <a:p>
             <a:fld id="{4EA7EFA5-8E37-463D-AE92-97FC5095B482}" type="datetimeFigureOut">
               <a:rPr lang="en-US" smtClean="0"/>
-              <a:t>8/4/2026</a:t>
+              <a:t>8/25/2026</a:t>
             </a:fld>
             <a:endParaRPr lang="en-US"/>
           </a:p>
@@ -2913,7 +2920,7 @@
           <a:p>
             <a:fld id="{4EA7EFA5-8E37-463D-AE92-97FC5095B482}" type="datetimeFigureOut">
               <a:rPr lang="en-US" smtClean="0"/>
-              <a:t>8/4/2026</a:t>
+              <a:t>8/25/2026</a:t>
             </a:fld>
             <a:endParaRPr lang="en-US"/>
           </a:p>
@@ -3387,7 +3394,7 @@
 </file>
 
 <file path=ppt/slides/slide1.xml><?xml version="1.0" encoding="utf-8"?>
-<p:sld xmlns:a="http://schemas.openxmlformats.org/drawingml/2006/main" xmlns:p="http://schemas.openxmlformats.org/presentationml/2006/main" xmlns:r="http://schemas.openxmlformats.org/officeDocument/2006/relationships">
+<p:sld xmlns:a="http://schemas.openxmlformats.org/drawingml/2006/main" xmlns:r="http://schemas.openxmlformats.org/officeDocument/2006/relationships" xmlns:p="http://schemas.openxmlformats.org/presentationml/2006/main">
   <p:cSld>
     <p:spTree>
       <p:nvGrpSpPr>
@@ -3395,7 +3402,14 @@
         <p:cNvGrpSpPr/>
         <p:nvPr/>
       </p:nvGrpSpPr>
-      <p:grpSpPr/>
+      <p:grpSpPr>
+        <a:xfrm>
+          <a:off x="0" y="0"/>
+          <a:ext cx="0" cy="0"/>
+          <a:chOff x="0" y="0"/>
+          <a:chExt cx="0" cy="0"/>
+        </a:xfrm>
+      </p:grpSpPr>
       <p:sp>
         <p:nvSpPr>
           <p:cNvPr id="2" name="Rectangle 1"/>
@@ -3436,6 +3450,7 @@
           <a:lstStyle/>
           <a:p>
             <a:pPr algn="ctr"/>
+            <a:endParaRPr/>
           </a:p>
         </p:txBody>
       </p:sp>
@@ -3481,6 +3496,7 @@
           <a:lstStyle/>
           <a:p>
             <a:pPr algn="ctr"/>
+            <a:endParaRPr/>
           </a:p>
         </p:txBody>
       </p:sp>
@@ -3524,6 +3540,7 @@
           <a:lstStyle/>
           <a:p>
             <a:pPr algn="ctr"/>
+            <a:endParaRPr/>
           </a:p>
         </p:txBody>
       </p:sp>
@@ -3544,7 +3561,7 @@
           <a:noFill/>
         </p:spPr>
         <p:txBody>
-          <a:bodyPr wrap="square" lIns="73152" rIns="73152" tIns="54864" bIns="54864">
+          <a:bodyPr wrap="square" lIns="73152" tIns="54864" rIns="73152" bIns="54864">
             <a:spAutoFit/>
           </a:bodyPr>
           <a:lstStyle/>
@@ -3580,7 +3597,7 @@
           <a:noFill/>
         </p:spPr>
         <p:txBody>
-          <a:bodyPr wrap="square" lIns="73152" rIns="73152" tIns="54864" bIns="54864">
+          <a:bodyPr wrap="square" lIns="73152" tIns="54864" rIns="73152" bIns="54864">
             <a:spAutoFit/>
           </a:bodyPr>
           <a:lstStyle/>
@@ -3620,7 +3637,7 @@
           <a:noFill/>
         </p:spPr>
         <p:txBody>
-          <a:bodyPr wrap="square" lIns="73152" rIns="73152" tIns="54864" bIns="54864">
+          <a:bodyPr wrap="square" lIns="73152" tIns="54864" rIns="73152" bIns="54864">
             <a:spAutoFit/>
           </a:bodyPr>
           <a:lstStyle/>
@@ -3656,7 +3673,7 @@
           <a:noFill/>
         </p:spPr>
         <p:txBody>
-          <a:bodyPr wrap="square" lIns="73152" rIns="73152" tIns="54864" bIns="54864">
+          <a:bodyPr wrap="square" lIns="73152" tIns="54864" rIns="73152" bIns="54864">
             <a:spAutoFit/>
           </a:bodyPr>
           <a:lstStyle/>
@@ -3687,7 +3704,7 @@
 </file>
 
 <file path=ppt/slides/slide10.xml><?xml version="1.0" encoding="utf-8"?>
-<p:sld xmlns:a="http://schemas.openxmlformats.org/drawingml/2006/main" xmlns:p="http://schemas.openxmlformats.org/presentationml/2006/main" xmlns:r="http://schemas.openxmlformats.org/officeDocument/2006/relationships">
+<p:sld xmlns:a="http://schemas.openxmlformats.org/drawingml/2006/main" xmlns:r="http://schemas.openxmlformats.org/officeDocument/2006/relationships" xmlns:p="http://schemas.openxmlformats.org/presentationml/2006/main">
   <p:cSld>
     <p:spTree>
       <p:nvGrpSpPr>
@@ -3695,7 +3712,14 @@
         <p:cNvGrpSpPr/>
         <p:nvPr/>
       </p:nvGrpSpPr>
-      <p:grpSpPr/>
+      <p:grpSpPr>
+        <a:xfrm>
+          <a:off x="0" y="0"/>
+          <a:ext cx="0" cy="0"/>
+          <a:chOff x="0" y="0"/>
+          <a:chExt cx="0" cy="0"/>
+        </a:xfrm>
+      </p:grpSpPr>
       <p:sp>
         <p:nvSpPr>
           <p:cNvPr id="2" name="Rectangle 1"/>
@@ -3708,6 +3732,50 @@
             <a:ext cx="12188952" cy="4754879"/>
           </a:xfrm>
           <a:prstGeom prst="rect">
+            <a:avLst/>
+          </a:prstGeom>
+          <a:solidFill>
+            <a:srgbClr val="FDF2F8"/>
+          </a:solidFill>
+          <a:ln>
+            <a:noFill/>
+          </a:ln>
+        </p:spPr>
+        <p:style>
+          <a:lnRef idx="1">
+            <a:schemeClr val="accent1"/>
+          </a:lnRef>
+          <a:fillRef idx="3">
+            <a:schemeClr val="accent1"/>
+          </a:fillRef>
+          <a:effectRef idx="2">
+            <a:schemeClr val="accent1"/>
+          </a:effectRef>
+          <a:fontRef idx="minor">
+            <a:schemeClr val="lt1"/>
+          </a:fontRef>
+        </p:style>
+        <p:txBody>
+          <a:bodyPr rtlCol="0" anchor="ctr"/>
+          <a:lstStyle/>
+          <a:p>
+            <a:pPr algn="ctr"/>
+            <a:endParaRPr/>
+          </a:p>
+        </p:txBody>
+      </p:sp>
+      <p:sp>
+        <p:nvSpPr>
+          <p:cNvPr id="3" name="Rounded Rectangle 2"/>
+          <p:cNvSpPr/>
+          <p:nvPr/>
+        </p:nvSpPr>
+        <p:spPr>
+          <a:xfrm>
+            <a:off x="365760" y="1188720"/>
+            <a:ext cx="11247120" cy="822960"/>
+          </a:xfrm>
+          <a:prstGeom prst="roundRect">
             <a:avLst/>
           </a:prstGeom>
           <a:solidFill>
@@ -3736,19 +3804,56 @@
           <a:lstStyle/>
           <a:p>
             <a:pPr algn="ctr"/>
-          </a:p>
-        </p:txBody>
-      </p:sp>
-      <p:sp>
-        <p:nvSpPr>
-          <p:cNvPr id="3" name="Rounded Rectangle 2"/>
+            <a:endParaRPr/>
+          </a:p>
+        </p:txBody>
+      </p:sp>
+      <p:sp>
+        <p:nvSpPr>
+          <p:cNvPr id="4" name="TextBox 3"/>
+          <p:cNvSpPr txBox="1"/>
+          <p:nvPr/>
+        </p:nvSpPr>
+        <p:spPr>
+          <a:xfrm>
+            <a:off x="640080" y="1234440"/>
+            <a:ext cx="10698480" cy="731520"/>
+          </a:xfrm>
+          <a:prstGeom prst="rect">
+            <a:avLst/>
+          </a:prstGeom>
+          <a:noFill/>
+        </p:spPr>
+        <p:txBody>
+          <a:bodyPr wrap="square" lIns="73152" tIns="54864" rIns="73152" bIns="54864">
+            <a:spAutoFit/>
+          </a:bodyPr>
+          <a:lstStyle/>
+          <a:p>
+            <a:pPr algn="l">
+              <a:defRPr sz="1800" b="1">
+                <a:solidFill>
+                  <a:srgbClr val="FFFFFF"/>
+                </a:solidFill>
+                <a:latin typeface="Arial"/>
+              </a:defRPr>
+            </a:pPr>
+            <a:r>
+              <a:t>❓ Tổng kết kiến thức trọng tâm Tuần 04 (Lớp 5)</a:t>
+            </a:r>
+          </a:p>
+        </p:txBody>
+      </p:sp>
+      <p:sp>
+        <p:nvSpPr>
+          <p:cNvPr id="5" name="Rounded Rectangle 4"/>
           <p:cNvSpPr/>
           <p:nvPr/>
         </p:nvSpPr>
         <p:spPr>
           <a:xfrm>
-            <a:off x="1828800" y="1645920"/>
-            <a:ext cx="8531352" cy="3474720"/>
+            <a:off x="365760" y="2103120"/>
+            <a:ext cx="6400800" cy="2194559"/>
           </a:xfrm>
           <a:prstGeom prst="roundRect">
             <a:avLst/>
@@ -3781,19 +3886,20 @@
           <a:lstStyle/>
           <a:p>
             <a:pPr algn="ctr"/>
-          </a:p>
-        </p:txBody>
-      </p:sp>
-      <p:sp>
-        <p:nvSpPr>
-          <p:cNvPr id="4" name="Rounded Rectangle 3"/>
+            <a:endParaRPr/>
+          </a:p>
+        </p:txBody>
+      </p:sp>
+      <p:sp>
+        <p:nvSpPr>
+          <p:cNvPr id="6" name="Rounded Rectangle 5"/>
           <p:cNvSpPr/>
           <p:nvPr/>
         </p:nvSpPr>
         <p:spPr>
           <a:xfrm>
-            <a:off x="1828800" y="1645920"/>
-            <a:ext cx="8531352" cy="182879"/>
+            <a:off x="365760" y="2103120"/>
+            <a:ext cx="164592" cy="2194559"/>
           </a:xfrm>
           <a:prstGeom prst="roundRect">
             <a:avLst/>
@@ -3824,6 +3930,1353 @@
           <a:lstStyle/>
           <a:p>
             <a:pPr algn="ctr"/>
+            <a:endParaRPr/>
+          </a:p>
+        </p:txBody>
+      </p:sp>
+      <p:sp>
+        <p:nvSpPr>
+          <p:cNvPr id="7" name="TextBox 6"/>
+          <p:cNvSpPr txBox="1"/>
+          <p:nvPr/>
+        </p:nvSpPr>
+        <p:spPr>
+          <a:xfrm>
+            <a:off x="640080" y="2240280"/>
+            <a:ext cx="5943600" cy="822959"/>
+          </a:xfrm>
+          <a:prstGeom prst="rect">
+            <a:avLst/>
+          </a:prstGeom>
+          <a:noFill/>
+        </p:spPr>
+        <p:txBody>
+          <a:bodyPr wrap="square" lIns="73152" tIns="54864" rIns="73152" bIns="54864">
+            <a:spAutoFit/>
+          </a:bodyPr>
+          <a:lstStyle/>
+          <a:p>
+            <a:pPr algn="l">
+              <a:defRPr sz="1500" b="0">
+                <a:solidFill>
+                  <a:srgbClr val="0F172A"/>
+                </a:solidFill>
+                <a:latin typeface="Arial"/>
+              </a:defRPr>
+            </a:pPr>
+            <a:r>
+              <a:t>👉 Tiết 3: Thu thập và tìm kiếm thông tin chính xác bằng từ khóa " ".</a:t>
+            </a:r>
+          </a:p>
+        </p:txBody>
+      </p:sp>
+      <p:sp>
+        <p:nvSpPr>
+          <p:cNvPr id="8" name="TextBox 7"/>
+          <p:cNvSpPr txBox="1"/>
+          <p:nvPr/>
+        </p:nvSpPr>
+        <p:spPr>
+          <a:xfrm>
+            <a:off x="640080" y="3200400"/>
+            <a:ext cx="5943600" cy="822960"/>
+          </a:xfrm>
+          <a:prstGeom prst="rect">
+            <a:avLst/>
+          </a:prstGeom>
+          <a:noFill/>
+        </p:spPr>
+        <p:txBody>
+          <a:bodyPr wrap="square" lIns="73152" tIns="54864" rIns="73152" bIns="54864">
+            <a:spAutoFit/>
+          </a:bodyPr>
+          <a:lstStyle/>
+          <a:p>
+            <a:pPr algn="l">
+              <a:defRPr sz="1500" b="0">
+                <a:solidFill>
+                  <a:srgbClr val="0F172A"/>
+                </a:solidFill>
+                <a:latin typeface="Arial"/>
+              </a:defRPr>
+            </a:pPr>
+            <a:r>
+              <a:t>👉 Tiết 4: Sắp xếp dữ liệu ngăn nắp theo cấu trúc Cây thư mục.</a:t>
+            </a:r>
+          </a:p>
+        </p:txBody>
+      </p:sp>
+      <p:sp>
+        <p:nvSpPr>
+          <p:cNvPr id="9" name="Rounded Rectangle 8"/>
+          <p:cNvSpPr/>
+          <p:nvPr/>
+        </p:nvSpPr>
+        <p:spPr>
+          <a:xfrm>
+            <a:off x="6949440" y="2103120"/>
+            <a:ext cx="4663440" cy="2194559"/>
+          </a:xfrm>
+          <a:prstGeom prst="roundRect">
+            <a:avLst/>
+          </a:prstGeom>
+          <a:solidFill>
+            <a:srgbClr val="FFFFFF"/>
+          </a:solidFill>
+          <a:ln w="19050">
+            <a:solidFill>
+              <a:srgbClr val="CBD5E1"/>
+            </a:solidFill>
+          </a:ln>
+        </p:spPr>
+        <p:style>
+          <a:lnRef idx="1">
+            <a:schemeClr val="accent1"/>
+          </a:lnRef>
+          <a:fillRef idx="3">
+            <a:schemeClr val="accent1"/>
+          </a:fillRef>
+          <a:effectRef idx="2">
+            <a:schemeClr val="accent1"/>
+          </a:effectRef>
+          <a:fontRef idx="minor">
+            <a:schemeClr val="lt1"/>
+          </a:fontRef>
+        </p:style>
+        <p:txBody>
+          <a:bodyPr rtlCol="0" anchor="ctr"/>
+          <a:lstStyle/>
+          <a:p>
+            <a:pPr algn="ctr"/>
+            <a:endParaRPr/>
+          </a:p>
+        </p:txBody>
+      </p:sp>
+      <p:pic>
+        <p:nvPicPr>
+          <p:cNvPr id="10" name="Picture 9" descr="ai_lop5_bai4_hoctap_folders.jpg"/>
+          <p:cNvPicPr>
+            <a:picLocks noChangeAspect="1"/>
+          </p:cNvPicPr>
+          <p:nvPr/>
+        </p:nvPicPr>
+        <p:blipFill>
+          <a:blip r:embed="rId2"/>
+          <a:stretch>
+            <a:fillRect/>
+          </a:stretch>
+        </p:blipFill>
+        <p:spPr>
+          <a:xfrm>
+            <a:off x="7040880" y="2148840"/>
+            <a:ext cx="4480560" cy="2103120"/>
+          </a:xfrm>
+          <a:prstGeom prst="rect">
+            <a:avLst/>
+          </a:prstGeom>
+        </p:spPr>
+      </p:pic>
+      <p:sp>
+        <p:nvSpPr>
+          <p:cNvPr id="11" name="Rounded Rectangle 10"/>
+          <p:cNvSpPr/>
+          <p:nvPr/>
+        </p:nvSpPr>
+        <p:spPr>
+          <a:xfrm>
+            <a:off x="365760" y="4434840"/>
+            <a:ext cx="11247120" cy="1188719"/>
+          </a:xfrm>
+          <a:prstGeom prst="roundRect">
+            <a:avLst/>
+          </a:prstGeom>
+          <a:solidFill>
+            <a:srgbClr val="EA580C"/>
+          </a:solidFill>
+          <a:ln>
+            <a:noFill/>
+          </a:ln>
+        </p:spPr>
+        <p:style>
+          <a:lnRef idx="1">
+            <a:schemeClr val="accent1"/>
+          </a:lnRef>
+          <a:fillRef idx="3">
+            <a:schemeClr val="accent1"/>
+          </a:fillRef>
+          <a:effectRef idx="2">
+            <a:schemeClr val="accent1"/>
+          </a:effectRef>
+          <a:fontRef idx="minor">
+            <a:schemeClr val="lt1"/>
+          </a:fontRef>
+        </p:style>
+        <p:txBody>
+          <a:bodyPr rtlCol="0" anchor="ctr"/>
+          <a:lstStyle/>
+          <a:p>
+            <a:pPr algn="ctr"/>
+            <a:endParaRPr/>
+          </a:p>
+        </p:txBody>
+      </p:sp>
+      <p:sp>
+        <p:nvSpPr>
+          <p:cNvPr id="12" name="TextBox 11"/>
+          <p:cNvSpPr txBox="1"/>
+          <p:nvPr/>
+        </p:nvSpPr>
+        <p:spPr>
+          <a:xfrm>
+            <a:off x="640080" y="4480560"/>
+            <a:ext cx="10698480" cy="320039"/>
+          </a:xfrm>
+          <a:prstGeom prst="rect">
+            <a:avLst/>
+          </a:prstGeom>
+          <a:noFill/>
+        </p:spPr>
+        <p:txBody>
+          <a:bodyPr wrap="square" lIns="73152" tIns="54864" rIns="73152" bIns="54864">
+            <a:spAutoFit/>
+          </a:bodyPr>
+          <a:lstStyle/>
+          <a:p>
+            <a:pPr algn="l">
+              <a:defRPr sz="1400" b="1">
+                <a:solidFill>
+                  <a:srgbClr val="FEF08A"/>
+                </a:solidFill>
+                <a:latin typeface="Arial"/>
+              </a:defRPr>
+            </a:pPr>
+            <a:r>
+              <a:t>📌 GHI NHỚ TRỌNG TÂM (SGK)</a:t>
+            </a:r>
+          </a:p>
+        </p:txBody>
+      </p:sp>
+      <p:sp>
+        <p:nvSpPr>
+          <p:cNvPr id="13" name="TextBox 12"/>
+          <p:cNvSpPr txBox="1"/>
+          <p:nvPr/>
+        </p:nvSpPr>
+        <p:spPr>
+          <a:xfrm>
+            <a:off x="640080" y="4800600"/>
+            <a:ext cx="10698480" cy="777239"/>
+          </a:xfrm>
+          <a:prstGeom prst="rect">
+            <a:avLst/>
+          </a:prstGeom>
+          <a:noFill/>
+        </p:spPr>
+        <p:txBody>
+          <a:bodyPr wrap="square" lIns="73152" tIns="54864" rIns="73152" bIns="54864">
+            <a:spAutoFit/>
+          </a:bodyPr>
+          <a:lstStyle/>
+          <a:p>
+            <a:pPr algn="l">
+              <a:defRPr sz="1600" b="1">
+                <a:solidFill>
+                  <a:srgbClr val="FFFFFF"/>
+                </a:solidFill>
+                <a:latin typeface="Arial"/>
+              </a:defRPr>
+            </a:pPr>
+            <a:r>
+              <a:t>Làm chủ kỹ năng tìm kiếm và tổ chức dữ liệu giúp em trở thành người sử dụng máy tính thông minh và hiệu quả!</a:t>
+            </a:r>
+          </a:p>
+        </p:txBody>
+      </p:sp>
+    </p:spTree>
+  </p:cSld>
+  <p:clrMapOvr>
+    <a:masterClrMapping/>
+  </p:clrMapOvr>
+  <p:transition spd="med">
+    <p:fade/>
+  </p:transition>
+</p:sld>
+</file>
+
+<file path=ppt/slides/slide11.xml><?xml version="1.0" encoding="utf-8"?>
+<p:sld xmlns:a="http://schemas.openxmlformats.org/drawingml/2006/main" xmlns:r="http://schemas.openxmlformats.org/officeDocument/2006/relationships" xmlns:p="http://schemas.openxmlformats.org/presentationml/2006/main">
+  <p:cSld>
+    <p:spTree>
+      <p:nvGrpSpPr>
+        <p:cNvPr id="1" name=""/>
+        <p:cNvGrpSpPr/>
+        <p:nvPr/>
+      </p:nvGrpSpPr>
+      <p:grpSpPr>
+        <a:xfrm>
+          <a:off x="0" y="0"/>
+          <a:ext cx="0" cy="0"/>
+          <a:chOff x="0" y="0"/>
+          <a:chExt cx="0" cy="0"/>
+        </a:xfrm>
+      </p:grpSpPr>
+      <p:sp>
+        <p:nvSpPr>
+          <p:cNvPr id="2" name="Rectangle 1"/>
+          <p:cNvSpPr/>
+          <p:nvPr/>
+        </p:nvSpPr>
+        <p:spPr>
+          <a:xfrm>
+            <a:off x="0" y="1051560"/>
+            <a:ext cx="12188952" cy="4754879"/>
+          </a:xfrm>
+          <a:prstGeom prst="rect">
+            <a:avLst/>
+          </a:prstGeom>
+          <a:solidFill>
+            <a:srgbClr val="FDF2F8"/>
+          </a:solidFill>
+          <a:ln>
+            <a:noFill/>
+          </a:ln>
+        </p:spPr>
+        <p:style>
+          <a:lnRef idx="1">
+            <a:schemeClr val="accent1"/>
+          </a:lnRef>
+          <a:fillRef idx="3">
+            <a:schemeClr val="accent1"/>
+          </a:fillRef>
+          <a:effectRef idx="2">
+            <a:schemeClr val="accent1"/>
+          </a:effectRef>
+          <a:fontRef idx="minor">
+            <a:schemeClr val="lt1"/>
+          </a:fontRef>
+        </p:style>
+        <p:txBody>
+          <a:bodyPr rtlCol="0" anchor="ctr"/>
+          <a:lstStyle/>
+          <a:p>
+            <a:pPr algn="ctr"/>
+            <a:endParaRPr/>
+          </a:p>
+        </p:txBody>
+      </p:sp>
+      <p:sp>
+        <p:nvSpPr>
+          <p:cNvPr id="3" name="Rounded Rectangle 2"/>
+          <p:cNvSpPr/>
+          <p:nvPr/>
+        </p:nvSpPr>
+        <p:spPr>
+          <a:xfrm>
+            <a:off x="365760" y="1143000"/>
+            <a:ext cx="2926080" cy="347471"/>
+          </a:xfrm>
+          <a:prstGeom prst="roundRect">
+            <a:avLst/>
+          </a:prstGeom>
+          <a:solidFill>
+            <a:srgbClr val="EA580C"/>
+          </a:solidFill>
+          <a:ln>
+            <a:noFill/>
+          </a:ln>
+        </p:spPr>
+        <p:style>
+          <a:lnRef idx="1">
+            <a:schemeClr val="accent1"/>
+          </a:lnRef>
+          <a:fillRef idx="3">
+            <a:schemeClr val="accent1"/>
+          </a:fillRef>
+          <a:effectRef idx="2">
+            <a:schemeClr val="accent1"/>
+          </a:effectRef>
+          <a:fontRef idx="minor">
+            <a:schemeClr val="lt1"/>
+          </a:fontRef>
+        </p:style>
+        <p:txBody>
+          <a:bodyPr rtlCol="0" anchor="ctr"/>
+          <a:lstStyle/>
+          <a:p>
+            <a:pPr algn="ctr"/>
+            <a:endParaRPr/>
+          </a:p>
+        </p:txBody>
+      </p:sp>
+      <p:sp>
+        <p:nvSpPr>
+          <p:cNvPr id="4" name="TextBox 3"/>
+          <p:cNvSpPr txBox="1"/>
+          <p:nvPr/>
+        </p:nvSpPr>
+        <p:spPr>
+          <a:xfrm>
+            <a:off x="365760" y="1143000"/>
+            <a:ext cx="2926080" cy="347471"/>
+          </a:xfrm>
+          <a:prstGeom prst="rect">
+            <a:avLst/>
+          </a:prstGeom>
+          <a:noFill/>
+        </p:spPr>
+        <p:txBody>
+          <a:bodyPr wrap="square" lIns="73152" tIns="54864" rIns="73152" bIns="54864">
+            <a:spAutoFit/>
+          </a:bodyPr>
+          <a:lstStyle/>
+          <a:p>
+            <a:pPr algn="ctr">
+              <a:defRPr sz="1300" b="1">
+                <a:solidFill>
+                  <a:srgbClr val="FFFFFF"/>
+                </a:solidFill>
+                <a:latin typeface="Arial"/>
+              </a:defRPr>
+            </a:pPr>
+            <a:r>
+              <a:t>LUYỆN TẬP NHANH</a:t>
+            </a:r>
+          </a:p>
+        </p:txBody>
+      </p:sp>
+      <p:sp>
+        <p:nvSpPr>
+          <p:cNvPr id="5" name="Rounded Rectangle 4"/>
+          <p:cNvSpPr/>
+          <p:nvPr/>
+        </p:nvSpPr>
+        <p:spPr>
+          <a:xfrm>
+            <a:off x="365760" y="1600200"/>
+            <a:ext cx="11247120" cy="914400"/>
+          </a:xfrm>
+          <a:prstGeom prst="roundRect">
+            <a:avLst/>
+          </a:prstGeom>
+          <a:solidFill>
+            <a:srgbClr val="FFFFFF"/>
+          </a:solidFill>
+          <a:ln w="19050">
+            <a:solidFill>
+              <a:srgbClr val="BE185D"/>
+            </a:solidFill>
+          </a:ln>
+        </p:spPr>
+        <p:style>
+          <a:lnRef idx="1">
+            <a:schemeClr val="accent1"/>
+          </a:lnRef>
+          <a:fillRef idx="3">
+            <a:schemeClr val="accent1"/>
+          </a:fillRef>
+          <a:effectRef idx="2">
+            <a:schemeClr val="accent1"/>
+          </a:effectRef>
+          <a:fontRef idx="minor">
+            <a:schemeClr val="lt1"/>
+          </a:fontRef>
+        </p:style>
+        <p:txBody>
+          <a:bodyPr rtlCol="0" anchor="ctr"/>
+          <a:lstStyle/>
+          <a:p>
+            <a:pPr algn="ctr"/>
+            <a:endParaRPr/>
+          </a:p>
+        </p:txBody>
+      </p:sp>
+      <p:sp>
+        <p:nvSpPr>
+          <p:cNvPr id="6" name="Rounded Rectangle 5"/>
+          <p:cNvSpPr/>
+          <p:nvPr/>
+        </p:nvSpPr>
+        <p:spPr>
+          <a:xfrm>
+            <a:off x="365760" y="1600200"/>
+            <a:ext cx="182880" cy="914400"/>
+          </a:xfrm>
+          <a:prstGeom prst="roundRect">
+            <a:avLst/>
+          </a:prstGeom>
+          <a:solidFill>
+            <a:srgbClr val="BE185D"/>
+          </a:solidFill>
+          <a:ln>
+            <a:noFill/>
+          </a:ln>
+        </p:spPr>
+        <p:style>
+          <a:lnRef idx="1">
+            <a:schemeClr val="accent1"/>
+          </a:lnRef>
+          <a:fillRef idx="3">
+            <a:schemeClr val="accent1"/>
+          </a:fillRef>
+          <a:effectRef idx="2">
+            <a:schemeClr val="accent1"/>
+          </a:effectRef>
+          <a:fontRef idx="minor">
+            <a:schemeClr val="lt1"/>
+          </a:fontRef>
+        </p:style>
+        <p:txBody>
+          <a:bodyPr rtlCol="0" anchor="ctr"/>
+          <a:lstStyle/>
+          <a:p>
+            <a:pPr algn="ctr"/>
+            <a:endParaRPr/>
+          </a:p>
+        </p:txBody>
+      </p:sp>
+      <p:sp>
+        <p:nvSpPr>
+          <p:cNvPr id="7" name="TextBox 6"/>
+          <p:cNvSpPr txBox="1"/>
+          <p:nvPr/>
+        </p:nvSpPr>
+        <p:spPr>
+          <a:xfrm>
+            <a:off x="640080" y="1691640"/>
+            <a:ext cx="10698480" cy="731520"/>
+          </a:xfrm>
+          <a:prstGeom prst="rect">
+            <a:avLst/>
+          </a:prstGeom>
+          <a:noFill/>
+        </p:spPr>
+        <p:txBody>
+          <a:bodyPr wrap="square" lIns="73152" tIns="54864" rIns="73152" bIns="54864">
+            <a:spAutoFit/>
+          </a:bodyPr>
+          <a:lstStyle/>
+          <a:p>
+            <a:pPr algn="l">
+              <a:defRPr sz="1700" b="1">
+                <a:solidFill>
+                  <a:srgbClr val="0F172A"/>
+                </a:solidFill>
+                <a:latin typeface="Arial"/>
+              </a:defRPr>
+            </a:pPr>
+            <a:r>
+              <a:t>❓ Trong đường dẫn D:\HOC_TAP\TIN_HOC\BaiTap.docx, đâu là thư mục con?</a:t>
+            </a:r>
+          </a:p>
+        </p:txBody>
+      </p:sp>
+      <p:sp>
+        <p:nvSpPr>
+          <p:cNvPr id="8" name="Rounded Rectangle 7"/>
+          <p:cNvSpPr/>
+          <p:nvPr/>
+        </p:nvSpPr>
+        <p:spPr>
+          <a:xfrm>
+            <a:off x="365760" y="2651760"/>
+            <a:ext cx="5440680" cy="1325879"/>
+          </a:xfrm>
+          <a:prstGeom prst="roundRect">
+            <a:avLst/>
+          </a:prstGeom>
+          <a:solidFill>
+            <a:srgbClr val="FFFFFF"/>
+          </a:solidFill>
+          <a:ln w="19050">
+            <a:solidFill>
+              <a:srgbClr val="CBD5E1"/>
+            </a:solidFill>
+          </a:ln>
+        </p:spPr>
+        <p:style>
+          <a:lnRef idx="1">
+            <a:schemeClr val="accent1"/>
+          </a:lnRef>
+          <a:fillRef idx="3">
+            <a:schemeClr val="accent1"/>
+          </a:fillRef>
+          <a:effectRef idx="2">
+            <a:schemeClr val="accent1"/>
+          </a:effectRef>
+          <a:fontRef idx="minor">
+            <a:schemeClr val="lt1"/>
+          </a:fontRef>
+        </p:style>
+        <p:txBody>
+          <a:bodyPr rtlCol="0" anchor="ctr"/>
+          <a:lstStyle/>
+          <a:p>
+            <a:pPr algn="ctr"/>
+            <a:endParaRPr/>
+          </a:p>
+        </p:txBody>
+      </p:sp>
+      <p:sp>
+        <p:nvSpPr>
+          <p:cNvPr id="9" name="Oval 8"/>
+          <p:cNvSpPr/>
+          <p:nvPr/>
+        </p:nvSpPr>
+        <p:spPr>
+          <a:xfrm>
+            <a:off x="548640" y="2880360"/>
+            <a:ext cx="822960" cy="822959"/>
+          </a:xfrm>
+          <a:prstGeom prst="ellipse">
+            <a:avLst/>
+          </a:prstGeom>
+          <a:solidFill>
+            <a:srgbClr val="BE185D"/>
+          </a:solidFill>
+          <a:ln>
+            <a:noFill/>
+          </a:ln>
+        </p:spPr>
+        <p:style>
+          <a:lnRef idx="1">
+            <a:schemeClr val="accent1"/>
+          </a:lnRef>
+          <a:fillRef idx="3">
+            <a:schemeClr val="accent1"/>
+          </a:fillRef>
+          <a:effectRef idx="2">
+            <a:schemeClr val="accent1"/>
+          </a:effectRef>
+          <a:fontRef idx="minor">
+            <a:schemeClr val="lt1"/>
+          </a:fontRef>
+        </p:style>
+        <p:txBody>
+          <a:bodyPr rtlCol="0" anchor="ctr"/>
+          <a:lstStyle/>
+          <a:p>
+            <a:pPr algn="ctr"/>
+            <a:endParaRPr/>
+          </a:p>
+        </p:txBody>
+      </p:sp>
+      <p:sp>
+        <p:nvSpPr>
+          <p:cNvPr id="10" name="TextBox 9"/>
+          <p:cNvSpPr txBox="1"/>
+          <p:nvPr/>
+        </p:nvSpPr>
+        <p:spPr>
+          <a:xfrm>
+            <a:off x="548640" y="3063240"/>
+            <a:ext cx="822960" cy="457200"/>
+          </a:xfrm>
+          <a:prstGeom prst="rect">
+            <a:avLst/>
+          </a:prstGeom>
+          <a:noFill/>
+        </p:spPr>
+        <p:txBody>
+          <a:bodyPr wrap="square" lIns="73152" tIns="54864" rIns="73152" bIns="54864">
+            <a:spAutoFit/>
+          </a:bodyPr>
+          <a:lstStyle/>
+          <a:p>
+            <a:pPr algn="ctr">
+              <a:defRPr sz="1800" b="1">
+                <a:solidFill>
+                  <a:srgbClr val="FFFFFF"/>
+                </a:solidFill>
+                <a:latin typeface="Arial"/>
+              </a:defRPr>
+            </a:pPr>
+            <a:r>
+              <a:t>A.</a:t>
+            </a:r>
+          </a:p>
+        </p:txBody>
+      </p:sp>
+      <p:sp>
+        <p:nvSpPr>
+          <p:cNvPr id="11" name="TextBox 10"/>
+          <p:cNvSpPr txBox="1"/>
+          <p:nvPr/>
+        </p:nvSpPr>
+        <p:spPr>
+          <a:xfrm>
+            <a:off x="1508760" y="2880360"/>
+            <a:ext cx="4160520" cy="960119"/>
+          </a:xfrm>
+          <a:prstGeom prst="rect">
+            <a:avLst/>
+          </a:prstGeom>
+          <a:noFill/>
+        </p:spPr>
+        <p:txBody>
+          <a:bodyPr wrap="square" lIns="73152" tIns="54864" rIns="73152" bIns="54864">
+            <a:spAutoFit/>
+          </a:bodyPr>
+          <a:lstStyle/>
+          <a:p>
+            <a:pPr algn="l">
+              <a:defRPr sz="1500" b="0">
+                <a:solidFill>
+                  <a:srgbClr val="0F172A"/>
+                </a:solidFill>
+                <a:latin typeface="Arial"/>
+              </a:defRPr>
+            </a:pPr>
+            <a:r>
+              <a:t>Ổ đĩa D:</a:t>
+            </a:r>
+          </a:p>
+        </p:txBody>
+      </p:sp>
+      <p:sp>
+        <p:nvSpPr>
+          <p:cNvPr id="12" name="Rounded Rectangle 11"/>
+          <p:cNvSpPr/>
+          <p:nvPr/>
+        </p:nvSpPr>
+        <p:spPr>
+          <a:xfrm>
+            <a:off x="6172200" y="2651760"/>
+            <a:ext cx="5440680" cy="1325879"/>
+          </a:xfrm>
+          <a:prstGeom prst="roundRect">
+            <a:avLst/>
+          </a:prstGeom>
+          <a:solidFill>
+            <a:srgbClr val="FFFFFF"/>
+          </a:solidFill>
+          <a:ln w="19050">
+            <a:solidFill>
+              <a:srgbClr val="CBD5E1"/>
+            </a:solidFill>
+          </a:ln>
+        </p:spPr>
+        <p:style>
+          <a:lnRef idx="1">
+            <a:schemeClr val="accent1"/>
+          </a:lnRef>
+          <a:fillRef idx="3">
+            <a:schemeClr val="accent1"/>
+          </a:fillRef>
+          <a:effectRef idx="2">
+            <a:schemeClr val="accent1"/>
+          </a:effectRef>
+          <a:fontRef idx="minor">
+            <a:schemeClr val="lt1"/>
+          </a:fontRef>
+        </p:style>
+        <p:txBody>
+          <a:bodyPr rtlCol="0" anchor="ctr"/>
+          <a:lstStyle/>
+          <a:p>
+            <a:pPr algn="ctr"/>
+            <a:endParaRPr/>
+          </a:p>
+        </p:txBody>
+      </p:sp>
+      <p:sp>
+        <p:nvSpPr>
+          <p:cNvPr id="13" name="Oval 12"/>
+          <p:cNvSpPr/>
+          <p:nvPr/>
+        </p:nvSpPr>
+        <p:spPr>
+          <a:xfrm>
+            <a:off x="6355080" y="2880360"/>
+            <a:ext cx="822960" cy="822959"/>
+          </a:xfrm>
+          <a:prstGeom prst="ellipse">
+            <a:avLst/>
+          </a:prstGeom>
+          <a:solidFill>
+            <a:srgbClr val="0D9488"/>
+          </a:solidFill>
+          <a:ln>
+            <a:noFill/>
+          </a:ln>
+        </p:spPr>
+        <p:style>
+          <a:lnRef idx="1">
+            <a:schemeClr val="accent1"/>
+          </a:lnRef>
+          <a:fillRef idx="3">
+            <a:schemeClr val="accent1"/>
+          </a:fillRef>
+          <a:effectRef idx="2">
+            <a:schemeClr val="accent1"/>
+          </a:effectRef>
+          <a:fontRef idx="minor">
+            <a:schemeClr val="lt1"/>
+          </a:fontRef>
+        </p:style>
+        <p:txBody>
+          <a:bodyPr rtlCol="0" anchor="ctr"/>
+          <a:lstStyle/>
+          <a:p>
+            <a:pPr algn="ctr"/>
+            <a:endParaRPr/>
+          </a:p>
+        </p:txBody>
+      </p:sp>
+      <p:sp>
+        <p:nvSpPr>
+          <p:cNvPr id="14" name="TextBox 13"/>
+          <p:cNvSpPr txBox="1"/>
+          <p:nvPr/>
+        </p:nvSpPr>
+        <p:spPr>
+          <a:xfrm>
+            <a:off x="6355080" y="3063240"/>
+            <a:ext cx="822960" cy="457200"/>
+          </a:xfrm>
+          <a:prstGeom prst="rect">
+            <a:avLst/>
+          </a:prstGeom>
+          <a:noFill/>
+        </p:spPr>
+        <p:txBody>
+          <a:bodyPr wrap="square" lIns="73152" tIns="54864" rIns="73152" bIns="54864">
+            <a:spAutoFit/>
+          </a:bodyPr>
+          <a:lstStyle/>
+          <a:p>
+            <a:pPr algn="ctr">
+              <a:defRPr sz="1800" b="1">
+                <a:solidFill>
+                  <a:srgbClr val="FFFFFF"/>
+                </a:solidFill>
+                <a:latin typeface="Arial"/>
+              </a:defRPr>
+            </a:pPr>
+            <a:r>
+              <a:t>B.</a:t>
+            </a:r>
+          </a:p>
+        </p:txBody>
+      </p:sp>
+      <p:sp>
+        <p:nvSpPr>
+          <p:cNvPr id="15" name="TextBox 14"/>
+          <p:cNvSpPr txBox="1"/>
+          <p:nvPr/>
+        </p:nvSpPr>
+        <p:spPr>
+          <a:xfrm>
+            <a:off x="7315200" y="2880360"/>
+            <a:ext cx="4160520" cy="960119"/>
+          </a:xfrm>
+          <a:prstGeom prst="rect">
+            <a:avLst/>
+          </a:prstGeom>
+          <a:noFill/>
+        </p:spPr>
+        <p:txBody>
+          <a:bodyPr wrap="square" lIns="73152" tIns="54864" rIns="73152" bIns="54864">
+            <a:spAutoFit/>
+          </a:bodyPr>
+          <a:lstStyle/>
+          <a:p>
+            <a:pPr algn="l">
+              <a:defRPr sz="1500" b="0">
+                <a:solidFill>
+                  <a:srgbClr val="0F172A"/>
+                </a:solidFill>
+                <a:latin typeface="Arial"/>
+              </a:defRPr>
+            </a:pPr>
+            <a:r>
+              <a:t>Thư mục TIN_HOC</a:t>
+            </a:r>
+          </a:p>
+        </p:txBody>
+      </p:sp>
+      <p:sp>
+        <p:nvSpPr>
+          <p:cNvPr id="16" name="Rounded Rectangle 15"/>
+          <p:cNvSpPr/>
+          <p:nvPr/>
+        </p:nvSpPr>
+        <p:spPr>
+          <a:xfrm>
+            <a:off x="365760" y="4114800"/>
+            <a:ext cx="5440680" cy="1325880"/>
+          </a:xfrm>
+          <a:prstGeom prst="roundRect">
+            <a:avLst/>
+          </a:prstGeom>
+          <a:solidFill>
+            <a:srgbClr val="FFFFFF"/>
+          </a:solidFill>
+          <a:ln w="19050">
+            <a:solidFill>
+              <a:srgbClr val="CBD5E1"/>
+            </a:solidFill>
+          </a:ln>
+        </p:spPr>
+        <p:style>
+          <a:lnRef idx="1">
+            <a:schemeClr val="accent1"/>
+          </a:lnRef>
+          <a:fillRef idx="3">
+            <a:schemeClr val="accent1"/>
+          </a:fillRef>
+          <a:effectRef idx="2">
+            <a:schemeClr val="accent1"/>
+          </a:effectRef>
+          <a:fontRef idx="minor">
+            <a:schemeClr val="lt1"/>
+          </a:fontRef>
+        </p:style>
+        <p:txBody>
+          <a:bodyPr rtlCol="0" anchor="ctr"/>
+          <a:lstStyle/>
+          <a:p>
+            <a:pPr algn="ctr"/>
+            <a:endParaRPr/>
+          </a:p>
+        </p:txBody>
+      </p:sp>
+      <p:sp>
+        <p:nvSpPr>
+          <p:cNvPr id="17" name="Oval 16"/>
+          <p:cNvSpPr/>
+          <p:nvPr/>
+        </p:nvSpPr>
+        <p:spPr>
+          <a:xfrm>
+            <a:off x="548640" y="4343400"/>
+            <a:ext cx="822960" cy="822960"/>
+          </a:xfrm>
+          <a:prstGeom prst="ellipse">
+            <a:avLst/>
+          </a:prstGeom>
+          <a:solidFill>
+            <a:srgbClr val="D97706"/>
+          </a:solidFill>
+          <a:ln>
+            <a:noFill/>
+          </a:ln>
+        </p:spPr>
+        <p:style>
+          <a:lnRef idx="1">
+            <a:schemeClr val="accent1"/>
+          </a:lnRef>
+          <a:fillRef idx="3">
+            <a:schemeClr val="accent1"/>
+          </a:fillRef>
+          <a:effectRef idx="2">
+            <a:schemeClr val="accent1"/>
+          </a:effectRef>
+          <a:fontRef idx="minor">
+            <a:schemeClr val="lt1"/>
+          </a:fontRef>
+        </p:style>
+        <p:txBody>
+          <a:bodyPr rtlCol="0" anchor="ctr"/>
+          <a:lstStyle/>
+          <a:p>
+            <a:pPr algn="ctr"/>
+            <a:endParaRPr/>
+          </a:p>
+        </p:txBody>
+      </p:sp>
+      <p:sp>
+        <p:nvSpPr>
+          <p:cNvPr id="18" name="TextBox 17"/>
+          <p:cNvSpPr txBox="1"/>
+          <p:nvPr/>
+        </p:nvSpPr>
+        <p:spPr>
+          <a:xfrm>
+            <a:off x="548640" y="4526280"/>
+            <a:ext cx="822960" cy="457200"/>
+          </a:xfrm>
+          <a:prstGeom prst="rect">
+            <a:avLst/>
+          </a:prstGeom>
+          <a:noFill/>
+        </p:spPr>
+        <p:txBody>
+          <a:bodyPr wrap="square" lIns="73152" tIns="54864" rIns="73152" bIns="54864">
+            <a:spAutoFit/>
+          </a:bodyPr>
+          <a:lstStyle/>
+          <a:p>
+            <a:pPr algn="ctr">
+              <a:defRPr sz="1800" b="1">
+                <a:solidFill>
+                  <a:srgbClr val="FFFFFF"/>
+                </a:solidFill>
+                <a:latin typeface="Arial"/>
+              </a:defRPr>
+            </a:pPr>
+            <a:r>
+              <a:t>C.</a:t>
+            </a:r>
+          </a:p>
+        </p:txBody>
+      </p:sp>
+      <p:sp>
+        <p:nvSpPr>
+          <p:cNvPr id="19" name="TextBox 18"/>
+          <p:cNvSpPr txBox="1"/>
+          <p:nvPr/>
+        </p:nvSpPr>
+        <p:spPr>
+          <a:xfrm>
+            <a:off x="1508760" y="4343400"/>
+            <a:ext cx="4160520" cy="960119"/>
+          </a:xfrm>
+          <a:prstGeom prst="rect">
+            <a:avLst/>
+          </a:prstGeom>
+          <a:noFill/>
+        </p:spPr>
+        <p:txBody>
+          <a:bodyPr wrap="square" lIns="73152" tIns="54864" rIns="73152" bIns="54864">
+            <a:spAutoFit/>
+          </a:bodyPr>
+          <a:lstStyle/>
+          <a:p>
+            <a:pPr algn="l">
+              <a:defRPr sz="1500" b="0">
+                <a:solidFill>
+                  <a:srgbClr val="0F172A"/>
+                </a:solidFill>
+                <a:latin typeface="Arial"/>
+              </a:defRPr>
+            </a:pPr>
+            <a:r>
+              <a:t>Tệp BaiTap.docx</a:t>
+            </a:r>
+          </a:p>
+        </p:txBody>
+      </p:sp>
+      <p:sp>
+        <p:nvSpPr>
+          <p:cNvPr id="20" name="Rounded Rectangle 19"/>
+          <p:cNvSpPr/>
+          <p:nvPr/>
+        </p:nvSpPr>
+        <p:spPr>
+          <a:xfrm>
+            <a:off x="6172200" y="4114800"/>
+            <a:ext cx="5440680" cy="1325880"/>
+          </a:xfrm>
+          <a:prstGeom prst="roundRect">
+            <a:avLst/>
+          </a:prstGeom>
+          <a:solidFill>
+            <a:srgbClr val="FFFFFF"/>
+          </a:solidFill>
+          <a:ln w="19050">
+            <a:solidFill>
+              <a:srgbClr val="CBD5E1"/>
+            </a:solidFill>
+          </a:ln>
+        </p:spPr>
+        <p:style>
+          <a:lnRef idx="1">
+            <a:schemeClr val="accent1"/>
+          </a:lnRef>
+          <a:fillRef idx="3">
+            <a:schemeClr val="accent1"/>
+          </a:fillRef>
+          <a:effectRef idx="2">
+            <a:schemeClr val="accent1"/>
+          </a:effectRef>
+          <a:fontRef idx="minor">
+            <a:schemeClr val="lt1"/>
+          </a:fontRef>
+        </p:style>
+        <p:txBody>
+          <a:bodyPr rtlCol="0" anchor="ctr"/>
+          <a:lstStyle/>
+          <a:p>
+            <a:pPr algn="ctr"/>
+            <a:endParaRPr/>
+          </a:p>
+        </p:txBody>
+      </p:sp>
+      <p:sp>
+        <p:nvSpPr>
+          <p:cNvPr id="21" name="Oval 20"/>
+          <p:cNvSpPr/>
+          <p:nvPr/>
+        </p:nvSpPr>
+        <p:spPr>
+          <a:xfrm>
+            <a:off x="6355080" y="4343400"/>
+            <a:ext cx="822960" cy="822960"/>
+          </a:xfrm>
+          <a:prstGeom prst="ellipse">
+            <a:avLst/>
+          </a:prstGeom>
+          <a:solidFill>
+            <a:srgbClr val="7C3AED"/>
+          </a:solidFill>
+          <a:ln>
+            <a:noFill/>
+          </a:ln>
+        </p:spPr>
+        <p:style>
+          <a:lnRef idx="1">
+            <a:schemeClr val="accent1"/>
+          </a:lnRef>
+          <a:fillRef idx="3">
+            <a:schemeClr val="accent1"/>
+          </a:fillRef>
+          <a:effectRef idx="2">
+            <a:schemeClr val="accent1"/>
+          </a:effectRef>
+          <a:fontRef idx="minor">
+            <a:schemeClr val="lt1"/>
+          </a:fontRef>
+        </p:style>
+        <p:txBody>
+          <a:bodyPr rtlCol="0" anchor="ctr"/>
+          <a:lstStyle/>
+          <a:p>
+            <a:pPr algn="ctr"/>
+            <a:endParaRPr/>
+          </a:p>
+        </p:txBody>
+      </p:sp>
+      <p:sp>
+        <p:nvSpPr>
+          <p:cNvPr id="22" name="TextBox 21"/>
+          <p:cNvSpPr txBox="1"/>
+          <p:nvPr/>
+        </p:nvSpPr>
+        <p:spPr>
+          <a:xfrm>
+            <a:off x="6355080" y="4526280"/>
+            <a:ext cx="822960" cy="457200"/>
+          </a:xfrm>
+          <a:prstGeom prst="rect">
+            <a:avLst/>
+          </a:prstGeom>
+          <a:noFill/>
+        </p:spPr>
+        <p:txBody>
+          <a:bodyPr wrap="square" lIns="73152" tIns="54864" rIns="73152" bIns="54864">
+            <a:spAutoFit/>
+          </a:bodyPr>
+          <a:lstStyle/>
+          <a:p>
+            <a:pPr algn="ctr">
+              <a:defRPr sz="1800" b="1">
+                <a:solidFill>
+                  <a:srgbClr val="FFFFFF"/>
+                </a:solidFill>
+                <a:latin typeface="Arial"/>
+              </a:defRPr>
+            </a:pPr>
+            <a:r>
+              <a:t>D.</a:t>
+            </a:r>
+          </a:p>
+        </p:txBody>
+      </p:sp>
+      <p:sp>
+        <p:nvSpPr>
+          <p:cNvPr id="23" name="TextBox 22"/>
+          <p:cNvSpPr txBox="1"/>
+          <p:nvPr/>
+        </p:nvSpPr>
+        <p:spPr>
+          <a:xfrm>
+            <a:off x="7315200" y="4343400"/>
+            <a:ext cx="4160520" cy="960119"/>
+          </a:xfrm>
+          <a:prstGeom prst="rect">
+            <a:avLst/>
+          </a:prstGeom>
+          <a:noFill/>
+        </p:spPr>
+        <p:txBody>
+          <a:bodyPr wrap="square" lIns="73152" tIns="54864" rIns="73152" bIns="54864">
+            <a:spAutoFit/>
+          </a:bodyPr>
+          <a:lstStyle/>
+          <a:p>
+            <a:pPr algn="l">
+              <a:defRPr sz="1500" b="0">
+                <a:solidFill>
+                  <a:srgbClr val="0F172A"/>
+                </a:solidFill>
+                <a:latin typeface="Arial"/>
+              </a:defRPr>
+            </a:pPr>
+            <a:r>
+              <a:t>Thư mục gốc</a:t>
+            </a:r>
+          </a:p>
+        </p:txBody>
+      </p:sp>
+    </p:spTree>
+  </p:cSld>
+  <p:clrMapOvr>
+    <a:masterClrMapping/>
+  </p:clrMapOvr>
+  <p:transition spd="med">
+    <p:fade/>
+  </p:transition>
+</p:sld>
+</file>
+
+<file path=ppt/slides/slide12.xml><?xml version="1.0" encoding="utf-8"?>
+<p:sld xmlns:a="http://schemas.openxmlformats.org/drawingml/2006/main" xmlns:r="http://schemas.openxmlformats.org/officeDocument/2006/relationships" xmlns:p="http://schemas.openxmlformats.org/presentationml/2006/main">
+  <p:cSld>
+    <p:spTree>
+      <p:nvGrpSpPr>
+        <p:cNvPr id="1" name=""/>
+        <p:cNvGrpSpPr/>
+        <p:nvPr/>
+      </p:nvGrpSpPr>
+      <p:grpSpPr>
+        <a:xfrm>
+          <a:off x="0" y="0"/>
+          <a:ext cx="0" cy="0"/>
+          <a:chOff x="0" y="0"/>
+          <a:chExt cx="0" cy="0"/>
+        </a:xfrm>
+      </p:grpSpPr>
+      <p:sp>
+        <p:nvSpPr>
+          <p:cNvPr id="2" name="Rectangle 1"/>
+          <p:cNvSpPr/>
+          <p:nvPr/>
+        </p:nvSpPr>
+        <p:spPr>
+          <a:xfrm>
+            <a:off x="0" y="1051560"/>
+            <a:ext cx="12188952" cy="4754879"/>
+          </a:xfrm>
+          <a:prstGeom prst="rect">
+            <a:avLst/>
+          </a:prstGeom>
+          <a:solidFill>
+            <a:srgbClr val="BE185D"/>
+          </a:solidFill>
+          <a:ln>
+            <a:noFill/>
+          </a:ln>
+        </p:spPr>
+        <p:style>
+          <a:lnRef idx="1">
+            <a:schemeClr val="accent1"/>
+          </a:lnRef>
+          <a:fillRef idx="3">
+            <a:schemeClr val="accent1"/>
+          </a:fillRef>
+          <a:effectRef idx="2">
+            <a:schemeClr val="accent1"/>
+          </a:effectRef>
+          <a:fontRef idx="minor">
+            <a:schemeClr val="lt1"/>
+          </a:fontRef>
+        </p:style>
+        <p:txBody>
+          <a:bodyPr rtlCol="0" anchor="ctr"/>
+          <a:lstStyle/>
+          <a:p>
+            <a:pPr algn="ctr"/>
+            <a:endParaRPr/>
+          </a:p>
+        </p:txBody>
+      </p:sp>
+      <p:sp>
+        <p:nvSpPr>
+          <p:cNvPr id="3" name="Rounded Rectangle 2"/>
+          <p:cNvSpPr/>
+          <p:nvPr/>
+        </p:nvSpPr>
+        <p:spPr>
+          <a:xfrm>
+            <a:off x="1828800" y="1645920"/>
+            <a:ext cx="8531352" cy="3474720"/>
+          </a:xfrm>
+          <a:prstGeom prst="roundRect">
+            <a:avLst/>
+          </a:prstGeom>
+          <a:solidFill>
+            <a:srgbClr val="FFFFFF"/>
+          </a:solidFill>
+          <a:ln w="19050">
+            <a:solidFill>
+              <a:srgbClr val="EC4899"/>
+            </a:solidFill>
+          </a:ln>
+        </p:spPr>
+        <p:style>
+          <a:lnRef idx="1">
+            <a:schemeClr val="accent1"/>
+          </a:lnRef>
+          <a:fillRef idx="3">
+            <a:schemeClr val="accent1"/>
+          </a:fillRef>
+          <a:effectRef idx="2">
+            <a:schemeClr val="accent1"/>
+          </a:effectRef>
+          <a:fontRef idx="minor">
+            <a:schemeClr val="lt1"/>
+          </a:fontRef>
+        </p:style>
+        <p:txBody>
+          <a:bodyPr rtlCol="0" anchor="ctr"/>
+          <a:lstStyle/>
+          <a:p>
+            <a:pPr algn="ctr"/>
+            <a:endParaRPr/>
+          </a:p>
+        </p:txBody>
+      </p:sp>
+      <p:sp>
+        <p:nvSpPr>
+          <p:cNvPr id="4" name="Rounded Rectangle 3"/>
+          <p:cNvSpPr/>
+          <p:nvPr/>
+        </p:nvSpPr>
+        <p:spPr>
+          <a:xfrm>
+            <a:off x="1828800" y="1645920"/>
+            <a:ext cx="8531352" cy="182879"/>
+          </a:xfrm>
+          <a:prstGeom prst="roundRect">
+            <a:avLst/>
+          </a:prstGeom>
+          <a:solidFill>
+            <a:srgbClr val="EC4899"/>
+          </a:solidFill>
+          <a:ln>
+            <a:noFill/>
+          </a:ln>
+        </p:spPr>
+        <p:style>
+          <a:lnRef idx="1">
+            <a:schemeClr val="accent1"/>
+          </a:lnRef>
+          <a:fillRef idx="3">
+            <a:schemeClr val="accent1"/>
+          </a:fillRef>
+          <a:effectRef idx="2">
+            <a:schemeClr val="accent1"/>
+          </a:effectRef>
+          <a:fontRef idx="minor">
+            <a:schemeClr val="lt1"/>
+          </a:fontRef>
+        </p:style>
+        <p:txBody>
+          <a:bodyPr rtlCol="0" anchor="ctr"/>
+          <a:lstStyle/>
+          <a:p>
+            <a:pPr algn="ctr"/>
+            <a:endParaRPr/>
           </a:p>
         </p:txBody>
       </p:sp>
@@ -3844,7 +5297,7 @@
           <a:noFill/>
         </p:spPr>
         <p:txBody>
-          <a:bodyPr wrap="square" lIns="73152" rIns="73152" tIns="54864" bIns="54864">
+          <a:bodyPr wrap="square" lIns="73152" tIns="54864" rIns="73152" bIns="54864">
             <a:spAutoFit/>
           </a:bodyPr>
           <a:lstStyle/>
@@ -3880,7 +5333,7 @@
           <a:noFill/>
         </p:spPr>
         <p:txBody>
-          <a:bodyPr wrap="square" lIns="73152" rIns="73152" tIns="54864" bIns="54864">
+          <a:bodyPr wrap="square" lIns="73152" tIns="54864" rIns="73152" bIns="54864">
             <a:spAutoFit/>
           </a:bodyPr>
           <a:lstStyle/>
@@ -3916,7 +5369,7 @@
           <a:noFill/>
         </p:spPr>
         <p:txBody>
-          <a:bodyPr wrap="square" lIns="73152" rIns="73152" tIns="54864" bIns="54864">
+          <a:bodyPr wrap="square" lIns="73152" tIns="54864" rIns="73152" bIns="54864">
             <a:spAutoFit/>
           </a:bodyPr>
           <a:lstStyle/>
@@ -3947,7 +5400,7 @@
 </file>
 
 <file path=ppt/slides/slide2.xml><?xml version="1.0" encoding="utf-8"?>
-<p:sld xmlns:a="http://schemas.openxmlformats.org/drawingml/2006/main" xmlns:p="http://schemas.openxmlformats.org/presentationml/2006/main" xmlns:r="http://schemas.openxmlformats.org/officeDocument/2006/relationships">
+<p:sld xmlns:a="http://schemas.openxmlformats.org/drawingml/2006/main" xmlns:r="http://schemas.openxmlformats.org/officeDocument/2006/relationships" xmlns:p="http://schemas.openxmlformats.org/presentationml/2006/main">
   <p:cSld>
     <p:spTree>
       <p:nvGrpSpPr>
@@ -3955,7 +5408,14 @@
         <p:cNvGrpSpPr/>
         <p:nvPr/>
       </p:nvGrpSpPr>
-      <p:grpSpPr/>
+      <p:grpSpPr>
+        <a:xfrm>
+          <a:off x="0" y="0"/>
+          <a:ext cx="0" cy="0"/>
+          <a:chOff x="0" y="0"/>
+          <a:chExt cx="0" cy="0"/>
+        </a:xfrm>
+      </p:grpSpPr>
       <p:sp>
         <p:nvSpPr>
           <p:cNvPr id="2" name="Rectangle 1"/>
@@ -3996,6 +5456,7 @@
           <a:lstStyle/>
           <a:p>
             <a:pPr algn="ctr"/>
+            <a:endParaRPr/>
           </a:p>
         </p:txBody>
       </p:sp>
@@ -4039,6 +5500,7 @@
           <a:lstStyle/>
           <a:p>
             <a:pPr algn="ctr"/>
+            <a:endParaRPr/>
           </a:p>
         </p:txBody>
       </p:sp>
@@ -4082,6 +5544,7 @@
           <a:lstStyle/>
           <a:p>
             <a:pPr algn="ctr"/>
+            <a:endParaRPr/>
           </a:p>
         </p:txBody>
       </p:sp>
@@ -4102,7 +5565,7 @@
           <a:noFill/>
         </p:spPr>
         <p:txBody>
-          <a:bodyPr wrap="square" lIns="73152" rIns="73152" tIns="54864" bIns="54864">
+          <a:bodyPr wrap="square" lIns="73152" tIns="54864" rIns="73152" bIns="54864">
             <a:spAutoFit/>
           </a:bodyPr>
           <a:lstStyle/>
@@ -4138,7 +5601,7 @@
           <a:noFill/>
         </p:spPr>
         <p:txBody>
-          <a:bodyPr wrap="square" lIns="73152" rIns="73152" tIns="54864" bIns="54864">
+          <a:bodyPr wrap="square" lIns="73152" tIns="54864" rIns="73152" bIns="54864">
             <a:spAutoFit/>
           </a:bodyPr>
           <a:lstStyle/>
@@ -4174,7 +5637,7 @@
           <a:noFill/>
         </p:spPr>
         <p:txBody>
-          <a:bodyPr wrap="square" lIns="73152" rIns="73152" tIns="54864" bIns="54864">
+          <a:bodyPr wrap="square" lIns="73152" tIns="54864" rIns="73152" bIns="54864">
             <a:spAutoFit/>
           </a:bodyPr>
           <a:lstStyle/>
@@ -4205,7 +5668,7 @@
 </file>
 
 <file path=ppt/slides/slide3.xml><?xml version="1.0" encoding="utf-8"?>
-<p:sld xmlns:a="http://schemas.openxmlformats.org/drawingml/2006/main" xmlns:p="http://schemas.openxmlformats.org/presentationml/2006/main" xmlns:r="http://schemas.openxmlformats.org/officeDocument/2006/relationships">
+<p:sld xmlns:a="http://schemas.openxmlformats.org/drawingml/2006/main" xmlns:r="http://schemas.openxmlformats.org/officeDocument/2006/relationships" xmlns:p="http://schemas.openxmlformats.org/presentationml/2006/main">
   <p:cSld>
     <p:spTree>
       <p:nvGrpSpPr>
@@ -4213,7 +5676,14 @@
         <p:cNvGrpSpPr/>
         <p:nvPr/>
       </p:nvGrpSpPr>
-      <p:grpSpPr/>
+      <p:grpSpPr>
+        <a:xfrm>
+          <a:off x="0" y="0"/>
+          <a:ext cx="0" cy="0"/>
+          <a:chOff x="0" y="0"/>
+          <a:chExt cx="0" cy="0"/>
+        </a:xfrm>
+      </p:grpSpPr>
       <p:sp>
         <p:nvSpPr>
           <p:cNvPr id="2" name="Rectangle 1"/>
@@ -4254,6 +5724,7 @@
           <a:lstStyle/>
           <a:p>
             <a:pPr algn="ctr"/>
+            <a:endParaRPr/>
           </a:p>
         </p:txBody>
       </p:sp>
@@ -4297,6 +5768,7 @@
           <a:lstStyle/>
           <a:p>
             <a:pPr algn="ctr"/>
+            <a:endParaRPr/>
           </a:p>
         </p:txBody>
       </p:sp>
@@ -4317,7 +5789,7 @@
           <a:noFill/>
         </p:spPr>
         <p:txBody>
-          <a:bodyPr wrap="square" lIns="73152" rIns="73152" tIns="54864" bIns="54864">
+          <a:bodyPr wrap="square" lIns="73152" tIns="54864" rIns="73152" bIns="54864">
             <a:spAutoFit/>
           </a:bodyPr>
           <a:lstStyle/>
@@ -4353,7 +5825,7 @@
           <a:noFill/>
         </p:spPr>
         <p:txBody>
-          <a:bodyPr wrap="square" lIns="73152" rIns="73152" tIns="54864" bIns="54864">
+          <a:bodyPr wrap="square" lIns="73152" tIns="54864" rIns="73152" bIns="54864">
             <a:spAutoFit/>
           </a:bodyPr>
           <a:lstStyle/>
@@ -4414,6 +5886,7 @@
           <a:lstStyle/>
           <a:p>
             <a:pPr algn="ctr"/>
+            <a:endParaRPr/>
           </a:p>
         </p:txBody>
       </p:sp>
@@ -4433,8 +5906,8 @@
         </p:blipFill>
         <p:spPr>
           <a:xfrm>
-            <a:off x="457200" y="1691640"/>
-            <a:ext cx="11064240" cy="2880360"/>
+            <a:off x="2235200" y="1691640"/>
+            <a:ext cx="7890933" cy="2880360"/>
           </a:xfrm>
           <a:prstGeom prst="rect">
             <a:avLst/>
@@ -4483,6 +5956,7 @@
           <a:lstStyle/>
           <a:p>
             <a:pPr algn="ctr"/>
+            <a:endParaRPr/>
           </a:p>
         </p:txBody>
       </p:sp>
@@ -4526,6 +6000,7 @@
           <a:lstStyle/>
           <a:p>
             <a:pPr algn="ctr"/>
+            <a:endParaRPr/>
           </a:p>
         </p:txBody>
       </p:sp>
@@ -4546,7 +6021,7 @@
           <a:noFill/>
         </p:spPr>
         <p:txBody>
-          <a:bodyPr wrap="square" lIns="73152" rIns="73152" tIns="54864" bIns="54864">
+          <a:bodyPr wrap="square" lIns="73152" tIns="54864" rIns="73152" bIns="54864">
             <a:spAutoFit/>
           </a:bodyPr>
           <a:lstStyle/>
@@ -4581,7 +6056,7 @@
 </file>
 
 <file path=ppt/slides/slide4.xml><?xml version="1.0" encoding="utf-8"?>
-<p:sld xmlns:a="http://schemas.openxmlformats.org/drawingml/2006/main" xmlns:p="http://schemas.openxmlformats.org/presentationml/2006/main" xmlns:r="http://schemas.openxmlformats.org/officeDocument/2006/relationships">
+<p:sld xmlns:a="http://schemas.openxmlformats.org/drawingml/2006/main" xmlns:r="http://schemas.openxmlformats.org/officeDocument/2006/relationships" xmlns:p="http://schemas.openxmlformats.org/presentationml/2006/main">
   <p:cSld>
     <p:spTree>
       <p:nvGrpSpPr>
@@ -4589,7 +6064,212 @@
         <p:cNvGrpSpPr/>
         <p:nvPr/>
       </p:nvGrpSpPr>
-      <p:grpSpPr/>
+      <p:grpSpPr>
+        <a:xfrm>
+          <a:off x="0" y="0"/>
+          <a:ext cx="0" cy="0"/>
+          <a:chOff x="0" y="0"/>
+          <a:chExt cx="0" cy="0"/>
+        </a:xfrm>
+      </p:grpSpPr>
+      <p:pic>
+        <p:nvPicPr>
+          <p:cNvPr id="4" name="Online Media 3" title="CÁC BƯỚC TÌM KIẾM THÔNG TIN TRÊN INTERNET">
+            <a:hlinkClick r:id="" action="ppaction://media"/>
+            <a:extLst>
+              <a:ext uri="{FF2B5EF4-FFF2-40B4-BE49-F238E27FC236}">
+                <a16:creationId xmlns:a16="http://schemas.microsoft.com/office/drawing/2014/main" id="{75C07412-6B99-714D-7663-3790BE6885E3}"/>
+              </a:ext>
+            </a:extLst>
+          </p:cNvPr>
+          <p:cNvPicPr>
+            <a:picLocks noRot="1" noChangeAspect="1"/>
+          </p:cNvPicPr>
+          <p:nvPr>
+            <a:videoFile r:link="rId1"/>
+          </p:nvPr>
+        </p:nvPicPr>
+        <p:blipFill>
+          <a:blip r:embed="rId3"/>
+          <a:stretch>
+            <a:fillRect/>
+          </a:stretch>
+        </p:blipFill>
+        <p:spPr>
+          <a:xfrm>
+            <a:off x="1360968" y="134831"/>
+            <a:ext cx="10138384" cy="5723709"/>
+          </a:xfrm>
+          <a:prstGeom prst="rect">
+            <a:avLst/>
+          </a:prstGeom>
+        </p:spPr>
+      </p:pic>
+    </p:spTree>
+    <p:extLst>
+      <p:ext uri="{BB962C8B-B14F-4D97-AF65-F5344CB8AC3E}">
+        <p14:creationId xmlns:p14="http://schemas.microsoft.com/office/powerpoint/2010/main" val="1279901137"/>
+      </p:ext>
+    </p:extLst>
+  </p:cSld>
+  <p:clrMapOvr>
+    <a:masterClrMapping/>
+  </p:clrMapOvr>
+  <p:timing>
+    <p:tnLst>
+      <p:par>
+        <p:cTn id="1" dur="indefinite" restart="never" nodeType="tmRoot">
+          <p:childTnLst>
+            <p:seq concurrent="1" nextAc="seek">
+              <p:cTn id="2" dur="indefinite" nodeType="mainSeq">
+                <p:childTnLst>
+                  <p:par>
+                    <p:cTn id="3" fill="hold">
+                      <p:stCondLst>
+                        <p:cond delay="indefinite"/>
+                      </p:stCondLst>
+                      <p:childTnLst>
+                        <p:par>
+                          <p:cTn id="4" fill="hold">
+                            <p:stCondLst>
+                              <p:cond delay="0"/>
+                            </p:stCondLst>
+                            <p:childTnLst>
+                              <p:par>
+                                <p:cTn id="5" presetID="1" presetClass="mediacall" presetSubtype="0" fill="hold" nodeType="clickEffect">
+                                  <p:stCondLst>
+                                    <p:cond delay="0"/>
+                                  </p:stCondLst>
+                                  <p:childTnLst>
+                                    <p:cmd type="call" cmd="playFrom(0.0)">
+                                      <p:cBhvr>
+                                        <p:cTn id="6" dur="1" fill="hold"/>
+                                        <p:tgtEl>
+                                          <p:spTgt spid="4"/>
+                                        </p:tgtEl>
+                                      </p:cBhvr>
+                                    </p:cmd>
+                                  </p:childTnLst>
+                                </p:cTn>
+                              </p:par>
+                            </p:childTnLst>
+                          </p:cTn>
+                        </p:par>
+                      </p:childTnLst>
+                    </p:cTn>
+                  </p:par>
+                </p:childTnLst>
+              </p:cTn>
+              <p:prevCondLst>
+                <p:cond evt="onPrev" delay="0">
+                  <p:tgtEl>
+                    <p:sldTgt/>
+                  </p:tgtEl>
+                </p:cond>
+              </p:prevCondLst>
+              <p:nextCondLst>
+                <p:cond evt="onNext" delay="0">
+                  <p:tgtEl>
+                    <p:sldTgt/>
+                  </p:tgtEl>
+                </p:cond>
+              </p:nextCondLst>
+            </p:seq>
+            <p:video>
+              <p:cMediaNode vol="80000">
+                <p:cTn id="7" fill="hold" display="0">
+                  <p:stCondLst>
+                    <p:cond delay="indefinite"/>
+                  </p:stCondLst>
+                </p:cTn>
+                <p:tgtEl>
+                  <p:spTgt spid="4"/>
+                </p:tgtEl>
+              </p:cMediaNode>
+            </p:video>
+            <p:seq concurrent="1" nextAc="seek">
+              <p:cTn id="8" restart="whenNotActive" fill="hold" evtFilter="cancelBubble" nodeType="interactiveSeq">
+                <p:stCondLst>
+                  <p:cond evt="onClick" delay="0">
+                    <p:tgtEl>
+                      <p:spTgt spid="4"/>
+                    </p:tgtEl>
+                  </p:cond>
+                </p:stCondLst>
+                <p:endSync evt="end" delay="0">
+                  <p:rtn val="all"/>
+                </p:endSync>
+                <p:childTnLst>
+                  <p:par>
+                    <p:cTn id="9" fill="hold">
+                      <p:stCondLst>
+                        <p:cond delay="0"/>
+                      </p:stCondLst>
+                      <p:childTnLst>
+                        <p:par>
+                          <p:cTn id="10" fill="hold">
+                            <p:stCondLst>
+                              <p:cond delay="0"/>
+                            </p:stCondLst>
+                            <p:childTnLst>
+                              <p:par>
+                                <p:cTn id="11" presetID="2" presetClass="mediacall" presetSubtype="0" fill="hold" nodeType="clickEffect">
+                                  <p:stCondLst>
+                                    <p:cond delay="0"/>
+                                  </p:stCondLst>
+                                  <p:childTnLst>
+                                    <p:cmd type="call" cmd="togglePause">
+                                      <p:cBhvr>
+                                        <p:cTn id="12" dur="1" fill="hold"/>
+                                        <p:tgtEl>
+                                          <p:spTgt spid="4"/>
+                                        </p:tgtEl>
+                                      </p:cBhvr>
+                                    </p:cmd>
+                                  </p:childTnLst>
+                                </p:cTn>
+                              </p:par>
+                            </p:childTnLst>
+                          </p:cTn>
+                        </p:par>
+                      </p:childTnLst>
+                    </p:cTn>
+                  </p:par>
+                </p:childTnLst>
+              </p:cTn>
+              <p:nextCondLst>
+                <p:cond evt="onClick" delay="0">
+                  <p:tgtEl>
+                    <p:spTgt spid="4"/>
+                  </p:tgtEl>
+                </p:cond>
+              </p:nextCondLst>
+            </p:seq>
+          </p:childTnLst>
+        </p:cTn>
+      </p:par>
+    </p:tnLst>
+  </p:timing>
+</p:sld>
+</file>
+
+<file path=ppt/slides/slide5.xml><?xml version="1.0" encoding="utf-8"?>
+<p:sld xmlns:a="http://schemas.openxmlformats.org/drawingml/2006/main" xmlns:r="http://schemas.openxmlformats.org/officeDocument/2006/relationships" xmlns:p="http://schemas.openxmlformats.org/presentationml/2006/main">
+  <p:cSld>
+    <p:spTree>
+      <p:nvGrpSpPr>
+        <p:cNvPr id="1" name=""/>
+        <p:cNvGrpSpPr/>
+        <p:nvPr/>
+      </p:nvGrpSpPr>
+      <p:grpSpPr>
+        <a:xfrm>
+          <a:off x="0" y="0"/>
+          <a:ext cx="0" cy="0"/>
+          <a:chOff x="0" y="0"/>
+          <a:chExt cx="0" cy="0"/>
+        </a:xfrm>
+      </p:grpSpPr>
       <p:sp>
         <p:nvSpPr>
           <p:cNvPr id="2" name="Rectangle 1"/>
@@ -4630,6 +6310,7 @@
           <a:lstStyle/>
           <a:p>
             <a:pPr algn="ctr"/>
+            <a:endParaRPr/>
           </a:p>
         </p:txBody>
       </p:sp>
@@ -4673,6 +6354,7 @@
           <a:lstStyle/>
           <a:p>
             <a:pPr algn="ctr"/>
+            <a:endParaRPr/>
           </a:p>
         </p:txBody>
       </p:sp>
@@ -4693,7 +6375,7 @@
           <a:noFill/>
         </p:spPr>
         <p:txBody>
-          <a:bodyPr wrap="square" lIns="73152" rIns="73152" tIns="54864" bIns="54864">
+          <a:bodyPr wrap="square" lIns="73152" tIns="54864" rIns="73152" bIns="54864">
             <a:spAutoFit/>
           </a:bodyPr>
           <a:lstStyle/>
@@ -4729,7 +6411,7 @@
           <a:noFill/>
         </p:spPr>
         <p:txBody>
-          <a:bodyPr wrap="square" lIns="73152" rIns="73152" tIns="54864" bIns="54864">
+          <a:bodyPr wrap="square" lIns="73152" tIns="54864" rIns="73152" bIns="54864">
             <a:spAutoFit/>
           </a:bodyPr>
           <a:lstStyle/>
@@ -4788,6 +6470,7 @@
           <a:lstStyle/>
           <a:p>
             <a:pPr algn="ctr"/>
+            <a:endParaRPr/>
           </a:p>
         </p:txBody>
       </p:sp>
@@ -4799,7 +6482,7 @@
         </p:nvSpPr>
         <p:spPr>
           <a:xfrm>
-            <a:off x="594360" y="1719072"/>
+            <a:off x="960120" y="1871301"/>
             <a:ext cx="3840480" cy="731520"/>
           </a:xfrm>
           <a:prstGeom prst="rect">
@@ -4808,7 +6491,7 @@
           <a:noFill/>
         </p:spPr>
         <p:txBody>
-          <a:bodyPr wrap="square" lIns="73152" rIns="73152" tIns="54864" bIns="54864">
+          <a:bodyPr wrap="square" lIns="73152" tIns="54864" rIns="73152" bIns="54864">
             <a:spAutoFit/>
           </a:bodyPr>
           <a:lstStyle/>
@@ -4867,6 +6550,7 @@
           <a:lstStyle/>
           <a:p>
             <a:pPr algn="ctr"/>
+            <a:endParaRPr/>
           </a:p>
         </p:txBody>
       </p:sp>
@@ -4878,7 +6562,7 @@
         </p:nvSpPr>
         <p:spPr>
           <a:xfrm>
-            <a:off x="594360" y="2697480"/>
+            <a:off x="914400" y="2860463"/>
             <a:ext cx="3840480" cy="731519"/>
           </a:xfrm>
           <a:prstGeom prst="rect">
@@ -4887,7 +6571,7 @@
           <a:noFill/>
         </p:spPr>
         <p:txBody>
-          <a:bodyPr wrap="square" lIns="73152" rIns="73152" tIns="54864" bIns="54864">
+          <a:bodyPr wrap="square" lIns="73152" tIns="54864" rIns="73152" bIns="54864">
             <a:spAutoFit/>
           </a:bodyPr>
           <a:lstStyle/>
@@ -4901,7 +6585,36 @@
               </a:defRPr>
             </a:pPr>
             <a:r>
-              <a:t>Bước 2: Chọn từ khóa " "</a:t>
+              <a:rPr dirty="0" err="1"/>
+              <a:t>Bước</a:t>
+            </a:r>
+            <a:r>
+              <a:rPr dirty="0"/>
+              <a:t> 2: </a:t>
+            </a:r>
+            <a:r>
+              <a:rPr dirty="0" err="1"/>
+              <a:t>Chọn</a:t>
+            </a:r>
+            <a:r>
+              <a:rPr dirty="0"/>
+              <a:t> </a:t>
+            </a:r>
+            <a:r>
+              <a:rPr dirty="0" err="1"/>
+              <a:t>từ</a:t>
+            </a:r>
+            <a:r>
+              <a:rPr dirty="0"/>
+              <a:t> </a:t>
+            </a:r>
+            <a:r>
+              <a:rPr dirty="0" err="1"/>
+              <a:t>khóa</a:t>
+            </a:r>
+            <a:r>
+              <a:rPr dirty="0"/>
+              <a:t> " "</a:t>
             </a:r>
           </a:p>
         </p:txBody>
@@ -4946,6 +6659,7 @@
           <a:lstStyle/>
           <a:p>
             <a:pPr algn="ctr"/>
+            <a:endParaRPr/>
           </a:p>
         </p:txBody>
       </p:sp>
@@ -4957,7 +6671,7 @@
         </p:nvSpPr>
         <p:spPr>
           <a:xfrm>
-            <a:off x="594360" y="3675887"/>
+            <a:off x="1005840" y="3828118"/>
             <a:ext cx="3840480" cy="731519"/>
           </a:xfrm>
           <a:prstGeom prst="rect">
@@ -4966,7 +6680,7 @@
           <a:noFill/>
         </p:spPr>
         <p:txBody>
-          <a:bodyPr wrap="square" lIns="73152" rIns="73152" tIns="54864" bIns="54864">
+          <a:bodyPr wrap="square" lIns="73152" tIns="54864" rIns="73152" bIns="54864">
             <a:spAutoFit/>
           </a:bodyPr>
           <a:lstStyle/>
@@ -4980,8 +6694,42 @@
               </a:defRPr>
             </a:pPr>
             <a:r>
-              <a:t>Bước 3: Chọn nguồn uy tín</a:t>
-            </a:r>
+              <a:rPr dirty="0" err="1"/>
+              <a:t>Bước</a:t>
+            </a:r>
+            <a:r>
+              <a:rPr dirty="0"/>
+              <a:t> 3: </a:t>
+            </a:r>
+            <a:r>
+              <a:rPr dirty="0" err="1"/>
+              <a:t>Chọn</a:t>
+            </a:r>
+            <a:r>
+              <a:rPr dirty="0"/>
+              <a:t> </a:t>
+            </a:r>
+            <a:r>
+              <a:rPr dirty="0" err="1"/>
+              <a:t>nguồn</a:t>
+            </a:r>
+            <a:r>
+              <a:rPr dirty="0"/>
+              <a:t> </a:t>
+            </a:r>
+            <a:r>
+              <a:rPr dirty="0" err="1"/>
+              <a:t>uy</a:t>
+            </a:r>
+            <a:r>
+              <a:rPr dirty="0"/>
+              <a:t> </a:t>
+            </a:r>
+            <a:r>
+              <a:rPr dirty="0" err="1"/>
+              <a:t>tín</a:t>
+            </a:r>
+            <a:endParaRPr dirty="0"/>
           </a:p>
         </p:txBody>
       </p:sp>
@@ -5025,6 +6773,7 @@
           <a:lstStyle/>
           <a:p>
             <a:pPr algn="ctr"/>
+            <a:endParaRPr/>
           </a:p>
         </p:txBody>
       </p:sp>
@@ -5036,7 +6785,7 @@
         </p:nvSpPr>
         <p:spPr>
           <a:xfrm>
-            <a:off x="594360" y="4654296"/>
+            <a:off x="1005840" y="4846320"/>
             <a:ext cx="3840480" cy="731519"/>
           </a:xfrm>
           <a:prstGeom prst="rect">
@@ -5045,7 +6794,7 @@
           <a:noFill/>
         </p:spPr>
         <p:txBody>
-          <a:bodyPr wrap="square" lIns="73152" rIns="73152" tIns="54864" bIns="54864">
+          <a:bodyPr wrap="square" lIns="73152" tIns="54864" rIns="73152" bIns="54864">
             <a:spAutoFit/>
           </a:bodyPr>
           <a:lstStyle/>
@@ -5059,8 +6808,42 @@
               </a:defRPr>
             </a:pPr>
             <a:r>
-              <a:t>Bước 4: Tổng hợp &amp; áp dụng</a:t>
-            </a:r>
+              <a:rPr dirty="0" err="1"/>
+              <a:t>Bước</a:t>
+            </a:r>
+            <a:r>
+              <a:rPr dirty="0"/>
+              <a:t> 4: </a:t>
+            </a:r>
+            <a:r>
+              <a:rPr dirty="0" err="1"/>
+              <a:t>Tổng</a:t>
+            </a:r>
+            <a:r>
+              <a:rPr dirty="0"/>
+              <a:t> </a:t>
+            </a:r>
+            <a:r>
+              <a:rPr dirty="0" err="1"/>
+              <a:t>hợp</a:t>
+            </a:r>
+            <a:r>
+              <a:rPr dirty="0"/>
+              <a:t> &amp; </a:t>
+            </a:r>
+            <a:r>
+              <a:rPr dirty="0" err="1"/>
+              <a:t>áp</a:t>
+            </a:r>
+            <a:r>
+              <a:rPr dirty="0"/>
+              <a:t> </a:t>
+            </a:r>
+            <a:r>
+              <a:rPr dirty="0" err="1"/>
+              <a:t>dụng</a:t>
+            </a:r>
+            <a:endParaRPr dirty="0"/>
           </a:p>
         </p:txBody>
       </p:sp>
@@ -5106,6 +6889,7 @@
           <a:lstStyle/>
           <a:p>
             <a:pPr algn="ctr"/>
+            <a:endParaRPr/>
           </a:p>
         </p:txBody>
       </p:sp>
@@ -5144,8 +6928,8 @@
 </p:sld>
 </file>
 
-<file path=ppt/slides/slide5.xml><?xml version="1.0" encoding="utf-8"?>
-<p:sld xmlns:a="http://schemas.openxmlformats.org/drawingml/2006/main" xmlns:p="http://schemas.openxmlformats.org/presentationml/2006/main" xmlns:r="http://schemas.openxmlformats.org/officeDocument/2006/relationships">
+<file path=ppt/slides/slide6.xml><?xml version="1.0" encoding="utf-8"?>
+<p:sld xmlns:a="http://schemas.openxmlformats.org/drawingml/2006/main" xmlns:r="http://schemas.openxmlformats.org/officeDocument/2006/relationships" xmlns:p="http://schemas.openxmlformats.org/presentationml/2006/main">
   <p:cSld>
     <p:spTree>
       <p:nvGrpSpPr>
@@ -5153,7 +6937,14 @@
         <p:cNvGrpSpPr/>
         <p:nvPr/>
       </p:nvGrpSpPr>
-      <p:grpSpPr/>
+      <p:grpSpPr>
+        <a:xfrm>
+          <a:off x="0" y="0"/>
+          <a:ext cx="0" cy="0"/>
+          <a:chOff x="0" y="0"/>
+          <a:chExt cx="0" cy="0"/>
+        </a:xfrm>
+      </p:grpSpPr>
       <p:sp>
         <p:nvSpPr>
           <p:cNvPr id="2" name="Rectangle 1"/>
@@ -5194,6 +6985,7 @@
           <a:lstStyle/>
           <a:p>
             <a:pPr algn="ctr"/>
+            <a:endParaRPr/>
           </a:p>
         </p:txBody>
       </p:sp>
@@ -5237,6 +7029,7 @@
           <a:lstStyle/>
           <a:p>
             <a:pPr algn="ctr"/>
+            <a:endParaRPr/>
           </a:p>
         </p:txBody>
       </p:sp>
@@ -5280,6 +7073,7 @@
           <a:lstStyle/>
           <a:p>
             <a:pPr algn="ctr"/>
+            <a:endParaRPr/>
           </a:p>
         </p:txBody>
       </p:sp>
@@ -5300,7 +7094,7 @@
           <a:noFill/>
         </p:spPr>
         <p:txBody>
-          <a:bodyPr wrap="square" lIns="73152" rIns="73152" tIns="54864" bIns="54864">
+          <a:bodyPr wrap="square" lIns="73152" tIns="54864" rIns="73152" bIns="54864">
             <a:spAutoFit/>
           </a:bodyPr>
           <a:lstStyle/>
@@ -5336,7 +7130,7 @@
           <a:noFill/>
         </p:spPr>
         <p:txBody>
-          <a:bodyPr wrap="square" lIns="73152" rIns="73152" tIns="54864" bIns="54864">
+          <a:bodyPr wrap="square" lIns="73152" tIns="54864" rIns="73152" bIns="54864">
             <a:spAutoFit/>
           </a:bodyPr>
           <a:lstStyle/>
@@ -5372,7 +7166,7 @@
           <a:noFill/>
         </p:spPr>
         <p:txBody>
-          <a:bodyPr wrap="square" lIns="73152" rIns="73152" tIns="54864" bIns="54864">
+          <a:bodyPr wrap="square" lIns="73152" tIns="54864" rIns="73152" bIns="54864">
             <a:spAutoFit/>
           </a:bodyPr>
           <a:lstStyle/>
@@ -5402,8 +7196,8 @@
 </p:sld>
 </file>
 
-<file path=ppt/slides/slide6.xml><?xml version="1.0" encoding="utf-8"?>
-<p:sld xmlns:a="http://schemas.openxmlformats.org/drawingml/2006/main" xmlns:p="http://schemas.openxmlformats.org/presentationml/2006/main" xmlns:r="http://schemas.openxmlformats.org/officeDocument/2006/relationships">
+<file path=ppt/slides/slide7.xml><?xml version="1.0" encoding="utf-8"?>
+<p:sld xmlns:a="http://schemas.openxmlformats.org/drawingml/2006/main" xmlns:r="http://schemas.openxmlformats.org/officeDocument/2006/relationships" xmlns:p="http://schemas.openxmlformats.org/presentationml/2006/main">
   <p:cSld>
     <p:spTree>
       <p:nvGrpSpPr>
@@ -5411,7 +7205,212 @@
         <p:cNvGrpSpPr/>
         <p:nvPr/>
       </p:nvGrpSpPr>
-      <p:grpSpPr/>
+      <p:grpSpPr>
+        <a:xfrm>
+          <a:off x="0" y="0"/>
+          <a:ext cx="0" cy="0"/>
+          <a:chOff x="0" y="0"/>
+          <a:chExt cx="0" cy="0"/>
+        </a:xfrm>
+      </p:grpSpPr>
+      <p:pic>
+        <p:nvPicPr>
+          <p:cNvPr id="2" name="Online Media 1" title="Tin học 3. Hướng dẫn tạo thư mục trên máy tính.">
+            <a:hlinkClick r:id="" action="ppaction://media"/>
+            <a:extLst>
+              <a:ext uri="{FF2B5EF4-FFF2-40B4-BE49-F238E27FC236}">
+                <a16:creationId xmlns:a16="http://schemas.microsoft.com/office/drawing/2014/main" id="{E1AC075A-BB15-791A-F7B8-8910ED9B9196}"/>
+              </a:ext>
+            </a:extLst>
+          </p:cNvPr>
+          <p:cNvPicPr>
+            <a:picLocks noRot="1" noChangeAspect="1"/>
+          </p:cNvPicPr>
+          <p:nvPr>
+            <a:videoFile r:link="rId1"/>
+          </p:nvPr>
+        </p:nvPicPr>
+        <p:blipFill>
+          <a:blip r:embed="rId3"/>
+          <a:stretch>
+            <a:fillRect/>
+          </a:stretch>
+        </p:blipFill>
+        <p:spPr>
+          <a:xfrm>
+            <a:off x="1233856" y="0"/>
+            <a:ext cx="10452543" cy="5901070"/>
+          </a:xfrm>
+          <a:prstGeom prst="rect">
+            <a:avLst/>
+          </a:prstGeom>
+        </p:spPr>
+      </p:pic>
+    </p:spTree>
+    <p:extLst>
+      <p:ext uri="{BB962C8B-B14F-4D97-AF65-F5344CB8AC3E}">
+        <p14:creationId xmlns:p14="http://schemas.microsoft.com/office/powerpoint/2010/main" val="1467231656"/>
+      </p:ext>
+    </p:extLst>
+  </p:cSld>
+  <p:clrMapOvr>
+    <a:masterClrMapping/>
+  </p:clrMapOvr>
+  <p:timing>
+    <p:tnLst>
+      <p:par>
+        <p:cTn id="1" dur="indefinite" restart="never" nodeType="tmRoot">
+          <p:childTnLst>
+            <p:seq concurrent="1" nextAc="seek">
+              <p:cTn id="2" dur="indefinite" nodeType="mainSeq">
+                <p:childTnLst>
+                  <p:par>
+                    <p:cTn id="3" fill="hold">
+                      <p:stCondLst>
+                        <p:cond delay="indefinite"/>
+                      </p:stCondLst>
+                      <p:childTnLst>
+                        <p:par>
+                          <p:cTn id="4" fill="hold">
+                            <p:stCondLst>
+                              <p:cond delay="0"/>
+                            </p:stCondLst>
+                            <p:childTnLst>
+                              <p:par>
+                                <p:cTn id="5" presetID="1" presetClass="mediacall" presetSubtype="0" fill="hold" nodeType="clickEffect">
+                                  <p:stCondLst>
+                                    <p:cond delay="0"/>
+                                  </p:stCondLst>
+                                  <p:childTnLst>
+                                    <p:cmd type="call" cmd="playFrom(0.0)">
+                                      <p:cBhvr>
+                                        <p:cTn id="6" dur="1" fill="hold"/>
+                                        <p:tgtEl>
+                                          <p:spTgt spid="2"/>
+                                        </p:tgtEl>
+                                      </p:cBhvr>
+                                    </p:cmd>
+                                  </p:childTnLst>
+                                </p:cTn>
+                              </p:par>
+                            </p:childTnLst>
+                          </p:cTn>
+                        </p:par>
+                      </p:childTnLst>
+                    </p:cTn>
+                  </p:par>
+                </p:childTnLst>
+              </p:cTn>
+              <p:prevCondLst>
+                <p:cond evt="onPrev" delay="0">
+                  <p:tgtEl>
+                    <p:sldTgt/>
+                  </p:tgtEl>
+                </p:cond>
+              </p:prevCondLst>
+              <p:nextCondLst>
+                <p:cond evt="onNext" delay="0">
+                  <p:tgtEl>
+                    <p:sldTgt/>
+                  </p:tgtEl>
+                </p:cond>
+              </p:nextCondLst>
+            </p:seq>
+            <p:video>
+              <p:cMediaNode vol="80000">
+                <p:cTn id="7" fill="hold" display="0">
+                  <p:stCondLst>
+                    <p:cond delay="indefinite"/>
+                  </p:stCondLst>
+                </p:cTn>
+                <p:tgtEl>
+                  <p:spTgt spid="2"/>
+                </p:tgtEl>
+              </p:cMediaNode>
+            </p:video>
+            <p:seq concurrent="1" nextAc="seek">
+              <p:cTn id="8" restart="whenNotActive" fill="hold" evtFilter="cancelBubble" nodeType="interactiveSeq">
+                <p:stCondLst>
+                  <p:cond evt="onClick" delay="0">
+                    <p:tgtEl>
+                      <p:spTgt spid="2"/>
+                    </p:tgtEl>
+                  </p:cond>
+                </p:stCondLst>
+                <p:endSync evt="end" delay="0">
+                  <p:rtn val="all"/>
+                </p:endSync>
+                <p:childTnLst>
+                  <p:par>
+                    <p:cTn id="9" fill="hold">
+                      <p:stCondLst>
+                        <p:cond delay="0"/>
+                      </p:stCondLst>
+                      <p:childTnLst>
+                        <p:par>
+                          <p:cTn id="10" fill="hold">
+                            <p:stCondLst>
+                              <p:cond delay="0"/>
+                            </p:stCondLst>
+                            <p:childTnLst>
+                              <p:par>
+                                <p:cTn id="11" presetID="2" presetClass="mediacall" presetSubtype="0" fill="hold" nodeType="clickEffect">
+                                  <p:stCondLst>
+                                    <p:cond delay="0"/>
+                                  </p:stCondLst>
+                                  <p:childTnLst>
+                                    <p:cmd type="call" cmd="togglePause">
+                                      <p:cBhvr>
+                                        <p:cTn id="12" dur="1" fill="hold"/>
+                                        <p:tgtEl>
+                                          <p:spTgt spid="2"/>
+                                        </p:tgtEl>
+                                      </p:cBhvr>
+                                    </p:cmd>
+                                  </p:childTnLst>
+                                </p:cTn>
+                              </p:par>
+                            </p:childTnLst>
+                          </p:cTn>
+                        </p:par>
+                      </p:childTnLst>
+                    </p:cTn>
+                  </p:par>
+                </p:childTnLst>
+              </p:cTn>
+              <p:nextCondLst>
+                <p:cond evt="onClick" delay="0">
+                  <p:tgtEl>
+                    <p:spTgt spid="2"/>
+                  </p:tgtEl>
+                </p:cond>
+              </p:nextCondLst>
+            </p:seq>
+          </p:childTnLst>
+        </p:cTn>
+      </p:par>
+    </p:tnLst>
+  </p:timing>
+</p:sld>
+</file>
+
+<file path=ppt/slides/slide8.xml><?xml version="1.0" encoding="utf-8"?>
+<p:sld xmlns:a="http://schemas.openxmlformats.org/drawingml/2006/main" xmlns:r="http://schemas.openxmlformats.org/officeDocument/2006/relationships" xmlns:p="http://schemas.openxmlformats.org/presentationml/2006/main">
+  <p:cSld>
+    <p:spTree>
+      <p:nvGrpSpPr>
+        <p:cNvPr id="1" name=""/>
+        <p:cNvGrpSpPr/>
+        <p:nvPr/>
+      </p:nvGrpSpPr>
+      <p:grpSpPr>
+        <a:xfrm>
+          <a:off x="0" y="0"/>
+          <a:ext cx="0" cy="0"/>
+          <a:chOff x="0" y="0"/>
+          <a:chExt cx="0" cy="0"/>
+        </a:xfrm>
+      </p:grpSpPr>
       <p:sp>
         <p:nvSpPr>
           <p:cNvPr id="2" name="Rectangle 1"/>
@@ -5452,6 +7451,7 @@
           <a:lstStyle/>
           <a:p>
             <a:pPr algn="ctr"/>
+            <a:endParaRPr/>
           </a:p>
         </p:txBody>
       </p:sp>
@@ -5495,6 +7495,7 @@
           <a:lstStyle/>
           <a:p>
             <a:pPr algn="ctr"/>
+            <a:endParaRPr/>
           </a:p>
         </p:txBody>
       </p:sp>
@@ -5515,7 +7516,7 @@
           <a:noFill/>
         </p:spPr>
         <p:txBody>
-          <a:bodyPr wrap="square" lIns="73152" rIns="73152" tIns="54864" bIns="54864">
+          <a:bodyPr wrap="square" lIns="73152" tIns="54864" rIns="73152" bIns="54864">
             <a:spAutoFit/>
           </a:bodyPr>
           <a:lstStyle/>
@@ -5551,7 +7552,7 @@
           <a:noFill/>
         </p:spPr>
         <p:txBody>
-          <a:bodyPr wrap="square" lIns="73152" rIns="73152" tIns="54864" bIns="54864">
+          <a:bodyPr wrap="square" lIns="73152" tIns="54864" rIns="73152" bIns="54864">
             <a:spAutoFit/>
           </a:bodyPr>
           <a:lstStyle/>
@@ -5610,6 +7611,7 @@
           <a:lstStyle/>
           <a:p>
             <a:pPr algn="ctr"/>
+            <a:endParaRPr/>
           </a:p>
         </p:txBody>
       </p:sp>
@@ -5621,7 +7623,7 @@
         </p:nvSpPr>
         <p:spPr>
           <a:xfrm>
-            <a:off x="594360" y="1719072"/>
+            <a:off x="1005840" y="1849458"/>
             <a:ext cx="3840480" cy="731520"/>
           </a:xfrm>
           <a:prstGeom prst="rect">
@@ -5630,7 +7632,7 @@
           <a:noFill/>
         </p:spPr>
         <p:txBody>
-          <a:bodyPr wrap="square" lIns="73152" rIns="73152" tIns="54864" bIns="54864">
+          <a:bodyPr wrap="square" lIns="73152" tIns="54864" rIns="73152" bIns="54864">
             <a:spAutoFit/>
           </a:bodyPr>
           <a:lstStyle/>
@@ -5644,7 +7646,40 @@
               </a:defRPr>
             </a:pPr>
             <a:r>
-              <a:t>1. Tạo thư mục mới (New)</a:t>
+              <a:rPr dirty="0"/>
+              <a:t>1. </a:t>
+            </a:r>
+            <a:r>
+              <a:rPr dirty="0" err="1"/>
+              <a:t>Tạo</a:t>
+            </a:r>
+            <a:r>
+              <a:rPr dirty="0"/>
+              <a:t> </a:t>
+            </a:r>
+            <a:r>
+              <a:rPr dirty="0" err="1"/>
+              <a:t>thư</a:t>
+            </a:r>
+            <a:r>
+              <a:rPr dirty="0"/>
+              <a:t> </a:t>
+            </a:r>
+            <a:r>
+              <a:rPr dirty="0" err="1"/>
+              <a:t>mục</a:t>
+            </a:r>
+            <a:r>
+              <a:rPr dirty="0"/>
+              <a:t> </a:t>
+            </a:r>
+            <a:r>
+              <a:rPr dirty="0" err="1"/>
+              <a:t>mới</a:t>
+            </a:r>
+            <a:r>
+              <a:rPr dirty="0"/>
+              <a:t> (New)</a:t>
             </a:r>
           </a:p>
         </p:txBody>
@@ -5689,6 +7724,7 @@
           <a:lstStyle/>
           <a:p>
             <a:pPr algn="ctr"/>
+            <a:endParaRPr/>
           </a:p>
         </p:txBody>
       </p:sp>
@@ -5700,7 +7736,7 @@
         </p:nvSpPr>
         <p:spPr>
           <a:xfrm>
-            <a:off x="594360" y="2697480"/>
+            <a:off x="1005840" y="2849541"/>
             <a:ext cx="3840480" cy="731519"/>
           </a:xfrm>
           <a:prstGeom prst="rect">
@@ -5709,7 +7745,7 @@
           <a:noFill/>
         </p:spPr>
         <p:txBody>
-          <a:bodyPr wrap="square" lIns="73152" rIns="73152" tIns="54864" bIns="54864">
+          <a:bodyPr wrap="square" lIns="73152" tIns="54864" rIns="73152" bIns="54864">
             <a:spAutoFit/>
           </a:bodyPr>
           <a:lstStyle/>
@@ -5723,7 +7759,40 @@
               </a:defRPr>
             </a:pPr>
             <a:r>
-              <a:t>2. Đổi tên thư mục (Rename)</a:t>
+              <a:rPr dirty="0"/>
+              <a:t>2. </a:t>
+            </a:r>
+            <a:r>
+              <a:rPr dirty="0" err="1"/>
+              <a:t>Đổi</a:t>
+            </a:r>
+            <a:r>
+              <a:rPr dirty="0"/>
+              <a:t> </a:t>
+            </a:r>
+            <a:r>
+              <a:rPr dirty="0" err="1"/>
+              <a:t>tên</a:t>
+            </a:r>
+            <a:r>
+              <a:rPr dirty="0"/>
+              <a:t> </a:t>
+            </a:r>
+            <a:r>
+              <a:rPr dirty="0" err="1"/>
+              <a:t>thư</a:t>
+            </a:r>
+            <a:r>
+              <a:rPr dirty="0"/>
+              <a:t> </a:t>
+            </a:r>
+            <a:r>
+              <a:rPr dirty="0" err="1"/>
+              <a:t>mục</a:t>
+            </a:r>
+            <a:r>
+              <a:rPr dirty="0"/>
+              <a:t> (Rename)</a:t>
             </a:r>
           </a:p>
         </p:txBody>
@@ -5768,6 +7837,7 @@
           <a:lstStyle/>
           <a:p>
             <a:pPr algn="ctr"/>
+            <a:endParaRPr/>
           </a:p>
         </p:txBody>
       </p:sp>
@@ -5779,7 +7849,7 @@
         </p:nvSpPr>
         <p:spPr>
           <a:xfrm>
-            <a:off x="594360" y="3675887"/>
+            <a:off x="1005840" y="3849623"/>
             <a:ext cx="3840480" cy="731519"/>
           </a:xfrm>
           <a:prstGeom prst="rect">
@@ -5788,7 +7858,7 @@
           <a:noFill/>
         </p:spPr>
         <p:txBody>
-          <a:bodyPr wrap="square" lIns="73152" rIns="73152" tIns="54864" bIns="54864">
+          <a:bodyPr wrap="square" lIns="73152" tIns="54864" rIns="73152" bIns="54864">
             <a:spAutoFit/>
           </a:bodyPr>
           <a:lstStyle/>
@@ -5802,8 +7872,30 @@
               </a:defRPr>
             </a:pPr>
             <a:r>
-              <a:t>3. Sao chép / Cắt &amp; Dán</a:t>
-            </a:r>
+              <a:rPr dirty="0"/>
+              <a:t>3. Sao </a:t>
+            </a:r>
+            <a:r>
+              <a:rPr dirty="0" err="1"/>
+              <a:t>chép</a:t>
+            </a:r>
+            <a:r>
+              <a:rPr dirty="0"/>
+              <a:t> / </a:t>
+            </a:r>
+            <a:r>
+              <a:rPr dirty="0" err="1"/>
+              <a:t>Cắt</a:t>
+            </a:r>
+            <a:r>
+              <a:rPr dirty="0"/>
+              <a:t> &amp; </a:t>
+            </a:r>
+            <a:r>
+              <a:rPr dirty="0" err="1"/>
+              <a:t>Dán</a:t>
+            </a:r>
+            <a:endParaRPr dirty="0"/>
           </a:p>
         </p:txBody>
       </p:sp>
@@ -5847,6 +7939,7 @@
           <a:lstStyle/>
           <a:p>
             <a:pPr algn="ctr"/>
+            <a:endParaRPr/>
           </a:p>
         </p:txBody>
       </p:sp>
@@ -5858,7 +7951,7 @@
         </p:nvSpPr>
         <p:spPr>
           <a:xfrm>
-            <a:off x="594360" y="4654296"/>
+            <a:off x="960120" y="4800601"/>
             <a:ext cx="3840480" cy="731519"/>
           </a:xfrm>
           <a:prstGeom prst="rect">
@@ -5867,7 +7960,7 @@
           <a:noFill/>
         </p:spPr>
         <p:txBody>
-          <a:bodyPr wrap="square" lIns="73152" rIns="73152" tIns="54864" bIns="54864">
+          <a:bodyPr wrap="square" lIns="73152" tIns="54864" rIns="73152" bIns="54864">
             <a:spAutoFit/>
           </a:bodyPr>
           <a:lstStyle/>
@@ -5881,7 +7974,40 @@
               </a:defRPr>
             </a:pPr>
             <a:r>
-              <a:t>4. Xóa thư mục rác (Delete)</a:t>
+              <a:rPr dirty="0"/>
+              <a:t>4. </a:t>
+            </a:r>
+            <a:r>
+              <a:rPr dirty="0" err="1"/>
+              <a:t>Xóa</a:t>
+            </a:r>
+            <a:r>
+              <a:rPr dirty="0"/>
+              <a:t> </a:t>
+            </a:r>
+            <a:r>
+              <a:rPr dirty="0" err="1"/>
+              <a:t>thư</a:t>
+            </a:r>
+            <a:r>
+              <a:rPr dirty="0"/>
+              <a:t> </a:t>
+            </a:r>
+            <a:r>
+              <a:rPr dirty="0" err="1"/>
+              <a:t>mục</a:t>
+            </a:r>
+            <a:r>
+              <a:rPr dirty="0"/>
+              <a:t> </a:t>
+            </a:r>
+            <a:r>
+              <a:rPr dirty="0" err="1"/>
+              <a:t>rác</a:t>
+            </a:r>
+            <a:r>
+              <a:rPr dirty="0"/>
+              <a:t> (Delete)</a:t>
             </a:r>
           </a:p>
         </p:txBody>
@@ -5928,6 +8054,7 @@
           <a:lstStyle/>
           <a:p>
             <a:pPr algn="ctr"/>
+            <a:endParaRPr/>
           </a:p>
         </p:txBody>
       </p:sp>
@@ -5966,8 +8093,8 @@
 </p:sld>
 </file>
 
-<file path=ppt/slides/slide7.xml><?xml version="1.0" encoding="utf-8"?>
-<p:sld xmlns:a="http://schemas.openxmlformats.org/drawingml/2006/main" xmlns:p="http://schemas.openxmlformats.org/presentationml/2006/main" xmlns:r="http://schemas.openxmlformats.org/officeDocument/2006/relationships">
+<file path=ppt/slides/slide9.xml><?xml version="1.0" encoding="utf-8"?>
+<p:sld xmlns:a="http://schemas.openxmlformats.org/drawingml/2006/main" xmlns:r="http://schemas.openxmlformats.org/officeDocument/2006/relationships" xmlns:p="http://schemas.openxmlformats.org/presentationml/2006/main">
   <p:cSld>
     <p:spTree>
       <p:nvGrpSpPr>
@@ -5975,7 +8102,14 @@
         <p:cNvGrpSpPr/>
         <p:nvPr/>
       </p:nvGrpSpPr>
-      <p:grpSpPr/>
+      <p:grpSpPr>
+        <a:xfrm>
+          <a:off x="0" y="0"/>
+          <a:ext cx="0" cy="0"/>
+          <a:chOff x="0" y="0"/>
+          <a:chExt cx="0" cy="0"/>
+        </a:xfrm>
+      </p:grpSpPr>
       <p:sp>
         <p:nvSpPr>
           <p:cNvPr id="2" name="Rectangle 1"/>
@@ -6016,6 +8150,7 @@
           <a:lstStyle/>
           <a:p>
             <a:pPr algn="ctr"/>
+            <a:endParaRPr/>
           </a:p>
         </p:txBody>
       </p:sp>
@@ -6059,6 +8194,7 @@
           <a:lstStyle/>
           <a:p>
             <a:pPr algn="ctr"/>
+            <a:endParaRPr/>
           </a:p>
         </p:txBody>
       </p:sp>
@@ -6079,7 +8215,7 @@
           <a:noFill/>
         </p:spPr>
         <p:txBody>
-          <a:bodyPr wrap="square" lIns="73152" rIns="73152" tIns="54864" bIns="54864">
+          <a:bodyPr wrap="square" lIns="73152" tIns="54864" rIns="73152" bIns="54864">
             <a:spAutoFit/>
           </a:bodyPr>
           <a:lstStyle/>
@@ -6115,7 +8251,7 @@
           <a:noFill/>
         </p:spPr>
         <p:txBody>
-          <a:bodyPr wrap="square" lIns="73152" rIns="73152" tIns="54864" bIns="54864">
+          <a:bodyPr wrap="square" lIns="73152" tIns="54864" rIns="73152" bIns="54864">
             <a:spAutoFit/>
           </a:bodyPr>
           <a:lstStyle/>
@@ -6176,6 +8312,7 @@
           <a:lstStyle/>
           <a:p>
             <a:pPr algn="ctr"/>
+            <a:endParaRPr/>
           </a:p>
         </p:txBody>
       </p:sp>
@@ -6219,6 +8356,7 @@
           <a:lstStyle/>
           <a:p>
             <a:pPr algn="ctr"/>
+            <a:endParaRPr/>
           </a:p>
         </p:txBody>
       </p:sp>
@@ -6231,7 +8369,7 @@
         <p:spPr>
           <a:xfrm>
             <a:off x="640080" y="1783080"/>
-            <a:ext cx="3611880" cy="640080"/>
+            <a:ext cx="3611880" cy="572464"/>
           </a:xfrm>
           <a:prstGeom prst="rect">
             <a:avLst/>
@@ -6239,7 +8377,7 @@
           <a:noFill/>
         </p:spPr>
         <p:txBody>
-          <a:bodyPr wrap="square" lIns="73152" rIns="73152" tIns="54864" bIns="54864">
+          <a:bodyPr wrap="square" lIns="73152" tIns="54864" rIns="73152" bIns="54864">
             <a:spAutoFit/>
           </a:bodyPr>
           <a:lstStyle/>
@@ -6253,7 +8391,76 @@
               </a:defRPr>
             </a:pPr>
             <a:r>
-              <a:t>• Tạo thư mục mẹ HOC_TAP trên ổ đĩa D:</a:t>
+              <a:rPr dirty="0"/>
+              <a:t>• </a:t>
+            </a:r>
+            <a:r>
+              <a:rPr dirty="0" err="1"/>
+              <a:t>Tạo</a:t>
+            </a:r>
+            <a:r>
+              <a:rPr dirty="0"/>
+              <a:t> </a:t>
+            </a:r>
+            <a:r>
+              <a:rPr dirty="0" err="1"/>
+              <a:t>thư</a:t>
+            </a:r>
+            <a:r>
+              <a:rPr dirty="0"/>
+              <a:t> </a:t>
+            </a:r>
+            <a:r>
+              <a:rPr dirty="0" err="1"/>
+              <a:t>mục</a:t>
+            </a:r>
+            <a:r>
+              <a:rPr dirty="0"/>
+              <a:t> </a:t>
+            </a:r>
+            <a:r>
+              <a:rPr dirty="0" err="1"/>
+              <a:t>mẹ</a:t>
+            </a:r>
+            <a:r>
+              <a:rPr dirty="0"/>
+              <a:t> </a:t>
+            </a:r>
+            <a:r>
+              <a:rPr lang="en-US" dirty="0"/>
+              <a:t>"</a:t>
+            </a:r>
+            <a:r>
+              <a:rPr lang="en-US" dirty="0" err="1"/>
+              <a:t>Tên_</a:t>
+            </a:r>
+            <a:r>
+              <a:rPr dirty="0" err="1"/>
+              <a:t>HOC_TAP</a:t>
+            </a:r>
+            <a:r>
+              <a:rPr lang="en-US" dirty="0"/>
+              <a:t>"</a:t>
+            </a:r>
+            <a:r>
+              <a:rPr dirty="0"/>
+              <a:t> </a:t>
+            </a:r>
+            <a:r>
+              <a:rPr dirty="0" err="1"/>
+              <a:t>trên</a:t>
+            </a:r>
+            <a:r>
+              <a:rPr dirty="0"/>
+              <a:t> ổ </a:t>
+            </a:r>
+            <a:r>
+              <a:rPr dirty="0" err="1"/>
+              <a:t>đĩa</a:t>
+            </a:r>
+            <a:r>
+              <a:rPr dirty="0"/>
+              <a:t> D:</a:t>
             </a:r>
           </a:p>
         </p:txBody>
@@ -6275,7 +8482,7 @@
           <a:noFill/>
         </p:spPr>
         <p:txBody>
-          <a:bodyPr wrap="square" lIns="73152" rIns="73152" tIns="54864" bIns="54864">
+          <a:bodyPr wrap="square" lIns="73152" tIns="54864" rIns="73152" bIns="54864">
             <a:spAutoFit/>
           </a:bodyPr>
           <a:lstStyle/>
@@ -6289,7 +8496,32 @@
               </a:defRPr>
             </a:pPr>
             <a:r>
-              <a:t>• Tạo 3 thư mục con: TOAN, TIENG_VIET, TIN_HOC</a:t>
+              <a:rPr dirty="0"/>
+              <a:t>• </a:t>
+            </a:r>
+            <a:r>
+              <a:rPr dirty="0" err="1"/>
+              <a:t>Tạo</a:t>
+            </a:r>
+            <a:r>
+              <a:rPr dirty="0"/>
+              <a:t> 3 </a:t>
+            </a:r>
+            <a:r>
+              <a:rPr dirty="0" err="1"/>
+              <a:t>thư</a:t>
+            </a:r>
+            <a:r>
+              <a:rPr dirty="0"/>
+              <a:t> </a:t>
+            </a:r>
+            <a:r>
+              <a:rPr dirty="0" err="1"/>
+              <a:t>mục</a:t>
+            </a:r>
+            <a:r>
+              <a:rPr dirty="0"/>
+              <a:t> con: TOAN, TIENG_VIET, TIN_HOC</a:t>
             </a:r>
           </a:p>
         </p:txBody>
@@ -6311,7 +8543,7 @@
           <a:noFill/>
         </p:spPr>
         <p:txBody>
-          <a:bodyPr wrap="square" lIns="73152" rIns="73152" tIns="54864" bIns="54864">
+          <a:bodyPr wrap="square" lIns="73152" tIns="54864" rIns="73152" bIns="54864">
             <a:spAutoFit/>
           </a:bodyPr>
           <a:lstStyle/>
@@ -6347,7 +8579,7 @@
           <a:noFill/>
         </p:spPr>
         <p:txBody>
-          <a:bodyPr wrap="square" lIns="73152" rIns="73152" tIns="54864" bIns="54864">
+          <a:bodyPr wrap="square" lIns="73152" tIns="54864" rIns="73152" bIns="54864">
             <a:spAutoFit/>
           </a:bodyPr>
           <a:lstStyle/>
@@ -6361,7 +8593,72 @@
               </a:defRPr>
             </a:pPr>
             <a:r>
-              <a:t>• Cấu trúc chuẩn Tiếng Việt rõ ràng, ngăn nắp!</a:t>
+              <a:rPr dirty="0"/>
+              <a:t>• </a:t>
+            </a:r>
+            <a:r>
+              <a:rPr dirty="0" err="1"/>
+              <a:t>Cấu</a:t>
+            </a:r>
+            <a:r>
+              <a:rPr dirty="0"/>
+              <a:t> </a:t>
+            </a:r>
+            <a:r>
+              <a:rPr dirty="0" err="1"/>
+              <a:t>trúc</a:t>
+            </a:r>
+            <a:r>
+              <a:rPr dirty="0"/>
+              <a:t> </a:t>
+            </a:r>
+            <a:r>
+              <a:rPr dirty="0" err="1"/>
+              <a:t>chuẩn</a:t>
+            </a:r>
+            <a:r>
+              <a:rPr dirty="0"/>
+              <a:t> </a:t>
+            </a:r>
+            <a:r>
+              <a:rPr dirty="0" err="1"/>
+              <a:t>Tiếng</a:t>
+            </a:r>
+            <a:r>
+              <a:rPr dirty="0"/>
+              <a:t> Việt </a:t>
+            </a:r>
+            <a:r>
+              <a:rPr dirty="0" err="1"/>
+              <a:t>rõ</a:t>
+            </a:r>
+            <a:r>
+              <a:rPr dirty="0"/>
+              <a:t> </a:t>
+            </a:r>
+            <a:r>
+              <a:rPr dirty="0" err="1"/>
+              <a:t>ràng</a:t>
+            </a:r>
+            <a:r>
+              <a:rPr dirty="0"/>
+              <a:t>, </a:t>
+            </a:r>
+            <a:r>
+              <a:rPr dirty="0" err="1"/>
+              <a:t>ngăn</a:t>
+            </a:r>
+            <a:r>
+              <a:rPr dirty="0"/>
+              <a:t> </a:t>
+            </a:r>
+            <a:r>
+              <a:rPr dirty="0" err="1"/>
+              <a:t>nắp</a:t>
+            </a:r>
+            <a:r>
+              <a:rPr dirty="0"/>
+              <a:t>!</a:t>
             </a:r>
           </a:p>
         </p:txBody>
@@ -6408,6 +8705,7 @@
           <a:lstStyle/>
           <a:p>
             <a:pPr algn="ctr"/>
+            <a:endParaRPr/>
           </a:p>
         </p:txBody>
       </p:sp>
@@ -6435,1400 +8733,6 @@
           </a:prstGeom>
         </p:spPr>
       </p:pic>
-    </p:spTree>
-  </p:cSld>
-  <p:clrMapOvr>
-    <a:masterClrMapping/>
-  </p:clrMapOvr>
-  <p:transition spd="med">
-    <p:fade/>
-  </p:transition>
-</p:sld>
-</file>
-
-<file path=ppt/slides/slide8.xml><?xml version="1.0" encoding="utf-8"?>
-<p:sld xmlns:a="http://schemas.openxmlformats.org/drawingml/2006/main" xmlns:p="http://schemas.openxmlformats.org/presentationml/2006/main" xmlns:r="http://schemas.openxmlformats.org/officeDocument/2006/relationships">
-  <p:cSld>
-    <p:spTree>
-      <p:nvGrpSpPr>
-        <p:cNvPr id="1" name=""/>
-        <p:cNvGrpSpPr/>
-        <p:nvPr/>
-      </p:nvGrpSpPr>
-      <p:grpSpPr/>
-      <p:sp>
-        <p:nvSpPr>
-          <p:cNvPr id="2" name="Rectangle 1"/>
-          <p:cNvSpPr/>
-          <p:nvPr/>
-        </p:nvSpPr>
-        <p:spPr>
-          <a:xfrm>
-            <a:off x="0" y="1051560"/>
-            <a:ext cx="12188952" cy="4754879"/>
-          </a:xfrm>
-          <a:prstGeom prst="rect">
-            <a:avLst/>
-          </a:prstGeom>
-          <a:solidFill>
-            <a:srgbClr val="FDF2F8"/>
-          </a:solidFill>
-          <a:ln>
-            <a:noFill/>
-          </a:ln>
-        </p:spPr>
-        <p:style>
-          <a:lnRef idx="1">
-            <a:schemeClr val="accent1"/>
-          </a:lnRef>
-          <a:fillRef idx="3">
-            <a:schemeClr val="accent1"/>
-          </a:fillRef>
-          <a:effectRef idx="2">
-            <a:schemeClr val="accent1"/>
-          </a:effectRef>
-          <a:fontRef idx="minor">
-            <a:schemeClr val="lt1"/>
-          </a:fontRef>
-        </p:style>
-        <p:txBody>
-          <a:bodyPr rtlCol="0" anchor="ctr"/>
-          <a:lstStyle/>
-          <a:p>
-            <a:pPr algn="ctr"/>
-          </a:p>
-        </p:txBody>
-      </p:sp>
-      <p:sp>
-        <p:nvSpPr>
-          <p:cNvPr id="3" name="Rounded Rectangle 2"/>
-          <p:cNvSpPr/>
-          <p:nvPr/>
-        </p:nvSpPr>
-        <p:spPr>
-          <a:xfrm>
-            <a:off x="365760" y="1188720"/>
-            <a:ext cx="11247120" cy="822960"/>
-          </a:xfrm>
-          <a:prstGeom prst="roundRect">
-            <a:avLst/>
-          </a:prstGeom>
-          <a:solidFill>
-            <a:srgbClr val="BE185D"/>
-          </a:solidFill>
-          <a:ln>
-            <a:noFill/>
-          </a:ln>
-        </p:spPr>
-        <p:style>
-          <a:lnRef idx="1">
-            <a:schemeClr val="accent1"/>
-          </a:lnRef>
-          <a:fillRef idx="3">
-            <a:schemeClr val="accent1"/>
-          </a:fillRef>
-          <a:effectRef idx="2">
-            <a:schemeClr val="accent1"/>
-          </a:effectRef>
-          <a:fontRef idx="minor">
-            <a:schemeClr val="lt1"/>
-          </a:fontRef>
-        </p:style>
-        <p:txBody>
-          <a:bodyPr rtlCol="0" anchor="ctr"/>
-          <a:lstStyle/>
-          <a:p>
-            <a:pPr algn="ctr"/>
-          </a:p>
-        </p:txBody>
-      </p:sp>
-      <p:sp>
-        <p:nvSpPr>
-          <p:cNvPr id="4" name="TextBox 3"/>
-          <p:cNvSpPr txBox="1"/>
-          <p:nvPr/>
-        </p:nvSpPr>
-        <p:spPr>
-          <a:xfrm>
-            <a:off x="640080" y="1234440"/>
-            <a:ext cx="10698480" cy="731520"/>
-          </a:xfrm>
-          <a:prstGeom prst="rect">
-            <a:avLst/>
-          </a:prstGeom>
-          <a:noFill/>
-        </p:spPr>
-        <p:txBody>
-          <a:bodyPr wrap="square" lIns="73152" rIns="73152" tIns="54864" bIns="54864">
-            <a:spAutoFit/>
-          </a:bodyPr>
-          <a:lstStyle/>
-          <a:p>
-            <a:pPr algn="l">
-              <a:defRPr sz="1800" b="1">
-                <a:solidFill>
-                  <a:srgbClr val="FFFFFF"/>
-                </a:solidFill>
-                <a:latin typeface="Arial"/>
-              </a:defRPr>
-            </a:pPr>
-            <a:r>
-              <a:t>❓ Tổng kết kiến thức trọng tâm Tuần 04 (Lớp 5)</a:t>
-            </a:r>
-          </a:p>
-        </p:txBody>
-      </p:sp>
-      <p:sp>
-        <p:nvSpPr>
-          <p:cNvPr id="5" name="Rounded Rectangle 4"/>
-          <p:cNvSpPr/>
-          <p:nvPr/>
-        </p:nvSpPr>
-        <p:spPr>
-          <a:xfrm>
-            <a:off x="365760" y="2103120"/>
-            <a:ext cx="6400800" cy="2194559"/>
-          </a:xfrm>
-          <a:prstGeom prst="roundRect">
-            <a:avLst/>
-          </a:prstGeom>
-          <a:solidFill>
-            <a:srgbClr val="FFFFFF"/>
-          </a:solidFill>
-          <a:ln w="19050">
-            <a:solidFill>
-              <a:srgbClr val="EC4899"/>
-            </a:solidFill>
-          </a:ln>
-        </p:spPr>
-        <p:style>
-          <a:lnRef idx="1">
-            <a:schemeClr val="accent1"/>
-          </a:lnRef>
-          <a:fillRef idx="3">
-            <a:schemeClr val="accent1"/>
-          </a:fillRef>
-          <a:effectRef idx="2">
-            <a:schemeClr val="accent1"/>
-          </a:effectRef>
-          <a:fontRef idx="minor">
-            <a:schemeClr val="lt1"/>
-          </a:fontRef>
-        </p:style>
-        <p:txBody>
-          <a:bodyPr rtlCol="0" anchor="ctr"/>
-          <a:lstStyle/>
-          <a:p>
-            <a:pPr algn="ctr"/>
-          </a:p>
-        </p:txBody>
-      </p:sp>
-      <p:sp>
-        <p:nvSpPr>
-          <p:cNvPr id="6" name="Rounded Rectangle 5"/>
-          <p:cNvSpPr/>
-          <p:nvPr/>
-        </p:nvSpPr>
-        <p:spPr>
-          <a:xfrm>
-            <a:off x="365760" y="2103120"/>
-            <a:ext cx="164592" cy="2194559"/>
-          </a:xfrm>
-          <a:prstGeom prst="roundRect">
-            <a:avLst/>
-          </a:prstGeom>
-          <a:solidFill>
-            <a:srgbClr val="EC4899"/>
-          </a:solidFill>
-          <a:ln>
-            <a:noFill/>
-          </a:ln>
-        </p:spPr>
-        <p:style>
-          <a:lnRef idx="1">
-            <a:schemeClr val="accent1"/>
-          </a:lnRef>
-          <a:fillRef idx="3">
-            <a:schemeClr val="accent1"/>
-          </a:fillRef>
-          <a:effectRef idx="2">
-            <a:schemeClr val="accent1"/>
-          </a:effectRef>
-          <a:fontRef idx="minor">
-            <a:schemeClr val="lt1"/>
-          </a:fontRef>
-        </p:style>
-        <p:txBody>
-          <a:bodyPr rtlCol="0" anchor="ctr"/>
-          <a:lstStyle/>
-          <a:p>
-            <a:pPr algn="ctr"/>
-          </a:p>
-        </p:txBody>
-      </p:sp>
-      <p:sp>
-        <p:nvSpPr>
-          <p:cNvPr id="7" name="TextBox 6"/>
-          <p:cNvSpPr txBox="1"/>
-          <p:nvPr/>
-        </p:nvSpPr>
-        <p:spPr>
-          <a:xfrm>
-            <a:off x="640080" y="2240280"/>
-            <a:ext cx="5943600" cy="822959"/>
-          </a:xfrm>
-          <a:prstGeom prst="rect">
-            <a:avLst/>
-          </a:prstGeom>
-          <a:noFill/>
-        </p:spPr>
-        <p:txBody>
-          <a:bodyPr wrap="square" lIns="73152" rIns="73152" tIns="54864" bIns="54864">
-            <a:spAutoFit/>
-          </a:bodyPr>
-          <a:lstStyle/>
-          <a:p>
-            <a:pPr algn="l">
-              <a:defRPr sz="1500" b="0">
-                <a:solidFill>
-                  <a:srgbClr val="0F172A"/>
-                </a:solidFill>
-                <a:latin typeface="Arial"/>
-              </a:defRPr>
-            </a:pPr>
-            <a:r>
-              <a:t>👉 Tiết 3: Thu thập và tìm kiếm thông tin chính xác bằng từ khóa " ".</a:t>
-            </a:r>
-          </a:p>
-        </p:txBody>
-      </p:sp>
-      <p:sp>
-        <p:nvSpPr>
-          <p:cNvPr id="8" name="TextBox 7"/>
-          <p:cNvSpPr txBox="1"/>
-          <p:nvPr/>
-        </p:nvSpPr>
-        <p:spPr>
-          <a:xfrm>
-            <a:off x="640080" y="3200400"/>
-            <a:ext cx="5943600" cy="822960"/>
-          </a:xfrm>
-          <a:prstGeom prst="rect">
-            <a:avLst/>
-          </a:prstGeom>
-          <a:noFill/>
-        </p:spPr>
-        <p:txBody>
-          <a:bodyPr wrap="square" lIns="73152" rIns="73152" tIns="54864" bIns="54864">
-            <a:spAutoFit/>
-          </a:bodyPr>
-          <a:lstStyle/>
-          <a:p>
-            <a:pPr algn="l">
-              <a:defRPr sz="1500" b="0">
-                <a:solidFill>
-                  <a:srgbClr val="0F172A"/>
-                </a:solidFill>
-                <a:latin typeface="Arial"/>
-              </a:defRPr>
-            </a:pPr>
-            <a:r>
-              <a:t>👉 Tiết 4: Sắp xếp dữ liệu ngăn nắp theo cấu trúc Cây thư mục.</a:t>
-            </a:r>
-          </a:p>
-        </p:txBody>
-      </p:sp>
-      <p:sp>
-        <p:nvSpPr>
-          <p:cNvPr id="9" name="Rounded Rectangle 8"/>
-          <p:cNvSpPr/>
-          <p:nvPr/>
-        </p:nvSpPr>
-        <p:spPr>
-          <a:xfrm>
-            <a:off x="6949440" y="2103120"/>
-            <a:ext cx="4663440" cy="2194559"/>
-          </a:xfrm>
-          <a:prstGeom prst="roundRect">
-            <a:avLst/>
-          </a:prstGeom>
-          <a:solidFill>
-            <a:srgbClr val="FFFFFF"/>
-          </a:solidFill>
-          <a:ln w="19050">
-            <a:solidFill>
-              <a:srgbClr val="CBD5E1"/>
-            </a:solidFill>
-          </a:ln>
-        </p:spPr>
-        <p:style>
-          <a:lnRef idx="1">
-            <a:schemeClr val="accent1"/>
-          </a:lnRef>
-          <a:fillRef idx="3">
-            <a:schemeClr val="accent1"/>
-          </a:fillRef>
-          <a:effectRef idx="2">
-            <a:schemeClr val="accent1"/>
-          </a:effectRef>
-          <a:fontRef idx="minor">
-            <a:schemeClr val="lt1"/>
-          </a:fontRef>
-        </p:style>
-        <p:txBody>
-          <a:bodyPr rtlCol="0" anchor="ctr"/>
-          <a:lstStyle/>
-          <a:p>
-            <a:pPr algn="ctr"/>
-          </a:p>
-        </p:txBody>
-      </p:sp>
-      <p:pic>
-        <p:nvPicPr>
-          <p:cNvPr id="10" name="Picture 9" descr="ai_lop5_bai4_hoctap_folders.jpg"/>
-          <p:cNvPicPr>
-            <a:picLocks noChangeAspect="1"/>
-          </p:cNvPicPr>
-          <p:nvPr/>
-        </p:nvPicPr>
-        <p:blipFill>
-          <a:blip r:embed="rId2"/>
-          <a:stretch>
-            <a:fillRect/>
-          </a:stretch>
-        </p:blipFill>
-        <p:spPr>
-          <a:xfrm>
-            <a:off x="7040880" y="2148840"/>
-            <a:ext cx="4480560" cy="2103120"/>
-          </a:xfrm>
-          <a:prstGeom prst="rect">
-            <a:avLst/>
-          </a:prstGeom>
-        </p:spPr>
-      </p:pic>
-      <p:sp>
-        <p:nvSpPr>
-          <p:cNvPr id="11" name="Rounded Rectangle 10"/>
-          <p:cNvSpPr/>
-          <p:nvPr/>
-        </p:nvSpPr>
-        <p:spPr>
-          <a:xfrm>
-            <a:off x="365760" y="4434840"/>
-            <a:ext cx="11247120" cy="1188719"/>
-          </a:xfrm>
-          <a:prstGeom prst="roundRect">
-            <a:avLst/>
-          </a:prstGeom>
-          <a:solidFill>
-            <a:srgbClr val="EA580C"/>
-          </a:solidFill>
-          <a:ln>
-            <a:noFill/>
-          </a:ln>
-        </p:spPr>
-        <p:style>
-          <a:lnRef idx="1">
-            <a:schemeClr val="accent1"/>
-          </a:lnRef>
-          <a:fillRef idx="3">
-            <a:schemeClr val="accent1"/>
-          </a:fillRef>
-          <a:effectRef idx="2">
-            <a:schemeClr val="accent1"/>
-          </a:effectRef>
-          <a:fontRef idx="minor">
-            <a:schemeClr val="lt1"/>
-          </a:fontRef>
-        </p:style>
-        <p:txBody>
-          <a:bodyPr rtlCol="0" anchor="ctr"/>
-          <a:lstStyle/>
-          <a:p>
-            <a:pPr algn="ctr"/>
-          </a:p>
-        </p:txBody>
-      </p:sp>
-      <p:sp>
-        <p:nvSpPr>
-          <p:cNvPr id="12" name="TextBox 11"/>
-          <p:cNvSpPr txBox="1"/>
-          <p:nvPr/>
-        </p:nvSpPr>
-        <p:spPr>
-          <a:xfrm>
-            <a:off x="640080" y="4480560"/>
-            <a:ext cx="10698480" cy="320039"/>
-          </a:xfrm>
-          <a:prstGeom prst="rect">
-            <a:avLst/>
-          </a:prstGeom>
-          <a:noFill/>
-        </p:spPr>
-        <p:txBody>
-          <a:bodyPr wrap="square" lIns="73152" rIns="73152" tIns="54864" bIns="54864">
-            <a:spAutoFit/>
-          </a:bodyPr>
-          <a:lstStyle/>
-          <a:p>
-            <a:pPr algn="l">
-              <a:defRPr sz="1400" b="1">
-                <a:solidFill>
-                  <a:srgbClr val="FEF08A"/>
-                </a:solidFill>
-                <a:latin typeface="Arial"/>
-              </a:defRPr>
-            </a:pPr>
-            <a:r>
-              <a:t>📌 GHI NHỚ TRỌNG TÂM (SGK)</a:t>
-            </a:r>
-          </a:p>
-        </p:txBody>
-      </p:sp>
-      <p:sp>
-        <p:nvSpPr>
-          <p:cNvPr id="13" name="TextBox 12"/>
-          <p:cNvSpPr txBox="1"/>
-          <p:nvPr/>
-        </p:nvSpPr>
-        <p:spPr>
-          <a:xfrm>
-            <a:off x="640080" y="4800600"/>
-            <a:ext cx="10698480" cy="777239"/>
-          </a:xfrm>
-          <a:prstGeom prst="rect">
-            <a:avLst/>
-          </a:prstGeom>
-          <a:noFill/>
-        </p:spPr>
-        <p:txBody>
-          <a:bodyPr wrap="square" lIns="73152" rIns="73152" tIns="54864" bIns="54864">
-            <a:spAutoFit/>
-          </a:bodyPr>
-          <a:lstStyle/>
-          <a:p>
-            <a:pPr algn="l">
-              <a:defRPr sz="1600" b="1">
-                <a:solidFill>
-                  <a:srgbClr val="FFFFFF"/>
-                </a:solidFill>
-                <a:latin typeface="Arial"/>
-              </a:defRPr>
-            </a:pPr>
-            <a:r>
-              <a:t>Làm chủ kỹ năng tìm kiếm và tổ chức dữ liệu giúp em trở thành người sử dụng máy tính thông minh và hiệu quả!</a:t>
-            </a:r>
-          </a:p>
-        </p:txBody>
-      </p:sp>
-    </p:spTree>
-  </p:cSld>
-  <p:clrMapOvr>
-    <a:masterClrMapping/>
-  </p:clrMapOvr>
-  <p:transition spd="med">
-    <p:fade/>
-  </p:transition>
-</p:sld>
-</file>
-
-<file path=ppt/slides/slide9.xml><?xml version="1.0" encoding="utf-8"?>
-<p:sld xmlns:a="http://schemas.openxmlformats.org/drawingml/2006/main" xmlns:p="http://schemas.openxmlformats.org/presentationml/2006/main" xmlns:r="http://schemas.openxmlformats.org/officeDocument/2006/relationships">
-  <p:cSld>
-    <p:spTree>
-      <p:nvGrpSpPr>
-        <p:cNvPr id="1" name=""/>
-        <p:cNvGrpSpPr/>
-        <p:nvPr/>
-      </p:nvGrpSpPr>
-      <p:grpSpPr/>
-      <p:sp>
-        <p:nvSpPr>
-          <p:cNvPr id="2" name="Rectangle 1"/>
-          <p:cNvSpPr/>
-          <p:nvPr/>
-        </p:nvSpPr>
-        <p:spPr>
-          <a:xfrm>
-            <a:off x="0" y="1051560"/>
-            <a:ext cx="12188952" cy="4754879"/>
-          </a:xfrm>
-          <a:prstGeom prst="rect">
-            <a:avLst/>
-          </a:prstGeom>
-          <a:solidFill>
-            <a:srgbClr val="FDF2F8"/>
-          </a:solidFill>
-          <a:ln>
-            <a:noFill/>
-          </a:ln>
-        </p:spPr>
-        <p:style>
-          <a:lnRef idx="1">
-            <a:schemeClr val="accent1"/>
-          </a:lnRef>
-          <a:fillRef idx="3">
-            <a:schemeClr val="accent1"/>
-          </a:fillRef>
-          <a:effectRef idx="2">
-            <a:schemeClr val="accent1"/>
-          </a:effectRef>
-          <a:fontRef idx="minor">
-            <a:schemeClr val="lt1"/>
-          </a:fontRef>
-        </p:style>
-        <p:txBody>
-          <a:bodyPr rtlCol="0" anchor="ctr"/>
-          <a:lstStyle/>
-          <a:p>
-            <a:pPr algn="ctr"/>
-          </a:p>
-        </p:txBody>
-      </p:sp>
-      <p:sp>
-        <p:nvSpPr>
-          <p:cNvPr id="3" name="Rounded Rectangle 2"/>
-          <p:cNvSpPr/>
-          <p:nvPr/>
-        </p:nvSpPr>
-        <p:spPr>
-          <a:xfrm>
-            <a:off x="365760" y="1143000"/>
-            <a:ext cx="2926080" cy="347471"/>
-          </a:xfrm>
-          <a:prstGeom prst="roundRect">
-            <a:avLst/>
-          </a:prstGeom>
-          <a:solidFill>
-            <a:srgbClr val="EA580C"/>
-          </a:solidFill>
-          <a:ln>
-            <a:noFill/>
-          </a:ln>
-        </p:spPr>
-        <p:style>
-          <a:lnRef idx="1">
-            <a:schemeClr val="accent1"/>
-          </a:lnRef>
-          <a:fillRef idx="3">
-            <a:schemeClr val="accent1"/>
-          </a:fillRef>
-          <a:effectRef idx="2">
-            <a:schemeClr val="accent1"/>
-          </a:effectRef>
-          <a:fontRef idx="minor">
-            <a:schemeClr val="lt1"/>
-          </a:fontRef>
-        </p:style>
-        <p:txBody>
-          <a:bodyPr rtlCol="0" anchor="ctr"/>
-          <a:lstStyle/>
-          <a:p>
-            <a:pPr algn="ctr"/>
-          </a:p>
-        </p:txBody>
-      </p:sp>
-      <p:sp>
-        <p:nvSpPr>
-          <p:cNvPr id="4" name="TextBox 3"/>
-          <p:cNvSpPr txBox="1"/>
-          <p:nvPr/>
-        </p:nvSpPr>
-        <p:spPr>
-          <a:xfrm>
-            <a:off x="365760" y="1143000"/>
-            <a:ext cx="2926080" cy="347471"/>
-          </a:xfrm>
-          <a:prstGeom prst="rect">
-            <a:avLst/>
-          </a:prstGeom>
-          <a:noFill/>
-        </p:spPr>
-        <p:txBody>
-          <a:bodyPr wrap="square" lIns="73152" rIns="73152" tIns="54864" bIns="54864">
-            <a:spAutoFit/>
-          </a:bodyPr>
-          <a:lstStyle/>
-          <a:p>
-            <a:pPr algn="ctr">
-              <a:defRPr sz="1300" b="1">
-                <a:solidFill>
-                  <a:srgbClr val="FFFFFF"/>
-                </a:solidFill>
-                <a:latin typeface="Arial"/>
-              </a:defRPr>
-            </a:pPr>
-            <a:r>
-              <a:t>LUYỆN TẬP NHANH</a:t>
-            </a:r>
-          </a:p>
-        </p:txBody>
-      </p:sp>
-      <p:sp>
-        <p:nvSpPr>
-          <p:cNvPr id="5" name="Rounded Rectangle 4"/>
-          <p:cNvSpPr/>
-          <p:nvPr/>
-        </p:nvSpPr>
-        <p:spPr>
-          <a:xfrm>
-            <a:off x="365760" y="1600200"/>
-            <a:ext cx="11247120" cy="914400"/>
-          </a:xfrm>
-          <a:prstGeom prst="roundRect">
-            <a:avLst/>
-          </a:prstGeom>
-          <a:solidFill>
-            <a:srgbClr val="FFFFFF"/>
-          </a:solidFill>
-          <a:ln w="19050">
-            <a:solidFill>
-              <a:srgbClr val="BE185D"/>
-            </a:solidFill>
-          </a:ln>
-        </p:spPr>
-        <p:style>
-          <a:lnRef idx="1">
-            <a:schemeClr val="accent1"/>
-          </a:lnRef>
-          <a:fillRef idx="3">
-            <a:schemeClr val="accent1"/>
-          </a:fillRef>
-          <a:effectRef idx="2">
-            <a:schemeClr val="accent1"/>
-          </a:effectRef>
-          <a:fontRef idx="minor">
-            <a:schemeClr val="lt1"/>
-          </a:fontRef>
-        </p:style>
-        <p:txBody>
-          <a:bodyPr rtlCol="0" anchor="ctr"/>
-          <a:lstStyle/>
-          <a:p>
-            <a:pPr algn="ctr"/>
-          </a:p>
-        </p:txBody>
-      </p:sp>
-      <p:sp>
-        <p:nvSpPr>
-          <p:cNvPr id="6" name="Rounded Rectangle 5"/>
-          <p:cNvSpPr/>
-          <p:nvPr/>
-        </p:nvSpPr>
-        <p:spPr>
-          <a:xfrm>
-            <a:off x="365760" y="1600200"/>
-            <a:ext cx="182880" cy="914400"/>
-          </a:xfrm>
-          <a:prstGeom prst="roundRect">
-            <a:avLst/>
-          </a:prstGeom>
-          <a:solidFill>
-            <a:srgbClr val="BE185D"/>
-          </a:solidFill>
-          <a:ln>
-            <a:noFill/>
-          </a:ln>
-        </p:spPr>
-        <p:style>
-          <a:lnRef idx="1">
-            <a:schemeClr val="accent1"/>
-          </a:lnRef>
-          <a:fillRef idx="3">
-            <a:schemeClr val="accent1"/>
-          </a:fillRef>
-          <a:effectRef idx="2">
-            <a:schemeClr val="accent1"/>
-          </a:effectRef>
-          <a:fontRef idx="minor">
-            <a:schemeClr val="lt1"/>
-          </a:fontRef>
-        </p:style>
-        <p:txBody>
-          <a:bodyPr rtlCol="0" anchor="ctr"/>
-          <a:lstStyle/>
-          <a:p>
-            <a:pPr algn="ctr"/>
-          </a:p>
-        </p:txBody>
-      </p:sp>
-      <p:sp>
-        <p:nvSpPr>
-          <p:cNvPr id="7" name="TextBox 6"/>
-          <p:cNvSpPr txBox="1"/>
-          <p:nvPr/>
-        </p:nvSpPr>
-        <p:spPr>
-          <a:xfrm>
-            <a:off x="640080" y="1691640"/>
-            <a:ext cx="10698480" cy="731520"/>
-          </a:xfrm>
-          <a:prstGeom prst="rect">
-            <a:avLst/>
-          </a:prstGeom>
-          <a:noFill/>
-        </p:spPr>
-        <p:txBody>
-          <a:bodyPr wrap="square" lIns="73152" rIns="73152" tIns="54864" bIns="54864">
-            <a:spAutoFit/>
-          </a:bodyPr>
-          <a:lstStyle/>
-          <a:p>
-            <a:pPr algn="l">
-              <a:defRPr sz="1700" b="1">
-                <a:solidFill>
-                  <a:srgbClr val="0F172A"/>
-                </a:solidFill>
-                <a:latin typeface="Arial"/>
-              </a:defRPr>
-            </a:pPr>
-            <a:r>
-              <a:t>❓ Trong đường dẫn D:\HOC_TAP\TIN_HOC\BaiTap.docx, đâu là thư mục con?</a:t>
-            </a:r>
-          </a:p>
-        </p:txBody>
-      </p:sp>
-      <p:sp>
-        <p:nvSpPr>
-          <p:cNvPr id="8" name="Rounded Rectangle 7"/>
-          <p:cNvSpPr/>
-          <p:nvPr/>
-        </p:nvSpPr>
-        <p:spPr>
-          <a:xfrm>
-            <a:off x="365760" y="2651760"/>
-            <a:ext cx="5440680" cy="1325879"/>
-          </a:xfrm>
-          <a:prstGeom prst="roundRect">
-            <a:avLst/>
-          </a:prstGeom>
-          <a:solidFill>
-            <a:srgbClr val="FFFFFF"/>
-          </a:solidFill>
-          <a:ln w="19050">
-            <a:solidFill>
-              <a:srgbClr val="CBD5E1"/>
-            </a:solidFill>
-          </a:ln>
-        </p:spPr>
-        <p:style>
-          <a:lnRef idx="1">
-            <a:schemeClr val="accent1"/>
-          </a:lnRef>
-          <a:fillRef idx="3">
-            <a:schemeClr val="accent1"/>
-          </a:fillRef>
-          <a:effectRef idx="2">
-            <a:schemeClr val="accent1"/>
-          </a:effectRef>
-          <a:fontRef idx="minor">
-            <a:schemeClr val="lt1"/>
-          </a:fontRef>
-        </p:style>
-        <p:txBody>
-          <a:bodyPr rtlCol="0" anchor="ctr"/>
-          <a:lstStyle/>
-          <a:p>
-            <a:pPr algn="ctr"/>
-          </a:p>
-        </p:txBody>
-      </p:sp>
-      <p:sp>
-        <p:nvSpPr>
-          <p:cNvPr id="9" name="Oval 8"/>
-          <p:cNvSpPr/>
-          <p:nvPr/>
-        </p:nvSpPr>
-        <p:spPr>
-          <a:xfrm>
-            <a:off x="548640" y="2880360"/>
-            <a:ext cx="822960" cy="822959"/>
-          </a:xfrm>
-          <a:prstGeom prst="ellipse">
-            <a:avLst/>
-          </a:prstGeom>
-          <a:solidFill>
-            <a:srgbClr val="BE185D"/>
-          </a:solidFill>
-          <a:ln>
-            <a:noFill/>
-          </a:ln>
-        </p:spPr>
-        <p:style>
-          <a:lnRef idx="1">
-            <a:schemeClr val="accent1"/>
-          </a:lnRef>
-          <a:fillRef idx="3">
-            <a:schemeClr val="accent1"/>
-          </a:fillRef>
-          <a:effectRef idx="2">
-            <a:schemeClr val="accent1"/>
-          </a:effectRef>
-          <a:fontRef idx="minor">
-            <a:schemeClr val="lt1"/>
-          </a:fontRef>
-        </p:style>
-        <p:txBody>
-          <a:bodyPr rtlCol="0" anchor="ctr"/>
-          <a:lstStyle/>
-          <a:p>
-            <a:pPr algn="ctr"/>
-          </a:p>
-        </p:txBody>
-      </p:sp>
-      <p:sp>
-        <p:nvSpPr>
-          <p:cNvPr id="10" name="TextBox 9"/>
-          <p:cNvSpPr txBox="1"/>
-          <p:nvPr/>
-        </p:nvSpPr>
-        <p:spPr>
-          <a:xfrm>
-            <a:off x="548640" y="3063240"/>
-            <a:ext cx="822960" cy="457200"/>
-          </a:xfrm>
-          <a:prstGeom prst="rect">
-            <a:avLst/>
-          </a:prstGeom>
-          <a:noFill/>
-        </p:spPr>
-        <p:txBody>
-          <a:bodyPr wrap="square" lIns="73152" rIns="73152" tIns="54864" bIns="54864">
-            <a:spAutoFit/>
-          </a:bodyPr>
-          <a:lstStyle/>
-          <a:p>
-            <a:pPr algn="ctr">
-              <a:defRPr sz="1800" b="1">
-                <a:solidFill>
-                  <a:srgbClr val="FFFFFF"/>
-                </a:solidFill>
-                <a:latin typeface="Arial"/>
-              </a:defRPr>
-            </a:pPr>
-            <a:r>
-              <a:t>A.</a:t>
-            </a:r>
-          </a:p>
-        </p:txBody>
-      </p:sp>
-      <p:sp>
-        <p:nvSpPr>
-          <p:cNvPr id="11" name="TextBox 10"/>
-          <p:cNvSpPr txBox="1"/>
-          <p:nvPr/>
-        </p:nvSpPr>
-        <p:spPr>
-          <a:xfrm>
-            <a:off x="1508760" y="2880360"/>
-            <a:ext cx="4160520" cy="960119"/>
-          </a:xfrm>
-          <a:prstGeom prst="rect">
-            <a:avLst/>
-          </a:prstGeom>
-          <a:noFill/>
-        </p:spPr>
-        <p:txBody>
-          <a:bodyPr wrap="square" lIns="73152" rIns="73152" tIns="54864" bIns="54864">
-            <a:spAutoFit/>
-          </a:bodyPr>
-          <a:lstStyle/>
-          <a:p>
-            <a:pPr algn="l">
-              <a:defRPr sz="1500" b="0">
-                <a:solidFill>
-                  <a:srgbClr val="0F172A"/>
-                </a:solidFill>
-                <a:latin typeface="Arial"/>
-              </a:defRPr>
-            </a:pPr>
-            <a:r>
-              <a:t>Ổ đĩa D:</a:t>
-            </a:r>
-          </a:p>
-        </p:txBody>
-      </p:sp>
-      <p:sp>
-        <p:nvSpPr>
-          <p:cNvPr id="12" name="Rounded Rectangle 11"/>
-          <p:cNvSpPr/>
-          <p:nvPr/>
-        </p:nvSpPr>
-        <p:spPr>
-          <a:xfrm>
-            <a:off x="6172200" y="2651760"/>
-            <a:ext cx="5440680" cy="1325879"/>
-          </a:xfrm>
-          <a:prstGeom prst="roundRect">
-            <a:avLst/>
-          </a:prstGeom>
-          <a:solidFill>
-            <a:srgbClr val="FFFFFF"/>
-          </a:solidFill>
-          <a:ln w="19050">
-            <a:solidFill>
-              <a:srgbClr val="CBD5E1"/>
-            </a:solidFill>
-          </a:ln>
-        </p:spPr>
-        <p:style>
-          <a:lnRef idx="1">
-            <a:schemeClr val="accent1"/>
-          </a:lnRef>
-          <a:fillRef idx="3">
-            <a:schemeClr val="accent1"/>
-          </a:fillRef>
-          <a:effectRef idx="2">
-            <a:schemeClr val="accent1"/>
-          </a:effectRef>
-          <a:fontRef idx="minor">
-            <a:schemeClr val="lt1"/>
-          </a:fontRef>
-        </p:style>
-        <p:txBody>
-          <a:bodyPr rtlCol="0" anchor="ctr"/>
-          <a:lstStyle/>
-          <a:p>
-            <a:pPr algn="ctr"/>
-          </a:p>
-        </p:txBody>
-      </p:sp>
-      <p:sp>
-        <p:nvSpPr>
-          <p:cNvPr id="13" name="Oval 12"/>
-          <p:cNvSpPr/>
-          <p:nvPr/>
-        </p:nvSpPr>
-        <p:spPr>
-          <a:xfrm>
-            <a:off x="6355080" y="2880360"/>
-            <a:ext cx="822960" cy="822959"/>
-          </a:xfrm>
-          <a:prstGeom prst="ellipse">
-            <a:avLst/>
-          </a:prstGeom>
-          <a:solidFill>
-            <a:srgbClr val="0D9488"/>
-          </a:solidFill>
-          <a:ln>
-            <a:noFill/>
-          </a:ln>
-        </p:spPr>
-        <p:style>
-          <a:lnRef idx="1">
-            <a:schemeClr val="accent1"/>
-          </a:lnRef>
-          <a:fillRef idx="3">
-            <a:schemeClr val="accent1"/>
-          </a:fillRef>
-          <a:effectRef idx="2">
-            <a:schemeClr val="accent1"/>
-          </a:effectRef>
-          <a:fontRef idx="minor">
-            <a:schemeClr val="lt1"/>
-          </a:fontRef>
-        </p:style>
-        <p:txBody>
-          <a:bodyPr rtlCol="0" anchor="ctr"/>
-          <a:lstStyle/>
-          <a:p>
-            <a:pPr algn="ctr"/>
-          </a:p>
-        </p:txBody>
-      </p:sp>
-      <p:sp>
-        <p:nvSpPr>
-          <p:cNvPr id="14" name="TextBox 13"/>
-          <p:cNvSpPr txBox="1"/>
-          <p:nvPr/>
-        </p:nvSpPr>
-        <p:spPr>
-          <a:xfrm>
-            <a:off x="6355080" y="3063240"/>
-            <a:ext cx="822960" cy="457200"/>
-          </a:xfrm>
-          <a:prstGeom prst="rect">
-            <a:avLst/>
-          </a:prstGeom>
-          <a:noFill/>
-        </p:spPr>
-        <p:txBody>
-          <a:bodyPr wrap="square" lIns="73152" rIns="73152" tIns="54864" bIns="54864">
-            <a:spAutoFit/>
-          </a:bodyPr>
-          <a:lstStyle/>
-          <a:p>
-            <a:pPr algn="ctr">
-              <a:defRPr sz="1800" b="1">
-                <a:solidFill>
-                  <a:srgbClr val="FFFFFF"/>
-                </a:solidFill>
-                <a:latin typeface="Arial"/>
-              </a:defRPr>
-            </a:pPr>
-            <a:r>
-              <a:t>B.</a:t>
-            </a:r>
-          </a:p>
-        </p:txBody>
-      </p:sp>
-      <p:sp>
-        <p:nvSpPr>
-          <p:cNvPr id="15" name="TextBox 14"/>
-          <p:cNvSpPr txBox="1"/>
-          <p:nvPr/>
-        </p:nvSpPr>
-        <p:spPr>
-          <a:xfrm>
-            <a:off x="7315200" y="2880360"/>
-            <a:ext cx="4160520" cy="960119"/>
-          </a:xfrm>
-          <a:prstGeom prst="rect">
-            <a:avLst/>
-          </a:prstGeom>
-          <a:noFill/>
-        </p:spPr>
-        <p:txBody>
-          <a:bodyPr wrap="square" lIns="73152" rIns="73152" tIns="54864" bIns="54864">
-            <a:spAutoFit/>
-          </a:bodyPr>
-          <a:lstStyle/>
-          <a:p>
-            <a:pPr algn="l">
-              <a:defRPr sz="1500" b="0">
-                <a:solidFill>
-                  <a:srgbClr val="0F172A"/>
-                </a:solidFill>
-                <a:latin typeface="Arial"/>
-              </a:defRPr>
-            </a:pPr>
-            <a:r>
-              <a:t>Thư mục TIN_HOC</a:t>
-            </a:r>
-          </a:p>
-        </p:txBody>
-      </p:sp>
-      <p:sp>
-        <p:nvSpPr>
-          <p:cNvPr id="16" name="Rounded Rectangle 15"/>
-          <p:cNvSpPr/>
-          <p:nvPr/>
-        </p:nvSpPr>
-        <p:spPr>
-          <a:xfrm>
-            <a:off x="365760" y="4114800"/>
-            <a:ext cx="5440680" cy="1325880"/>
-          </a:xfrm>
-          <a:prstGeom prst="roundRect">
-            <a:avLst/>
-          </a:prstGeom>
-          <a:solidFill>
-            <a:srgbClr val="FFFFFF"/>
-          </a:solidFill>
-          <a:ln w="19050">
-            <a:solidFill>
-              <a:srgbClr val="CBD5E1"/>
-            </a:solidFill>
-          </a:ln>
-        </p:spPr>
-        <p:style>
-          <a:lnRef idx="1">
-            <a:schemeClr val="accent1"/>
-          </a:lnRef>
-          <a:fillRef idx="3">
-            <a:schemeClr val="accent1"/>
-          </a:fillRef>
-          <a:effectRef idx="2">
-            <a:schemeClr val="accent1"/>
-          </a:effectRef>
-          <a:fontRef idx="minor">
-            <a:schemeClr val="lt1"/>
-          </a:fontRef>
-        </p:style>
-        <p:txBody>
-          <a:bodyPr rtlCol="0" anchor="ctr"/>
-          <a:lstStyle/>
-          <a:p>
-            <a:pPr algn="ctr"/>
-          </a:p>
-        </p:txBody>
-      </p:sp>
-      <p:sp>
-        <p:nvSpPr>
-          <p:cNvPr id="17" name="Oval 16"/>
-          <p:cNvSpPr/>
-          <p:nvPr/>
-        </p:nvSpPr>
-        <p:spPr>
-          <a:xfrm>
-            <a:off x="548640" y="4343400"/>
-            <a:ext cx="822960" cy="822960"/>
-          </a:xfrm>
-          <a:prstGeom prst="ellipse">
-            <a:avLst/>
-          </a:prstGeom>
-          <a:solidFill>
-            <a:srgbClr val="D97706"/>
-          </a:solidFill>
-          <a:ln>
-            <a:noFill/>
-          </a:ln>
-        </p:spPr>
-        <p:style>
-          <a:lnRef idx="1">
-            <a:schemeClr val="accent1"/>
-          </a:lnRef>
-          <a:fillRef idx="3">
-            <a:schemeClr val="accent1"/>
-          </a:fillRef>
-          <a:effectRef idx="2">
-            <a:schemeClr val="accent1"/>
-          </a:effectRef>
-          <a:fontRef idx="minor">
-            <a:schemeClr val="lt1"/>
-          </a:fontRef>
-        </p:style>
-        <p:txBody>
-          <a:bodyPr rtlCol="0" anchor="ctr"/>
-          <a:lstStyle/>
-          <a:p>
-            <a:pPr algn="ctr"/>
-          </a:p>
-        </p:txBody>
-      </p:sp>
-      <p:sp>
-        <p:nvSpPr>
-          <p:cNvPr id="18" name="TextBox 17"/>
-          <p:cNvSpPr txBox="1"/>
-          <p:nvPr/>
-        </p:nvSpPr>
-        <p:spPr>
-          <a:xfrm>
-            <a:off x="548640" y="4526280"/>
-            <a:ext cx="822960" cy="457200"/>
-          </a:xfrm>
-          <a:prstGeom prst="rect">
-            <a:avLst/>
-          </a:prstGeom>
-          <a:noFill/>
-        </p:spPr>
-        <p:txBody>
-          <a:bodyPr wrap="square" lIns="73152" rIns="73152" tIns="54864" bIns="54864">
-            <a:spAutoFit/>
-          </a:bodyPr>
-          <a:lstStyle/>
-          <a:p>
-            <a:pPr algn="ctr">
-              <a:defRPr sz="1800" b="1">
-                <a:solidFill>
-                  <a:srgbClr val="FFFFFF"/>
-                </a:solidFill>
-                <a:latin typeface="Arial"/>
-              </a:defRPr>
-            </a:pPr>
-            <a:r>
-              <a:t>C.</a:t>
-            </a:r>
-          </a:p>
-        </p:txBody>
-      </p:sp>
-      <p:sp>
-        <p:nvSpPr>
-          <p:cNvPr id="19" name="TextBox 18"/>
-          <p:cNvSpPr txBox="1"/>
-          <p:nvPr/>
-        </p:nvSpPr>
-        <p:spPr>
-          <a:xfrm>
-            <a:off x="1508760" y="4343400"/>
-            <a:ext cx="4160520" cy="960119"/>
-          </a:xfrm>
-          <a:prstGeom prst="rect">
-            <a:avLst/>
-          </a:prstGeom>
-          <a:noFill/>
-        </p:spPr>
-        <p:txBody>
-          <a:bodyPr wrap="square" lIns="73152" rIns="73152" tIns="54864" bIns="54864">
-            <a:spAutoFit/>
-          </a:bodyPr>
-          <a:lstStyle/>
-          <a:p>
-            <a:pPr algn="l">
-              <a:defRPr sz="1500" b="0">
-                <a:solidFill>
-                  <a:srgbClr val="0F172A"/>
-                </a:solidFill>
-                <a:latin typeface="Arial"/>
-              </a:defRPr>
-            </a:pPr>
-            <a:r>
-              <a:t>Tệp BaiTap.docx</a:t>
-            </a:r>
-          </a:p>
-        </p:txBody>
-      </p:sp>
-      <p:sp>
-        <p:nvSpPr>
-          <p:cNvPr id="20" name="Rounded Rectangle 19"/>
-          <p:cNvSpPr/>
-          <p:nvPr/>
-        </p:nvSpPr>
-        <p:spPr>
-          <a:xfrm>
-            <a:off x="6172200" y="4114800"/>
-            <a:ext cx="5440680" cy="1325880"/>
-          </a:xfrm>
-          <a:prstGeom prst="roundRect">
-            <a:avLst/>
-          </a:prstGeom>
-          <a:solidFill>
-            <a:srgbClr val="FFFFFF"/>
-          </a:solidFill>
-          <a:ln w="19050">
-            <a:solidFill>
-              <a:srgbClr val="CBD5E1"/>
-            </a:solidFill>
-          </a:ln>
-        </p:spPr>
-        <p:style>
-          <a:lnRef idx="1">
-            <a:schemeClr val="accent1"/>
-          </a:lnRef>
-          <a:fillRef idx="3">
-            <a:schemeClr val="accent1"/>
-          </a:fillRef>
-          <a:effectRef idx="2">
-            <a:schemeClr val="accent1"/>
-          </a:effectRef>
-          <a:fontRef idx="minor">
-            <a:schemeClr val="lt1"/>
-          </a:fontRef>
-        </p:style>
-        <p:txBody>
-          <a:bodyPr rtlCol="0" anchor="ctr"/>
-          <a:lstStyle/>
-          <a:p>
-            <a:pPr algn="ctr"/>
-          </a:p>
-        </p:txBody>
-      </p:sp>
-      <p:sp>
-        <p:nvSpPr>
-          <p:cNvPr id="21" name="Oval 20"/>
-          <p:cNvSpPr/>
-          <p:nvPr/>
-        </p:nvSpPr>
-        <p:spPr>
-          <a:xfrm>
-            <a:off x="6355080" y="4343400"/>
-            <a:ext cx="822960" cy="822960"/>
-          </a:xfrm>
-          <a:prstGeom prst="ellipse">
-            <a:avLst/>
-          </a:prstGeom>
-          <a:solidFill>
-            <a:srgbClr val="7C3AED"/>
-          </a:solidFill>
-          <a:ln>
-            <a:noFill/>
-          </a:ln>
-        </p:spPr>
-        <p:style>
-          <a:lnRef idx="1">
-            <a:schemeClr val="accent1"/>
-          </a:lnRef>
-          <a:fillRef idx="3">
-            <a:schemeClr val="accent1"/>
-          </a:fillRef>
-          <a:effectRef idx="2">
-            <a:schemeClr val="accent1"/>
-          </a:effectRef>
-          <a:fontRef idx="minor">
-            <a:schemeClr val="lt1"/>
-          </a:fontRef>
-        </p:style>
-        <p:txBody>
-          <a:bodyPr rtlCol="0" anchor="ctr"/>
-          <a:lstStyle/>
-          <a:p>
-            <a:pPr algn="ctr"/>
-          </a:p>
-        </p:txBody>
-      </p:sp>
-      <p:sp>
-        <p:nvSpPr>
-          <p:cNvPr id="22" name="TextBox 21"/>
-          <p:cNvSpPr txBox="1"/>
-          <p:nvPr/>
-        </p:nvSpPr>
-        <p:spPr>
-          <a:xfrm>
-            <a:off x="6355080" y="4526280"/>
-            <a:ext cx="822960" cy="457200"/>
-          </a:xfrm>
-          <a:prstGeom prst="rect">
-            <a:avLst/>
-          </a:prstGeom>
-          <a:noFill/>
-        </p:spPr>
-        <p:txBody>
-          <a:bodyPr wrap="square" lIns="73152" rIns="73152" tIns="54864" bIns="54864">
-            <a:spAutoFit/>
-          </a:bodyPr>
-          <a:lstStyle/>
-          <a:p>
-            <a:pPr algn="ctr">
-              <a:defRPr sz="1800" b="1">
-                <a:solidFill>
-                  <a:srgbClr val="FFFFFF"/>
-                </a:solidFill>
-                <a:latin typeface="Arial"/>
-              </a:defRPr>
-            </a:pPr>
-            <a:r>
-              <a:t>D.</a:t>
-            </a:r>
-          </a:p>
-        </p:txBody>
-      </p:sp>
-      <p:sp>
-        <p:nvSpPr>
-          <p:cNvPr id="23" name="TextBox 22"/>
-          <p:cNvSpPr txBox="1"/>
-          <p:nvPr/>
-        </p:nvSpPr>
-        <p:spPr>
-          <a:xfrm>
-            <a:off x="7315200" y="4343400"/>
-            <a:ext cx="4160520" cy="960119"/>
-          </a:xfrm>
-          <a:prstGeom prst="rect">
-            <a:avLst/>
-          </a:prstGeom>
-          <a:noFill/>
-        </p:spPr>
-        <p:txBody>
-          <a:bodyPr wrap="square" lIns="73152" rIns="73152" tIns="54864" bIns="54864">
-            <a:spAutoFit/>
-          </a:bodyPr>
-          <a:lstStyle/>
-          <a:p>
-            <a:pPr algn="l">
-              <a:defRPr sz="1500" b="0">
-                <a:solidFill>
-                  <a:srgbClr val="0F172A"/>
-                </a:solidFill>
-                <a:latin typeface="Arial"/>
-              </a:defRPr>
-            </a:pPr>
-            <a:r>
-              <a:t>Thư mục gốc</a:t>
-            </a:r>
-          </a:p>
-        </p:txBody>
-      </p:sp>
     </p:spTree>
   </p:cSld>
   <p:clrMapOvr>
